--- a/slides/discussion/07_LLM_discussion.pptx
+++ b/slides/discussion/07_LLM_discussion.pptx
@@ -273,7 +273,7 @@
           <a:p>
             <a:fld id="{A0CF861B-2947-4E74-AAE0-E351222E926D}" type="datetimeFigureOut">
               <a:rPr lang="en-US" smtClean="0"/>
-              <a:t>11/10/2025</a:t>
+              <a:t>4/6/2026</a:t>
             </a:fld>
             <a:endParaRPr lang="en-US"/>
           </a:p>
@@ -471,7 +471,7 @@
           <a:p>
             <a:fld id="{A0CF861B-2947-4E74-AAE0-E351222E926D}" type="datetimeFigureOut">
               <a:rPr lang="en-US" smtClean="0"/>
-              <a:t>11/10/2025</a:t>
+              <a:t>4/6/2026</a:t>
             </a:fld>
             <a:endParaRPr lang="en-US"/>
           </a:p>
@@ -679,7 +679,7 @@
           <a:p>
             <a:fld id="{A0CF861B-2947-4E74-AAE0-E351222E926D}" type="datetimeFigureOut">
               <a:rPr lang="en-US" smtClean="0"/>
-              <a:t>11/10/2025</a:t>
+              <a:t>4/6/2026</a:t>
             </a:fld>
             <a:endParaRPr lang="en-US"/>
           </a:p>
@@ -877,7 +877,7 @@
           <a:p>
             <a:fld id="{A0CF861B-2947-4E74-AAE0-E351222E926D}" type="datetimeFigureOut">
               <a:rPr lang="en-US" smtClean="0"/>
-              <a:t>11/10/2025</a:t>
+              <a:t>4/6/2026</a:t>
             </a:fld>
             <a:endParaRPr lang="en-US"/>
           </a:p>
@@ -1152,7 +1152,7 @@
           <a:p>
             <a:fld id="{A0CF861B-2947-4E74-AAE0-E351222E926D}" type="datetimeFigureOut">
               <a:rPr lang="en-US" smtClean="0"/>
-              <a:t>11/10/2025</a:t>
+              <a:t>4/6/2026</a:t>
             </a:fld>
             <a:endParaRPr lang="en-US"/>
           </a:p>
@@ -1417,7 +1417,7 @@
           <a:p>
             <a:fld id="{A0CF861B-2947-4E74-AAE0-E351222E926D}" type="datetimeFigureOut">
               <a:rPr lang="en-US" smtClean="0"/>
-              <a:t>11/10/2025</a:t>
+              <a:t>4/6/2026</a:t>
             </a:fld>
             <a:endParaRPr lang="en-US"/>
           </a:p>
@@ -1829,7 +1829,7 @@
           <a:p>
             <a:fld id="{A0CF861B-2947-4E74-AAE0-E351222E926D}" type="datetimeFigureOut">
               <a:rPr lang="en-US" smtClean="0"/>
-              <a:t>11/10/2025</a:t>
+              <a:t>4/6/2026</a:t>
             </a:fld>
             <a:endParaRPr lang="en-US"/>
           </a:p>
@@ -1970,7 +1970,7 @@
           <a:p>
             <a:fld id="{A0CF861B-2947-4E74-AAE0-E351222E926D}" type="datetimeFigureOut">
               <a:rPr lang="en-US" smtClean="0"/>
-              <a:t>11/10/2025</a:t>
+              <a:t>4/6/2026</a:t>
             </a:fld>
             <a:endParaRPr lang="en-US"/>
           </a:p>
@@ -2083,7 +2083,7 @@
           <a:p>
             <a:fld id="{A0CF861B-2947-4E74-AAE0-E351222E926D}" type="datetimeFigureOut">
               <a:rPr lang="en-US" smtClean="0"/>
-              <a:t>11/10/2025</a:t>
+              <a:t>4/6/2026</a:t>
             </a:fld>
             <a:endParaRPr lang="en-US"/>
           </a:p>
@@ -2394,7 +2394,7 @@
           <a:p>
             <a:fld id="{A0CF861B-2947-4E74-AAE0-E351222E926D}" type="datetimeFigureOut">
               <a:rPr lang="en-US" smtClean="0"/>
-              <a:t>11/10/2025</a:t>
+              <a:t>4/6/2026</a:t>
             </a:fld>
             <a:endParaRPr lang="en-US"/>
           </a:p>
@@ -2682,7 +2682,7 @@
           <a:p>
             <a:fld id="{A0CF861B-2947-4E74-AAE0-E351222E926D}" type="datetimeFigureOut">
               <a:rPr lang="en-US" smtClean="0"/>
-              <a:t>11/10/2025</a:t>
+              <a:t>4/6/2026</a:t>
             </a:fld>
             <a:endParaRPr lang="en-US"/>
           </a:p>
@@ -2923,7 +2923,7 @@
           <a:p>
             <a:fld id="{A0CF861B-2947-4E74-AAE0-E351222E926D}" type="datetimeFigureOut">
               <a:rPr lang="en-US" smtClean="0"/>
-              <a:t>11/10/2025</a:t>
+              <a:t>4/6/2026</a:t>
             </a:fld>
             <a:endParaRPr lang="en-US"/>
           </a:p>
@@ -5629,10 +5629,15 @@
             <p:ph idx="1"/>
           </p:nvPr>
         </p:nvSpPr>
-        <p:spPr/>
+        <p:spPr>
+          <a:xfrm>
+            <a:off x="838200" y="1825625"/>
+            <a:ext cx="6586559" cy="4351338"/>
+          </a:xfrm>
+        </p:spPr>
         <p:txBody>
           <a:bodyPr>
-            <a:normAutofit fontScale="92500" lnSpcReduction="20000"/>
+            <a:normAutofit fontScale="70000" lnSpcReduction="20000"/>
           </a:bodyPr>
           <a:lstStyle/>
           <a:p>
@@ -5684,6 +5689,24 @@
           </a:p>
           <a:p>
             <a:r>
+              <a:rPr lang="en-US" dirty="0"/>
+              <a:t>The general idea of learning from different types of inputs (text, video, audio, …) is called a </a:t>
+            </a:r>
+            <a:r>
+              <a:rPr lang="en-US" b="1" dirty="0"/>
+              <a:t>Multimodal LLM</a:t>
+            </a:r>
+            <a:r>
+              <a:rPr lang="en-US" dirty="0"/>
+              <a:t>.</a:t>
+            </a:r>
+          </a:p>
+          <a:p>
+            <a:pPr lvl="1"/>
+            <a:endParaRPr lang="en-US" dirty="0"/>
+          </a:p>
+          <a:p>
+            <a:r>
               <a:rPr lang="en-US" b="1" dirty="0"/>
               <a:t>Image generation: </a:t>
             </a:r>
@@ -5722,6 +5745,495 @@
           </a:p>
         </p:txBody>
       </p:sp>
+      <p:grpSp>
+        <p:nvGrpSpPr>
+          <p:cNvPr id="13" name="Group 12">
+            <a:extLst>
+              <a:ext uri="{FF2B5EF4-FFF2-40B4-BE49-F238E27FC236}">
+                <a16:creationId xmlns:a16="http://schemas.microsoft.com/office/drawing/2014/main" id="{8674CA7F-4A8E-5453-B9F8-9E082794B960}"/>
+              </a:ext>
+            </a:extLst>
+          </p:cNvPr>
+          <p:cNvGrpSpPr/>
+          <p:nvPr/>
+        </p:nvGrpSpPr>
+        <p:grpSpPr>
+          <a:xfrm>
+            <a:off x="8578303" y="727176"/>
+            <a:ext cx="3153001" cy="2529824"/>
+            <a:chOff x="8112177" y="1825625"/>
+            <a:chExt cx="3877456" cy="3234747"/>
+          </a:xfrm>
+        </p:grpSpPr>
+        <p:pic>
+          <p:nvPicPr>
+            <p:cNvPr id="14" name="Picture 2" descr="From Words to Vectors: Understanding Word2Vec in NLP">
+              <a:extLst>
+                <a:ext uri="{FF2B5EF4-FFF2-40B4-BE49-F238E27FC236}">
+                  <a16:creationId xmlns:a16="http://schemas.microsoft.com/office/drawing/2014/main" id="{7F23BE60-A687-523C-A27C-2039DE7FA2B5}"/>
+                </a:ext>
+              </a:extLst>
+            </p:cNvPr>
+            <p:cNvPicPr>
+              <a:picLocks noChangeAspect="1" noChangeArrowheads="1"/>
+            </p:cNvPicPr>
+            <p:nvPr/>
+          </p:nvPicPr>
+          <p:blipFill>
+            <a:blip r:embed="rId2">
+              <a:extLst>
+                <a:ext uri="{28A0092B-C50C-407E-A947-70E740481C1C}">
+                  <a14:useLocalDpi xmlns:a14="http://schemas.microsoft.com/office/drawing/2010/main" val="0"/>
+                </a:ext>
+              </a:extLst>
+            </a:blip>
+            <a:srcRect/>
+            <a:stretch>
+              <a:fillRect/>
+            </a:stretch>
+          </p:blipFill>
+          <p:spPr bwMode="auto">
+            <a:xfrm>
+              <a:off x="8112177" y="1825625"/>
+              <a:ext cx="3877456" cy="2908092"/>
+            </a:xfrm>
+            <a:prstGeom prst="rect">
+              <a:avLst/>
+            </a:prstGeom>
+            <a:noFill/>
+            <a:extLst>
+              <a:ext uri="{909E8E84-426E-40DD-AFC4-6F175D3DCCD1}">
+                <a14:hiddenFill xmlns:a14="http://schemas.microsoft.com/office/drawing/2010/main">
+                  <a:solidFill>
+                    <a:srgbClr val="FFFFFF"/>
+                  </a:solidFill>
+                </a14:hiddenFill>
+              </a:ext>
+            </a:extLst>
+          </p:spPr>
+        </p:pic>
+        <p:sp>
+          <p:nvSpPr>
+            <p:cNvPr id="15" name="TextBox 14">
+              <a:extLst>
+                <a:ext uri="{FF2B5EF4-FFF2-40B4-BE49-F238E27FC236}">
+                  <a16:creationId xmlns:a16="http://schemas.microsoft.com/office/drawing/2014/main" id="{54EB4FF3-3FDB-2D43-398D-DAD3CAF43BD3}"/>
+                </a:ext>
+              </a:extLst>
+            </p:cNvPr>
+            <p:cNvSpPr txBox="1"/>
+            <p:nvPr/>
+          </p:nvSpPr>
+          <p:spPr>
+            <a:xfrm>
+              <a:off x="8385287" y="4745543"/>
+              <a:ext cx="3331235" cy="314829"/>
+            </a:xfrm>
+            <a:prstGeom prst="rect">
+              <a:avLst/>
+            </a:prstGeom>
+            <a:noFill/>
+          </p:spPr>
+          <p:txBody>
+            <a:bodyPr wrap="square">
+              <a:spAutoFit/>
+            </a:bodyPr>
+            <a:lstStyle/>
+            <a:p>
+              <a:pPr algn="ctr"/>
+              <a:r>
+                <a:rPr lang="en-US" sz="1000" dirty="0"/>
+                <a:t>Source: </a:t>
+              </a:r>
+              <a:r>
+                <a:rPr lang="en-US" sz="1000" dirty="0">
+                  <a:hlinkClick r:id="rId3"/>
+                </a:rPr>
+                <a:t>https://zilliz.com/glossary/word2vec</a:t>
+              </a:r>
+              <a:r>
+                <a:rPr lang="en-US" sz="1000" dirty="0"/>
+                <a:t> </a:t>
+              </a:r>
+            </a:p>
+          </p:txBody>
+        </p:sp>
+      </p:grpSp>
+      <p:grpSp>
+        <p:nvGrpSpPr>
+          <p:cNvPr id="25" name="Group 24">
+            <a:extLst>
+              <a:ext uri="{FF2B5EF4-FFF2-40B4-BE49-F238E27FC236}">
+                <a16:creationId xmlns:a16="http://schemas.microsoft.com/office/drawing/2014/main" id="{7B262D4E-6A36-0809-1748-9C81C55EB7A6}"/>
+              </a:ext>
+            </a:extLst>
+          </p:cNvPr>
+          <p:cNvGrpSpPr/>
+          <p:nvPr/>
+        </p:nvGrpSpPr>
+        <p:grpSpPr>
+          <a:xfrm>
+            <a:off x="8250572" y="1228987"/>
+            <a:ext cx="1433296" cy="511983"/>
+            <a:chOff x="8250572" y="1228987"/>
+            <a:chExt cx="1433296" cy="511983"/>
+          </a:xfrm>
+        </p:grpSpPr>
+        <p:cxnSp>
+          <p:nvCxnSpPr>
+            <p:cNvPr id="17" name="Straight Arrow Connector 16">
+              <a:extLst>
+                <a:ext uri="{FF2B5EF4-FFF2-40B4-BE49-F238E27FC236}">
+                  <a16:creationId xmlns:a16="http://schemas.microsoft.com/office/drawing/2014/main" id="{7F730FE9-16B9-1A1F-0737-2F6C8F3FAA1D}"/>
+                </a:ext>
+              </a:extLst>
+            </p:cNvPr>
+            <p:cNvCxnSpPr>
+              <a:cxnSpLocks/>
+              <a:endCxn id="18" idx="2"/>
+            </p:cNvCxnSpPr>
+            <p:nvPr/>
+          </p:nvCxnSpPr>
+          <p:spPr>
+            <a:xfrm>
+              <a:off x="8250572" y="1228987"/>
+              <a:ext cx="1294878" cy="444744"/>
+            </a:xfrm>
+            <a:prstGeom prst="straightConnector1">
+              <a:avLst/>
+            </a:prstGeom>
+            <a:ln>
+              <a:tailEnd type="triangle"/>
+            </a:ln>
+          </p:spPr>
+          <p:style>
+            <a:lnRef idx="2">
+              <a:schemeClr val="accent3"/>
+            </a:lnRef>
+            <a:fillRef idx="0">
+              <a:schemeClr val="accent3"/>
+            </a:fillRef>
+            <a:effectRef idx="1">
+              <a:schemeClr val="accent3"/>
+            </a:effectRef>
+            <a:fontRef idx="minor">
+              <a:schemeClr val="tx1"/>
+            </a:fontRef>
+          </p:style>
+        </p:cxnSp>
+        <p:sp>
+          <p:nvSpPr>
+            <p:cNvPr id="18" name="Oval 17">
+              <a:extLst>
+                <a:ext uri="{FF2B5EF4-FFF2-40B4-BE49-F238E27FC236}">
+                  <a16:creationId xmlns:a16="http://schemas.microsoft.com/office/drawing/2014/main" id="{AB34BE9D-1D3F-76E2-B3DD-AC5114219F3F}"/>
+                </a:ext>
+              </a:extLst>
+            </p:cNvPr>
+            <p:cNvSpPr/>
+            <p:nvPr/>
+          </p:nvSpPr>
+          <p:spPr>
+            <a:xfrm>
+              <a:off x="9545450" y="1606492"/>
+              <a:ext cx="138418" cy="134478"/>
+            </a:xfrm>
+            <a:prstGeom prst="ellipse">
+              <a:avLst/>
+            </a:prstGeom>
+            <a:ln>
+              <a:noFill/>
+            </a:ln>
+          </p:spPr>
+          <p:style>
+            <a:lnRef idx="3">
+              <a:schemeClr val="lt1"/>
+            </a:lnRef>
+            <a:fillRef idx="1">
+              <a:schemeClr val="accent3"/>
+            </a:fillRef>
+            <a:effectRef idx="1">
+              <a:schemeClr val="accent3"/>
+            </a:effectRef>
+            <a:fontRef idx="minor">
+              <a:schemeClr val="lt1"/>
+            </a:fontRef>
+          </p:style>
+          <p:txBody>
+            <a:bodyPr rtlCol="0" anchor="ctr"/>
+            <a:lstStyle/>
+            <a:p>
+              <a:pPr algn="ctr"/>
+              <a:endParaRPr lang="en-US"/>
+            </a:p>
+          </p:txBody>
+        </p:sp>
+      </p:grpSp>
+      <p:grpSp>
+        <p:nvGrpSpPr>
+          <p:cNvPr id="24" name="Group 23">
+            <a:extLst>
+              <a:ext uri="{FF2B5EF4-FFF2-40B4-BE49-F238E27FC236}">
+                <a16:creationId xmlns:a16="http://schemas.microsoft.com/office/drawing/2014/main" id="{2457BB68-292F-F076-9926-D5EE07C1F62D}"/>
+              </a:ext>
+            </a:extLst>
+          </p:cNvPr>
+          <p:cNvGrpSpPr/>
+          <p:nvPr/>
+        </p:nvGrpSpPr>
+        <p:grpSpPr>
+          <a:xfrm>
+            <a:off x="6939792" y="918594"/>
+            <a:ext cx="1866551" cy="902115"/>
+            <a:chOff x="6939792" y="918594"/>
+            <a:chExt cx="1866551" cy="902115"/>
+          </a:xfrm>
+        </p:grpSpPr>
+        <p:pic>
+          <p:nvPicPr>
+            <p:cNvPr id="1026" name="Picture 2" descr="Zdjęcie stockowe: Gry Karty - Król Kier – Obrazy bez opłat licencyjnych | FreeImages">
+              <a:extLst>
+                <a:ext uri="{FF2B5EF4-FFF2-40B4-BE49-F238E27FC236}">
+                  <a16:creationId xmlns:a16="http://schemas.microsoft.com/office/drawing/2014/main" id="{70482B82-47FD-637B-328B-F63F2B656795}"/>
+                </a:ext>
+              </a:extLst>
+            </p:cNvPr>
+            <p:cNvPicPr>
+              <a:picLocks noChangeAspect="1" noChangeArrowheads="1"/>
+            </p:cNvPicPr>
+            <p:nvPr/>
+          </p:nvPicPr>
+          <p:blipFill>
+            <a:blip r:embed="rId4">
+              <a:extLst>
+                <a:ext uri="{28A0092B-C50C-407E-A947-70E740481C1C}">
+                  <a14:useLocalDpi xmlns:a14="http://schemas.microsoft.com/office/drawing/2010/main" val="0"/>
+                </a:ext>
+              </a:extLst>
+            </a:blip>
+            <a:srcRect/>
+            <a:stretch>
+              <a:fillRect/>
+            </a:stretch>
+          </p:blipFill>
+          <p:spPr bwMode="auto">
+            <a:xfrm>
+              <a:off x="7697904" y="918594"/>
+              <a:ext cx="446930" cy="607546"/>
+            </a:xfrm>
+            <a:prstGeom prst="rect">
+              <a:avLst/>
+            </a:prstGeom>
+            <a:noFill/>
+            <a:ln>
+              <a:solidFill>
+                <a:schemeClr val="tx1"/>
+              </a:solidFill>
+            </a:ln>
+            <a:extLst>
+              <a:ext uri="{909E8E84-426E-40DD-AFC4-6F175D3DCCD1}">
+                <a14:hiddenFill xmlns:a14="http://schemas.microsoft.com/office/drawing/2010/main">
+                  <a:solidFill>
+                    <a:srgbClr val="FFFFFF"/>
+                  </a:solidFill>
+                </a14:hiddenFill>
+              </a:ext>
+            </a:extLst>
+          </p:spPr>
+        </p:pic>
+        <p:sp>
+          <p:nvSpPr>
+            <p:cNvPr id="22" name="TextBox 21">
+              <a:extLst>
+                <a:ext uri="{FF2B5EF4-FFF2-40B4-BE49-F238E27FC236}">
+                  <a16:creationId xmlns:a16="http://schemas.microsoft.com/office/drawing/2014/main" id="{74C9D252-A8DA-7B64-96DF-A595BD5FC22E}"/>
+                </a:ext>
+              </a:extLst>
+            </p:cNvPr>
+            <p:cNvSpPr txBox="1"/>
+            <p:nvPr/>
+          </p:nvSpPr>
+          <p:spPr>
+            <a:xfrm>
+              <a:off x="6939792" y="1543710"/>
+              <a:ext cx="1866551" cy="276999"/>
+            </a:xfrm>
+            <a:prstGeom prst="rect">
+              <a:avLst/>
+            </a:prstGeom>
+            <a:noFill/>
+          </p:spPr>
+          <p:txBody>
+            <a:bodyPr wrap="square" rtlCol="0">
+              <a:spAutoFit/>
+            </a:bodyPr>
+            <a:lstStyle/>
+            <a:p>
+              <a:pPr algn="ctr"/>
+              <a:r>
+                <a:rPr lang="en-US" sz="1200" dirty="0"/>
+                <a:t>This is the king of hearts.</a:t>
+              </a:r>
+            </a:p>
+          </p:txBody>
+        </p:sp>
+      </p:grpSp>
+      <p:grpSp>
+        <p:nvGrpSpPr>
+          <p:cNvPr id="31" name="Group 30">
+            <a:extLst>
+              <a:ext uri="{FF2B5EF4-FFF2-40B4-BE49-F238E27FC236}">
+                <a16:creationId xmlns:a16="http://schemas.microsoft.com/office/drawing/2014/main" id="{29870C15-FE93-C59C-75BF-7B52853971E1}"/>
+              </a:ext>
+            </a:extLst>
+          </p:cNvPr>
+          <p:cNvGrpSpPr/>
+          <p:nvPr/>
+        </p:nvGrpSpPr>
+        <p:grpSpPr>
+          <a:xfrm>
+            <a:off x="7697904" y="4701317"/>
+            <a:ext cx="4447606" cy="1933063"/>
+            <a:chOff x="7697904" y="4701317"/>
+            <a:chExt cx="4447606" cy="1933063"/>
+          </a:xfrm>
+        </p:grpSpPr>
+        <p:pic>
+          <p:nvPicPr>
+            <p:cNvPr id="28" name="Picture 27">
+              <a:extLst>
+                <a:ext uri="{FF2B5EF4-FFF2-40B4-BE49-F238E27FC236}">
+                  <a16:creationId xmlns:a16="http://schemas.microsoft.com/office/drawing/2014/main" id="{A655924D-F8C0-D195-0DDD-84DDB3FFA0EB}"/>
+                </a:ext>
+              </a:extLst>
+            </p:cNvPr>
+            <p:cNvPicPr>
+              <a:picLocks noChangeAspect="1"/>
+            </p:cNvPicPr>
+            <p:nvPr/>
+          </p:nvPicPr>
+          <p:blipFill>
+            <a:blip r:embed="rId5"/>
+            <a:srcRect r="33731" b="25065"/>
+            <a:stretch>
+              <a:fillRect/>
+            </a:stretch>
+          </p:blipFill>
+          <p:spPr>
+            <a:xfrm>
+              <a:off x="7697904" y="4701317"/>
+              <a:ext cx="4327642" cy="1686842"/>
+            </a:xfrm>
+            <a:prstGeom prst="rect">
+              <a:avLst/>
+            </a:prstGeom>
+            <a:ln>
+              <a:solidFill>
+                <a:schemeClr val="tx1"/>
+              </a:solidFill>
+            </a:ln>
+          </p:spPr>
+        </p:pic>
+        <p:sp>
+          <p:nvSpPr>
+            <p:cNvPr id="29" name="TextBox 28">
+              <a:extLst>
+                <a:ext uri="{FF2B5EF4-FFF2-40B4-BE49-F238E27FC236}">
+                  <a16:creationId xmlns:a16="http://schemas.microsoft.com/office/drawing/2014/main" id="{5CCC3F1B-15CF-14B2-0262-8C09F8D2E5CB}"/>
+                </a:ext>
+              </a:extLst>
+            </p:cNvPr>
+            <p:cNvSpPr txBox="1"/>
+            <p:nvPr/>
+          </p:nvSpPr>
+          <p:spPr>
+            <a:xfrm>
+              <a:off x="8023124" y="6388159"/>
+              <a:ext cx="4122386" cy="246221"/>
+            </a:xfrm>
+            <a:prstGeom prst="rect">
+              <a:avLst/>
+            </a:prstGeom>
+            <a:noFill/>
+          </p:spPr>
+          <p:txBody>
+            <a:bodyPr wrap="square" rtlCol="0">
+              <a:spAutoFit/>
+            </a:bodyPr>
+            <a:lstStyle/>
+            <a:p>
+              <a:r>
+                <a:rPr lang="en-US" sz="1000" dirty="0"/>
+                <a:t>Source: </a:t>
+              </a:r>
+              <a:r>
+                <a:rPr lang="en-US" sz="1000" dirty="0">
+                  <a:hlinkClick r:id="rId6"/>
+                </a:rPr>
+                <a:t>https://www.superannotate.com/blog/diffusion-models</a:t>
+              </a:r>
+              <a:r>
+                <a:rPr lang="en-US" sz="1000" dirty="0"/>
+                <a:t> </a:t>
+              </a:r>
+            </a:p>
+          </p:txBody>
+        </p:sp>
+        <p:sp>
+          <p:nvSpPr>
+            <p:cNvPr id="30" name="Rectangle 29">
+              <a:extLst>
+                <a:ext uri="{FF2B5EF4-FFF2-40B4-BE49-F238E27FC236}">
+                  <a16:creationId xmlns:a16="http://schemas.microsoft.com/office/drawing/2014/main" id="{3E37A830-5599-03C4-7DB8-9ECC763E8CB6}"/>
+                </a:ext>
+              </a:extLst>
+            </p:cNvPr>
+            <p:cNvSpPr/>
+            <p:nvPr/>
+          </p:nvSpPr>
+          <p:spPr>
+            <a:xfrm>
+              <a:off x="7873067" y="5544738"/>
+              <a:ext cx="4115265" cy="708578"/>
+            </a:xfrm>
+            <a:prstGeom prst="rect">
+              <a:avLst/>
+            </a:prstGeom>
+            <a:noFill/>
+            <a:ln w="38100" cap="flat" cmpd="sng" algn="ctr">
+              <a:solidFill>
+                <a:schemeClr val="accent3"/>
+              </a:solidFill>
+              <a:prstDash val="solid"/>
+              <a:round/>
+              <a:headEnd type="none" w="med" len="med"/>
+              <a:tailEnd type="none" w="med" len="med"/>
+            </a:ln>
+          </p:spPr>
+          <p:style>
+            <a:lnRef idx="0">
+              <a:scrgbClr r="0" g="0" b="0"/>
+            </a:lnRef>
+            <a:fillRef idx="0">
+              <a:scrgbClr r="0" g="0" b="0"/>
+            </a:fillRef>
+            <a:effectRef idx="0">
+              <a:scrgbClr r="0" g="0" b="0"/>
+            </a:effectRef>
+            <a:fontRef idx="minor">
+              <a:schemeClr val="accent3"/>
+            </a:fontRef>
+          </p:style>
+          <p:txBody>
+            <a:bodyPr rtlCol="0" anchor="ctr"/>
+            <a:lstStyle/>
+            <a:p>
+              <a:pPr algn="ctr"/>
+              <a:endParaRPr lang="en-US"/>
+            </a:p>
+          </p:txBody>
+        </p:sp>
+      </p:grpSp>
     </p:spTree>
     <p:extLst>
       <p:ext uri="{BB962C8B-B14F-4D97-AF65-F5344CB8AC3E}">
@@ -5732,6 +6244,485 @@
   <p:clrMapOvr>
     <a:masterClrMapping/>
   </p:clrMapOvr>
+  <p:timing>
+    <p:tnLst>
+      <p:par>
+        <p:cTn id="1" dur="indefinite" restart="never" nodeType="tmRoot">
+          <p:childTnLst>
+            <p:seq concurrent="1" nextAc="seek">
+              <p:cTn id="2" dur="indefinite" nodeType="mainSeq">
+                <p:childTnLst>
+                  <p:par>
+                    <p:cTn id="3" fill="hold">
+                      <p:stCondLst>
+                        <p:cond delay="indefinite"/>
+                      </p:stCondLst>
+                      <p:childTnLst>
+                        <p:par>
+                          <p:cTn id="4" fill="hold">
+                            <p:stCondLst>
+                              <p:cond delay="0"/>
+                            </p:stCondLst>
+                            <p:childTnLst>
+                              <p:par>
+                                <p:cTn id="5" presetID="1" presetClass="entr" presetSubtype="0" fill="hold" grpId="0" nodeType="clickEffect">
+                                  <p:stCondLst>
+                                    <p:cond delay="0"/>
+                                  </p:stCondLst>
+                                  <p:childTnLst>
+                                    <p:set>
+                                      <p:cBhvr>
+                                        <p:cTn id="6" dur="1" fill="hold">
+                                          <p:stCondLst>
+                                            <p:cond delay="0"/>
+                                          </p:stCondLst>
+                                        </p:cTn>
+                                        <p:tgtEl>
+                                          <p:spTgt spid="3">
+                                            <p:txEl>
+                                              <p:pRg st="0" end="0"/>
+                                            </p:txEl>
+                                          </p:spTgt>
+                                        </p:tgtEl>
+                                        <p:attrNameLst>
+                                          <p:attrName>style.visibility</p:attrName>
+                                        </p:attrNameLst>
+                                      </p:cBhvr>
+                                      <p:to>
+                                        <p:strVal val="visible"/>
+                                      </p:to>
+                                    </p:set>
+                                  </p:childTnLst>
+                                </p:cTn>
+                              </p:par>
+                              <p:par>
+                                <p:cTn id="7" presetID="1" presetClass="entr" presetSubtype="0" fill="hold" grpId="0" nodeType="withEffect">
+                                  <p:stCondLst>
+                                    <p:cond delay="0"/>
+                                  </p:stCondLst>
+                                  <p:childTnLst>
+                                    <p:set>
+                                      <p:cBhvr>
+                                        <p:cTn id="8" dur="1" fill="hold">
+                                          <p:stCondLst>
+                                            <p:cond delay="0"/>
+                                          </p:stCondLst>
+                                        </p:cTn>
+                                        <p:tgtEl>
+                                          <p:spTgt spid="3">
+                                            <p:txEl>
+                                              <p:pRg st="1" end="1"/>
+                                            </p:txEl>
+                                          </p:spTgt>
+                                        </p:tgtEl>
+                                        <p:attrNameLst>
+                                          <p:attrName>style.visibility</p:attrName>
+                                        </p:attrNameLst>
+                                      </p:cBhvr>
+                                      <p:to>
+                                        <p:strVal val="visible"/>
+                                      </p:to>
+                                    </p:set>
+                                  </p:childTnLst>
+                                </p:cTn>
+                              </p:par>
+                              <p:par>
+                                <p:cTn id="9" presetID="1" presetClass="entr" presetSubtype="0" fill="hold" grpId="0" nodeType="withEffect">
+                                  <p:stCondLst>
+                                    <p:cond delay="0"/>
+                                  </p:stCondLst>
+                                  <p:childTnLst>
+                                    <p:set>
+                                      <p:cBhvr>
+                                        <p:cTn id="10" dur="1" fill="hold">
+                                          <p:stCondLst>
+                                            <p:cond delay="0"/>
+                                          </p:stCondLst>
+                                        </p:cTn>
+                                        <p:tgtEl>
+                                          <p:spTgt spid="3">
+                                            <p:txEl>
+                                              <p:pRg st="2" end="2"/>
+                                            </p:txEl>
+                                          </p:spTgt>
+                                        </p:tgtEl>
+                                        <p:attrNameLst>
+                                          <p:attrName>style.visibility</p:attrName>
+                                        </p:attrNameLst>
+                                      </p:cBhvr>
+                                      <p:to>
+                                        <p:strVal val="visible"/>
+                                      </p:to>
+                                    </p:set>
+                                  </p:childTnLst>
+                                </p:cTn>
+                              </p:par>
+                              <p:par>
+                                <p:cTn id="11" presetID="1" presetClass="entr" presetSubtype="0" fill="hold" grpId="0" nodeType="withEffect">
+                                  <p:stCondLst>
+                                    <p:cond delay="0"/>
+                                  </p:stCondLst>
+                                  <p:childTnLst>
+                                    <p:set>
+                                      <p:cBhvr>
+                                        <p:cTn id="12" dur="1" fill="hold">
+                                          <p:stCondLst>
+                                            <p:cond delay="0"/>
+                                          </p:stCondLst>
+                                        </p:cTn>
+                                        <p:tgtEl>
+                                          <p:spTgt spid="3">
+                                            <p:txEl>
+                                              <p:pRg st="3" end="3"/>
+                                            </p:txEl>
+                                          </p:spTgt>
+                                        </p:tgtEl>
+                                        <p:attrNameLst>
+                                          <p:attrName>style.visibility</p:attrName>
+                                        </p:attrNameLst>
+                                      </p:cBhvr>
+                                      <p:to>
+                                        <p:strVal val="visible"/>
+                                      </p:to>
+                                    </p:set>
+                                  </p:childTnLst>
+                                </p:cTn>
+                              </p:par>
+                              <p:par>
+                                <p:cTn id="13" presetID="1" presetClass="entr" presetSubtype="0" fill="hold" nodeType="withEffect">
+                                  <p:stCondLst>
+                                    <p:cond delay="0"/>
+                                  </p:stCondLst>
+                                  <p:childTnLst>
+                                    <p:set>
+                                      <p:cBhvr>
+                                        <p:cTn id="14" dur="1" fill="hold">
+                                          <p:stCondLst>
+                                            <p:cond delay="0"/>
+                                          </p:stCondLst>
+                                        </p:cTn>
+                                        <p:tgtEl>
+                                          <p:spTgt spid="13"/>
+                                        </p:tgtEl>
+                                        <p:attrNameLst>
+                                          <p:attrName>style.visibility</p:attrName>
+                                        </p:attrNameLst>
+                                      </p:cBhvr>
+                                      <p:to>
+                                        <p:strVal val="visible"/>
+                                      </p:to>
+                                    </p:set>
+                                  </p:childTnLst>
+                                </p:cTn>
+                              </p:par>
+                            </p:childTnLst>
+                          </p:cTn>
+                        </p:par>
+                      </p:childTnLst>
+                    </p:cTn>
+                  </p:par>
+                  <p:par>
+                    <p:cTn id="15" fill="hold">
+                      <p:stCondLst>
+                        <p:cond delay="indefinite"/>
+                      </p:stCondLst>
+                      <p:childTnLst>
+                        <p:par>
+                          <p:cTn id="16" fill="hold">
+                            <p:stCondLst>
+                              <p:cond delay="0"/>
+                            </p:stCondLst>
+                            <p:childTnLst>
+                              <p:par>
+                                <p:cTn id="17" presetID="1" presetClass="entr" presetSubtype="0" fill="hold" nodeType="clickEffect">
+                                  <p:stCondLst>
+                                    <p:cond delay="0"/>
+                                  </p:stCondLst>
+                                  <p:childTnLst>
+                                    <p:set>
+                                      <p:cBhvr>
+                                        <p:cTn id="18" dur="1" fill="hold">
+                                          <p:stCondLst>
+                                            <p:cond delay="0"/>
+                                          </p:stCondLst>
+                                        </p:cTn>
+                                        <p:tgtEl>
+                                          <p:spTgt spid="24"/>
+                                        </p:tgtEl>
+                                        <p:attrNameLst>
+                                          <p:attrName>style.visibility</p:attrName>
+                                        </p:attrNameLst>
+                                      </p:cBhvr>
+                                      <p:to>
+                                        <p:strVal val="visible"/>
+                                      </p:to>
+                                    </p:set>
+                                  </p:childTnLst>
+                                </p:cTn>
+                              </p:par>
+                            </p:childTnLst>
+                          </p:cTn>
+                        </p:par>
+                      </p:childTnLst>
+                    </p:cTn>
+                  </p:par>
+                  <p:par>
+                    <p:cTn id="19" fill="hold">
+                      <p:stCondLst>
+                        <p:cond delay="indefinite"/>
+                      </p:stCondLst>
+                      <p:childTnLst>
+                        <p:par>
+                          <p:cTn id="20" fill="hold">
+                            <p:stCondLst>
+                              <p:cond delay="0"/>
+                            </p:stCondLst>
+                            <p:childTnLst>
+                              <p:par>
+                                <p:cTn id="21" presetID="1" presetClass="entr" presetSubtype="0" fill="hold" nodeType="clickEffect">
+                                  <p:stCondLst>
+                                    <p:cond delay="0"/>
+                                  </p:stCondLst>
+                                  <p:childTnLst>
+                                    <p:set>
+                                      <p:cBhvr>
+                                        <p:cTn id="22" dur="1" fill="hold">
+                                          <p:stCondLst>
+                                            <p:cond delay="0"/>
+                                          </p:stCondLst>
+                                        </p:cTn>
+                                        <p:tgtEl>
+                                          <p:spTgt spid="25"/>
+                                        </p:tgtEl>
+                                        <p:attrNameLst>
+                                          <p:attrName>style.visibility</p:attrName>
+                                        </p:attrNameLst>
+                                      </p:cBhvr>
+                                      <p:to>
+                                        <p:strVal val="visible"/>
+                                      </p:to>
+                                    </p:set>
+                                  </p:childTnLst>
+                                </p:cTn>
+                              </p:par>
+                            </p:childTnLst>
+                          </p:cTn>
+                        </p:par>
+                      </p:childTnLst>
+                    </p:cTn>
+                  </p:par>
+                  <p:par>
+                    <p:cTn id="23" fill="hold">
+                      <p:stCondLst>
+                        <p:cond delay="indefinite"/>
+                      </p:stCondLst>
+                      <p:childTnLst>
+                        <p:par>
+                          <p:cTn id="24" fill="hold">
+                            <p:stCondLst>
+                              <p:cond delay="0"/>
+                            </p:stCondLst>
+                            <p:childTnLst>
+                              <p:par>
+                                <p:cTn id="25" presetID="1" presetClass="entr" presetSubtype="0" fill="hold" grpId="0" nodeType="clickEffect">
+                                  <p:stCondLst>
+                                    <p:cond delay="0"/>
+                                  </p:stCondLst>
+                                  <p:childTnLst>
+                                    <p:set>
+                                      <p:cBhvr>
+                                        <p:cTn id="26" dur="1" fill="hold">
+                                          <p:stCondLst>
+                                            <p:cond delay="0"/>
+                                          </p:stCondLst>
+                                        </p:cTn>
+                                        <p:tgtEl>
+                                          <p:spTgt spid="3">
+                                            <p:txEl>
+                                              <p:pRg st="5" end="5"/>
+                                            </p:txEl>
+                                          </p:spTgt>
+                                        </p:tgtEl>
+                                        <p:attrNameLst>
+                                          <p:attrName>style.visibility</p:attrName>
+                                        </p:attrNameLst>
+                                      </p:cBhvr>
+                                      <p:to>
+                                        <p:strVal val="visible"/>
+                                      </p:to>
+                                    </p:set>
+                                  </p:childTnLst>
+                                </p:cTn>
+                              </p:par>
+                            </p:childTnLst>
+                          </p:cTn>
+                        </p:par>
+                      </p:childTnLst>
+                    </p:cTn>
+                  </p:par>
+                  <p:par>
+                    <p:cTn id="27" fill="hold">
+                      <p:stCondLst>
+                        <p:cond delay="indefinite"/>
+                      </p:stCondLst>
+                      <p:childTnLst>
+                        <p:par>
+                          <p:cTn id="28" fill="hold">
+                            <p:stCondLst>
+                              <p:cond delay="0"/>
+                            </p:stCondLst>
+                            <p:childTnLst>
+                              <p:par>
+                                <p:cTn id="29" presetID="1" presetClass="entr" presetSubtype="0" fill="hold" grpId="0" nodeType="clickEffect">
+                                  <p:stCondLst>
+                                    <p:cond delay="0"/>
+                                  </p:stCondLst>
+                                  <p:childTnLst>
+                                    <p:set>
+                                      <p:cBhvr>
+                                        <p:cTn id="30" dur="1" fill="hold">
+                                          <p:stCondLst>
+                                            <p:cond delay="0"/>
+                                          </p:stCondLst>
+                                        </p:cTn>
+                                        <p:tgtEl>
+                                          <p:spTgt spid="3">
+                                            <p:txEl>
+                                              <p:pRg st="7" end="7"/>
+                                            </p:txEl>
+                                          </p:spTgt>
+                                        </p:tgtEl>
+                                        <p:attrNameLst>
+                                          <p:attrName>style.visibility</p:attrName>
+                                        </p:attrNameLst>
+                                      </p:cBhvr>
+                                      <p:to>
+                                        <p:strVal val="visible"/>
+                                      </p:to>
+                                    </p:set>
+                                  </p:childTnLst>
+                                </p:cTn>
+                              </p:par>
+                              <p:par>
+                                <p:cTn id="31" presetID="1" presetClass="entr" presetSubtype="0" fill="hold" grpId="0" nodeType="withEffect">
+                                  <p:stCondLst>
+                                    <p:cond delay="0"/>
+                                  </p:stCondLst>
+                                  <p:childTnLst>
+                                    <p:set>
+                                      <p:cBhvr>
+                                        <p:cTn id="32" dur="1" fill="hold">
+                                          <p:stCondLst>
+                                            <p:cond delay="0"/>
+                                          </p:stCondLst>
+                                        </p:cTn>
+                                        <p:tgtEl>
+                                          <p:spTgt spid="3">
+                                            <p:txEl>
+                                              <p:pRg st="8" end="8"/>
+                                            </p:txEl>
+                                          </p:spTgt>
+                                        </p:tgtEl>
+                                        <p:attrNameLst>
+                                          <p:attrName>style.visibility</p:attrName>
+                                        </p:attrNameLst>
+                                      </p:cBhvr>
+                                      <p:to>
+                                        <p:strVal val="visible"/>
+                                      </p:to>
+                                    </p:set>
+                                  </p:childTnLst>
+                                </p:cTn>
+                              </p:par>
+                              <p:par>
+                                <p:cTn id="33" presetID="1" presetClass="entr" presetSubtype="0" fill="hold" grpId="0" nodeType="withEffect">
+                                  <p:stCondLst>
+                                    <p:cond delay="0"/>
+                                  </p:stCondLst>
+                                  <p:childTnLst>
+                                    <p:set>
+                                      <p:cBhvr>
+                                        <p:cTn id="34" dur="1" fill="hold">
+                                          <p:stCondLst>
+                                            <p:cond delay="0"/>
+                                          </p:stCondLst>
+                                        </p:cTn>
+                                        <p:tgtEl>
+                                          <p:spTgt spid="3">
+                                            <p:txEl>
+                                              <p:pRg st="9" end="9"/>
+                                            </p:txEl>
+                                          </p:spTgt>
+                                        </p:tgtEl>
+                                        <p:attrNameLst>
+                                          <p:attrName>style.visibility</p:attrName>
+                                        </p:attrNameLst>
+                                      </p:cBhvr>
+                                      <p:to>
+                                        <p:strVal val="visible"/>
+                                      </p:to>
+                                    </p:set>
+                                  </p:childTnLst>
+                                </p:cTn>
+                              </p:par>
+                              <p:par>
+                                <p:cTn id="35" presetID="1" presetClass="entr" presetSubtype="0" fill="hold" nodeType="withEffect">
+                                  <p:stCondLst>
+                                    <p:cond delay="0"/>
+                                  </p:stCondLst>
+                                  <p:childTnLst>
+                                    <p:set>
+                                      <p:cBhvr>
+                                        <p:cTn id="36" dur="1" fill="hold">
+                                          <p:stCondLst>
+                                            <p:cond delay="0"/>
+                                          </p:stCondLst>
+                                        </p:cTn>
+                                        <p:tgtEl>
+                                          <p:spTgt spid="31"/>
+                                        </p:tgtEl>
+                                        <p:attrNameLst>
+                                          <p:attrName>style.visibility</p:attrName>
+                                        </p:attrNameLst>
+                                      </p:cBhvr>
+                                      <p:to>
+                                        <p:strVal val="visible"/>
+                                      </p:to>
+                                    </p:set>
+                                  </p:childTnLst>
+                                </p:cTn>
+                              </p:par>
+                            </p:childTnLst>
+                          </p:cTn>
+                        </p:par>
+                      </p:childTnLst>
+                    </p:cTn>
+                  </p:par>
+                </p:childTnLst>
+              </p:cTn>
+              <p:prevCondLst>
+                <p:cond evt="onPrev" delay="0">
+                  <p:tgtEl>
+                    <p:sldTgt/>
+                  </p:tgtEl>
+                </p:cond>
+              </p:prevCondLst>
+              <p:nextCondLst>
+                <p:cond evt="onNext" delay="0">
+                  <p:tgtEl>
+                    <p:sldTgt/>
+                  </p:tgtEl>
+                </p:cond>
+              </p:nextCondLst>
+            </p:seq>
+          </p:childTnLst>
+        </p:cTn>
+      </p:par>
+    </p:tnLst>
+    <p:bldLst>
+      <p:bldP spid="3" grpId="0" uiExpand="1" build="p"/>
+    </p:bldLst>
+  </p:timing>
 </p:sld>
 </file>
 
@@ -5799,7 +6790,7 @@
         <p:spPr/>
         <p:txBody>
           <a:bodyPr>
-            <a:normAutofit/>
+            <a:normAutofit fontScale="92500" lnSpcReduction="20000"/>
           </a:bodyPr>
           <a:lstStyle/>
           <a:p>
@@ -5807,8 +6798,25 @@
               <a:buNone/>
             </a:pPr>
             <a:r>
+              <a:rPr lang="en-US" b="1" dirty="0"/>
+              <a:t>Observation</a:t>
+            </a:r>
+            <a:r>
               <a:rPr lang="en-US" dirty="0"/>
-              <a:t>An AI solution that uses a set of specially prompted LLM calls. </a:t>
+              <a:t>: LLMs are good to solve small problems, but struggle with larger, multi-step problems.</a:t>
+            </a:r>
+          </a:p>
+          <a:p>
+            <a:pPr marL="0" indent="0">
+              <a:buNone/>
+            </a:pPr>
+            <a:r>
+              <a:rPr lang="en-US" b="1" dirty="0"/>
+              <a:t>Argentic AI</a:t>
+            </a:r>
+            <a:r>
+              <a:rPr lang="en-US" dirty="0"/>
+              <a:t>: An AI solution that breaks down a problem into a set of specially prompted LLM calls. </a:t>
             </a:r>
           </a:p>
           <a:p>
@@ -5898,6 +6906,328 @@
   <p:clrMapOvr>
     <a:masterClrMapping/>
   </p:clrMapOvr>
+  <p:timing>
+    <p:tnLst>
+      <p:par>
+        <p:cTn id="1" dur="indefinite" restart="never" nodeType="tmRoot">
+          <p:childTnLst>
+            <p:seq concurrent="1" nextAc="seek">
+              <p:cTn id="2" dur="indefinite" nodeType="mainSeq">
+                <p:childTnLst>
+                  <p:par>
+                    <p:cTn id="3" fill="hold">
+                      <p:stCondLst>
+                        <p:cond delay="indefinite"/>
+                      </p:stCondLst>
+                      <p:childTnLst>
+                        <p:par>
+                          <p:cTn id="4" fill="hold">
+                            <p:stCondLst>
+                              <p:cond delay="0"/>
+                            </p:stCondLst>
+                            <p:childTnLst>
+                              <p:par>
+                                <p:cTn id="5" presetID="1" presetClass="entr" presetSubtype="0" fill="hold" grpId="0" nodeType="clickEffect">
+                                  <p:stCondLst>
+                                    <p:cond delay="0"/>
+                                  </p:stCondLst>
+                                  <p:childTnLst>
+                                    <p:set>
+                                      <p:cBhvr>
+                                        <p:cTn id="6" dur="1" fill="hold">
+                                          <p:stCondLst>
+                                            <p:cond delay="0"/>
+                                          </p:stCondLst>
+                                        </p:cTn>
+                                        <p:tgtEl>
+                                          <p:spTgt spid="3">
+                                            <p:txEl>
+                                              <p:pRg st="0" end="0"/>
+                                            </p:txEl>
+                                          </p:spTgt>
+                                        </p:tgtEl>
+                                        <p:attrNameLst>
+                                          <p:attrName>style.visibility</p:attrName>
+                                        </p:attrNameLst>
+                                      </p:cBhvr>
+                                      <p:to>
+                                        <p:strVal val="visible"/>
+                                      </p:to>
+                                    </p:set>
+                                  </p:childTnLst>
+                                </p:cTn>
+                              </p:par>
+                            </p:childTnLst>
+                          </p:cTn>
+                        </p:par>
+                      </p:childTnLst>
+                    </p:cTn>
+                  </p:par>
+                  <p:par>
+                    <p:cTn id="7" fill="hold">
+                      <p:stCondLst>
+                        <p:cond delay="indefinite"/>
+                      </p:stCondLst>
+                      <p:childTnLst>
+                        <p:par>
+                          <p:cTn id="8" fill="hold">
+                            <p:stCondLst>
+                              <p:cond delay="0"/>
+                            </p:stCondLst>
+                            <p:childTnLst>
+                              <p:par>
+                                <p:cTn id="9" presetID="1" presetClass="entr" presetSubtype="0" fill="hold" grpId="0" nodeType="clickEffect">
+                                  <p:stCondLst>
+                                    <p:cond delay="0"/>
+                                  </p:stCondLst>
+                                  <p:childTnLst>
+                                    <p:set>
+                                      <p:cBhvr>
+                                        <p:cTn id="10" dur="1" fill="hold">
+                                          <p:stCondLst>
+                                            <p:cond delay="0"/>
+                                          </p:stCondLst>
+                                        </p:cTn>
+                                        <p:tgtEl>
+                                          <p:spTgt spid="3">
+                                            <p:txEl>
+                                              <p:pRg st="1" end="1"/>
+                                            </p:txEl>
+                                          </p:spTgt>
+                                        </p:tgtEl>
+                                        <p:attrNameLst>
+                                          <p:attrName>style.visibility</p:attrName>
+                                        </p:attrNameLst>
+                                      </p:cBhvr>
+                                      <p:to>
+                                        <p:strVal val="visible"/>
+                                      </p:to>
+                                    </p:set>
+                                  </p:childTnLst>
+                                </p:cTn>
+                              </p:par>
+                            </p:childTnLst>
+                          </p:cTn>
+                        </p:par>
+                      </p:childTnLst>
+                    </p:cTn>
+                  </p:par>
+                  <p:par>
+                    <p:cTn id="11" fill="hold">
+                      <p:stCondLst>
+                        <p:cond delay="indefinite"/>
+                      </p:stCondLst>
+                      <p:childTnLst>
+                        <p:par>
+                          <p:cTn id="12" fill="hold">
+                            <p:stCondLst>
+                              <p:cond delay="0"/>
+                            </p:stCondLst>
+                            <p:childTnLst>
+                              <p:par>
+                                <p:cTn id="13" presetID="1" presetClass="entr" presetSubtype="0" fill="hold" grpId="0" nodeType="clickEffect">
+                                  <p:stCondLst>
+                                    <p:cond delay="0"/>
+                                  </p:stCondLst>
+                                  <p:childTnLst>
+                                    <p:set>
+                                      <p:cBhvr>
+                                        <p:cTn id="14" dur="1" fill="hold">
+                                          <p:stCondLst>
+                                            <p:cond delay="0"/>
+                                          </p:stCondLst>
+                                        </p:cTn>
+                                        <p:tgtEl>
+                                          <p:spTgt spid="3">
+                                            <p:txEl>
+                                              <p:pRg st="2" end="2"/>
+                                            </p:txEl>
+                                          </p:spTgt>
+                                        </p:tgtEl>
+                                        <p:attrNameLst>
+                                          <p:attrName>style.visibility</p:attrName>
+                                        </p:attrNameLst>
+                                      </p:cBhvr>
+                                      <p:to>
+                                        <p:strVal val="visible"/>
+                                      </p:to>
+                                    </p:set>
+                                  </p:childTnLst>
+                                </p:cTn>
+                              </p:par>
+                              <p:par>
+                                <p:cTn id="15" presetID="1" presetClass="entr" presetSubtype="0" fill="hold" grpId="0" nodeType="withEffect">
+                                  <p:stCondLst>
+                                    <p:cond delay="0"/>
+                                  </p:stCondLst>
+                                  <p:childTnLst>
+                                    <p:set>
+                                      <p:cBhvr>
+                                        <p:cTn id="16" dur="1" fill="hold">
+                                          <p:stCondLst>
+                                            <p:cond delay="0"/>
+                                          </p:stCondLst>
+                                        </p:cTn>
+                                        <p:tgtEl>
+                                          <p:spTgt spid="3">
+                                            <p:txEl>
+                                              <p:pRg st="3" end="3"/>
+                                            </p:txEl>
+                                          </p:spTgt>
+                                        </p:tgtEl>
+                                        <p:attrNameLst>
+                                          <p:attrName>style.visibility</p:attrName>
+                                        </p:attrNameLst>
+                                      </p:cBhvr>
+                                      <p:to>
+                                        <p:strVal val="visible"/>
+                                      </p:to>
+                                    </p:set>
+                                  </p:childTnLst>
+                                </p:cTn>
+                              </p:par>
+                              <p:par>
+                                <p:cTn id="17" presetID="1" presetClass="entr" presetSubtype="0" fill="hold" grpId="0" nodeType="withEffect">
+                                  <p:stCondLst>
+                                    <p:cond delay="0"/>
+                                  </p:stCondLst>
+                                  <p:childTnLst>
+                                    <p:set>
+                                      <p:cBhvr>
+                                        <p:cTn id="18" dur="1" fill="hold">
+                                          <p:stCondLst>
+                                            <p:cond delay="0"/>
+                                          </p:stCondLst>
+                                        </p:cTn>
+                                        <p:tgtEl>
+                                          <p:spTgt spid="3">
+                                            <p:txEl>
+                                              <p:pRg st="4" end="4"/>
+                                            </p:txEl>
+                                          </p:spTgt>
+                                        </p:tgtEl>
+                                        <p:attrNameLst>
+                                          <p:attrName>style.visibility</p:attrName>
+                                        </p:attrNameLst>
+                                      </p:cBhvr>
+                                      <p:to>
+                                        <p:strVal val="visible"/>
+                                      </p:to>
+                                    </p:set>
+                                  </p:childTnLst>
+                                </p:cTn>
+                              </p:par>
+                              <p:par>
+                                <p:cTn id="19" presetID="1" presetClass="entr" presetSubtype="0" fill="hold" grpId="0" nodeType="withEffect">
+                                  <p:stCondLst>
+                                    <p:cond delay="0"/>
+                                  </p:stCondLst>
+                                  <p:childTnLst>
+                                    <p:set>
+                                      <p:cBhvr>
+                                        <p:cTn id="20" dur="1" fill="hold">
+                                          <p:stCondLst>
+                                            <p:cond delay="0"/>
+                                          </p:stCondLst>
+                                        </p:cTn>
+                                        <p:tgtEl>
+                                          <p:spTgt spid="3">
+                                            <p:txEl>
+                                              <p:pRg st="5" end="5"/>
+                                            </p:txEl>
+                                          </p:spTgt>
+                                        </p:tgtEl>
+                                        <p:attrNameLst>
+                                          <p:attrName>style.visibility</p:attrName>
+                                        </p:attrNameLst>
+                                      </p:cBhvr>
+                                      <p:to>
+                                        <p:strVal val="visible"/>
+                                      </p:to>
+                                    </p:set>
+                                  </p:childTnLst>
+                                </p:cTn>
+                              </p:par>
+                            </p:childTnLst>
+                          </p:cTn>
+                        </p:par>
+                      </p:childTnLst>
+                    </p:cTn>
+                  </p:par>
+                  <p:par>
+                    <p:cTn id="21" fill="hold">
+                      <p:stCondLst>
+                        <p:cond delay="indefinite"/>
+                      </p:stCondLst>
+                      <p:childTnLst>
+                        <p:par>
+                          <p:cTn id="22" fill="hold">
+                            <p:stCondLst>
+                              <p:cond delay="0"/>
+                            </p:stCondLst>
+                            <p:childTnLst>
+                              <p:par>
+                                <p:cTn id="23" presetID="1" presetClass="entr" presetSubtype="0" fill="hold" grpId="0" nodeType="clickEffect">
+                                  <p:stCondLst>
+                                    <p:cond delay="0"/>
+                                  </p:stCondLst>
+                                  <p:childTnLst>
+                                    <p:set>
+                                      <p:cBhvr>
+                                        <p:cTn id="24" dur="1" fill="hold">
+                                          <p:stCondLst>
+                                            <p:cond delay="0"/>
+                                          </p:stCondLst>
+                                        </p:cTn>
+                                        <p:tgtEl>
+                                          <p:spTgt spid="3">
+                                            <p:txEl>
+                                              <p:pRg st="7" end="7"/>
+                                            </p:txEl>
+                                          </p:spTgt>
+                                        </p:tgtEl>
+                                        <p:attrNameLst>
+                                          <p:attrName>style.visibility</p:attrName>
+                                        </p:attrNameLst>
+                                      </p:cBhvr>
+                                      <p:to>
+                                        <p:strVal val="visible"/>
+                                      </p:to>
+                                    </p:set>
+                                  </p:childTnLst>
+                                </p:cTn>
+                              </p:par>
+                            </p:childTnLst>
+                          </p:cTn>
+                        </p:par>
+                      </p:childTnLst>
+                    </p:cTn>
+                  </p:par>
+                </p:childTnLst>
+              </p:cTn>
+              <p:prevCondLst>
+                <p:cond evt="onPrev" delay="0">
+                  <p:tgtEl>
+                    <p:sldTgt/>
+                  </p:tgtEl>
+                </p:cond>
+              </p:prevCondLst>
+              <p:nextCondLst>
+                <p:cond evt="onNext" delay="0">
+                  <p:tgtEl>
+                    <p:sldTgt/>
+                  </p:tgtEl>
+                </p:cond>
+              </p:nextCondLst>
+            </p:seq>
+          </p:childTnLst>
+        </p:cTn>
+      </p:par>
+    </p:tnLst>
+    <p:bldLst>
+      <p:bldP spid="3" grpId="0" build="p"/>
+    </p:bldLst>
+  </p:timing>
 </p:sld>
 </file>
 
@@ -9302,8 +10632,25 @@
               <a:pPr algn="ctr"/>
               <a:r>
                 <a:rPr lang="en-US" sz="1000" dirty="0"/>
-                <a:t>Source: https://zilliz.com/glossary/word2vec</a:t>
+                <a:t>Source: </a:t>
               </a:r>
+              <a:r>
+                <a:rPr lang="en-US" sz="1000" dirty="0">
+                  <a:hlinkClick r:id="rId3"/>
+                </a:rPr>
+                <a:t>https://zilliz.com/glossary</a:t>
+              </a:r>
+              <a:r>
+                <a:rPr lang="en-US" sz="1000">
+                  <a:hlinkClick r:id="rId3"/>
+                </a:rPr>
+                <a:t>/word2vec</a:t>
+              </a:r>
+              <a:r>
+                <a:rPr lang="en-US" sz="1000"/>
+                <a:t> </a:t>
+              </a:r>
+              <a:endParaRPr lang="en-US" sz="1000" dirty="0"/>
             </a:p>
           </p:txBody>
         </p:sp>
@@ -10143,40 +11490,40 @@
             </p:spPr>
             <p:txBody>
               <a:bodyPr>
-                <a:normAutofit lnSpcReduction="10000"/>
+                <a:normAutofit/>
               </a:bodyPr>
               <a:lstStyle/>
               <a:p>
                 <a:r>
-                  <a:rPr lang="en-US" sz="2000" b="1" dirty="0"/>
+                  <a:rPr lang="en-US" sz="1800" b="1" dirty="0"/>
                   <a:t>Example: </a:t>
                 </a:r>
                 <a:r>
-                  <a:rPr lang="en-US" sz="2000" dirty="0"/>
+                  <a:rPr lang="en-US" sz="1800" dirty="0"/>
                   <a:t>“Tomorrow is a good”</a:t>
                 </a:r>
               </a:p>
               <a:p>
-                <a:endParaRPr lang="en-US" sz="2000" b="1" dirty="0"/>
+                <a:endParaRPr lang="en-US" sz="1800" b="1" dirty="0"/>
               </a:p>
               <a:p>
                 <a:r>
-                  <a:rPr lang="en-US" sz="2000" b="1" dirty="0"/>
+                  <a:rPr lang="en-US" sz="1800" b="1" dirty="0"/>
                   <a:t>Model</a:t>
                 </a:r>
                 <a:r>
-                  <a:rPr lang="en-US" sz="2000" dirty="0"/>
+                  <a:rPr lang="en-US" sz="1800" dirty="0"/>
                   <a:t>: The optimal MAP decision for the next word using the Bayes rule is</a:t>
                 </a:r>
                 <a:br>
-                  <a:rPr lang="en-US" sz="2000" dirty="0"/>
+                  <a:rPr lang="en-US" sz="1800" dirty="0"/>
                 </a:br>
                 <a14:m>
                   <m:oMath xmlns:m="http://schemas.openxmlformats.org/officeDocument/2006/math">
                     <m:sSub>
                       <m:sSubPr>
                         <m:ctrlPr>
-                          <a:rPr lang="en-US" sz="2000" b="0" i="1" smtClean="0">
+                          <a:rPr lang="en-US" sz="1800" b="0" i="1" smtClean="0">
                             <a:latin typeface="Cambria Math" panose="02040503050406030204" pitchFamily="18" charset="0"/>
                           </a:rPr>
                         </m:ctrlPr>
@@ -10186,7 +11533,7 @@
                           <m:rPr>
                             <m:sty m:val="p"/>
                           </m:rPr>
-                          <a:rPr lang="en-US" sz="2000" b="0" i="0" smtClean="0">
+                          <a:rPr lang="en-US" sz="1800" b="0" i="0" smtClean="0">
                             <a:latin typeface="Cambria Math" panose="02040503050406030204" pitchFamily="18" charset="0"/>
                           </a:rPr>
                           <m:t>argmax</m:t>
@@ -10196,14 +11543,14 @@
                         <m:sSub>
                           <m:sSubPr>
                             <m:ctrlPr>
-                              <a:rPr lang="en-US" sz="2000" b="0" i="1" smtClean="0">
+                              <a:rPr lang="en-US" sz="1800" b="0" i="1" smtClean="0">
                                 <a:latin typeface="Cambria Math" panose="02040503050406030204" pitchFamily="18" charset="0"/>
                               </a:rPr>
                             </m:ctrlPr>
                           </m:sSubPr>
                           <m:e>
                             <m:r>
-                              <a:rPr lang="en-US" sz="2000" b="0" i="1" smtClean="0">
+                              <a:rPr lang="en-US" sz="1800" b="0" i="1" smtClean="0">
                                 <a:latin typeface="Cambria Math" panose="02040503050406030204" pitchFamily="18" charset="0"/>
                               </a:rPr>
                               <m:t>𝑥</m:t>
@@ -10211,7 +11558,7 @@
                           </m:e>
                           <m:sub>
                             <m:r>
-                              <a:rPr lang="en-US" sz="2000" b="0" i="1" smtClean="0">
+                              <a:rPr lang="en-US" sz="1800" b="0" i="1" smtClean="0">
                                 <a:latin typeface="Cambria Math" panose="02040503050406030204" pitchFamily="18" charset="0"/>
                               </a:rPr>
                               <m:t>𝑖</m:t>
@@ -10221,13 +11568,13 @@
                       </m:sub>
                     </m:sSub>
                     <m:r>
-                      <a:rPr lang="en-US" sz="2000" b="0" i="1" smtClean="0">
+                      <a:rPr lang="en-US" sz="1800" b="0" i="1" smtClean="0">
                         <a:latin typeface="Cambria Math" panose="02040503050406030204" pitchFamily="18" charset="0"/>
                       </a:rPr>
                       <m:t> </m:t>
                     </m:r>
                     <m:r>
-                      <a:rPr lang="en-US" sz="2000" b="0" i="1" smtClean="0">
+                      <a:rPr lang="en-US" sz="1800" b="0" i="1" smtClean="0">
                         <a:latin typeface="Cambria Math" panose="02040503050406030204" pitchFamily="18" charset="0"/>
                       </a:rPr>
                       <m:t>𝑃</m:t>
@@ -10235,7 +11582,7 @@
                     <m:d>
                       <m:dPr>
                         <m:ctrlPr>
-                          <a:rPr lang="en-US" sz="2000" b="0" i="1" smtClean="0">
+                          <a:rPr lang="en-US" sz="1800" b="0" i="1" smtClean="0">
                             <a:latin typeface="Cambria Math" panose="02040503050406030204" pitchFamily="18" charset="0"/>
                           </a:rPr>
                         </m:ctrlPr>
@@ -10244,14 +11591,14 @@
                         <m:sSub>
                           <m:sSubPr>
                             <m:ctrlPr>
-                              <a:rPr lang="en-US" sz="2000" b="0" i="1" smtClean="0">
+                              <a:rPr lang="en-US" sz="1800" b="0" i="1" smtClean="0">
                                 <a:latin typeface="Cambria Math" panose="02040503050406030204" pitchFamily="18" charset="0"/>
                               </a:rPr>
                             </m:ctrlPr>
                           </m:sSubPr>
                           <m:e>
                             <m:r>
-                              <a:rPr lang="en-US" sz="2000" b="0" i="1" smtClean="0">
+                              <a:rPr lang="en-US" sz="1800" b="0" i="1" smtClean="0">
                                 <a:latin typeface="Cambria Math" panose="02040503050406030204" pitchFamily="18" charset="0"/>
                               </a:rPr>
                               <m:t>𝑋</m:t>
@@ -10259,7 +11606,7 @@
                           </m:e>
                           <m:sub>
                             <m:r>
-                              <a:rPr lang="en-US" sz="2000" b="0" i="1" smtClean="0">
+                              <a:rPr lang="en-US" sz="1800" b="0" i="1" smtClean="0">
                                 <a:latin typeface="Cambria Math" panose="02040503050406030204" pitchFamily="18" charset="0"/>
                               </a:rPr>
                               <m:t>𝑖</m:t>
@@ -10267,7 +11614,7 @@
                           </m:sub>
                         </m:sSub>
                         <m:r>
-                          <a:rPr lang="en-US" sz="2000" b="0" i="1" smtClean="0">
+                          <a:rPr lang="en-US" sz="1800" b="0" i="1" smtClean="0">
                             <a:latin typeface="Cambria Math" panose="02040503050406030204" pitchFamily="18" charset="0"/>
                           </a:rPr>
                           <m:t>=</m:t>
@@ -10275,14 +11622,14 @@
                         <m:sSub>
                           <m:sSubPr>
                             <m:ctrlPr>
-                              <a:rPr lang="en-US" sz="2000" b="0" i="1" smtClean="0">
+                              <a:rPr lang="en-US" sz="1800" b="0" i="1" smtClean="0">
                                 <a:latin typeface="Cambria Math" panose="02040503050406030204" pitchFamily="18" charset="0"/>
                               </a:rPr>
                             </m:ctrlPr>
                           </m:sSubPr>
                           <m:e>
                             <m:r>
-                              <a:rPr lang="en-US" sz="2000" b="0" i="1" smtClean="0">
+                              <a:rPr lang="en-US" sz="1800" b="0" i="1" smtClean="0">
                                 <a:latin typeface="Cambria Math" panose="02040503050406030204" pitchFamily="18" charset="0"/>
                               </a:rPr>
                               <m:t>𝑥</m:t>
@@ -10290,7 +11637,7 @@
                           </m:e>
                           <m:sub>
                             <m:r>
-                              <a:rPr lang="en-US" sz="2000" b="0" i="1" smtClean="0">
+                              <a:rPr lang="en-US" sz="1800" b="0" i="1" smtClean="0">
                                 <a:latin typeface="Cambria Math" panose="02040503050406030204" pitchFamily="18" charset="0"/>
                               </a:rPr>
                               <m:t>𝑖</m:t>
@@ -10302,14 +11649,14 @@
                         <m:sSub>
                           <m:sSubPr>
                             <m:ctrlPr>
-                              <a:rPr lang="en-US" sz="2000" b="0" i="1" smtClean="0">
+                              <a:rPr lang="en-US" sz="1800" b="0" i="1" smtClean="0">
                                 <a:latin typeface="Cambria Math" panose="02040503050406030204" pitchFamily="18" charset="0"/>
                               </a:rPr>
                             </m:ctrlPr>
                           </m:sSubPr>
                           <m:e>
                             <m:r>
-                              <a:rPr lang="en-US" sz="2000" b="0" i="1" smtClean="0">
+                              <a:rPr lang="en-US" sz="1800" b="0" i="1" smtClean="0">
                                 <a:latin typeface="Cambria Math" panose="02040503050406030204" pitchFamily="18" charset="0"/>
                               </a:rPr>
                               <m:t>𝑋</m:t>
@@ -10317,13 +11664,13 @@
                           </m:e>
                           <m:sub>
                             <m:r>
-                              <a:rPr lang="en-US" sz="2000" b="0" i="1" smtClean="0">
+                              <a:rPr lang="en-US" sz="1800" b="0" i="1" smtClean="0">
                                 <a:latin typeface="Cambria Math" panose="02040503050406030204" pitchFamily="18" charset="0"/>
                               </a:rPr>
                               <m:t>𝑖</m:t>
                             </m:r>
                             <m:r>
-                              <a:rPr lang="en-US" sz="2000" b="0" i="1" smtClean="0">
+                              <a:rPr lang="en-US" sz="1800" b="0" i="1" smtClean="0">
                                 <a:latin typeface="Cambria Math" panose="02040503050406030204" pitchFamily="18" charset="0"/>
                               </a:rPr>
                               <m:t>−1</m:t>
@@ -10331,7 +11678,7 @@
                           </m:sub>
                         </m:sSub>
                         <m:r>
-                          <a:rPr lang="en-US" sz="2000" b="0" i="1" smtClean="0">
+                          <a:rPr lang="en-US" sz="1800" b="0" i="1" smtClean="0">
                             <a:latin typeface="Cambria Math" panose="02040503050406030204" pitchFamily="18" charset="0"/>
                           </a:rPr>
                           <m:t>=</m:t>
@@ -10339,14 +11686,14 @@
                         <m:sSub>
                           <m:sSubPr>
                             <m:ctrlPr>
-                              <a:rPr lang="en-US" sz="2000" b="0" i="1" smtClean="0">
+                              <a:rPr lang="en-US" sz="1800" b="0" i="1" smtClean="0">
                                 <a:latin typeface="Cambria Math" panose="02040503050406030204" pitchFamily="18" charset="0"/>
                               </a:rPr>
                             </m:ctrlPr>
                           </m:sSubPr>
                           <m:e>
                             <m:r>
-                              <a:rPr lang="en-US" sz="2000" b="0" i="1" smtClean="0">
+                              <a:rPr lang="en-US" sz="1800" b="0" i="1" smtClean="0">
                                 <a:latin typeface="Cambria Math" panose="02040503050406030204" pitchFamily="18" charset="0"/>
                               </a:rPr>
                               <m:t>𝑥</m:t>
@@ -10354,13 +11701,13 @@
                           </m:e>
                           <m:sub>
                             <m:r>
-                              <a:rPr lang="en-US" sz="2000" b="0" i="1" smtClean="0">
+                              <a:rPr lang="en-US" sz="1800" b="0" i="1" smtClean="0">
                                 <a:latin typeface="Cambria Math" panose="02040503050406030204" pitchFamily="18" charset="0"/>
                               </a:rPr>
                               <m:t>𝑖</m:t>
                             </m:r>
                             <m:r>
-                              <a:rPr lang="en-US" sz="2000" b="0" i="1" smtClean="0">
+                              <a:rPr lang="en-US" sz="1800" b="0" i="1" smtClean="0">
                                 <a:latin typeface="Cambria Math" panose="02040503050406030204" pitchFamily="18" charset="0"/>
                               </a:rPr>
                               <m:t>−1, </m:t>
@@ -10370,14 +11717,14 @@
                         <m:sSub>
                           <m:sSubPr>
                             <m:ctrlPr>
-                              <a:rPr lang="en-US" sz="2000" b="0" i="1" smtClean="0">
+                              <a:rPr lang="en-US" sz="1800" b="0" i="1" smtClean="0">
                                 <a:latin typeface="Cambria Math" panose="02040503050406030204" pitchFamily="18" charset="0"/>
                               </a:rPr>
                             </m:ctrlPr>
                           </m:sSubPr>
                           <m:e>
                             <m:r>
-                              <a:rPr lang="en-US" sz="2000" b="0" i="1" smtClean="0">
+                              <a:rPr lang="en-US" sz="1800" b="0" i="1" smtClean="0">
                                 <a:latin typeface="Cambria Math" panose="02040503050406030204" pitchFamily="18" charset="0"/>
                               </a:rPr>
                               <m:t>𝑋</m:t>
@@ -10385,13 +11732,13 @@
                           </m:e>
                           <m:sub>
                             <m:r>
-                              <a:rPr lang="en-US" sz="2000" b="0" i="1" smtClean="0">
+                              <a:rPr lang="en-US" sz="1800" b="0" i="1" smtClean="0">
                                 <a:latin typeface="Cambria Math" panose="02040503050406030204" pitchFamily="18" charset="0"/>
                               </a:rPr>
                               <m:t>𝑖</m:t>
                             </m:r>
                             <m:r>
-                              <a:rPr lang="en-US" sz="2000" b="0" i="1" smtClean="0">
+                              <a:rPr lang="en-US" sz="1800" b="0" i="1" smtClean="0">
                                 <a:latin typeface="Cambria Math" panose="02040503050406030204" pitchFamily="18" charset="0"/>
                               </a:rPr>
                               <m:t>−2</m:t>
@@ -10399,7 +11746,7 @@
                           </m:sub>
                         </m:sSub>
                         <m:r>
-                          <a:rPr lang="en-US" sz="2000" b="0" i="1" smtClean="0">
+                          <a:rPr lang="en-US" sz="1800" b="0" i="1" smtClean="0">
                             <a:latin typeface="Cambria Math" panose="02040503050406030204" pitchFamily="18" charset="0"/>
                           </a:rPr>
                           <m:t>=</m:t>
@@ -10407,14 +11754,14 @@
                         <m:sSub>
                           <m:sSubPr>
                             <m:ctrlPr>
-                              <a:rPr lang="en-US" sz="2000" b="0" i="1" smtClean="0">
+                              <a:rPr lang="en-US" sz="1800" b="0" i="1" smtClean="0">
                                 <a:latin typeface="Cambria Math" panose="02040503050406030204" pitchFamily="18" charset="0"/>
                               </a:rPr>
                             </m:ctrlPr>
                           </m:sSubPr>
                           <m:e>
                             <m:r>
-                              <a:rPr lang="en-US" sz="2000" b="0" i="1" smtClean="0">
+                              <a:rPr lang="en-US" sz="1800" b="0" i="1" smtClean="0">
                                 <a:latin typeface="Cambria Math" panose="02040503050406030204" pitchFamily="18" charset="0"/>
                               </a:rPr>
                               <m:t>𝑥</m:t>
@@ -10422,13 +11769,13 @@
                           </m:e>
                           <m:sub>
                             <m:r>
-                              <a:rPr lang="en-US" sz="2000" b="0" i="1" smtClean="0">
+                              <a:rPr lang="en-US" sz="1800" b="0" i="1" smtClean="0">
                                 <a:latin typeface="Cambria Math" panose="02040503050406030204" pitchFamily="18" charset="0"/>
                               </a:rPr>
                               <m:t>𝑖</m:t>
                             </m:r>
                             <m:r>
-                              <a:rPr lang="en-US" sz="2000" b="0" i="1" smtClean="0">
+                              <a:rPr lang="en-US" sz="1800" b="0" i="1" smtClean="0">
                                 <a:latin typeface="Cambria Math" panose="02040503050406030204" pitchFamily="18" charset="0"/>
                               </a:rPr>
                               <m:t>−2</m:t>
@@ -10436,7 +11783,7 @@
                           </m:sub>
                         </m:sSub>
                         <m:r>
-                          <a:rPr lang="en-US" sz="2000" b="0" i="1" smtClean="0">
+                          <a:rPr lang="en-US" sz="1800" b="0" i="1" smtClean="0">
                             <a:latin typeface="Cambria Math" panose="02040503050406030204" pitchFamily="18" charset="0"/>
                           </a:rPr>
                           <m:t>, …, </m:t>
@@ -10444,14 +11791,14 @@
                         <m:sSub>
                           <m:sSubPr>
                             <m:ctrlPr>
-                              <a:rPr lang="en-US" sz="2000" b="0" i="1" smtClean="0">
+                              <a:rPr lang="en-US" sz="1800" b="0" i="1" smtClean="0">
                                 <a:latin typeface="Cambria Math" panose="02040503050406030204" pitchFamily="18" charset="0"/>
                               </a:rPr>
                             </m:ctrlPr>
                           </m:sSubPr>
                           <m:e>
                             <m:r>
-                              <a:rPr lang="en-US" sz="2000" b="0" i="1" smtClean="0">
+                              <a:rPr lang="en-US" sz="1800" b="0" i="1" smtClean="0">
                                 <a:latin typeface="Cambria Math" panose="02040503050406030204" pitchFamily="18" charset="0"/>
                               </a:rPr>
                               <m:t>𝑋</m:t>
@@ -10459,25 +11806,25 @@
                           </m:e>
                           <m:sub>
                             <m:r>
-                              <a:rPr lang="en-US" sz="2000" b="0" i="1" smtClean="0">
+                              <a:rPr lang="en-US" sz="1800" b="0" i="1" smtClean="0">
                                 <a:latin typeface="Cambria Math" panose="02040503050406030204" pitchFamily="18" charset="0"/>
                               </a:rPr>
                               <m:t>𝑖</m:t>
                             </m:r>
                             <m:r>
-                              <a:rPr lang="en-US" sz="2000" b="0" i="1" smtClean="0">
+                              <a:rPr lang="en-US" sz="1800" b="0" i="1" smtClean="0">
                                 <a:latin typeface="Cambria Math" panose="02040503050406030204" pitchFamily="18" charset="0"/>
                               </a:rPr>
                               <m:t>−</m:t>
                             </m:r>
                             <m:r>
-                              <a:rPr lang="en-US" sz="2000" b="0" i="1" smtClean="0">
+                              <a:rPr lang="en-US" sz="1800" b="0" i="1" smtClean="0">
                                 <a:latin typeface="Cambria Math" panose="02040503050406030204" pitchFamily="18" charset="0"/>
                               </a:rPr>
                               <m:t>𝑙</m:t>
                             </m:r>
                             <m:r>
-                              <a:rPr lang="en-US" sz="2000" b="0" i="1" smtClean="0">
+                              <a:rPr lang="en-US" sz="1800" b="0" i="1" smtClean="0">
                                 <a:latin typeface="Cambria Math" panose="02040503050406030204" pitchFamily="18" charset="0"/>
                               </a:rPr>
                               <m:t> </m:t>
@@ -10485,7 +11832,7 @@
                           </m:sub>
                         </m:sSub>
                         <m:r>
-                          <a:rPr lang="en-US" sz="2000" b="0" i="1" smtClean="0">
+                          <a:rPr lang="en-US" sz="1800" b="0" i="1" smtClean="0">
                             <a:latin typeface="Cambria Math" panose="02040503050406030204" pitchFamily="18" charset="0"/>
                           </a:rPr>
                           <m:t>=</m:t>
@@ -10493,14 +11840,14 @@
                         <m:sSub>
                           <m:sSubPr>
                             <m:ctrlPr>
-                              <a:rPr lang="en-US" sz="2000" b="0" i="1" smtClean="0">
+                              <a:rPr lang="en-US" sz="1800" b="0" i="1" smtClean="0">
                                 <a:latin typeface="Cambria Math" panose="02040503050406030204" pitchFamily="18" charset="0"/>
                               </a:rPr>
                             </m:ctrlPr>
                           </m:sSubPr>
                           <m:e>
                             <m:r>
-                              <a:rPr lang="en-US" sz="2000" b="0" i="1" smtClean="0">
+                              <a:rPr lang="en-US" sz="1800" b="0" i="1" smtClean="0">
                                 <a:latin typeface="Cambria Math" panose="02040503050406030204" pitchFamily="18" charset="0"/>
                               </a:rPr>
                               <m:t>𝑥</m:t>
@@ -10508,19 +11855,19 @@
                           </m:e>
                           <m:sub>
                             <m:r>
-                              <a:rPr lang="en-US" sz="2000" b="0" i="1" smtClean="0">
+                              <a:rPr lang="en-US" sz="1800" b="0" i="1" smtClean="0">
                                 <a:latin typeface="Cambria Math" panose="02040503050406030204" pitchFamily="18" charset="0"/>
                               </a:rPr>
                               <m:t>𝑖</m:t>
                             </m:r>
                             <m:r>
-                              <a:rPr lang="en-US" sz="2000" b="0" i="1" smtClean="0">
+                              <a:rPr lang="en-US" sz="1800" b="0" i="1" smtClean="0">
                                 <a:latin typeface="Cambria Math" panose="02040503050406030204" pitchFamily="18" charset="0"/>
                               </a:rPr>
                               <m:t>−</m:t>
                             </m:r>
                             <m:r>
-                              <a:rPr lang="en-US" sz="2000" b="0" i="1" smtClean="0">
+                              <a:rPr lang="en-US" sz="1800" b="0" i="1" smtClean="0">
                                 <a:latin typeface="Cambria Math" panose="02040503050406030204" pitchFamily="18" charset="0"/>
                               </a:rPr>
                               <m:t>𝑙</m:t>
@@ -10530,14 +11877,14 @@
                       </m:e>
                     </m:d>
                     <m:r>
-                      <a:rPr lang="en-US" sz="2000" b="0" i="1" smtClean="0">
+                      <a:rPr lang="en-US" sz="1800" b="0" i="1" smtClean="0">
                         <a:latin typeface="Cambria Math" panose="02040503050406030204" pitchFamily="18" charset="0"/>
                         <a:ea typeface="Cambria Math" panose="02040503050406030204" pitchFamily="18" charset="0"/>
                       </a:rPr>
                       <m:t>∝</m:t>
                     </m:r>
                     <m:r>
-                      <a:rPr lang="en-US" sz="2000" i="1">
+                      <a:rPr lang="en-US" sz="1800" i="1">
                         <a:latin typeface="Cambria Math" panose="02040503050406030204" pitchFamily="18" charset="0"/>
                       </a:rPr>
                       <m:t>𝑃</m:t>
@@ -10545,7 +11892,7 @@
                     <m:d>
                       <m:dPr>
                         <m:ctrlPr>
-                          <a:rPr lang="en-US" sz="2000" i="1">
+                          <a:rPr lang="en-US" sz="1800" i="1">
                             <a:latin typeface="Cambria Math" panose="02040503050406030204" pitchFamily="18" charset="0"/>
                           </a:rPr>
                         </m:ctrlPr>
@@ -10554,14 +11901,14 @@
                         <m:sSub>
                           <m:sSubPr>
                             <m:ctrlPr>
-                              <a:rPr lang="en-US" sz="2000" i="1" smtClean="0">
+                              <a:rPr lang="en-US" sz="1800" i="1" smtClean="0">
                                 <a:latin typeface="Cambria Math" panose="02040503050406030204" pitchFamily="18" charset="0"/>
                               </a:rPr>
                             </m:ctrlPr>
                           </m:sSubPr>
                           <m:e>
                             <m:r>
-                              <a:rPr lang="en-US" sz="2000" i="1">
+                              <a:rPr lang="en-US" sz="1800" i="1">
                                 <a:latin typeface="Cambria Math" panose="02040503050406030204" pitchFamily="18" charset="0"/>
                               </a:rPr>
                               <m:t>𝑥</m:t>
@@ -10569,13 +11916,13 @@
                           </m:e>
                           <m:sub>
                             <m:r>
-                              <a:rPr lang="en-US" sz="2000" i="1">
+                              <a:rPr lang="en-US" sz="1800" i="1">
                                 <a:latin typeface="Cambria Math" panose="02040503050406030204" pitchFamily="18" charset="0"/>
                               </a:rPr>
                               <m:t>𝑖</m:t>
                             </m:r>
                             <m:r>
-                              <a:rPr lang="en-US" sz="2000" i="1">
+                              <a:rPr lang="en-US" sz="1800" i="1">
                                 <a:latin typeface="Cambria Math" panose="02040503050406030204" pitchFamily="18" charset="0"/>
                               </a:rPr>
                               <m:t>−1, </m:t>
@@ -10585,14 +11932,14 @@
                         <m:sSub>
                           <m:sSubPr>
                             <m:ctrlPr>
-                              <a:rPr lang="en-US" sz="2000" i="1">
+                              <a:rPr lang="en-US" sz="1800" i="1">
                                 <a:latin typeface="Cambria Math" panose="02040503050406030204" pitchFamily="18" charset="0"/>
                               </a:rPr>
                             </m:ctrlPr>
                           </m:sSubPr>
                           <m:e>
                             <m:r>
-                              <a:rPr lang="en-US" sz="2000" i="1">
+                              <a:rPr lang="en-US" sz="1800" i="1">
                                 <a:latin typeface="Cambria Math" panose="02040503050406030204" pitchFamily="18" charset="0"/>
                               </a:rPr>
                               <m:t>𝑥</m:t>
@@ -10600,13 +11947,13 @@
                           </m:e>
                           <m:sub>
                             <m:r>
-                              <a:rPr lang="en-US" sz="2000" i="1">
+                              <a:rPr lang="en-US" sz="1800" i="1">
                                 <a:latin typeface="Cambria Math" panose="02040503050406030204" pitchFamily="18" charset="0"/>
                               </a:rPr>
                               <m:t>𝑖</m:t>
                             </m:r>
                             <m:r>
-                              <a:rPr lang="en-US" sz="2000" i="1">
+                              <a:rPr lang="en-US" sz="1800" i="1">
                                 <a:latin typeface="Cambria Math" panose="02040503050406030204" pitchFamily="18" charset="0"/>
                               </a:rPr>
                               <m:t>−2</m:t>
@@ -10614,13 +11961,13 @@
                           </m:sub>
                         </m:sSub>
                         <m:r>
-                          <a:rPr lang="en-US" sz="2000" i="1">
+                          <a:rPr lang="en-US" sz="1800" i="1">
                             <a:latin typeface="Cambria Math" panose="02040503050406030204" pitchFamily="18" charset="0"/>
                           </a:rPr>
                           <m:t>, …,</m:t>
                         </m:r>
                         <m:r>
-                          <a:rPr lang="en-US" sz="2000" i="1" smtClean="0">
+                          <a:rPr lang="en-US" sz="1800" i="1" smtClean="0">
                             <a:latin typeface="Cambria Math" panose="02040503050406030204" pitchFamily="18" charset="0"/>
                           </a:rPr>
                           <m:t> </m:t>
@@ -10628,14 +11975,14 @@
                         <m:sSub>
                           <m:sSubPr>
                             <m:ctrlPr>
-                              <a:rPr lang="en-US" sz="2000" i="1" smtClean="0">
+                              <a:rPr lang="en-US" sz="1800" i="1" smtClean="0">
                                 <a:latin typeface="Cambria Math" panose="02040503050406030204" pitchFamily="18" charset="0"/>
                               </a:rPr>
                             </m:ctrlPr>
                           </m:sSubPr>
                           <m:e>
                             <m:r>
-                              <a:rPr lang="en-US" sz="2000" b="0" i="1" smtClean="0">
+                              <a:rPr lang="en-US" sz="1800" b="0" i="1" smtClean="0">
                                 <a:latin typeface="Cambria Math" panose="02040503050406030204" pitchFamily="18" charset="0"/>
                               </a:rPr>
                               <m:t>𝑥</m:t>
@@ -10643,13 +11990,13 @@
                           </m:e>
                           <m:sub>
                             <m:r>
-                              <a:rPr lang="en-US" sz="2000" i="1">
+                              <a:rPr lang="en-US" sz="1800" i="1">
                                 <a:latin typeface="Cambria Math" panose="02040503050406030204" pitchFamily="18" charset="0"/>
                               </a:rPr>
                               <m:t>𝑙</m:t>
                             </m:r>
                             <m:r>
-                              <a:rPr lang="en-US" sz="2000" i="1">
+                              <a:rPr lang="en-US" sz="1800" i="1">
                                 <a:latin typeface="Cambria Math" panose="02040503050406030204" pitchFamily="18" charset="0"/>
                               </a:rPr>
                               <m:t> </m:t>
@@ -10661,14 +12008,14 @@
                         <m:sSub>
                           <m:sSubPr>
                             <m:ctrlPr>
-                              <a:rPr lang="en-US" sz="2000" b="0" i="1" smtClean="0">
+                              <a:rPr lang="en-US" sz="1800" b="0" i="1" smtClean="0">
                                 <a:latin typeface="Cambria Math" panose="02040503050406030204" pitchFamily="18" charset="0"/>
                               </a:rPr>
                             </m:ctrlPr>
                           </m:sSubPr>
                           <m:e>
                             <m:r>
-                              <a:rPr lang="en-US" sz="2000" b="0" i="1" smtClean="0">
+                              <a:rPr lang="en-US" sz="1800" b="0" i="1" smtClean="0">
                                 <a:latin typeface="Cambria Math" panose="02040503050406030204" pitchFamily="18" charset="0"/>
                               </a:rPr>
                               <m:t>𝑥</m:t>
@@ -10676,7 +12023,7 @@
                           </m:e>
                           <m:sub>
                             <m:r>
-                              <a:rPr lang="en-US" sz="2000" b="0" i="1" smtClean="0">
+                              <a:rPr lang="en-US" sz="1800" b="0" i="1" smtClean="0">
                                 <a:latin typeface="Cambria Math" panose="02040503050406030204" pitchFamily="18" charset="0"/>
                               </a:rPr>
                               <m:t>𝑖</m:t>
@@ -10686,13 +12033,13 @@
                       </m:e>
                     </m:d>
                     <m:r>
-                      <a:rPr lang="en-US" sz="2000" b="0" i="1" smtClean="0">
+                      <a:rPr lang="en-US" sz="1800" b="0" i="1" smtClean="0">
                         <a:latin typeface="Cambria Math" panose="02040503050406030204" pitchFamily="18" charset="0"/>
                       </a:rPr>
                       <m:t>𝑃</m:t>
                     </m:r>
                     <m:r>
-                      <a:rPr lang="en-US" sz="2000" b="0" i="0" smtClean="0">
+                      <a:rPr lang="en-US" sz="1800" b="0" i="0" smtClean="0">
                         <a:latin typeface="Cambria Math" panose="02040503050406030204" pitchFamily="18" charset="0"/>
                       </a:rPr>
                       <m:t>(</m:t>
@@ -10700,14 +12047,14 @@
                     <m:sSub>
                       <m:sSubPr>
                         <m:ctrlPr>
-                          <a:rPr lang="en-US" sz="2000" b="0" i="1" smtClean="0">
+                          <a:rPr lang="en-US" sz="1800" b="0" i="1" smtClean="0">
                             <a:latin typeface="Cambria Math" panose="02040503050406030204" pitchFamily="18" charset="0"/>
                           </a:rPr>
                         </m:ctrlPr>
                       </m:sSubPr>
                       <m:e>
                         <m:r>
-                          <a:rPr lang="en-US" sz="2000" b="0" i="1" smtClean="0">
+                          <a:rPr lang="en-US" sz="1800" b="0" i="1" smtClean="0">
                             <a:latin typeface="Cambria Math" panose="02040503050406030204" pitchFamily="18" charset="0"/>
                           </a:rPr>
                           <m:t>𝑥</m:t>
@@ -10715,7 +12062,7 @@
                       </m:e>
                       <m:sub>
                         <m:r>
-                          <a:rPr lang="en-US" sz="2000" b="0" i="1" smtClean="0">
+                          <a:rPr lang="en-US" sz="1800" b="0" i="1" smtClean="0">
                             <a:latin typeface="Cambria Math" panose="02040503050406030204" pitchFamily="18" charset="0"/>
                           </a:rPr>
                           <m:t>𝑖</m:t>
@@ -10723,34 +12070,34 @@
                       </m:sub>
                     </m:sSub>
                     <m:r>
-                      <a:rPr lang="en-US" sz="2000" b="0" i="0" smtClean="0">
+                      <a:rPr lang="en-US" sz="1800" b="0" i="0" smtClean="0">
                         <a:latin typeface="Cambria Math" panose="02040503050406030204" pitchFamily="18" charset="0"/>
                       </a:rPr>
                       <m:t>)</m:t>
                     </m:r>
                   </m:oMath>
                 </a14:m>
-                <a:endParaRPr lang="en-US" sz="2000" dirty="0"/>
+                <a:endParaRPr lang="en-US" sz="1800" dirty="0"/>
               </a:p>
               <a:p>
-                <a:endParaRPr lang="en-US" sz="2000" b="1" dirty="0"/>
+                <a:endParaRPr lang="en-US" sz="1800" b="1" dirty="0"/>
               </a:p>
               <a:p>
                 <a:r>
-                  <a:rPr lang="en-US" sz="2000" b="1" dirty="0"/>
+                  <a:rPr lang="en-US" sz="1800" b="1" dirty="0"/>
                   <a:t>Learning/Estimation: </a:t>
                 </a:r>
                 <a:r>
-                  <a:rPr lang="en-US" sz="2000" dirty="0"/>
+                  <a:rPr lang="en-US" sz="1800" dirty="0"/>
                   <a:t>From a large amount of data “Tomorrow is a good [day].”</a:t>
                 </a:r>
                 <a:br>
-                  <a:rPr lang="en-US" sz="2000" b="1" dirty="0"/>
+                  <a:rPr lang="en-US" sz="1800" b="1" dirty="0"/>
                 </a:br>
                 <a14:m>
                   <m:oMath xmlns:m="http://schemas.openxmlformats.org/officeDocument/2006/math">
                     <m:r>
-                      <a:rPr lang="en-US" sz="2000" i="1">
+                      <a:rPr lang="en-US" sz="1800" i="1">
                         <a:latin typeface="Cambria Math" panose="02040503050406030204" pitchFamily="18" charset="0"/>
                       </a:rPr>
                       <m:t>𝑃</m:t>
@@ -10758,7 +12105,7 @@
                     <m:d>
                       <m:dPr>
                         <m:ctrlPr>
-                          <a:rPr lang="en-US" sz="2000" b="0" i="1" smtClean="0">
+                          <a:rPr lang="en-US" sz="1800" b="0" i="1" smtClean="0">
                             <a:latin typeface="Cambria Math" panose="02040503050406030204" pitchFamily="18" charset="0"/>
                           </a:rPr>
                         </m:ctrlPr>
@@ -10767,14 +12114,14 @@
                         <m:sSub>
                           <m:sSubPr>
                             <m:ctrlPr>
-                              <a:rPr lang="en-US" sz="2000" b="0" i="1" smtClean="0">
+                              <a:rPr lang="en-US" sz="1800" b="0" i="1" smtClean="0">
                                 <a:latin typeface="Cambria Math" panose="02040503050406030204" pitchFamily="18" charset="0"/>
                               </a:rPr>
                             </m:ctrlPr>
                           </m:sSubPr>
                           <m:e>
                             <m:r>
-                              <a:rPr lang="en-US" sz="2000" b="0" i="1" smtClean="0">
+                              <a:rPr lang="en-US" sz="1800" b="0" i="1" smtClean="0">
                                 <a:latin typeface="Cambria Math" panose="02040503050406030204" pitchFamily="18" charset="0"/>
                               </a:rPr>
                               <m:t>𝑥</m:t>
@@ -10782,7 +12129,7 @@
                           </m:e>
                           <m:sub>
                             <m:r>
-                              <a:rPr lang="en-US" sz="2000" b="0" i="1" smtClean="0">
+                              <a:rPr lang="en-US" sz="1800" b="0" i="1" smtClean="0">
                                 <a:latin typeface="Cambria Math" panose="02040503050406030204" pitchFamily="18" charset="0"/>
                               </a:rPr>
                               <m:t>𝑖</m:t>
@@ -10792,7 +12139,7 @@
                       </m:e>
                     </m:d>
                     <m:r>
-                      <a:rPr lang="en-US" sz="2000" b="0" i="1" smtClean="0">
+                      <a:rPr lang="en-US" sz="1800" b="0" i="1" smtClean="0">
                         <a:latin typeface="Cambria Math" panose="02040503050406030204" pitchFamily="18" charset="0"/>
                       </a:rPr>
                       <m:t>=</m:t>
@@ -10800,7 +12147,7 @@
                     <m:f>
                       <m:fPr>
                         <m:ctrlPr>
-                          <a:rPr lang="en-US" sz="2000" i="1">
+                          <a:rPr lang="en-US" sz="1800" i="1">
                             <a:solidFill>
                               <a:srgbClr val="FF0000"/>
                             </a:solidFill>
@@ -10810,7 +12157,7 @@
                       </m:fPr>
                       <m:num>
                         <m:r>
-                          <a:rPr lang="en-US" sz="2000" b="0" i="1" smtClean="0">
+                          <a:rPr lang="en-US" sz="1800" b="0" i="1" smtClean="0">
                             <a:solidFill>
                               <a:srgbClr val="FF0000"/>
                             </a:solidFill>
@@ -10819,7 +12166,7 @@
                           <m:t>𝑁</m:t>
                         </m:r>
                         <m:r>
-                          <a:rPr lang="en-US" sz="2000" b="0" i="1" smtClean="0">
+                          <a:rPr lang="en-US" sz="1800" b="0" i="1" smtClean="0">
                             <a:solidFill>
                               <a:srgbClr val="FF0000"/>
                             </a:solidFill>
@@ -10830,7 +12177,7 @@
                         <m:sSub>
                           <m:sSubPr>
                             <m:ctrlPr>
-                              <a:rPr lang="en-US" sz="2000" b="0" i="1" smtClean="0">
+                              <a:rPr lang="en-US" sz="1800" b="0" i="1" smtClean="0">
                                 <a:solidFill>
                                   <a:srgbClr val="FF0000"/>
                                 </a:solidFill>
@@ -10840,7 +12187,7 @@
                           </m:sSubPr>
                           <m:e>
                             <m:r>
-                              <a:rPr lang="en-US" sz="2000" b="0" i="1" smtClean="0">
+                              <a:rPr lang="en-US" sz="1800" b="0" i="1" smtClean="0">
                                 <a:solidFill>
                                   <a:srgbClr val="FF0000"/>
                                 </a:solidFill>
@@ -10851,7 +12198,7 @@
                           </m:e>
                           <m:sub>
                             <m:r>
-                              <a:rPr lang="en-US" sz="2000" b="0" i="1" smtClean="0">
+                              <a:rPr lang="en-US" sz="1800" b="0" i="1" smtClean="0">
                                 <a:solidFill>
                                   <a:srgbClr val="FF0000"/>
                                 </a:solidFill>
@@ -10862,7 +12209,7 @@
                           </m:sub>
                         </m:sSub>
                         <m:r>
-                          <a:rPr lang="en-US" sz="2000" i="1">
+                          <a:rPr lang="en-US" sz="1800" i="1">
                             <a:solidFill>
                               <a:srgbClr val="FF0000"/>
                             </a:solidFill>
@@ -10873,7 +12220,7 @@
                       </m:num>
                       <m:den>
                         <m:r>
-                          <a:rPr lang="en-US" sz="2000" i="1">
+                          <a:rPr lang="en-US" sz="1800" i="1">
                             <a:solidFill>
                               <a:srgbClr val="FF0000"/>
                             </a:solidFill>
@@ -10886,14 +12233,14 @@
                   </m:oMath>
                 </a14:m>
                 <a:br>
-                  <a:rPr lang="en-US" sz="2000" i="1" dirty="0">
+                  <a:rPr lang="en-US" sz="1800" i="1" dirty="0">
                     <a:latin typeface="Cambria Math" panose="02040503050406030204" pitchFamily="18" charset="0"/>
                   </a:rPr>
                 </a:br>
                 <a14:m>
                   <m:oMath xmlns:m="http://schemas.openxmlformats.org/officeDocument/2006/math">
                     <m:r>
-                      <a:rPr lang="en-US" sz="2000" i="1">
+                      <a:rPr lang="en-US" sz="1800" i="1">
                         <a:latin typeface="Cambria Math" panose="02040503050406030204" pitchFamily="18" charset="0"/>
                       </a:rPr>
                       <m:t>𝑃</m:t>
@@ -10901,7 +12248,7 @@
                     <m:d>
                       <m:dPr>
                         <m:ctrlPr>
-                          <a:rPr lang="en-US" sz="2000" i="1">
+                          <a:rPr lang="en-US" sz="1800" i="1">
                             <a:latin typeface="Cambria Math" panose="02040503050406030204" pitchFamily="18" charset="0"/>
                           </a:rPr>
                         </m:ctrlPr>
@@ -10910,14 +12257,14 @@
                         <m:sSub>
                           <m:sSubPr>
                             <m:ctrlPr>
-                              <a:rPr lang="en-US" sz="2000" i="1" smtClean="0">
+                              <a:rPr lang="en-US" sz="1800" i="1" smtClean="0">
                                 <a:latin typeface="Cambria Math" panose="02040503050406030204" pitchFamily="18" charset="0"/>
                               </a:rPr>
                             </m:ctrlPr>
                           </m:sSubPr>
                           <m:e>
                             <m:r>
-                              <a:rPr lang="en-US" sz="2000" i="1">
+                              <a:rPr lang="en-US" sz="1800" i="1">
                                 <a:latin typeface="Cambria Math" panose="02040503050406030204" pitchFamily="18" charset="0"/>
                               </a:rPr>
                               <m:t>𝑥</m:t>
@@ -10925,13 +12272,13 @@
                           </m:e>
                           <m:sub>
                             <m:r>
-                              <a:rPr lang="en-US" sz="2000" i="1">
+                              <a:rPr lang="en-US" sz="1800" i="1">
                                 <a:latin typeface="Cambria Math" panose="02040503050406030204" pitchFamily="18" charset="0"/>
                               </a:rPr>
                               <m:t>𝑖</m:t>
                             </m:r>
                             <m:r>
-                              <a:rPr lang="en-US" sz="2000" i="1">
+                              <a:rPr lang="en-US" sz="1800" i="1">
                                 <a:latin typeface="Cambria Math" panose="02040503050406030204" pitchFamily="18" charset="0"/>
                               </a:rPr>
                               <m:t>−1, </m:t>
@@ -10941,14 +12288,14 @@
                         <m:sSub>
                           <m:sSubPr>
                             <m:ctrlPr>
-                              <a:rPr lang="en-US" sz="2000" i="1">
+                              <a:rPr lang="en-US" sz="1800" i="1">
                                 <a:latin typeface="Cambria Math" panose="02040503050406030204" pitchFamily="18" charset="0"/>
                               </a:rPr>
                             </m:ctrlPr>
                           </m:sSubPr>
                           <m:e>
                             <m:r>
-                              <a:rPr lang="en-US" sz="2000" i="1">
+                              <a:rPr lang="en-US" sz="1800" i="1">
                                 <a:latin typeface="Cambria Math" panose="02040503050406030204" pitchFamily="18" charset="0"/>
                               </a:rPr>
                               <m:t>𝑥</m:t>
@@ -10956,13 +12303,13 @@
                           </m:e>
                           <m:sub>
                             <m:r>
-                              <a:rPr lang="en-US" sz="2000" i="1">
+                              <a:rPr lang="en-US" sz="1800" i="1">
                                 <a:latin typeface="Cambria Math" panose="02040503050406030204" pitchFamily="18" charset="0"/>
                               </a:rPr>
                               <m:t>𝑖</m:t>
                             </m:r>
                             <m:r>
-                              <a:rPr lang="en-US" sz="2000" i="1">
+                              <a:rPr lang="en-US" sz="1800" i="1">
                                 <a:latin typeface="Cambria Math" panose="02040503050406030204" pitchFamily="18" charset="0"/>
                               </a:rPr>
                               <m:t>−2</m:t>
@@ -10970,13 +12317,13 @@
                           </m:sub>
                         </m:sSub>
                         <m:r>
-                          <a:rPr lang="en-US" sz="2000" i="1">
+                          <a:rPr lang="en-US" sz="1800" i="1">
                             <a:latin typeface="Cambria Math" panose="02040503050406030204" pitchFamily="18" charset="0"/>
                           </a:rPr>
                           <m:t>, …,</m:t>
                         </m:r>
                         <m:r>
-                          <a:rPr lang="en-US" sz="2000" i="1" smtClean="0">
+                          <a:rPr lang="en-US" sz="1800" i="1" smtClean="0">
                             <a:latin typeface="Cambria Math" panose="02040503050406030204" pitchFamily="18" charset="0"/>
                           </a:rPr>
                           <m:t> </m:t>
@@ -10984,14 +12331,14 @@
                         <m:sSub>
                           <m:sSubPr>
                             <m:ctrlPr>
-                              <a:rPr lang="en-US" sz="2000" i="1" smtClean="0">
+                              <a:rPr lang="en-US" sz="1800" i="1" smtClean="0">
                                 <a:latin typeface="Cambria Math" panose="02040503050406030204" pitchFamily="18" charset="0"/>
                               </a:rPr>
                             </m:ctrlPr>
                           </m:sSubPr>
                           <m:e>
                             <m:r>
-                              <a:rPr lang="en-US" sz="2000" b="0" i="1" smtClean="0">
+                              <a:rPr lang="en-US" sz="1800" b="0" i="1" smtClean="0">
                                 <a:latin typeface="Cambria Math" panose="02040503050406030204" pitchFamily="18" charset="0"/>
                               </a:rPr>
                               <m:t>𝑥</m:t>
@@ -10999,13 +12346,13 @@
                           </m:e>
                           <m:sub>
                             <m:r>
-                              <a:rPr lang="en-US" sz="2000" i="1">
+                              <a:rPr lang="en-US" sz="1800" i="1">
                                 <a:latin typeface="Cambria Math" panose="02040503050406030204" pitchFamily="18" charset="0"/>
                               </a:rPr>
                               <m:t>𝑙</m:t>
                             </m:r>
                             <m:r>
-                              <a:rPr lang="en-US" sz="2000" i="1">
+                              <a:rPr lang="en-US" sz="1800" i="1">
                                 <a:latin typeface="Cambria Math" panose="02040503050406030204" pitchFamily="18" charset="0"/>
                               </a:rPr>
                               <m:t> </m:t>
@@ -11017,14 +12364,14 @@
                         <m:sSub>
                           <m:sSubPr>
                             <m:ctrlPr>
-                              <a:rPr lang="en-US" sz="2000" b="0" i="1" smtClean="0">
+                              <a:rPr lang="en-US" sz="1800" b="0" i="1" smtClean="0">
                                 <a:latin typeface="Cambria Math" panose="02040503050406030204" pitchFamily="18" charset="0"/>
                               </a:rPr>
                             </m:ctrlPr>
                           </m:sSubPr>
                           <m:e>
                             <m:r>
-                              <a:rPr lang="en-US" sz="2000" b="0" i="1" smtClean="0">
+                              <a:rPr lang="en-US" sz="1800" b="0" i="1" smtClean="0">
                                 <a:latin typeface="Cambria Math" panose="02040503050406030204" pitchFamily="18" charset="0"/>
                               </a:rPr>
                               <m:t>𝑥</m:t>
@@ -11032,7 +12379,7 @@
                           </m:e>
                           <m:sub>
                             <m:r>
-                              <a:rPr lang="en-US" sz="2000" b="0" i="1" smtClean="0">
+                              <a:rPr lang="en-US" sz="1800" b="0" i="1" smtClean="0">
                                 <a:latin typeface="Cambria Math" panose="02040503050406030204" pitchFamily="18" charset="0"/>
                               </a:rPr>
                               <m:t>𝑖</m:t>
@@ -11042,7 +12389,7 @@
                       </m:e>
                     </m:d>
                     <m:r>
-                      <a:rPr lang="en-US" sz="2000" b="0" i="1" smtClean="0">
+                      <a:rPr lang="en-US" sz="1800" b="0" i="1" smtClean="0">
                         <a:latin typeface="Cambria Math" panose="02040503050406030204" pitchFamily="18" charset="0"/>
                       </a:rPr>
                       <m:t>=</m:t>
@@ -11050,7 +12397,7 @@
                     <m:f>
                       <m:fPr>
                         <m:ctrlPr>
-                          <a:rPr lang="en-US" sz="2000" i="1">
+                          <a:rPr lang="en-US" sz="1800" i="1">
                             <a:solidFill>
                               <a:srgbClr val="FF0000"/>
                             </a:solidFill>
@@ -11060,7 +12407,7 @@
                       </m:fPr>
                       <m:num>
                         <m:r>
-                          <a:rPr lang="en-US" sz="2000" i="1">
+                          <a:rPr lang="en-US" sz="1800" i="1">
                             <a:solidFill>
                               <a:srgbClr val="FF0000"/>
                             </a:solidFill>
@@ -11069,7 +12416,7 @@
                           <m:t>𝑁</m:t>
                         </m:r>
                         <m:r>
-                          <a:rPr lang="en-US" sz="2000" i="1">
+                          <a:rPr lang="en-US" sz="1800" i="1">
                             <a:solidFill>
                               <a:srgbClr val="FF0000"/>
                             </a:solidFill>
@@ -11080,7 +12427,7 @@
                         <m:sSub>
                           <m:sSubPr>
                             <m:ctrlPr>
-                              <a:rPr lang="en-US" sz="2000" i="1">
+                              <a:rPr lang="en-US" sz="1800" i="1">
                                 <a:solidFill>
                                   <a:srgbClr val="FF0000"/>
                                 </a:solidFill>
@@ -11090,7 +12437,7 @@
                           </m:sSubPr>
                           <m:e>
                             <m:r>
-                              <a:rPr lang="en-US" sz="2000" i="1">
+                              <a:rPr lang="en-US" sz="1800" i="1">
                                 <a:solidFill>
                                   <a:srgbClr val="FF0000"/>
                                 </a:solidFill>
@@ -11101,7 +12448,7 @@
                           </m:e>
                           <m:sub>
                             <m:r>
-                              <a:rPr lang="en-US" sz="2000" i="1">
+                              <a:rPr lang="en-US" sz="1800" i="1">
                                 <a:solidFill>
                                   <a:srgbClr val="FF0000"/>
                                 </a:solidFill>
@@ -11112,7 +12459,7 @@
                           </m:sub>
                         </m:sSub>
                         <m:r>
-                          <a:rPr lang="en-US" sz="2000" i="1">
+                          <a:rPr lang="en-US" sz="1800" i="1">
                             <a:solidFill>
                               <a:srgbClr val="FF0000"/>
                             </a:solidFill>
@@ -11123,7 +12470,7 @@
                         <m:sSub>
                           <m:sSubPr>
                             <m:ctrlPr>
-                              <a:rPr lang="en-US" sz="2000" i="1">
+                              <a:rPr lang="en-US" sz="1800" i="1">
                                 <a:solidFill>
                                   <a:srgbClr val="FF0000"/>
                                 </a:solidFill>
@@ -11133,7 +12480,7 @@
                           </m:sSubPr>
                           <m:e>
                             <m:r>
-                              <a:rPr lang="en-US" sz="2000" i="1">
+                              <a:rPr lang="en-US" sz="1800" i="1">
                                 <a:solidFill>
                                   <a:srgbClr val="FF0000"/>
                                 </a:solidFill>
@@ -11144,7 +12491,7 @@
                           </m:e>
                           <m:sub>
                             <m:r>
-                              <a:rPr lang="en-US" sz="2000" i="1">
+                              <a:rPr lang="en-US" sz="1800" i="1">
                                 <a:solidFill>
                                   <a:srgbClr val="FF0000"/>
                                 </a:solidFill>
@@ -11153,7 +12500,7 @@
                               <m:t>𝑖</m:t>
                             </m:r>
                             <m:r>
-                              <a:rPr lang="en-US" sz="2000" i="1">
+                              <a:rPr lang="en-US" sz="1800" i="1">
                                 <a:solidFill>
                                   <a:srgbClr val="FF0000"/>
                                 </a:solidFill>
@@ -11164,7 +12511,7 @@
                           </m:sub>
                         </m:sSub>
                         <m:r>
-                          <a:rPr lang="en-US" sz="2000" i="1">
+                          <a:rPr lang="en-US" sz="1800" i="1">
                             <a:solidFill>
                               <a:srgbClr val="FF0000"/>
                             </a:solidFill>
@@ -11175,7 +12522,7 @@
                         <m:sSub>
                           <m:sSubPr>
                             <m:ctrlPr>
-                              <a:rPr lang="en-US" sz="2000" i="1">
+                              <a:rPr lang="en-US" sz="1800" i="1">
                                 <a:solidFill>
                                   <a:srgbClr val="FF0000"/>
                                 </a:solidFill>
@@ -11185,7 +12532,7 @@
                           </m:sSubPr>
                           <m:e>
                             <m:r>
-                              <a:rPr lang="en-US" sz="2000" i="1">
+                              <a:rPr lang="en-US" sz="1800" i="1">
                                 <a:solidFill>
                                   <a:srgbClr val="FF0000"/>
                                 </a:solidFill>
@@ -11196,7 +12543,7 @@
                           </m:e>
                           <m:sub>
                             <m:r>
-                              <a:rPr lang="en-US" sz="2000" i="1">
+                              <a:rPr lang="en-US" sz="1800" i="1">
                                 <a:solidFill>
                                   <a:srgbClr val="FF0000"/>
                                 </a:solidFill>
@@ -11205,7 +12552,7 @@
                               <m:t>𝑖</m:t>
                             </m:r>
                             <m:r>
-                              <a:rPr lang="en-US" sz="2000" i="1">
+                              <a:rPr lang="en-US" sz="1800" i="1">
                                 <a:solidFill>
                                   <a:srgbClr val="FF0000"/>
                                 </a:solidFill>
@@ -11216,7 +12563,7 @@
                           </m:sub>
                         </m:sSub>
                         <m:r>
-                          <a:rPr lang="en-US" sz="2000" i="1">
+                          <a:rPr lang="en-US" sz="1800" i="1">
                             <a:solidFill>
                               <a:srgbClr val="FF0000"/>
                             </a:solidFill>
@@ -11227,7 +12574,7 @@
                         <m:sSub>
                           <m:sSubPr>
                             <m:ctrlPr>
-                              <a:rPr lang="en-US" sz="2000" i="1">
+                              <a:rPr lang="en-US" sz="1800" i="1">
                                 <a:solidFill>
                                   <a:srgbClr val="FF0000"/>
                                 </a:solidFill>
@@ -11237,7 +12584,7 @@
                           </m:sSubPr>
                           <m:e>
                             <m:r>
-                              <a:rPr lang="en-US" sz="2000" i="1">
+                              <a:rPr lang="en-US" sz="1800" i="1">
                                 <a:solidFill>
                                   <a:srgbClr val="FF0000"/>
                                 </a:solidFill>
@@ -11248,7 +12595,7 @@
                           </m:e>
                           <m:sub>
                             <m:r>
-                              <a:rPr lang="en-US" sz="2000" i="1">
+                              <a:rPr lang="en-US" sz="1800" i="1">
                                 <a:solidFill>
                                   <a:srgbClr val="FF0000"/>
                                 </a:solidFill>
@@ -11257,7 +12604,7 @@
                               <m:t>𝑖</m:t>
                             </m:r>
                             <m:r>
-                              <a:rPr lang="en-US" sz="2000" i="1">
+                              <a:rPr lang="en-US" sz="1800" i="1">
                                 <a:solidFill>
                                   <a:srgbClr val="FF0000"/>
                                 </a:solidFill>
@@ -11266,7 +12613,7 @@
                               <m:t>−</m:t>
                             </m:r>
                             <m:r>
-                              <a:rPr lang="en-US" sz="2000" i="1">
+                              <a:rPr lang="en-US" sz="1800" i="1">
                                 <a:solidFill>
                                   <a:srgbClr val="FF0000"/>
                                 </a:solidFill>
@@ -11275,7 +12622,7 @@
                               <m:t>𝑙</m:t>
                             </m:r>
                             <m:r>
-                              <a:rPr lang="en-US" sz="2000" i="1">
+                              <a:rPr lang="en-US" sz="1800" i="1">
                                 <a:solidFill>
                                   <a:srgbClr val="FF0000"/>
                                 </a:solidFill>
@@ -11286,7 +12633,7 @@
                           </m:sub>
                         </m:sSub>
                         <m:r>
-                          <a:rPr lang="en-US" sz="2000" i="1">
+                          <a:rPr lang="en-US" sz="1800" i="1">
                             <a:solidFill>
                               <a:srgbClr val="FF0000"/>
                             </a:solidFill>
@@ -11297,7 +12644,7 @@
                       </m:num>
                       <m:den>
                         <m:r>
-                          <a:rPr lang="en-US" sz="2000" i="1">
+                          <a:rPr lang="en-US" sz="1800" i="1">
                             <a:solidFill>
                               <a:srgbClr val="FF0000"/>
                             </a:solidFill>
@@ -11306,7 +12653,7 @@
                           <m:t>𝑁</m:t>
                         </m:r>
                         <m:r>
-                          <a:rPr lang="en-US" sz="2000" b="0" i="1" smtClean="0">
+                          <a:rPr lang="en-US" sz="1800" b="0" i="1" smtClean="0">
                             <a:solidFill>
                               <a:srgbClr val="FF0000"/>
                             </a:solidFill>
@@ -11317,7 +12664,7 @@
                         <m:sSub>
                           <m:sSubPr>
                             <m:ctrlPr>
-                              <a:rPr lang="en-US" sz="2000" b="0" i="1" smtClean="0">
+                              <a:rPr lang="en-US" sz="1800" b="0" i="1" smtClean="0">
                                 <a:solidFill>
                                   <a:srgbClr val="FF0000"/>
                                 </a:solidFill>
@@ -11327,7 +12674,7 @@
                           </m:sSubPr>
                           <m:e>
                             <m:r>
-                              <a:rPr lang="en-US" sz="2000" b="0" i="1" smtClean="0">
+                              <a:rPr lang="en-US" sz="1800" b="0" i="1" smtClean="0">
                                 <a:solidFill>
                                   <a:srgbClr val="FF0000"/>
                                 </a:solidFill>
@@ -11338,7 +12685,7 @@
                           </m:e>
                           <m:sub>
                             <m:r>
-                              <a:rPr lang="en-US" sz="2000" b="0" i="1" smtClean="0">
+                              <a:rPr lang="en-US" sz="1800" b="0" i="1" smtClean="0">
                                 <a:solidFill>
                                   <a:srgbClr val="FF0000"/>
                                 </a:solidFill>
@@ -11349,7 +12696,7 @@
                           </m:sub>
                         </m:sSub>
                         <m:r>
-                          <a:rPr lang="en-US" sz="2000" b="0" i="1" smtClean="0">
+                          <a:rPr lang="en-US" sz="1800" b="0" i="1" smtClean="0">
                             <a:solidFill>
                               <a:srgbClr val="FF0000"/>
                             </a:solidFill>
@@ -11362,23 +12709,23 @@
                   </m:oMath>
                 </a14:m>
                 <a:br>
-                  <a:rPr lang="en-US" sz="2000" dirty="0"/>
+                  <a:rPr lang="en-US" sz="1800" dirty="0"/>
                 </a:br>
-                <a:endParaRPr lang="en-US" sz="2000" b="1" dirty="0"/>
+                <a:endParaRPr lang="en-US" sz="1800" b="1" dirty="0"/>
               </a:p>
               <a:p>
                 <a:r>
-                  <a:rPr lang="en-US" sz="2000" b="1" dirty="0"/>
+                  <a:rPr lang="en-US" sz="1800" b="1" dirty="0"/>
                   <a:t>Model size: </a:t>
                 </a:r>
                 <a:r>
-                  <a:rPr lang="en-US" sz="2000" dirty="0"/>
+                  <a:rPr lang="en-US" sz="1800" dirty="0"/>
                   <a:t>vocabulary size </a:t>
                 </a:r>
                 <a14:m>
                   <m:oMath xmlns:m="http://schemas.openxmlformats.org/officeDocument/2006/math">
                     <m:r>
-                      <a:rPr lang="en-US" sz="2000" i="1" dirty="0" smtClean="0">
+                      <a:rPr lang="en-US" sz="1800" i="1" dirty="0" smtClean="0">
                         <a:latin typeface="Cambria Math" panose="02040503050406030204" pitchFamily="18" charset="0"/>
                       </a:rPr>
                       <m:t>𝑑</m:t>
@@ -11386,13 +12733,13 @@
                   </m:oMath>
                 </a14:m>
                 <a:r>
-                  <a:rPr lang="en-US" sz="2000" dirty="0"/>
+                  <a:rPr lang="en-US" sz="1800" dirty="0"/>
                   <a:t>, context length </a:t>
                 </a:r>
                 <a14:m>
                   <m:oMath xmlns:m="http://schemas.openxmlformats.org/officeDocument/2006/math">
                     <m:r>
-                      <a:rPr lang="en-US" sz="2000" i="1" dirty="0" smtClean="0">
+                      <a:rPr lang="en-US" sz="1800" i="1" dirty="0" smtClean="0">
                         <a:latin typeface="Cambria Math" panose="02040503050406030204" pitchFamily="18" charset="0"/>
                       </a:rPr>
                       <m:t>𝑙</m:t>
@@ -11400,13 +12747,13 @@
                   </m:oMath>
                 </a14:m>
                 <a:r>
-                  <a:rPr lang="en-US" sz="2000" dirty="0"/>
+                  <a:rPr lang="en-US" sz="1800" dirty="0"/>
                   <a:t> </a:t>
                 </a:r>
                 <a14:m>
                   <m:oMath xmlns:m="http://schemas.openxmlformats.org/officeDocument/2006/math">
                     <m:r>
-                      <a:rPr lang="en-US" sz="2000" b="0" i="1" dirty="0" smtClean="0">
+                      <a:rPr lang="en-US" sz="1800" b="0" i="1" dirty="0" smtClean="0">
                         <a:latin typeface="Cambria Math" panose="02040503050406030204" pitchFamily="18" charset="0"/>
                       </a:rPr>
                       <m:t>→</m:t>
@@ -11414,19 +12761,19 @@
                   </m:oMath>
                 </a14:m>
                 <a:r>
-                  <a:rPr lang="en-US" sz="2000" dirty="0"/>
+                  <a:rPr lang="en-US" sz="1800" dirty="0"/>
                   <a:t> </a:t>
                 </a:r>
                 <a14:m>
                   <m:oMath xmlns:m="http://schemas.openxmlformats.org/officeDocument/2006/math">
                     <m:r>
-                      <a:rPr lang="en-US" sz="2000" b="0" i="1" smtClean="0">
+                      <a:rPr lang="en-US" sz="1800" b="0" i="1" smtClean="0">
                         <a:latin typeface="Cambria Math" panose="02040503050406030204" pitchFamily="18" charset="0"/>
                       </a:rPr>
                       <m:t>𝑂</m:t>
                     </m:r>
                     <m:r>
-                      <a:rPr lang="en-US" sz="2000" b="0" i="1" smtClean="0">
+                      <a:rPr lang="en-US" sz="1800" b="0" i="1" smtClean="0">
                         <a:latin typeface="Cambria Math" panose="02040503050406030204" pitchFamily="18" charset="0"/>
                       </a:rPr>
                       <m:t>(</m:t>
@@ -11434,14 +12781,14 @@
                     <m:sSup>
                       <m:sSupPr>
                         <m:ctrlPr>
-                          <a:rPr lang="en-US" sz="2000" i="1" smtClean="0">
+                          <a:rPr lang="en-US" sz="1800" i="1" smtClean="0">
                             <a:latin typeface="Cambria Math" panose="02040503050406030204" pitchFamily="18" charset="0"/>
                           </a:rPr>
                         </m:ctrlPr>
                       </m:sSupPr>
                       <m:e>
                         <m:r>
-                          <a:rPr lang="en-US" sz="2000" b="0" i="1" smtClean="0">
+                          <a:rPr lang="en-US" sz="1800" b="0" i="1" smtClean="0">
                             <a:latin typeface="Cambria Math" panose="02040503050406030204" pitchFamily="18" charset="0"/>
                           </a:rPr>
                           <m:t>𝑑</m:t>
@@ -11449,7 +12796,7 @@
                       </m:e>
                       <m:sup>
                         <m:r>
-                          <a:rPr lang="en-US" sz="2000" b="0" i="1" smtClean="0">
+                          <a:rPr lang="en-US" sz="1800" b="0" i="1" smtClean="0">
                             <a:latin typeface="Cambria Math" panose="02040503050406030204" pitchFamily="18" charset="0"/>
                           </a:rPr>
                           <m:t>𝑙</m:t>
@@ -11457,46 +12804,46 @@
                       </m:sup>
                     </m:sSup>
                     <m:r>
-                      <a:rPr lang="en-US" sz="2000" b="0" i="1" smtClean="0">
+                      <a:rPr lang="en-US" sz="1800" b="0" i="1" smtClean="0">
                         <a:latin typeface="Cambria Math" panose="02040503050406030204" pitchFamily="18" charset="0"/>
                       </a:rPr>
                       <m:t>)</m:t>
                     </m:r>
                   </m:oMath>
                 </a14:m>
-                <a:endParaRPr lang="en-US" sz="2000" b="1" dirty="0"/>
+                <a:endParaRPr lang="en-US" sz="1800" b="1" dirty="0"/>
               </a:p>
               <a:p>
                 <a:r>
-                  <a:rPr lang="en-US" sz="2000" b="1" dirty="0"/>
+                  <a:rPr lang="en-US" sz="1800" b="1" dirty="0"/>
                   <a:t>Example GPT 3</a:t>
                 </a:r>
                 <a:r>
-                  <a:rPr lang="en-US" sz="2000" dirty="0"/>
+                  <a:rPr lang="en-US" sz="1800" dirty="0"/>
                   <a:t> uses </a:t>
                 </a:r>
                 <a14:m>
                   <m:oMath xmlns:m="http://schemas.openxmlformats.org/officeDocument/2006/math">
                     <m:r>
-                      <a:rPr lang="en-US" sz="2000" i="1" dirty="0">
+                      <a:rPr lang="en-US" sz="1800" i="1" dirty="0">
                         <a:latin typeface="Cambria Math" panose="02040503050406030204" pitchFamily="18" charset="0"/>
                       </a:rPr>
                       <m:t>𝑑</m:t>
                     </m:r>
                     <m:r>
-                      <a:rPr lang="en-US" sz="2000" i="1" dirty="0">
+                      <a:rPr lang="en-US" sz="1800" i="1" dirty="0">
                         <a:latin typeface="Cambria Math" panose="02040503050406030204" pitchFamily="18" charset="0"/>
                       </a:rPr>
                       <m:t> = 50,000, </m:t>
                     </m:r>
                     <m:r>
-                      <a:rPr lang="en-US" sz="2000" i="1" dirty="0">
+                      <a:rPr lang="en-US" sz="1800" i="1" dirty="0">
                         <a:latin typeface="Cambria Math" panose="02040503050406030204" pitchFamily="18" charset="0"/>
                       </a:rPr>
                       <m:t>𝑙</m:t>
                     </m:r>
                     <m:r>
-                      <a:rPr lang="en-US" sz="2000" i="1" dirty="0">
+                      <a:rPr lang="en-US" sz="1800" i="1" dirty="0">
                         <a:latin typeface="Cambria Math" panose="02040503050406030204" pitchFamily="18" charset="0"/>
                       </a:rPr>
                       <m:t> = 2000</m:t>
@@ -11504,20 +12851,20 @@
                   </m:oMath>
                 </a14:m>
                 <a:r>
-                  <a:rPr lang="en-US" sz="2000" dirty="0"/>
+                  <a:rPr lang="en-US" sz="1800" dirty="0"/>
                   <a:t> </a:t>
                 </a:r>
               </a:p>
               <a:p>
                 <a:pPr lvl="1"/>
                 <a:r>
-                  <a:rPr lang="en-US" sz="1600" dirty="0"/>
+                  <a:rPr lang="en-US" sz="1400" dirty="0"/>
                   <a:t>Bayesian classifier : </a:t>
                 </a:r>
                 <a14:m>
                   <m:oMath xmlns:m="http://schemas.openxmlformats.org/officeDocument/2006/math">
                     <m:r>
-                      <a:rPr lang="en-US" sz="1600" b="0" i="1" smtClean="0">
+                      <a:rPr lang="en-US" sz="1400" b="0" i="1" smtClean="0">
                         <a:latin typeface="Cambria Math" panose="02040503050406030204" pitchFamily="18" charset="0"/>
                       </a:rPr>
                       <m:t>𝑂</m:t>
@@ -11525,7 +12872,7 @@
                     <m:d>
                       <m:dPr>
                         <m:ctrlPr>
-                          <a:rPr lang="en-US" sz="1600" b="0" i="1" smtClean="0">
+                          <a:rPr lang="en-US" sz="1400" b="0" i="1" smtClean="0">
                             <a:latin typeface="Cambria Math" panose="02040503050406030204" pitchFamily="18" charset="0"/>
                           </a:rPr>
                         </m:ctrlPr>
@@ -11534,14 +12881,14 @@
                         <m:sSup>
                           <m:sSupPr>
                             <m:ctrlPr>
-                              <a:rPr lang="en-US" sz="1600" i="1" smtClean="0">
+                              <a:rPr lang="en-US" sz="1400" i="1" smtClean="0">
                                 <a:latin typeface="Cambria Math" panose="02040503050406030204" pitchFamily="18" charset="0"/>
                               </a:rPr>
                             </m:ctrlPr>
                           </m:sSupPr>
                           <m:e>
                             <m:r>
-                              <a:rPr lang="en-US" sz="1600" b="0" i="1" smtClean="0">
+                              <a:rPr lang="en-US" sz="1400" b="0" i="1" smtClean="0">
                                 <a:latin typeface="Cambria Math" panose="02040503050406030204" pitchFamily="18" charset="0"/>
                               </a:rPr>
                               <m:t>50000</m:t>
@@ -11549,7 +12896,7 @@
                           </m:e>
                           <m:sup>
                             <m:r>
-                              <a:rPr lang="en-US" sz="1600" b="0" i="1" smtClean="0">
+                              <a:rPr lang="en-US" sz="1400" b="0" i="1" smtClean="0">
                                 <a:latin typeface="Cambria Math" panose="02040503050406030204" pitchFamily="18" charset="0"/>
                               </a:rPr>
                               <m:t>2000</m:t>
@@ -11559,14 +12906,14 @@
                       </m:e>
                     </m:d>
                     <m:r>
-                      <a:rPr lang="en-US" sz="1600" b="0" i="1" smtClean="0">
+                      <a:rPr lang="en-US" sz="1400" b="0" i="1" smtClean="0">
                         <a:latin typeface="Cambria Math" panose="02040503050406030204" pitchFamily="18" charset="0"/>
                         <a:ea typeface="Cambria Math" panose="02040503050406030204" pitchFamily="18" charset="0"/>
                       </a:rPr>
                       <m:t>≈</m:t>
                     </m:r>
                     <m:r>
-                      <a:rPr lang="en-US" sz="1600" b="0" i="1" smtClean="0">
+                      <a:rPr lang="en-US" sz="1400" b="0" i="1" smtClean="0">
                         <a:latin typeface="Cambria Math" panose="02040503050406030204" pitchFamily="18" charset="0"/>
                         <a:ea typeface="Cambria Math" panose="02040503050406030204" pitchFamily="18" charset="0"/>
                       </a:rPr>
@@ -11575,7 +12922,7 @@
                     <m:d>
                       <m:dPr>
                         <m:ctrlPr>
-                          <a:rPr lang="en-US" sz="1600" b="0" i="1" smtClean="0">
+                          <a:rPr lang="en-US" sz="1400" b="0" i="1" smtClean="0">
                             <a:latin typeface="Cambria Math" panose="02040503050406030204" pitchFamily="18" charset="0"/>
                             <a:ea typeface="Cambria Math" panose="02040503050406030204" pitchFamily="18" charset="0"/>
                           </a:rPr>
@@ -11585,7 +12932,7 @@
                         <m:sSup>
                           <m:sSupPr>
                             <m:ctrlPr>
-                              <a:rPr lang="en-US" sz="1600" b="0" i="1" smtClean="0">
+                              <a:rPr lang="en-US" sz="1400" b="0" i="1" smtClean="0">
                                 <a:latin typeface="Cambria Math" panose="02040503050406030204" pitchFamily="18" charset="0"/>
                                 <a:ea typeface="Cambria Math" panose="02040503050406030204" pitchFamily="18" charset="0"/>
                               </a:rPr>
@@ -11593,7 +12940,7 @@
                           </m:sSupPr>
                           <m:e>
                             <m:r>
-                              <a:rPr lang="en-US" sz="1600" b="0" i="1" smtClean="0">
+                              <a:rPr lang="en-US" sz="1400" b="0" i="1" smtClean="0">
                                 <a:latin typeface="Cambria Math" panose="02040503050406030204" pitchFamily="18" charset="0"/>
                                 <a:ea typeface="Cambria Math" panose="02040503050406030204" pitchFamily="18" charset="0"/>
                               </a:rPr>
@@ -11602,7 +12949,7 @@
                           </m:e>
                           <m:sup>
                             <m:r>
-                              <a:rPr lang="en-US" sz="1600" b="0" i="1" smtClean="0">
+                              <a:rPr lang="en-US" sz="1400" b="0" i="1" smtClean="0">
                                 <a:latin typeface="Cambria Math" panose="02040503050406030204" pitchFamily="18" charset="0"/>
                                 <a:ea typeface="Cambria Math" panose="02040503050406030204" pitchFamily="18" charset="0"/>
                               </a:rPr>
@@ -11614,20 +12961,20 @@
                     </m:d>
                   </m:oMath>
                 </a14:m>
-                <a:endParaRPr lang="en-US" sz="1600" b="0" dirty="0">
+                <a:endParaRPr lang="en-US" sz="1400" b="0" dirty="0">
                   <a:ea typeface="Cambria Math" panose="02040503050406030204" pitchFamily="18" charset="0"/>
                 </a:endParaRPr>
               </a:p>
               <a:p>
                 <a:pPr lvl="1"/>
                 <a:r>
-                  <a:rPr lang="en-US" sz="1600" dirty="0"/>
+                  <a:rPr lang="en-US" sz="1400" dirty="0"/>
                   <a:t>GPT 3 models </a:t>
                 </a:r>
                 <a14:m>
                   <m:oMath xmlns:m="http://schemas.openxmlformats.org/officeDocument/2006/math">
                     <m:r>
-                      <a:rPr lang="en-US" sz="1600" b="1" i="1">
+                      <a:rPr lang="en-US" sz="1400" b="1" i="1">
                         <a:latin typeface="Cambria Math" panose="02040503050406030204" pitchFamily="18" charset="0"/>
                       </a:rPr>
                       <m:t>𝑷</m:t>
@@ -11635,7 +12982,7 @@
                     <m:d>
                       <m:dPr>
                         <m:ctrlPr>
-                          <a:rPr lang="en-US" sz="1600" i="1">
+                          <a:rPr lang="en-US" sz="1400" i="1">
                             <a:latin typeface="Cambria Math" panose="02040503050406030204" pitchFamily="18" charset="0"/>
                           </a:rPr>
                         </m:ctrlPr>
@@ -11644,14 +12991,14 @@
                         <m:sSub>
                           <m:sSubPr>
                             <m:ctrlPr>
-                              <a:rPr lang="en-US" sz="1600" i="1">
+                              <a:rPr lang="en-US" sz="1400" i="1">
                                 <a:latin typeface="Cambria Math" panose="02040503050406030204" pitchFamily="18" charset="0"/>
                               </a:rPr>
                             </m:ctrlPr>
                           </m:sSubPr>
                           <m:e>
                             <m:r>
-                              <a:rPr lang="en-US" sz="1600" i="1">
+                              <a:rPr lang="en-US" sz="1400" i="1">
                                 <a:latin typeface="Cambria Math" panose="02040503050406030204" pitchFamily="18" charset="0"/>
                               </a:rPr>
                               <m:t>𝑋</m:t>
@@ -11659,7 +13006,7 @@
                           </m:e>
                           <m:sub>
                             <m:r>
-                              <a:rPr lang="en-US" sz="1600" i="1">
+                              <a:rPr lang="en-US" sz="1400" i="1">
                                 <a:latin typeface="Cambria Math" panose="02040503050406030204" pitchFamily="18" charset="0"/>
                               </a:rPr>
                               <m:t>𝑖</m:t>
@@ -11671,14 +13018,14 @@
                         <m:sSub>
                           <m:sSubPr>
                             <m:ctrlPr>
-                              <a:rPr lang="en-US" sz="1600" i="1">
+                              <a:rPr lang="en-US" sz="1400" i="1">
                                 <a:latin typeface="Cambria Math" panose="02040503050406030204" pitchFamily="18" charset="0"/>
                               </a:rPr>
                             </m:ctrlPr>
                           </m:sSubPr>
                           <m:e>
                             <m:r>
-                              <a:rPr lang="en-US" sz="1600" i="1">
+                              <a:rPr lang="en-US" sz="1400" i="1">
                                 <a:latin typeface="Cambria Math" panose="02040503050406030204" pitchFamily="18" charset="0"/>
                               </a:rPr>
                               <m:t>𝑋</m:t>
@@ -11686,13 +13033,13 @@
                           </m:e>
                           <m:sub>
                             <m:r>
-                              <a:rPr lang="en-US" sz="1600" i="1">
+                              <a:rPr lang="en-US" sz="1400" i="1">
                                 <a:latin typeface="Cambria Math" panose="02040503050406030204" pitchFamily="18" charset="0"/>
                               </a:rPr>
                               <m:t>𝑖</m:t>
                             </m:r>
                             <m:r>
-                              <a:rPr lang="en-US" sz="1600" i="1">
+                              <a:rPr lang="en-US" sz="1400" i="1">
                                 <a:latin typeface="Cambria Math" panose="02040503050406030204" pitchFamily="18" charset="0"/>
                               </a:rPr>
                               <m:t>−1</m:t>
@@ -11700,7 +13047,7 @@
                           </m:sub>
                         </m:sSub>
                         <m:r>
-                          <a:rPr lang="en-US" sz="1600" i="1">
+                          <a:rPr lang="en-US" sz="1400" i="1">
                             <a:latin typeface="Cambria Math" panose="02040503050406030204" pitchFamily="18" charset="0"/>
                           </a:rPr>
                           <m:t>, </m:t>
@@ -11708,14 +13055,14 @@
                         <m:sSub>
                           <m:sSubPr>
                             <m:ctrlPr>
-                              <a:rPr lang="en-US" sz="1600" i="1">
+                              <a:rPr lang="en-US" sz="1400" i="1">
                                 <a:latin typeface="Cambria Math" panose="02040503050406030204" pitchFamily="18" charset="0"/>
                               </a:rPr>
                             </m:ctrlPr>
                           </m:sSubPr>
                           <m:e>
                             <m:r>
-                              <a:rPr lang="en-US" sz="1600" i="1">
+                              <a:rPr lang="en-US" sz="1400" i="1">
                                 <a:latin typeface="Cambria Math" panose="02040503050406030204" pitchFamily="18" charset="0"/>
                               </a:rPr>
                               <m:t>𝑋</m:t>
@@ -11723,13 +13070,13 @@
                           </m:e>
                           <m:sub>
                             <m:r>
-                              <a:rPr lang="en-US" sz="1600" i="1">
+                              <a:rPr lang="en-US" sz="1400" i="1">
                                 <a:latin typeface="Cambria Math" panose="02040503050406030204" pitchFamily="18" charset="0"/>
                               </a:rPr>
                               <m:t>𝑖</m:t>
                             </m:r>
                             <m:r>
-                              <a:rPr lang="en-US" sz="1600" i="1">
+                              <a:rPr lang="en-US" sz="1400" i="1">
                                 <a:latin typeface="Cambria Math" panose="02040503050406030204" pitchFamily="18" charset="0"/>
                               </a:rPr>
                               <m:t>−2</m:t>
@@ -11737,7 +13084,7 @@
                           </m:sub>
                         </m:sSub>
                         <m:r>
-                          <a:rPr lang="en-US" sz="1600" i="1">
+                          <a:rPr lang="en-US" sz="1400" i="1">
                             <a:latin typeface="Cambria Math" panose="02040503050406030204" pitchFamily="18" charset="0"/>
                           </a:rPr>
                           <m:t>, …, </m:t>
@@ -11745,14 +13092,14 @@
                         <m:sSub>
                           <m:sSubPr>
                             <m:ctrlPr>
-                              <a:rPr lang="en-US" sz="1600" i="1">
+                              <a:rPr lang="en-US" sz="1400" i="1">
                                 <a:latin typeface="Cambria Math" panose="02040503050406030204" pitchFamily="18" charset="0"/>
                               </a:rPr>
                             </m:ctrlPr>
                           </m:sSubPr>
                           <m:e>
                             <m:r>
-                              <a:rPr lang="en-US" sz="1600" i="1">
+                              <a:rPr lang="en-US" sz="1400" i="1">
                                 <a:latin typeface="Cambria Math" panose="02040503050406030204" pitchFamily="18" charset="0"/>
                               </a:rPr>
                               <m:t>𝑋</m:t>
@@ -11760,25 +13107,25 @@
                           </m:e>
                           <m:sub>
                             <m:r>
-                              <a:rPr lang="en-US" sz="1600" i="1">
+                              <a:rPr lang="en-US" sz="1400" i="1">
                                 <a:latin typeface="Cambria Math" panose="02040503050406030204" pitchFamily="18" charset="0"/>
                               </a:rPr>
                               <m:t>𝑖</m:t>
                             </m:r>
                             <m:r>
-                              <a:rPr lang="en-US" sz="1600" i="1">
+                              <a:rPr lang="en-US" sz="1400" i="1">
                                 <a:latin typeface="Cambria Math" panose="02040503050406030204" pitchFamily="18" charset="0"/>
                               </a:rPr>
                               <m:t>−</m:t>
                             </m:r>
                             <m:r>
-                              <a:rPr lang="en-US" sz="1600" i="1">
+                              <a:rPr lang="en-US" sz="1400" i="1">
                                 <a:latin typeface="Cambria Math" panose="02040503050406030204" pitchFamily="18" charset="0"/>
                               </a:rPr>
                               <m:t>𝑙</m:t>
                             </m:r>
                             <m:r>
-                              <a:rPr lang="en-US" sz="1600" i="1">
+                              <a:rPr lang="en-US" sz="1400" i="1">
                                 <a:latin typeface="Cambria Math" panose="02040503050406030204" pitchFamily="18" charset="0"/>
                               </a:rPr>
                               <m:t> </m:t>
@@ -11790,13 +13137,13 @@
                   </m:oMath>
                 </a14:m>
                 <a:r>
-                  <a:rPr lang="en-US" sz="1600" dirty="0"/>
+                  <a:rPr lang="en-US" sz="1400" dirty="0"/>
                   <a:t> with only 175 billion parameters (</a:t>
                 </a:r>
                 <a14:m>
                   <m:oMath xmlns:m="http://schemas.openxmlformats.org/officeDocument/2006/math">
                     <m:r>
-                      <a:rPr lang="en-US" sz="1600" i="1">
+                      <a:rPr lang="en-US" sz="1400" i="1">
                         <a:latin typeface="Cambria Math" panose="02040503050406030204" pitchFamily="18" charset="0"/>
                         <a:ea typeface="Cambria Math" panose="02040503050406030204" pitchFamily="18" charset="0"/>
                       </a:rPr>
@@ -11805,7 +13152,7 @@
                     <m:d>
                       <m:dPr>
                         <m:ctrlPr>
-                          <a:rPr lang="en-US" sz="1600" i="1">
+                          <a:rPr lang="en-US" sz="1400" i="1">
                             <a:latin typeface="Cambria Math" panose="02040503050406030204" pitchFamily="18" charset="0"/>
                             <a:ea typeface="Cambria Math" panose="02040503050406030204" pitchFamily="18" charset="0"/>
                           </a:rPr>
@@ -11815,7 +13162,7 @@
                         <m:sSup>
                           <m:sSupPr>
                             <m:ctrlPr>
-                              <a:rPr lang="en-US" sz="1600" i="1">
+                              <a:rPr lang="en-US" sz="1400" i="1">
                                 <a:latin typeface="Cambria Math" panose="02040503050406030204" pitchFamily="18" charset="0"/>
                                 <a:ea typeface="Cambria Math" panose="02040503050406030204" pitchFamily="18" charset="0"/>
                               </a:rPr>
@@ -11823,7 +13170,7 @@
                           </m:sSupPr>
                           <m:e>
                             <m:r>
-                              <a:rPr lang="en-US" sz="1600" i="1">
+                              <a:rPr lang="en-US" sz="1400" i="1">
                                 <a:latin typeface="Cambria Math" panose="02040503050406030204" pitchFamily="18" charset="0"/>
                                 <a:ea typeface="Cambria Math" panose="02040503050406030204" pitchFamily="18" charset="0"/>
                               </a:rPr>
@@ -11832,7 +13179,7 @@
                           </m:e>
                           <m:sup>
                             <m:r>
-                              <a:rPr lang="en-US" sz="1600" b="0" i="1" smtClean="0">
+                              <a:rPr lang="en-US" sz="1400" b="0" i="1" smtClean="0">
                                 <a:latin typeface="Cambria Math" panose="02040503050406030204" pitchFamily="18" charset="0"/>
                                 <a:ea typeface="Cambria Math" panose="02040503050406030204" pitchFamily="18" charset="0"/>
                               </a:rPr>
@@ -11845,7 +13192,7 @@
                   </m:oMath>
                 </a14:m>
                 <a:r>
-                  <a:rPr lang="en-US" sz="1600" dirty="0"/>
+                  <a:rPr lang="en-US" sz="1400" dirty="0"/>
                   <a:t>)</a:t>
                 </a:r>
               </a:p>
@@ -11877,7 +13224,7 @@
               <a:blipFill>
                 <a:blip r:embed="rId2"/>
                 <a:stretch>
-                  <a:fillRect l="-522" t="-1849"/>
+                  <a:fillRect l="-406" t="-1321"/>
                 </a:stretch>
               </a:blipFill>
             </p:spPr>
@@ -12885,8 +14232,8 @@
           </a:p>
         </p:txBody>
       </p:sp>
-      <mc:AlternateContent xmlns:mc="http://schemas.openxmlformats.org/markup-compatibility/2006" xmlns:a14="http://schemas.microsoft.com/office/drawing/2010/main">
-        <mc:Choice Requires="a14">
+      <mc:AlternateContent xmlns:mc="http://schemas.openxmlformats.org/markup-compatibility/2006">
+        <mc:Choice xmlns:a14="http://schemas.microsoft.com/office/drawing/2010/main" Requires="a14">
           <p:graphicFrame>
             <p:nvGraphicFramePr>
               <p:cNvPr id="35" name="Table 34">
@@ -12902,14 +14249,14 @@
               <p:nvPr>
                 <p:extLst>
                   <p:ext uri="{D42A27DB-BD31-4B8C-83A1-F6EECF244321}">
-                    <p14:modId xmlns:p14="http://schemas.microsoft.com/office/powerpoint/2010/main" val="2438416708"/>
+                    <p14:modId xmlns:p14="http://schemas.microsoft.com/office/powerpoint/2010/main" val="1801031252"/>
                   </p:ext>
                 </p:extLst>
               </p:nvPr>
             </p:nvGraphicFramePr>
             <p:xfrm>
               <a:off x="8934596" y="4293931"/>
-              <a:ext cx="3146472" cy="1198840"/>
+              <a:ext cx="3011327" cy="1198840"/>
             </p:xfrm>
             <a:graphic>
               <a:graphicData uri="http://schemas.openxmlformats.org/drawingml/2006/table">
@@ -12918,49 +14265,49 @@
                     <a:tableStyleId>{5C22544A-7EE6-4342-B048-85BDC9FD1C3A}</a:tableStyleId>
                   </a:tblPr>
                   <a:tblGrid>
-                    <a:gridCol w="314107">
+                    <a:gridCol w="300616">
                       <a:extLst>
                         <a:ext uri="{9D8B030D-6E8A-4147-A177-3AD203B41FA5}">
                           <a16:colId xmlns:a16="http://schemas.microsoft.com/office/drawing/2014/main" val="2886527042"/>
                         </a:ext>
                       </a:extLst>
                     </a:gridCol>
-                    <a:gridCol w="230345">
+                    <a:gridCol w="220451">
                       <a:extLst>
                         <a:ext uri="{9D8B030D-6E8A-4147-A177-3AD203B41FA5}">
                           <a16:colId xmlns:a16="http://schemas.microsoft.com/office/drawing/2014/main" val="2843465921"/>
                         </a:ext>
                       </a:extLst>
                     </a:gridCol>
-                    <a:gridCol w="474650">
+                    <a:gridCol w="454263">
                       <a:extLst>
                         <a:ext uri="{9D8B030D-6E8A-4147-A177-3AD203B41FA5}">
                           <a16:colId xmlns:a16="http://schemas.microsoft.com/office/drawing/2014/main" val="3869960157"/>
                         </a:ext>
                       </a:extLst>
                     </a:gridCol>
-                    <a:gridCol w="390889">
+                    <a:gridCol w="374100">
                       <a:extLst>
                         <a:ext uri="{9D8B030D-6E8A-4147-A177-3AD203B41FA5}">
                           <a16:colId xmlns:a16="http://schemas.microsoft.com/office/drawing/2014/main" val="2082622642"/>
                         </a:ext>
                       </a:extLst>
                     </a:gridCol>
-                    <a:gridCol w="516531">
+                    <a:gridCol w="494345">
                       <a:extLst>
                         <a:ext uri="{9D8B030D-6E8A-4147-A177-3AD203B41FA5}">
                           <a16:colId xmlns:a16="http://schemas.microsoft.com/office/drawing/2014/main" val="2201784429"/>
                         </a:ext>
                       </a:extLst>
                     </a:gridCol>
-                    <a:gridCol w="649154">
+                    <a:gridCol w="621272">
                       <a:extLst>
                         <a:ext uri="{9D8B030D-6E8A-4147-A177-3AD203B41FA5}">
                           <a16:colId xmlns:a16="http://schemas.microsoft.com/office/drawing/2014/main" val="2101555180"/>
                         </a:ext>
                       </a:extLst>
                     </a:gridCol>
-                    <a:gridCol w="570796">
+                    <a:gridCol w="546280">
                       <a:extLst>
                         <a:ext uri="{9D8B030D-6E8A-4147-A177-3AD203B41FA5}">
                           <a16:colId xmlns:a16="http://schemas.microsoft.com/office/drawing/2014/main" val="3151341098"/>
@@ -13683,7 +15030,7 @@
             </a:graphic>
           </p:graphicFrame>
         </mc:Choice>
-        <mc:Fallback xmlns="">
+        <mc:Fallback>
           <p:graphicFrame>
             <p:nvGraphicFramePr>
               <p:cNvPr id="35" name="Table 34">
@@ -13699,14 +15046,14 @@
               <p:nvPr>
                 <p:extLst>
                   <p:ext uri="{D42A27DB-BD31-4B8C-83A1-F6EECF244321}">
-                    <p14:modId xmlns:p14="http://schemas.microsoft.com/office/powerpoint/2010/main" val="2438416708"/>
+                    <p14:modId xmlns:p14="http://schemas.microsoft.com/office/powerpoint/2010/main" val="1801031252"/>
                   </p:ext>
                 </p:extLst>
               </p:nvPr>
             </p:nvGraphicFramePr>
             <p:xfrm>
               <a:off x="8934596" y="4293931"/>
-              <a:ext cx="3146472" cy="1198840"/>
+              <a:ext cx="3011327" cy="1198840"/>
             </p:xfrm>
             <a:graphic>
               <a:graphicData uri="http://schemas.openxmlformats.org/drawingml/2006/table">
@@ -13715,49 +15062,49 @@
                     <a:tableStyleId>{5C22544A-7EE6-4342-B048-85BDC9FD1C3A}</a:tableStyleId>
                   </a:tblPr>
                   <a:tblGrid>
-                    <a:gridCol w="314107">
+                    <a:gridCol w="300616">
                       <a:extLst>
                         <a:ext uri="{9D8B030D-6E8A-4147-A177-3AD203B41FA5}">
                           <a16:colId xmlns:a16="http://schemas.microsoft.com/office/drawing/2014/main" val="2886527042"/>
                         </a:ext>
                       </a:extLst>
                     </a:gridCol>
-                    <a:gridCol w="230345">
+                    <a:gridCol w="220451">
                       <a:extLst>
                         <a:ext uri="{9D8B030D-6E8A-4147-A177-3AD203B41FA5}">
                           <a16:colId xmlns:a16="http://schemas.microsoft.com/office/drawing/2014/main" val="2843465921"/>
                         </a:ext>
                       </a:extLst>
                     </a:gridCol>
-                    <a:gridCol w="474650">
+                    <a:gridCol w="454263">
                       <a:extLst>
                         <a:ext uri="{9D8B030D-6E8A-4147-A177-3AD203B41FA5}">
                           <a16:colId xmlns:a16="http://schemas.microsoft.com/office/drawing/2014/main" val="3869960157"/>
                         </a:ext>
                       </a:extLst>
                     </a:gridCol>
-                    <a:gridCol w="390889">
+                    <a:gridCol w="374100">
                       <a:extLst>
                         <a:ext uri="{9D8B030D-6E8A-4147-A177-3AD203B41FA5}">
                           <a16:colId xmlns:a16="http://schemas.microsoft.com/office/drawing/2014/main" val="2082622642"/>
                         </a:ext>
                       </a:extLst>
                     </a:gridCol>
-                    <a:gridCol w="516531">
+                    <a:gridCol w="494345">
                       <a:extLst>
                         <a:ext uri="{9D8B030D-6E8A-4147-A177-3AD203B41FA5}">
                           <a16:colId xmlns:a16="http://schemas.microsoft.com/office/drawing/2014/main" val="2201784429"/>
                         </a:ext>
                       </a:extLst>
                     </a:gridCol>
-                    <a:gridCol w="649154">
+                    <a:gridCol w="621272">
                       <a:extLst>
                         <a:ext uri="{9D8B030D-6E8A-4147-A177-3AD203B41FA5}">
                           <a16:colId xmlns:a16="http://schemas.microsoft.com/office/drawing/2014/main" val="2101555180"/>
                         </a:ext>
                       </a:extLst>
                     </a:gridCol>
-                    <a:gridCol w="570796">
+                    <a:gridCol w="546280">
                       <a:extLst>
                         <a:ext uri="{9D8B030D-6E8A-4147-A177-3AD203B41FA5}">
                           <a16:colId xmlns:a16="http://schemas.microsoft.com/office/drawing/2014/main" val="3151341098"/>
@@ -13778,7 +15125,7 @@
                         <a:blipFill>
                           <a:blip r:embed="rId9"/>
                           <a:stretch>
-                            <a:fillRect l="-1923" t="-2000" r="-901923" b="-300000"/>
+                            <a:fillRect l="-2041" t="-2000" r="-918367" b="-300000"/>
                           </a:stretch>
                         </a:blipFill>
                       </a:tcPr>
@@ -13825,7 +15172,7 @@
                         <a:blipFill>
                           <a:blip r:embed="rId9"/>
                           <a:stretch>
-                            <a:fillRect l="-115385" t="-2000" r="-453846" b="-300000"/>
+                            <a:fillRect l="-117568" t="-2000" r="-458108" b="-300000"/>
                           </a:stretch>
                         </a:blipFill>
                       </a:tcPr>
@@ -13842,7 +15189,7 @@
                         <a:blipFill>
                           <a:blip r:embed="rId9"/>
                           <a:stretch>
-                            <a:fillRect l="-258462" t="-2000" r="-444615" b="-300000"/>
+                            <a:fillRect l="-259677" t="-2000" r="-446774" b="-300000"/>
                           </a:stretch>
                         </a:blipFill>
                       </a:tcPr>
@@ -13859,7 +15206,7 @@
                         <a:blipFill>
                           <a:blip r:embed="rId9"/>
                           <a:stretch>
-                            <a:fillRect l="-274118" t="-2000" r="-240000" b="-300000"/>
+                            <a:fillRect l="-275309" t="-2000" r="-241975" b="-300000"/>
                           </a:stretch>
                         </a:blipFill>
                       </a:tcPr>
@@ -13876,7 +15223,7 @@
                         <a:blipFill>
                           <a:blip r:embed="rId9"/>
                           <a:stretch>
-                            <a:fillRect l="-300000" t="-2000" r="-92453" b="-300000"/>
+                            <a:fillRect l="-298039" t="-2000" r="-92157" b="-300000"/>
                           </a:stretch>
                         </a:blipFill>
                       </a:tcPr>
@@ -13893,7 +15240,7 @@
                         <a:blipFill>
                           <a:blip r:embed="rId9"/>
                           <a:stretch>
-                            <a:fillRect l="-451064" t="-2000" r="-4255" b="-300000"/>
+                            <a:fillRect l="-451111" t="-2000" r="-4444" b="-300000"/>
                           </a:stretch>
                         </a:blipFill>
                       </a:tcPr>
@@ -14204,8 +15551,8 @@
           </p:graphicFrame>
         </mc:Fallback>
       </mc:AlternateContent>
-      <mc:AlternateContent xmlns:mc="http://schemas.openxmlformats.org/markup-compatibility/2006" xmlns:a14="http://schemas.microsoft.com/office/drawing/2010/main">
-        <mc:Choice Requires="a14">
+      <mc:AlternateContent xmlns:mc="http://schemas.openxmlformats.org/markup-compatibility/2006">
+        <mc:Choice xmlns:a14="http://schemas.microsoft.com/office/drawing/2010/main" Requires="a14">
           <p:sp>
             <p:nvSpPr>
               <p:cNvPr id="42" name="TextBox 41">
@@ -14220,8 +15567,8 @@
             </p:nvSpPr>
             <p:spPr>
               <a:xfrm>
-                <a:off x="9619828" y="3571008"/>
-                <a:ext cx="1926321" cy="646331"/>
+                <a:off x="8686800" y="3786672"/>
+                <a:ext cx="3322040" cy="461665"/>
               </a:xfrm>
               <a:prstGeom prst="rect">
                 <a:avLst/>
@@ -14491,7 +15838,7 @@
             </p:txBody>
           </p:sp>
         </mc:Choice>
-        <mc:Fallback xmlns="">
+        <mc:Fallback>
           <p:sp>
             <p:nvSpPr>
               <p:cNvPr id="42" name="TextBox 41">
@@ -14508,8 +15855,8 @@
             </p:nvSpPr>
             <p:spPr>
               <a:xfrm>
-                <a:off x="9619828" y="3571008"/>
-                <a:ext cx="1926321" cy="646331"/>
+                <a:off x="8686800" y="3786672"/>
+                <a:ext cx="3322040" cy="461665"/>
               </a:xfrm>
               <a:prstGeom prst="rect">
                 <a:avLst/>
@@ -14517,7 +15864,7 @@
               <a:blipFill>
                 <a:blip r:embed="rId10"/>
                 <a:stretch>
-                  <a:fillRect t="-943" r="-949" b="-2830"/>
+                  <a:fillRect b="-9211"/>
                 </a:stretch>
               </a:blipFill>
             </p:spPr>
@@ -14536,8 +15883,8 @@
           </p:sp>
         </mc:Fallback>
       </mc:AlternateContent>
-      <mc:AlternateContent xmlns:mc="http://schemas.openxmlformats.org/markup-compatibility/2006" xmlns:a14="http://schemas.microsoft.com/office/drawing/2010/main">
-        <mc:Choice Requires="a14">
+      <mc:AlternateContent xmlns:mc="http://schemas.openxmlformats.org/markup-compatibility/2006">
+        <mc:Choice xmlns:a14="http://schemas.microsoft.com/office/drawing/2010/main" Requires="a14">
           <p:sp>
             <p:nvSpPr>
               <p:cNvPr id="43" name="TextBox 42">
@@ -14552,8 +15899,8 @@
             </p:nvSpPr>
             <p:spPr>
               <a:xfrm>
-                <a:off x="9957961" y="5286504"/>
-                <a:ext cx="1367919" cy="374270"/>
+                <a:off x="9356989" y="5125672"/>
+                <a:ext cx="1367919" cy="342979"/>
               </a:xfrm>
               <a:prstGeom prst="rect">
                 <a:avLst/>
@@ -14583,13 +15930,13 @@
                 <a14:m>
                   <m:oMath xmlns:m="http://schemas.openxmlformats.org/officeDocument/2006/math">
                     <m:r>
-                      <a:rPr lang="en-US" sz="1800" b="0" i="1" smtClean="0">
+                      <a:rPr lang="en-US" sz="1600" b="0" i="1" smtClean="0">
                         <a:latin typeface="Cambria Math" panose="02040503050406030204" pitchFamily="18" charset="0"/>
                       </a:rPr>
                       <m:t>𝑂</m:t>
                     </m:r>
                     <m:r>
-                      <a:rPr lang="en-US" sz="1800" b="0" i="1" smtClean="0">
+                      <a:rPr lang="en-US" sz="1600" b="0" i="1" smtClean="0">
                         <a:latin typeface="Cambria Math" panose="02040503050406030204" pitchFamily="18" charset="0"/>
                       </a:rPr>
                       <m:t>(</m:t>
@@ -14597,14 +15944,14 @@
                     <m:sSup>
                       <m:sSupPr>
                         <m:ctrlPr>
-                          <a:rPr lang="en-US" sz="1800" i="1" smtClean="0">
+                          <a:rPr lang="en-US" sz="1600" i="1" smtClean="0">
                             <a:latin typeface="Cambria Math" panose="02040503050406030204" pitchFamily="18" charset="0"/>
                           </a:rPr>
                         </m:ctrlPr>
                       </m:sSupPr>
                       <m:e>
                         <m:r>
-                          <a:rPr lang="en-US" sz="1800" b="0" i="1" smtClean="0">
+                          <a:rPr lang="en-US" sz="1600" b="0" i="1" smtClean="0">
                             <a:latin typeface="Cambria Math" panose="02040503050406030204" pitchFamily="18" charset="0"/>
                           </a:rPr>
                           <m:t>𝑑</m:t>
@@ -14612,7 +15959,7 @@
                       </m:e>
                       <m:sup>
                         <m:r>
-                          <a:rPr lang="en-US" sz="1800" b="0" i="1" smtClean="0">
+                          <a:rPr lang="en-US" sz="1600" b="0" i="1" smtClean="0">
                             <a:latin typeface="Cambria Math" panose="02040503050406030204" pitchFamily="18" charset="0"/>
                           </a:rPr>
                           <m:t>𝑙</m:t>
@@ -14620,7 +15967,7 @@
                       </m:sup>
                     </m:sSup>
                     <m:r>
-                      <a:rPr lang="en-US" sz="1800" b="0" i="1" smtClean="0">
+                      <a:rPr lang="en-US" sz="1600" b="0" i="1" smtClean="0">
                         <a:latin typeface="Cambria Math" panose="02040503050406030204" pitchFamily="18" charset="0"/>
                       </a:rPr>
                       <m:t>)</m:t>
@@ -14628,14 +15975,14 @@
                   </m:oMath>
                 </a14:m>
                 <a:r>
-                  <a:rPr lang="en-US" dirty="0"/>
+                  <a:rPr lang="en-US" sz="1600" dirty="0"/>
                   <a:t> rows!</a:t>
                 </a:r>
               </a:p>
             </p:txBody>
           </p:sp>
         </mc:Choice>
-        <mc:Fallback xmlns="">
+        <mc:Fallback>
           <p:sp>
             <p:nvSpPr>
               <p:cNvPr id="43" name="TextBox 42">
@@ -14652,8 +15999,8 @@
             </p:nvSpPr>
             <p:spPr>
               <a:xfrm>
-                <a:off x="9957961" y="5286504"/>
-                <a:ext cx="1367919" cy="374270"/>
+                <a:off x="9356989" y="5125672"/>
+                <a:ext cx="1367919" cy="342979"/>
               </a:xfrm>
               <a:prstGeom prst="rect">
                 <a:avLst/>
@@ -14661,7 +16008,7 @@
               <a:blipFill>
                 <a:blip r:embed="rId11"/>
                 <a:stretch>
-                  <a:fillRect t="-1515" r="-1316" b="-21212"/>
+                  <a:fillRect b="-18333"/>
                 </a:stretch>
               </a:blipFill>
             </p:spPr>
@@ -14777,7 +16124,15 @@
             <a:pPr algn="ctr"/>
             <a:r>
               <a:rPr lang="en-US" sz="1000" dirty="0"/>
-              <a:t>Tricks for compression in transformers are positional encoding and the attention mechanism.</a:t>
+              <a:t>Tricks for compression in transformers are positional encoding and the </a:t>
+            </a:r>
+            <a:r>
+              <a:rPr lang="en-US" sz="1000" b="1" dirty="0"/>
+              <a:t>attention mechanism</a:t>
+            </a:r>
+            <a:r>
+              <a:rPr lang="en-US" sz="1000" dirty="0"/>
+              <a:t>.</a:t>
             </a:r>
           </a:p>
         </p:txBody>
@@ -14993,6 +16348,366 @@
               <a:r>
                 <a:rPr lang="en-US" dirty="0"/>
                 <a:t>?</a:t>
+              </a:r>
+            </a:p>
+          </p:txBody>
+        </p:sp>
+      </p:grpSp>
+      <p:grpSp>
+        <p:nvGrpSpPr>
+          <p:cNvPr id="29" name="Group 28">
+            <a:extLst>
+              <a:ext uri="{FF2B5EF4-FFF2-40B4-BE49-F238E27FC236}">
+                <a16:creationId xmlns:a16="http://schemas.microsoft.com/office/drawing/2014/main" id="{17A66860-721D-C994-443E-78A32CA6CC27}"/>
+              </a:ext>
+            </a:extLst>
+          </p:cNvPr>
+          <p:cNvGrpSpPr/>
+          <p:nvPr/>
+        </p:nvGrpSpPr>
+        <p:grpSpPr>
+          <a:xfrm>
+            <a:off x="8844554" y="3786672"/>
+            <a:ext cx="3193648" cy="2909322"/>
+            <a:chOff x="8844554" y="3786672"/>
+            <a:chExt cx="3193648" cy="2909322"/>
+          </a:xfrm>
+        </p:grpSpPr>
+        <p:sp>
+          <p:nvSpPr>
+            <p:cNvPr id="14" name="Rectangle 13">
+              <a:extLst>
+                <a:ext uri="{FF2B5EF4-FFF2-40B4-BE49-F238E27FC236}">
+                  <a16:creationId xmlns:a16="http://schemas.microsoft.com/office/drawing/2014/main" id="{1DE3961F-530C-9C25-EBDC-16BE51568717}"/>
+                </a:ext>
+              </a:extLst>
+            </p:cNvPr>
+            <p:cNvSpPr/>
+            <p:nvPr/>
+          </p:nvSpPr>
+          <p:spPr>
+            <a:xfrm>
+              <a:off x="8844554" y="3786672"/>
+              <a:ext cx="3193648" cy="2873229"/>
+            </a:xfrm>
+            <a:prstGeom prst="rect">
+              <a:avLst/>
+            </a:prstGeom>
+            <a:noFill/>
+            <a:ln w="9525" cap="flat" cmpd="sng" algn="ctr">
+              <a:solidFill>
+                <a:schemeClr val="dk1"/>
+              </a:solidFill>
+              <a:prstDash val="solid"/>
+              <a:round/>
+              <a:headEnd type="none" w="med" len="med"/>
+              <a:tailEnd type="none" w="med" len="med"/>
+            </a:ln>
+          </p:spPr>
+          <p:style>
+            <a:lnRef idx="0">
+              <a:scrgbClr r="0" g="0" b="0"/>
+            </a:lnRef>
+            <a:fillRef idx="0">
+              <a:scrgbClr r="0" g="0" b="0"/>
+            </a:fillRef>
+            <a:effectRef idx="0">
+              <a:scrgbClr r="0" g="0" b="0"/>
+            </a:effectRef>
+            <a:fontRef idx="minor">
+              <a:schemeClr val="dk1"/>
+            </a:fontRef>
+          </p:style>
+          <p:txBody>
+            <a:bodyPr rtlCol="0" anchor="ctr"/>
+            <a:lstStyle/>
+            <a:p>
+              <a:pPr algn="ctr"/>
+              <a:endParaRPr lang="en-US"/>
+            </a:p>
+          </p:txBody>
+        </p:sp>
+        <p:sp>
+          <p:nvSpPr>
+            <p:cNvPr id="19" name="Right Brace 18">
+              <a:extLst>
+                <a:ext uri="{FF2B5EF4-FFF2-40B4-BE49-F238E27FC236}">
+                  <a16:creationId xmlns:a16="http://schemas.microsoft.com/office/drawing/2014/main" id="{BDB57BDE-D89F-B400-CCCB-A8D568FEABD5}"/>
+                </a:ext>
+              </a:extLst>
+            </p:cNvPr>
+            <p:cNvSpPr/>
+            <p:nvPr/>
+          </p:nvSpPr>
+          <p:spPr>
+            <a:xfrm rot="5400000">
+              <a:off x="9799410" y="4761786"/>
+              <a:ext cx="176440" cy="1762232"/>
+            </a:xfrm>
+            <a:prstGeom prst="rightBrace">
+              <a:avLst/>
+            </a:prstGeom>
+          </p:spPr>
+          <p:style>
+            <a:lnRef idx="2">
+              <a:schemeClr val="accent1"/>
+            </a:lnRef>
+            <a:fillRef idx="0">
+              <a:schemeClr val="accent1"/>
+            </a:fillRef>
+            <a:effectRef idx="1">
+              <a:schemeClr val="accent1"/>
+            </a:effectRef>
+            <a:fontRef idx="minor">
+              <a:schemeClr val="tx1"/>
+            </a:fontRef>
+          </p:style>
+          <p:txBody>
+            <a:bodyPr rtlCol="0" anchor="ctr"/>
+            <a:lstStyle/>
+            <a:p>
+              <a:pPr algn="ctr"/>
+              <a:endParaRPr lang="en-US"/>
+            </a:p>
+          </p:txBody>
+        </p:sp>
+        <p:cxnSp>
+          <p:nvCxnSpPr>
+            <p:cNvPr id="21" name="Straight Arrow Connector 20">
+              <a:extLst>
+                <a:ext uri="{FF2B5EF4-FFF2-40B4-BE49-F238E27FC236}">
+                  <a16:creationId xmlns:a16="http://schemas.microsoft.com/office/drawing/2014/main" id="{F55AF277-DB26-8615-A032-E1AC40EC3276}"/>
+                </a:ext>
+              </a:extLst>
+            </p:cNvPr>
+            <p:cNvCxnSpPr>
+              <a:cxnSpLocks/>
+            </p:cNvCxnSpPr>
+            <p:nvPr/>
+          </p:nvCxnSpPr>
+          <p:spPr>
+            <a:xfrm flipV="1">
+              <a:off x="11102829" y="5512595"/>
+              <a:ext cx="0" cy="218527"/>
+            </a:xfrm>
+            <a:prstGeom prst="straightConnector1">
+              <a:avLst/>
+            </a:prstGeom>
+            <a:ln>
+              <a:tailEnd type="triangle"/>
+            </a:ln>
+          </p:spPr>
+          <p:style>
+            <a:lnRef idx="2">
+              <a:schemeClr val="accent1"/>
+            </a:lnRef>
+            <a:fillRef idx="0">
+              <a:schemeClr val="accent1"/>
+            </a:fillRef>
+            <a:effectRef idx="1">
+              <a:schemeClr val="accent1"/>
+            </a:effectRef>
+            <a:fontRef idx="minor">
+              <a:schemeClr val="tx1"/>
+            </a:fontRef>
+          </p:style>
+        </p:cxnSp>
+        <p:sp>
+          <p:nvSpPr>
+            <p:cNvPr id="24" name="TextBox 23">
+              <a:extLst>
+                <a:ext uri="{FF2B5EF4-FFF2-40B4-BE49-F238E27FC236}">
+                  <a16:creationId xmlns:a16="http://schemas.microsoft.com/office/drawing/2014/main" id="{45859CF7-9E56-A843-940C-57AEDADD017B}"/>
+                </a:ext>
+              </a:extLst>
+            </p:cNvPr>
+            <p:cNvSpPr txBox="1"/>
+            <p:nvPr/>
+          </p:nvSpPr>
+          <p:spPr>
+            <a:xfrm>
+              <a:off x="9514320" y="5691027"/>
+              <a:ext cx="746620" cy="307777"/>
+            </a:xfrm>
+            <a:prstGeom prst="rect">
+              <a:avLst/>
+            </a:prstGeom>
+            <a:noFill/>
+          </p:spPr>
+          <p:txBody>
+            <a:bodyPr wrap="square" rtlCol="0">
+              <a:spAutoFit/>
+            </a:bodyPr>
+            <a:lstStyle/>
+            <a:p>
+              <a:pPr algn="ctr"/>
+              <a:r>
+                <a:rPr lang="en-US" sz="1400" b="1" dirty="0">
+                  <a:solidFill>
+                    <a:schemeClr val="accent1"/>
+                  </a:solidFill>
+                </a:rPr>
+                <a:t>state</a:t>
+              </a:r>
+            </a:p>
+          </p:txBody>
+        </p:sp>
+        <p:sp>
+          <p:nvSpPr>
+            <p:cNvPr id="25" name="TextBox 24">
+              <a:extLst>
+                <a:ext uri="{FF2B5EF4-FFF2-40B4-BE49-F238E27FC236}">
+                  <a16:creationId xmlns:a16="http://schemas.microsoft.com/office/drawing/2014/main" id="{C5E3FE32-B183-50E4-1856-0674B227310B}"/>
+                </a:ext>
+              </a:extLst>
+            </p:cNvPr>
+            <p:cNvSpPr txBox="1"/>
+            <p:nvPr/>
+          </p:nvSpPr>
+          <p:spPr>
+            <a:xfrm>
+              <a:off x="10729519" y="5702248"/>
+              <a:ext cx="746620" cy="307777"/>
+            </a:xfrm>
+            <a:prstGeom prst="rect">
+              <a:avLst/>
+            </a:prstGeom>
+            <a:noFill/>
+          </p:spPr>
+          <p:txBody>
+            <a:bodyPr wrap="square" rtlCol="0">
+              <a:spAutoFit/>
+            </a:bodyPr>
+            <a:lstStyle/>
+            <a:p>
+              <a:pPr algn="ctr"/>
+              <a:r>
+                <a:rPr lang="en-US" sz="1400" b="1" dirty="0">
+                  <a:solidFill>
+                    <a:schemeClr val="accent1"/>
+                  </a:solidFill>
+                </a:rPr>
+                <a:t>action</a:t>
+              </a:r>
+            </a:p>
+          </p:txBody>
+        </p:sp>
+        <p:sp>
+          <p:nvSpPr>
+            <p:cNvPr id="26" name="Right Brace 25">
+              <a:extLst>
+                <a:ext uri="{FF2B5EF4-FFF2-40B4-BE49-F238E27FC236}">
+                  <a16:creationId xmlns:a16="http://schemas.microsoft.com/office/drawing/2014/main" id="{07FB57A7-33E6-A3C3-FACF-B509245068F2}"/>
+                </a:ext>
+              </a:extLst>
+            </p:cNvPr>
+            <p:cNvSpPr/>
+            <p:nvPr/>
+          </p:nvSpPr>
+          <p:spPr>
+            <a:xfrm rot="5400000">
+              <a:off x="10098802" y="4895009"/>
+              <a:ext cx="207306" cy="2379590"/>
+            </a:xfrm>
+            <a:prstGeom prst="rightBrace">
+              <a:avLst/>
+            </a:prstGeom>
+          </p:spPr>
+          <p:style>
+            <a:lnRef idx="2">
+              <a:schemeClr val="accent1"/>
+            </a:lnRef>
+            <a:fillRef idx="0">
+              <a:schemeClr val="accent1"/>
+            </a:fillRef>
+            <a:effectRef idx="1">
+              <a:schemeClr val="accent1"/>
+            </a:effectRef>
+            <a:fontRef idx="minor">
+              <a:schemeClr val="tx1"/>
+            </a:fontRef>
+          </p:style>
+          <p:txBody>
+            <a:bodyPr rtlCol="0" anchor="ctr"/>
+            <a:lstStyle/>
+            <a:p>
+              <a:pPr algn="ctr"/>
+              <a:endParaRPr lang="en-US"/>
+            </a:p>
+          </p:txBody>
+        </p:sp>
+        <p:sp>
+          <p:nvSpPr>
+            <p:cNvPr id="27" name="TextBox 26">
+              <a:extLst>
+                <a:ext uri="{FF2B5EF4-FFF2-40B4-BE49-F238E27FC236}">
+                  <a16:creationId xmlns:a16="http://schemas.microsoft.com/office/drawing/2014/main" id="{BFAA99BC-F161-2F0D-CDE8-D7BC3F62F8A0}"/>
+                </a:ext>
+              </a:extLst>
+            </p:cNvPr>
+            <p:cNvSpPr txBox="1"/>
+            <p:nvPr/>
+          </p:nvSpPr>
+          <p:spPr>
+            <a:xfrm>
+              <a:off x="9497669" y="6113992"/>
+              <a:ext cx="1413656" cy="307777"/>
+            </a:xfrm>
+            <a:prstGeom prst="rect">
+              <a:avLst/>
+            </a:prstGeom>
+            <a:noFill/>
+          </p:spPr>
+          <p:txBody>
+            <a:bodyPr wrap="square" rtlCol="0">
+              <a:spAutoFit/>
+            </a:bodyPr>
+            <a:lstStyle/>
+            <a:p>
+              <a:pPr algn="ctr"/>
+              <a:r>
+                <a:rPr lang="en-US" sz="1400" b="1" dirty="0">
+                  <a:solidFill>
+                    <a:schemeClr val="accent1"/>
+                  </a:solidFill>
+                </a:rPr>
+                <a:t>next state</a:t>
+              </a:r>
+            </a:p>
+          </p:txBody>
+        </p:sp>
+        <p:sp>
+          <p:nvSpPr>
+            <p:cNvPr id="28" name="TextBox 27">
+              <a:extLst>
+                <a:ext uri="{FF2B5EF4-FFF2-40B4-BE49-F238E27FC236}">
+                  <a16:creationId xmlns:a16="http://schemas.microsoft.com/office/drawing/2014/main" id="{E7D9338F-3F3A-B230-341E-DD4C3C199FFB}"/>
+                </a:ext>
+              </a:extLst>
+            </p:cNvPr>
+            <p:cNvSpPr txBox="1"/>
+            <p:nvPr/>
+          </p:nvSpPr>
+          <p:spPr>
+            <a:xfrm>
+              <a:off x="9043331" y="6388217"/>
+              <a:ext cx="2873229" cy="307777"/>
+            </a:xfrm>
+            <a:prstGeom prst="rect">
+              <a:avLst/>
+            </a:prstGeom>
+            <a:noFill/>
+          </p:spPr>
+          <p:txBody>
+            <a:bodyPr wrap="square" rtlCol="0">
+              <a:spAutoFit/>
+            </a:bodyPr>
+            <a:lstStyle/>
+            <a:p>
+              <a:pPr algn="ctr"/>
+              <a:r>
+                <a:rPr lang="en-US" sz="1400" dirty="0"/>
+                <a:t>This is just a transition model!</a:t>
               </a:r>
             </a:p>
           </p:txBody>
@@ -15517,6 +17232,51 @@
                                         </p:cTn>
                                         <p:tgtEl>
                                           <p:spTgt spid="46"/>
+                                        </p:tgtEl>
+                                        <p:attrNameLst>
+                                          <p:attrName>style.visibility</p:attrName>
+                                        </p:attrNameLst>
+                                      </p:cBhvr>
+                                      <p:to>
+                                        <p:strVal val="visible"/>
+                                      </p:to>
+                                    </p:set>
+                                  </p:childTnLst>
+                                </p:cTn>
+                              </p:par>
+                            </p:childTnLst>
+                          </p:cTn>
+                        </p:par>
+                      </p:childTnLst>
+                    </p:cTn>
+                  </p:par>
+                  <p:par>
+                    <p:cTn id="43" fill="hold">
+                      <p:stCondLst>
+                        <p:cond delay="indefinite"/>
+                      </p:stCondLst>
+                      <p:childTnLst>
+                        <p:par>
+                          <p:cTn id="44" fill="hold">
+                            <p:stCondLst>
+                              <p:cond delay="0"/>
+                            </p:stCondLst>
+                            <p:childTnLst>
+                              <p:par>
+                                <p:cTn id="45" presetID="1" presetClass="entr" presetSubtype="0" fill="hold" nodeType="clickEffect">
+                                  <p:stCondLst>
+                                    <p:cond delay="0"/>
+                                  </p:stCondLst>
+                                  <p:childTnLst>
+                                    <p:set>
+                                      <p:cBhvr>
+                                        <p:cTn id="46" dur="1" fill="hold">
+                                          <p:stCondLst>
+                                            <p:cond delay="0"/>
+                                          </p:stCondLst>
+                                        </p:cTn>
+                                        <p:tgtEl>
+                                          <p:spTgt spid="29"/>
                                         </p:tgtEl>
                                         <p:attrNameLst>
                                           <p:attrName>style.visibility</p:attrName>

--- a/slides/discussion/07_LLM_discussion.pptx
+++ b/slides/discussion/07_LLM_discussion.pptx
@@ -273,7 +273,7 @@
           <a:p>
             <a:fld id="{A0CF861B-2947-4E74-AAE0-E351222E926D}" type="datetimeFigureOut">
               <a:rPr lang="en-US" smtClean="0"/>
-              <a:t>4/6/2026</a:t>
+              <a:t>4/8/2026</a:t>
             </a:fld>
             <a:endParaRPr lang="en-US"/>
           </a:p>
@@ -471,7 +471,7 @@
           <a:p>
             <a:fld id="{A0CF861B-2947-4E74-AAE0-E351222E926D}" type="datetimeFigureOut">
               <a:rPr lang="en-US" smtClean="0"/>
-              <a:t>4/6/2026</a:t>
+              <a:t>4/8/2026</a:t>
             </a:fld>
             <a:endParaRPr lang="en-US"/>
           </a:p>
@@ -679,7 +679,7 @@
           <a:p>
             <a:fld id="{A0CF861B-2947-4E74-AAE0-E351222E926D}" type="datetimeFigureOut">
               <a:rPr lang="en-US" smtClean="0"/>
-              <a:t>4/6/2026</a:t>
+              <a:t>4/8/2026</a:t>
             </a:fld>
             <a:endParaRPr lang="en-US"/>
           </a:p>
@@ -877,7 +877,7 @@
           <a:p>
             <a:fld id="{A0CF861B-2947-4E74-AAE0-E351222E926D}" type="datetimeFigureOut">
               <a:rPr lang="en-US" smtClean="0"/>
-              <a:t>4/6/2026</a:t>
+              <a:t>4/8/2026</a:t>
             </a:fld>
             <a:endParaRPr lang="en-US"/>
           </a:p>
@@ -1152,7 +1152,7 @@
           <a:p>
             <a:fld id="{A0CF861B-2947-4E74-AAE0-E351222E926D}" type="datetimeFigureOut">
               <a:rPr lang="en-US" smtClean="0"/>
-              <a:t>4/6/2026</a:t>
+              <a:t>4/8/2026</a:t>
             </a:fld>
             <a:endParaRPr lang="en-US"/>
           </a:p>
@@ -1417,7 +1417,7 @@
           <a:p>
             <a:fld id="{A0CF861B-2947-4E74-AAE0-E351222E926D}" type="datetimeFigureOut">
               <a:rPr lang="en-US" smtClean="0"/>
-              <a:t>4/6/2026</a:t>
+              <a:t>4/8/2026</a:t>
             </a:fld>
             <a:endParaRPr lang="en-US"/>
           </a:p>
@@ -1829,7 +1829,7 @@
           <a:p>
             <a:fld id="{A0CF861B-2947-4E74-AAE0-E351222E926D}" type="datetimeFigureOut">
               <a:rPr lang="en-US" smtClean="0"/>
-              <a:t>4/6/2026</a:t>
+              <a:t>4/8/2026</a:t>
             </a:fld>
             <a:endParaRPr lang="en-US"/>
           </a:p>
@@ -1970,7 +1970,7 @@
           <a:p>
             <a:fld id="{A0CF861B-2947-4E74-AAE0-E351222E926D}" type="datetimeFigureOut">
               <a:rPr lang="en-US" smtClean="0"/>
-              <a:t>4/6/2026</a:t>
+              <a:t>4/8/2026</a:t>
             </a:fld>
             <a:endParaRPr lang="en-US"/>
           </a:p>
@@ -2083,7 +2083,7 @@
           <a:p>
             <a:fld id="{A0CF861B-2947-4E74-AAE0-E351222E926D}" type="datetimeFigureOut">
               <a:rPr lang="en-US" smtClean="0"/>
-              <a:t>4/6/2026</a:t>
+              <a:t>4/8/2026</a:t>
             </a:fld>
             <a:endParaRPr lang="en-US"/>
           </a:p>
@@ -2394,7 +2394,7 @@
           <a:p>
             <a:fld id="{A0CF861B-2947-4E74-AAE0-E351222E926D}" type="datetimeFigureOut">
               <a:rPr lang="en-US" smtClean="0"/>
-              <a:t>4/6/2026</a:t>
+              <a:t>4/8/2026</a:t>
             </a:fld>
             <a:endParaRPr lang="en-US"/>
           </a:p>
@@ -2682,7 +2682,7 @@
           <a:p>
             <a:fld id="{A0CF861B-2947-4E74-AAE0-E351222E926D}" type="datetimeFigureOut">
               <a:rPr lang="en-US" smtClean="0"/>
-              <a:t>4/6/2026</a:t>
+              <a:t>4/8/2026</a:t>
             </a:fld>
             <a:endParaRPr lang="en-US"/>
           </a:p>
@@ -2923,7 +2923,7 @@
           <a:p>
             <a:fld id="{A0CF861B-2947-4E74-AAE0-E351222E926D}" type="datetimeFigureOut">
               <a:rPr lang="en-US" smtClean="0"/>
-              <a:t>4/6/2026</a:t>
+              <a:t>4/8/2026</a:t>
             </a:fld>
             <a:endParaRPr lang="en-US"/>
           </a:p>
@@ -11464,8 +11464,8 @@
           </a:p>
         </p:txBody>
       </p:sp>
-      <mc:AlternateContent xmlns:mc="http://schemas.openxmlformats.org/markup-compatibility/2006">
-        <mc:Choice xmlns:a14="http://schemas.microsoft.com/office/drawing/2010/main" Requires="a14">
+      <mc:AlternateContent xmlns:mc="http://schemas.openxmlformats.org/markup-compatibility/2006" xmlns:a14="http://schemas.microsoft.com/office/drawing/2010/main">
+        <mc:Choice Requires="a14">
           <p:sp>
             <p:nvSpPr>
               <p:cNvPr id="3" name="Content Placeholder 2">
@@ -13199,7 +13199,7 @@
             </p:txBody>
           </p:sp>
         </mc:Choice>
-        <mc:Fallback>
+        <mc:Fallback xmlns="">
           <p:sp>
             <p:nvSpPr>
               <p:cNvPr id="3" name="Content Placeholder 2">
@@ -14232,8 +14232,8 @@
           </a:p>
         </p:txBody>
       </p:sp>
-      <mc:AlternateContent xmlns:mc="http://schemas.openxmlformats.org/markup-compatibility/2006">
-        <mc:Choice xmlns:a14="http://schemas.microsoft.com/office/drawing/2010/main" Requires="a14">
+      <mc:AlternateContent xmlns:mc="http://schemas.openxmlformats.org/markup-compatibility/2006" xmlns:a14="http://schemas.microsoft.com/office/drawing/2010/main">
+        <mc:Choice Requires="a14">
           <p:graphicFrame>
             <p:nvGraphicFramePr>
               <p:cNvPr id="35" name="Table 34">
@@ -15030,7 +15030,7 @@
             </a:graphic>
           </p:graphicFrame>
         </mc:Choice>
-        <mc:Fallback>
+        <mc:Fallback xmlns="">
           <p:graphicFrame>
             <p:nvGraphicFramePr>
               <p:cNvPr id="35" name="Table 34">
@@ -15551,8 +15551,8 @@
           </p:graphicFrame>
         </mc:Fallback>
       </mc:AlternateContent>
-      <mc:AlternateContent xmlns:mc="http://schemas.openxmlformats.org/markup-compatibility/2006">
-        <mc:Choice xmlns:a14="http://schemas.microsoft.com/office/drawing/2010/main" Requires="a14">
+      <mc:AlternateContent xmlns:mc="http://schemas.openxmlformats.org/markup-compatibility/2006" xmlns:a14="http://schemas.microsoft.com/office/drawing/2010/main">
+        <mc:Choice Requires="a14">
           <p:sp>
             <p:nvSpPr>
               <p:cNvPr id="42" name="TextBox 41">
@@ -15838,7 +15838,7 @@
             </p:txBody>
           </p:sp>
         </mc:Choice>
-        <mc:Fallback>
+        <mc:Fallback xmlns="">
           <p:sp>
             <p:nvSpPr>
               <p:cNvPr id="42" name="TextBox 41">
@@ -15883,8 +15883,8 @@
           </p:sp>
         </mc:Fallback>
       </mc:AlternateContent>
-      <mc:AlternateContent xmlns:mc="http://schemas.openxmlformats.org/markup-compatibility/2006">
-        <mc:Choice xmlns:a14="http://schemas.microsoft.com/office/drawing/2010/main" Requires="a14">
+      <mc:AlternateContent xmlns:mc="http://schemas.openxmlformats.org/markup-compatibility/2006" xmlns:a14="http://schemas.microsoft.com/office/drawing/2010/main">
+        <mc:Choice Requires="a14">
           <p:sp>
             <p:nvSpPr>
               <p:cNvPr id="43" name="TextBox 42">
@@ -15982,7 +15982,7 @@
             </p:txBody>
           </p:sp>
         </mc:Choice>
-        <mc:Fallback>
+        <mc:Fallback xmlns="">
           <p:sp>
             <p:nvSpPr>
               <p:cNvPr id="43" name="TextBox 42">
@@ -16092,13 +16092,13 @@
         </p:nvSpPr>
         <p:spPr>
           <a:xfrm>
-            <a:off x="2694331" y="5843960"/>
-            <a:ext cx="3114107" cy="457752"/>
+            <a:off x="2694331" y="5843959"/>
+            <a:ext cx="3114107" cy="544257"/>
           </a:xfrm>
           <a:prstGeom prst="wedgeRoundRectCallout">
             <a:avLst>
-              <a:gd name="adj1" fmla="val 51457"/>
-              <a:gd name="adj2" fmla="val -98668"/>
+              <a:gd name="adj1" fmla="val 49167"/>
+              <a:gd name="adj2" fmla="val -81713"/>
               <a:gd name="adj3" fmla="val 16667"/>
             </a:avLst>
           </a:prstGeom>
@@ -16124,7 +16124,14 @@
             <a:pPr algn="ctr"/>
             <a:r>
               <a:rPr lang="en-US" sz="1000" dirty="0"/>
-              <a:t>Tricks for compression in transformers are positional encoding and the </a:t>
+              <a:t>Tricks for compression in transformers are:</a:t>
+            </a:r>
+          </a:p>
+          <a:p>
+            <a:pPr algn="ctr"/>
+            <a:r>
+              <a:rPr lang="en-US" sz="1000" dirty="0"/>
+              <a:t>Embedding, positional encoding, and the </a:t>
             </a:r>
             <a:r>
               <a:rPr lang="en-US" sz="1000" b="1" dirty="0"/>
@@ -20371,20 +20378,20 @@
 </file>
 
 <file path=customXml/item1.xml><?xml version="1.0" encoding="utf-8"?>
+<p:properties xmlns:p="http://schemas.microsoft.com/office/2006/metadata/properties" xmlns:xsi="http://www.w3.org/2001/XMLSchema-instance" xmlns:pc="http://schemas.microsoft.com/office/infopath/2007/PartnerControls">
+  <documentManagement>
+    <_activity xmlns="49eab711-90d1-4c0f-9775-bfb7f5e5a799" xsi:nil="true"/>
+  </documentManagement>
+</p:properties>
+</file>
+
+<file path=customXml/item2.xml><?xml version="1.0" encoding="utf-8"?>
 <?mso-contentType ?>
 <FormTemplates xmlns="http://schemas.microsoft.com/sharepoint/v3/contenttype/forms">
   <Display>DocumentLibraryForm</Display>
   <Edit>DocumentLibraryForm</Edit>
   <New>DocumentLibraryForm</New>
 </FormTemplates>
-</file>
-
-<file path=customXml/item2.xml><?xml version="1.0" encoding="utf-8"?>
-<p:properties xmlns:p="http://schemas.microsoft.com/office/2006/metadata/properties" xmlns:xsi="http://www.w3.org/2001/XMLSchema-instance" xmlns:pc="http://schemas.microsoft.com/office/infopath/2007/PartnerControls">
-  <documentManagement>
-    <_activity xmlns="49eab711-90d1-4c0f-9775-bfb7f5e5a799" xsi:nil="true"/>
-  </documentManagement>
-</p:properties>
 </file>
 
 <file path=customXml/item3.xml><?xml version="1.0" encoding="utf-8"?>
@@ -20613,14 +20620,6 @@
 </file>
 
 <file path=customXml/itemProps1.xml><?xml version="1.0" encoding="utf-8"?>
-<ds:datastoreItem xmlns:ds="http://schemas.openxmlformats.org/officeDocument/2006/customXml" ds:itemID="{7EAB5880-6DEB-490E-8068-CD3C9FC7A3FA}">
-  <ds:schemaRefs>
-    <ds:schemaRef ds:uri="http://schemas.microsoft.com/sharepoint/v3/contenttype/forms"/>
-  </ds:schemaRefs>
-</ds:datastoreItem>
-</file>
-
-<file path=customXml/itemProps2.xml><?xml version="1.0" encoding="utf-8"?>
 <ds:datastoreItem xmlns:ds="http://schemas.openxmlformats.org/officeDocument/2006/customXml" ds:itemID="{11B526AB-E763-48A9-8676-6358C5544126}">
   <ds:schemaRefs>
     <ds:schemaRef ds:uri="http://purl.org/dc/dcmitype/"/>
@@ -20633,6 +20632,14 @@
     <ds:schemaRef ds:uri="609867d6-2629-4535-86dd-ac3b97a3ffd8"/>
     <ds:schemaRef ds:uri="49eab711-90d1-4c0f-9775-bfb7f5e5a799"/>
     <ds:schemaRef ds:uri="http://purl.org/dc/terms/"/>
+  </ds:schemaRefs>
+</ds:datastoreItem>
+</file>
+
+<file path=customXml/itemProps2.xml><?xml version="1.0" encoding="utf-8"?>
+<ds:datastoreItem xmlns:ds="http://schemas.openxmlformats.org/officeDocument/2006/customXml" ds:itemID="{7EAB5880-6DEB-490E-8068-CD3C9FC7A3FA}">
+  <ds:schemaRefs>
+    <ds:schemaRef ds:uri="http://schemas.microsoft.com/sharepoint/v3/contenttype/forms"/>
   </ds:schemaRefs>
 </ds:datastoreItem>
 </file>

--- a/slides/discussion/07_LLM_discussion.pptx
+++ b/slides/discussion/07_LLM_discussion.pptx
@@ -19,7 +19,8 @@
     <p:sldId id="263" r:id="rId16"/>
     <p:sldId id="261" r:id="rId17"/>
     <p:sldId id="262" r:id="rId18"/>
-    <p:sldId id="266" r:id="rId19"/>
+    <p:sldId id="820" r:id="rId19"/>
+    <p:sldId id="266" r:id="rId20"/>
   </p:sldIdLst>
   <p:sldSz cx="12192000" cy="6858000"/>
   <p:notesSz cx="6858000" cy="9144000"/>
@@ -119,6 +120,38 @@
     </a:lvl9pPr>
   </p:defaultTextStyle>
   <p:extLst>
+    <p:ext uri="{521415D9-36F7-43E2-AB2F-B90AF26B5E84}">
+      <p14:sectionLst xmlns:p14="http://schemas.microsoft.com/office/powerpoint/2010/main">
+        <p14:section name="Default Section" id="{9E3BC568-D9EB-4DBB-8653-EFBD1B6201D1}">
+          <p14:sldIdLst>
+            <p14:sldId id="256"/>
+          </p14:sldIdLst>
+        </p14:section>
+        <p14:section name="Introduction" id="{2536F703-5AE5-48D1-A7B5-35DFBA591515}">
+          <p14:sldIdLst>
+            <p14:sldId id="817"/>
+            <p14:sldId id="384"/>
+            <p14:sldId id="265"/>
+            <p14:sldId id="264"/>
+            <p14:sldId id="257"/>
+            <p14:sldId id="818"/>
+            <p14:sldId id="819"/>
+          </p14:sldIdLst>
+        </p14:section>
+        <p14:section name="Using LLMs" id="{EB2E06F3-49EE-4CF4-B34B-FD67CF177CB1}">
+          <p14:sldIdLst>
+            <p14:sldId id="259"/>
+            <p14:sldId id="260"/>
+            <p14:sldId id="258"/>
+            <p14:sldId id="263"/>
+            <p14:sldId id="261"/>
+            <p14:sldId id="262"/>
+            <p14:sldId id="820"/>
+            <p14:sldId id="266"/>
+          </p14:sldIdLst>
+        </p14:section>
+      </p14:sectionLst>
+    </p:ext>
     <p:ext uri="{EFAFB233-063F-42B5-8137-9DF3F51BA10A}">
       <p15:sldGuideLst xmlns:p15="http://schemas.microsoft.com/office/powerpoint/2012/main"/>
     </p:ext>
@@ -273,7 +306,7 @@
           <a:p>
             <a:fld id="{A0CF861B-2947-4E74-AAE0-E351222E926D}" type="datetimeFigureOut">
               <a:rPr lang="en-US" smtClean="0"/>
-              <a:t>4/8/2026</a:t>
+              <a:t>4/11/2026</a:t>
             </a:fld>
             <a:endParaRPr lang="en-US"/>
           </a:p>
@@ -471,7 +504,7 @@
           <a:p>
             <a:fld id="{A0CF861B-2947-4E74-AAE0-E351222E926D}" type="datetimeFigureOut">
               <a:rPr lang="en-US" smtClean="0"/>
-              <a:t>4/8/2026</a:t>
+              <a:t>4/11/2026</a:t>
             </a:fld>
             <a:endParaRPr lang="en-US"/>
           </a:p>
@@ -679,7 +712,7 @@
           <a:p>
             <a:fld id="{A0CF861B-2947-4E74-AAE0-E351222E926D}" type="datetimeFigureOut">
               <a:rPr lang="en-US" smtClean="0"/>
-              <a:t>4/8/2026</a:t>
+              <a:t>4/11/2026</a:t>
             </a:fld>
             <a:endParaRPr lang="en-US"/>
           </a:p>
@@ -877,7 +910,7 @@
           <a:p>
             <a:fld id="{A0CF861B-2947-4E74-AAE0-E351222E926D}" type="datetimeFigureOut">
               <a:rPr lang="en-US" smtClean="0"/>
-              <a:t>4/8/2026</a:t>
+              <a:t>4/11/2026</a:t>
             </a:fld>
             <a:endParaRPr lang="en-US"/>
           </a:p>
@@ -1152,7 +1185,7 @@
           <a:p>
             <a:fld id="{A0CF861B-2947-4E74-AAE0-E351222E926D}" type="datetimeFigureOut">
               <a:rPr lang="en-US" smtClean="0"/>
-              <a:t>4/8/2026</a:t>
+              <a:t>4/11/2026</a:t>
             </a:fld>
             <a:endParaRPr lang="en-US"/>
           </a:p>
@@ -1417,7 +1450,7 @@
           <a:p>
             <a:fld id="{A0CF861B-2947-4E74-AAE0-E351222E926D}" type="datetimeFigureOut">
               <a:rPr lang="en-US" smtClean="0"/>
-              <a:t>4/8/2026</a:t>
+              <a:t>4/11/2026</a:t>
             </a:fld>
             <a:endParaRPr lang="en-US"/>
           </a:p>
@@ -1829,7 +1862,7 @@
           <a:p>
             <a:fld id="{A0CF861B-2947-4E74-AAE0-E351222E926D}" type="datetimeFigureOut">
               <a:rPr lang="en-US" smtClean="0"/>
-              <a:t>4/8/2026</a:t>
+              <a:t>4/11/2026</a:t>
             </a:fld>
             <a:endParaRPr lang="en-US"/>
           </a:p>
@@ -1970,7 +2003,7 @@
           <a:p>
             <a:fld id="{A0CF861B-2947-4E74-AAE0-E351222E926D}" type="datetimeFigureOut">
               <a:rPr lang="en-US" smtClean="0"/>
-              <a:t>4/8/2026</a:t>
+              <a:t>4/11/2026</a:t>
             </a:fld>
             <a:endParaRPr lang="en-US"/>
           </a:p>
@@ -2083,7 +2116,7 @@
           <a:p>
             <a:fld id="{A0CF861B-2947-4E74-AAE0-E351222E926D}" type="datetimeFigureOut">
               <a:rPr lang="en-US" smtClean="0"/>
-              <a:t>4/8/2026</a:t>
+              <a:t>4/11/2026</a:t>
             </a:fld>
             <a:endParaRPr lang="en-US"/>
           </a:p>
@@ -2394,7 +2427,7 @@
           <a:p>
             <a:fld id="{A0CF861B-2947-4E74-AAE0-E351222E926D}" type="datetimeFigureOut">
               <a:rPr lang="en-US" smtClean="0"/>
-              <a:t>4/8/2026</a:t>
+              <a:t>4/11/2026</a:t>
             </a:fld>
             <a:endParaRPr lang="en-US"/>
           </a:p>
@@ -2682,7 +2715,7 @@
           <a:p>
             <a:fld id="{A0CF861B-2947-4E74-AAE0-E351222E926D}" type="datetimeFigureOut">
               <a:rPr lang="en-US" smtClean="0"/>
-              <a:t>4/8/2026</a:t>
+              <a:t>4/11/2026</a:t>
             </a:fld>
             <a:endParaRPr lang="en-US"/>
           </a:p>
@@ -2923,7 +2956,7 @@
           <a:p>
             <a:fld id="{A0CF861B-2947-4E74-AAE0-E351222E926D}" type="datetimeFigureOut">
               <a:rPr lang="en-US" smtClean="0"/>
-              <a:t>4/8/2026</a:t>
+              <a:t>4/11/2026</a:t>
             </a:fld>
             <a:endParaRPr lang="en-US"/>
           </a:p>
@@ -4893,116 +4926,6 @@
           </a:p>
         </p:txBody>
       </p:sp>
-      <p:sp>
-        <p:nvSpPr>
-          <p:cNvPr id="3" name="Content Placeholder 2">
-            <a:extLst>
-              <a:ext uri="{FF2B5EF4-FFF2-40B4-BE49-F238E27FC236}">
-                <a16:creationId xmlns:a16="http://schemas.microsoft.com/office/drawing/2014/main" id="{8627F2F3-19BA-9759-7B24-F24A77190033}"/>
-              </a:ext>
-            </a:extLst>
-          </p:cNvPr>
-          <p:cNvSpPr>
-            <a:spLocks noGrp="1"/>
-          </p:cNvSpPr>
-          <p:nvPr>
-            <p:ph idx="1"/>
-          </p:nvPr>
-        </p:nvSpPr>
-        <p:spPr>
-          <a:xfrm>
-            <a:off x="838200" y="1825625"/>
-            <a:ext cx="4358640" cy="4351338"/>
-          </a:xfrm>
-        </p:spPr>
-        <p:txBody>
-          <a:bodyPr>
-            <a:normAutofit fontScale="62500" lnSpcReduction="20000"/>
-          </a:bodyPr>
-          <a:lstStyle/>
-          <a:p>
-            <a:r>
-              <a:rPr lang="en-US" dirty="0"/>
-              <a:t>RAG combines an information retrieval component with a text generator model.</a:t>
-            </a:r>
-          </a:p>
-          <a:p>
-            <a:r>
-              <a:rPr lang="en-US" dirty="0"/>
-              <a:t>Approach:</a:t>
-            </a:r>
-          </a:p>
-          <a:p>
-            <a:pPr marL="914400" lvl="1" indent="-457200">
-              <a:buFont typeface="+mj-lt"/>
-              <a:buAutoNum type="arabicPeriod"/>
-            </a:pPr>
-            <a:r>
-              <a:rPr lang="en-US" dirty="0"/>
-              <a:t>RAG takes an input and retrieves a set of relevant/supporting documents given a source (e.g., Wikipedia). </a:t>
-            </a:r>
-          </a:p>
-          <a:p>
-            <a:pPr marL="914400" lvl="1" indent="-457200">
-              <a:buFont typeface="+mj-lt"/>
-              <a:buAutoNum type="arabicPeriod"/>
-            </a:pPr>
-            <a:r>
-              <a:rPr lang="en-US" dirty="0"/>
-              <a:t>The documents are concatenated as context with the original input prompt and fed to the text generator LLM.</a:t>
-            </a:r>
-          </a:p>
-          <a:p>
-            <a:pPr marL="914400" lvl="1" indent="-457200">
-              <a:buFont typeface="+mj-lt"/>
-              <a:buAutoNum type="arabicPeriod"/>
-            </a:pPr>
-            <a:r>
-              <a:rPr lang="en-US" dirty="0"/>
-              <a:t>The LLM produces the final output.</a:t>
-            </a:r>
-          </a:p>
-          <a:p>
-            <a:endParaRPr lang="en-US" dirty="0"/>
-          </a:p>
-          <a:p>
-            <a:r>
-              <a:rPr lang="en-US" dirty="0"/>
-              <a:t>This approach can reduce issues with hallucination and introduce information that was not in the training data.</a:t>
-            </a:r>
-          </a:p>
-          <a:p>
-            <a:r>
-              <a:rPr lang="en-US" dirty="0"/>
-              <a:t>Tools: </a:t>
-            </a:r>
-            <a:r>
-              <a:rPr lang="en-US" dirty="0" err="1"/>
-              <a:t>LangChain</a:t>
-            </a:r>
-            <a:r>
-              <a:rPr lang="en-US" dirty="0"/>
-              <a:t>, </a:t>
-            </a:r>
-            <a:r>
-              <a:rPr lang="en-US" dirty="0" err="1"/>
-              <a:t>LambdaIndex</a:t>
-            </a:r>
-            <a:r>
-              <a:rPr lang="en-US" dirty="0"/>
-              <a:t>, </a:t>
-            </a:r>
-            <a:r>
-              <a:rPr lang="en-US" dirty="0" err="1"/>
-              <a:t>Flowise</a:t>
-            </a:r>
-            <a:r>
-              <a:rPr lang="en-US" dirty="0"/>
-              <a:t>,…</a:t>
-            </a:r>
-          </a:p>
-        </p:txBody>
-      </p:sp>
       <p:grpSp>
         <p:nvGrpSpPr>
           <p:cNvPr id="8" name="Group 7">
@@ -5017,8 +4940,8 @@
         </p:nvGrpSpPr>
         <p:grpSpPr>
           <a:xfrm>
-            <a:off x="5312845" y="1825625"/>
-            <a:ext cx="6281189" cy="3563053"/>
+            <a:off x="5109471" y="1825625"/>
+            <a:ext cx="6700947" cy="3615719"/>
             <a:chOff x="5312845" y="1825625"/>
             <a:chExt cx="6281189" cy="3563053"/>
           </a:xfrm>
@@ -5192,6 +5115,126 @@
           </p:txBody>
         </p:sp>
       </p:grpSp>
+      <p:sp>
+        <p:nvSpPr>
+          <p:cNvPr id="3" name="Content Placeholder 2">
+            <a:extLst>
+              <a:ext uri="{FF2B5EF4-FFF2-40B4-BE49-F238E27FC236}">
+                <a16:creationId xmlns:a16="http://schemas.microsoft.com/office/drawing/2014/main" id="{8627F2F3-19BA-9759-7B24-F24A77190033}"/>
+              </a:ext>
+            </a:extLst>
+          </p:cNvPr>
+          <p:cNvSpPr>
+            <a:spLocks noGrp="1"/>
+          </p:cNvSpPr>
+          <p:nvPr>
+            <p:ph idx="1"/>
+          </p:nvPr>
+        </p:nvSpPr>
+        <p:spPr>
+          <a:xfrm>
+            <a:off x="838200" y="1825625"/>
+            <a:ext cx="4054887" cy="4351338"/>
+          </a:xfrm>
+        </p:spPr>
+        <p:txBody>
+          <a:bodyPr>
+            <a:normAutofit fontScale="55000" lnSpcReduction="20000"/>
+          </a:bodyPr>
+          <a:lstStyle/>
+          <a:p>
+            <a:r>
+              <a:rPr lang="en-US" b="1" dirty="0"/>
+              <a:t>Issue</a:t>
+            </a:r>
+            <a:r>
+              <a:rPr lang="en-US" dirty="0"/>
+              <a:t>: An LLM only knows what is in its fixed knowledge base. </a:t>
+            </a:r>
+          </a:p>
+          <a:p>
+            <a:r>
+              <a:rPr lang="en-US" dirty="0"/>
+              <a:t>RAG adds an information retrieval component to the text generator model.</a:t>
+            </a:r>
+          </a:p>
+          <a:p>
+            <a:r>
+              <a:rPr lang="en-US" dirty="0"/>
+              <a:t>Approach:</a:t>
+            </a:r>
+          </a:p>
+          <a:p>
+            <a:pPr marL="914400" lvl="1" indent="-457200">
+              <a:buFont typeface="+mj-lt"/>
+              <a:buAutoNum type="arabicPeriod"/>
+            </a:pPr>
+            <a:r>
+              <a:rPr lang="en-US" dirty="0"/>
+              <a:t>RAG takes an input and retrieves a set of relevant/supporting documents given a source (e.g., Wikipedia). </a:t>
+            </a:r>
+          </a:p>
+          <a:p>
+            <a:pPr marL="914400" lvl="1" indent="-457200">
+              <a:buFont typeface="+mj-lt"/>
+              <a:buAutoNum type="arabicPeriod"/>
+            </a:pPr>
+            <a:r>
+              <a:rPr lang="en-US" dirty="0"/>
+              <a:t>The documents are concatenated as context with the original input prompt and fed to the text generator LLM.</a:t>
+            </a:r>
+          </a:p>
+          <a:p>
+            <a:pPr marL="914400" lvl="1" indent="-457200">
+              <a:buFont typeface="+mj-lt"/>
+              <a:buAutoNum type="arabicPeriod"/>
+            </a:pPr>
+            <a:r>
+              <a:rPr lang="en-US" dirty="0"/>
+              <a:t>The LLM produces the final output.</a:t>
+            </a:r>
+          </a:p>
+          <a:p>
+            <a:endParaRPr lang="en-US" dirty="0"/>
+          </a:p>
+          <a:p>
+            <a:r>
+              <a:rPr lang="en-US" dirty="0"/>
+              <a:t>This approach can reduce issues with hallucination and introduce information that was not in the training data.</a:t>
+            </a:r>
+          </a:p>
+          <a:p>
+            <a:r>
+              <a:rPr lang="en-US" dirty="0"/>
+              <a:t>Tools: </a:t>
+            </a:r>
+            <a:r>
+              <a:rPr lang="en-US" dirty="0" err="1"/>
+              <a:t>LangChain</a:t>
+            </a:r>
+            <a:r>
+              <a:rPr lang="en-US" dirty="0"/>
+              <a:t>, </a:t>
+            </a:r>
+            <a:r>
+              <a:rPr lang="en-US" dirty="0" err="1"/>
+              <a:t>LambdaIndex</a:t>
+            </a:r>
+            <a:r>
+              <a:rPr lang="en-US" dirty="0"/>
+              <a:t>, </a:t>
+            </a:r>
+            <a:r>
+              <a:rPr lang="en-US" dirty="0" err="1"/>
+              <a:t>Flowise</a:t>
+            </a:r>
+            <a:r>
+              <a:rPr lang="en-US" dirty="0"/>
+              <a:t>,…</a:t>
+            </a:r>
+          </a:p>
+        </p:txBody>
+      </p:sp>
     </p:spTree>
     <p:extLst>
       <p:ext uri="{BB962C8B-B14F-4D97-AF65-F5344CB8AC3E}">
@@ -5250,122 +5293,6 @@
           </a:p>
         </p:txBody>
       </p:sp>
-      <p:sp>
-        <p:nvSpPr>
-          <p:cNvPr id="3" name="Content Placeholder 2">
-            <a:extLst>
-              <a:ext uri="{FF2B5EF4-FFF2-40B4-BE49-F238E27FC236}">
-                <a16:creationId xmlns:a16="http://schemas.microsoft.com/office/drawing/2014/main" id="{2F174EC8-27CC-1E0D-8F02-2C32D1B09842}"/>
-              </a:ext>
-            </a:extLst>
-          </p:cNvPr>
-          <p:cNvSpPr>
-            <a:spLocks noGrp="1"/>
-          </p:cNvSpPr>
-          <p:nvPr>
-            <p:ph idx="1"/>
-          </p:nvPr>
-        </p:nvSpPr>
-        <p:spPr>
-          <a:xfrm>
-            <a:off x="838200" y="1825625"/>
-            <a:ext cx="5007964" cy="4351338"/>
-          </a:xfrm>
-        </p:spPr>
-        <p:txBody>
-          <a:bodyPr>
-            <a:normAutofit fontScale="55000" lnSpcReduction="20000"/>
-          </a:bodyPr>
-          <a:lstStyle/>
-          <a:p>
-            <a:r>
-              <a:rPr lang="en-US" dirty="0"/>
-              <a:t>Enables LLMs to use tools like browsing the web, a calculator, or executing code.</a:t>
-            </a:r>
-          </a:p>
-          <a:p>
-            <a:endParaRPr lang="en-US" dirty="0"/>
-          </a:p>
-          <a:p>
-            <a:r>
-              <a:rPr lang="en-US" b="1" dirty="0"/>
-              <a:t>Training</a:t>
-            </a:r>
-            <a:r>
-              <a:rPr lang="en-US" dirty="0"/>
-              <a:t>: LLMs are finetuned using demonstrations of how the tool is correctly used.</a:t>
-            </a:r>
-          </a:p>
-          <a:p>
-            <a:endParaRPr lang="en-US" b="1" dirty="0"/>
-          </a:p>
-          <a:p>
-            <a:r>
-              <a:rPr lang="en-US" b="1" dirty="0"/>
-              <a:t>Execution</a:t>
-            </a:r>
-            <a:r>
-              <a:rPr lang="en-US" dirty="0"/>
-              <a:t>:</a:t>
-            </a:r>
-          </a:p>
-          <a:p>
-            <a:pPr marL="514350" indent="-514350">
-              <a:buFont typeface="+mj-lt"/>
-              <a:buAutoNum type="arabicPeriod"/>
-            </a:pPr>
-            <a:r>
-              <a:rPr lang="en-US" dirty="0"/>
-              <a:t>The LLM generates a structured output that signals a tool call. E.g.: “browser(http://…”</a:t>
-            </a:r>
-          </a:p>
-          <a:p>
-            <a:pPr marL="514350" indent="-514350">
-              <a:buFont typeface="+mj-lt"/>
-              <a:buAutoNum type="arabicPeriod"/>
-            </a:pPr>
-            <a:r>
-              <a:rPr lang="en-US" dirty="0"/>
-              <a:t>The tool call is intercepted by the surrounding program, and the tool is executed. </a:t>
-            </a:r>
-          </a:p>
-          <a:p>
-            <a:pPr marL="514350" indent="-514350">
-              <a:buFont typeface="+mj-lt"/>
-              <a:buAutoNum type="arabicPeriod"/>
-            </a:pPr>
-            <a:r>
-              <a:rPr lang="en-US" dirty="0"/>
-              <a:t>The tool’s result is returned to the LLM to create the final output.</a:t>
-            </a:r>
-          </a:p>
-          <a:p>
-            <a:pPr marL="514350" indent="-514350">
-              <a:buFont typeface="+mj-lt"/>
-              <a:buAutoNum type="arabicPeriod"/>
-            </a:pPr>
-            <a:endParaRPr lang="en-US" dirty="0"/>
-          </a:p>
-          <a:p>
-            <a:r>
-              <a:rPr lang="en-US" b="1" dirty="0"/>
-              <a:t>Frameworks</a:t>
-            </a:r>
-            <a:r>
-              <a:rPr lang="en-US" dirty="0"/>
-              <a:t>: </a:t>
-            </a:r>
-            <a:r>
-              <a:rPr lang="en-US" dirty="0" err="1"/>
-              <a:t>LangChain</a:t>
-            </a:r>
-            <a:r>
-              <a:rPr lang="en-US" dirty="0"/>
-              <a:t>, LangGraph, OpenAI Agents SDK, …</a:t>
-            </a:r>
-          </a:p>
-        </p:txBody>
-      </p:sp>
       <p:grpSp>
         <p:nvGrpSpPr>
           <p:cNvPr id="7" name="Group 6">
@@ -5380,10 +5307,10 @@
         </p:nvGrpSpPr>
         <p:grpSpPr>
           <a:xfrm>
-            <a:off x="5726243" y="944380"/>
-            <a:ext cx="6688923" cy="3774203"/>
-            <a:chOff x="5726243" y="944380"/>
-            <a:chExt cx="6688923" cy="3774203"/>
+            <a:off x="4521826" y="1662673"/>
+            <a:ext cx="8289281" cy="4486275"/>
+            <a:chOff x="5485680" y="802125"/>
+            <a:chExt cx="7289970" cy="3916459"/>
           </a:xfrm>
         </p:grpSpPr>
         <p:grpSp>
@@ -5400,10 +5327,10 @@
           </p:nvGrpSpPr>
           <p:grpSpPr>
             <a:xfrm>
-              <a:off x="5726243" y="944380"/>
-              <a:ext cx="6688923" cy="3593554"/>
-              <a:chOff x="5726243" y="944380"/>
-              <a:chExt cx="6688923" cy="3593554"/>
+              <a:off x="5485680" y="802125"/>
+              <a:ext cx="7289970" cy="3916459"/>
+              <a:chOff x="5485680" y="802125"/>
+              <a:chExt cx="7289970" cy="3916459"/>
             </a:xfrm>
           </p:grpSpPr>
           <p:pic>
@@ -5435,8 +5362,8 @@
             </p:blipFill>
             <p:spPr bwMode="auto">
               <a:xfrm>
-                <a:off x="5726243" y="944380"/>
-                <a:ext cx="6688923" cy="3593554"/>
+                <a:off x="5485680" y="802125"/>
+                <a:ext cx="7289970" cy="3916459"/>
               </a:xfrm>
               <a:prstGeom prst="rect">
                 <a:avLst/>
@@ -5555,6 +5482,122 @@
           </p:txBody>
         </p:sp>
       </p:grpSp>
+      <p:sp>
+        <p:nvSpPr>
+          <p:cNvPr id="3" name="Content Placeholder 2">
+            <a:extLst>
+              <a:ext uri="{FF2B5EF4-FFF2-40B4-BE49-F238E27FC236}">
+                <a16:creationId xmlns:a16="http://schemas.microsoft.com/office/drawing/2014/main" id="{2F174EC8-27CC-1E0D-8F02-2C32D1B09842}"/>
+              </a:ext>
+            </a:extLst>
+          </p:cNvPr>
+          <p:cNvSpPr>
+            <a:spLocks noGrp="1"/>
+          </p:cNvSpPr>
+          <p:nvPr>
+            <p:ph idx="1"/>
+          </p:nvPr>
+        </p:nvSpPr>
+        <p:spPr>
+          <a:xfrm>
+            <a:off x="838201" y="1825625"/>
+            <a:ext cx="4082808" cy="4351338"/>
+          </a:xfrm>
+        </p:spPr>
+        <p:txBody>
+          <a:bodyPr>
+            <a:normAutofit fontScale="55000" lnSpcReduction="20000"/>
+          </a:bodyPr>
+          <a:lstStyle/>
+          <a:p>
+            <a:r>
+              <a:rPr lang="en-US" dirty="0"/>
+              <a:t>Enables LLMs to use tools like browsing the web, a calculator, or executing code.</a:t>
+            </a:r>
+          </a:p>
+          <a:p>
+            <a:endParaRPr lang="en-US" dirty="0"/>
+          </a:p>
+          <a:p>
+            <a:r>
+              <a:rPr lang="en-US" b="1" dirty="0"/>
+              <a:t>Training</a:t>
+            </a:r>
+            <a:r>
+              <a:rPr lang="en-US" dirty="0"/>
+              <a:t>: LLMs are finetuned using demonstrations of how the tool is correctly used.</a:t>
+            </a:r>
+          </a:p>
+          <a:p>
+            <a:endParaRPr lang="en-US" b="1" dirty="0"/>
+          </a:p>
+          <a:p>
+            <a:r>
+              <a:rPr lang="en-US" b="1" dirty="0"/>
+              <a:t>Execution</a:t>
+            </a:r>
+            <a:r>
+              <a:rPr lang="en-US" dirty="0"/>
+              <a:t>:</a:t>
+            </a:r>
+          </a:p>
+          <a:p>
+            <a:pPr marL="514350" indent="-514350">
+              <a:buFont typeface="+mj-lt"/>
+              <a:buAutoNum type="arabicPeriod"/>
+            </a:pPr>
+            <a:r>
+              <a:rPr lang="en-US" dirty="0"/>
+              <a:t>The LLM generates a structured output that signals a tool call. E.g.: “browser(http://…”</a:t>
+            </a:r>
+          </a:p>
+          <a:p>
+            <a:pPr marL="514350" indent="-514350">
+              <a:buFont typeface="+mj-lt"/>
+              <a:buAutoNum type="arabicPeriod"/>
+            </a:pPr>
+            <a:r>
+              <a:rPr lang="en-US" dirty="0"/>
+              <a:t>The tool call is intercepted by the surrounding program, and the tool is executed. </a:t>
+            </a:r>
+          </a:p>
+          <a:p>
+            <a:pPr marL="514350" indent="-514350">
+              <a:buFont typeface="+mj-lt"/>
+              <a:buAutoNum type="arabicPeriod"/>
+            </a:pPr>
+            <a:r>
+              <a:rPr lang="en-US" dirty="0"/>
+              <a:t>The tool’s result is returned to the LLM to create the final output.</a:t>
+            </a:r>
+          </a:p>
+          <a:p>
+            <a:pPr marL="514350" indent="-514350">
+              <a:buFont typeface="+mj-lt"/>
+              <a:buAutoNum type="arabicPeriod"/>
+            </a:pPr>
+            <a:endParaRPr lang="en-US" dirty="0"/>
+          </a:p>
+          <a:p>
+            <a:r>
+              <a:rPr lang="en-US" b="1" dirty="0"/>
+              <a:t>Frameworks</a:t>
+            </a:r>
+            <a:r>
+              <a:rPr lang="en-US" dirty="0"/>
+              <a:t>: </a:t>
+            </a:r>
+            <a:r>
+              <a:rPr lang="en-US" dirty="0" err="1"/>
+              <a:t>LangChain</a:t>
+            </a:r>
+            <a:r>
+              <a:rPr lang="en-US" dirty="0"/>
+              <a:t>, LangGraph, OpenAI Agents SDK, …</a:t>
+            </a:r>
+          </a:p>
+        </p:txBody>
+      </p:sp>
     </p:spTree>
     <p:extLst>
       <p:ext uri="{BB962C8B-B14F-4D97-AF65-F5344CB8AC3E}">
@@ -7295,12 +7338,12 @@
         <p:spPr>
           <a:xfrm>
             <a:off x="838200" y="1825625"/>
-            <a:ext cx="4110728" cy="4351338"/>
+            <a:ext cx="3259150" cy="4351338"/>
           </a:xfrm>
         </p:spPr>
         <p:txBody>
           <a:bodyPr>
-            <a:normAutofit fontScale="62500" lnSpcReduction="20000"/>
+            <a:normAutofit fontScale="55000" lnSpcReduction="20000"/>
           </a:bodyPr>
           <a:lstStyle/>
           <a:p>
@@ -7369,8 +7412,8 @@
         </p:nvGrpSpPr>
         <p:grpSpPr>
           <a:xfrm>
-            <a:off x="5093185" y="1690688"/>
-            <a:ext cx="7308220" cy="4609385"/>
+            <a:off x="3975777" y="1453363"/>
+            <a:ext cx="8464599" cy="5260030"/>
             <a:chOff x="5093185" y="1369322"/>
             <a:chExt cx="7308220" cy="4609385"/>
           </a:xfrm>
@@ -7492,6 +7535,359 @@
 </file>
 
 <file path=ppt/slides/slide15.xml><?xml version="1.0" encoding="utf-8"?>
+<p:sld xmlns:a="http://schemas.openxmlformats.org/drawingml/2006/main" xmlns:r="http://schemas.openxmlformats.org/officeDocument/2006/relationships" xmlns:p="http://schemas.openxmlformats.org/presentationml/2006/main">
+  <p:cSld>
+    <p:spTree>
+      <p:nvGrpSpPr>
+        <p:cNvPr id="1" name=""/>
+        <p:cNvGrpSpPr/>
+        <p:nvPr/>
+      </p:nvGrpSpPr>
+      <p:grpSpPr>
+        <a:xfrm>
+          <a:off x="0" y="0"/>
+          <a:ext cx="0" cy="0"/>
+          <a:chOff x="0" y="0"/>
+          <a:chExt cx="0" cy="0"/>
+        </a:xfrm>
+      </p:grpSpPr>
+      <p:sp>
+        <p:nvSpPr>
+          <p:cNvPr id="2" name="Title 1">
+            <a:extLst>
+              <a:ext uri="{FF2B5EF4-FFF2-40B4-BE49-F238E27FC236}">
+                <a16:creationId xmlns:a16="http://schemas.microsoft.com/office/drawing/2014/main" id="{64A66FE5-A533-39CC-165E-E5EACB1C6470}"/>
+              </a:ext>
+            </a:extLst>
+          </p:cNvPr>
+          <p:cNvSpPr>
+            <a:spLocks noGrp="1"/>
+          </p:cNvSpPr>
+          <p:nvPr>
+            <p:ph type="title"/>
+          </p:nvPr>
+        </p:nvSpPr>
+        <p:spPr/>
+        <p:txBody>
+          <a:bodyPr/>
+          <a:lstStyle/>
+          <a:p>
+            <a:r>
+              <a:rPr lang="en-US" dirty="0"/>
+              <a:t>Argentic AI: </a:t>
+            </a:r>
+            <a:r>
+              <a:rPr lang="en-US" dirty="0" err="1"/>
+              <a:t>ReAct</a:t>
+            </a:r>
+            <a:r>
+              <a:rPr lang="en-US" dirty="0"/>
+              <a:t> Pattern</a:t>
+            </a:r>
+          </a:p>
+        </p:txBody>
+      </p:sp>
+      <p:sp>
+        <p:nvSpPr>
+          <p:cNvPr id="3" name="Content Placeholder 2">
+            <a:extLst>
+              <a:ext uri="{FF2B5EF4-FFF2-40B4-BE49-F238E27FC236}">
+                <a16:creationId xmlns:a16="http://schemas.microsoft.com/office/drawing/2014/main" id="{11832D08-7607-A2FF-4EC7-812B2A46D35E}"/>
+              </a:ext>
+            </a:extLst>
+          </p:cNvPr>
+          <p:cNvSpPr>
+            <a:spLocks noGrp="1"/>
+          </p:cNvSpPr>
+          <p:nvPr>
+            <p:ph idx="1"/>
+          </p:nvPr>
+        </p:nvSpPr>
+        <p:spPr>
+          <a:xfrm>
+            <a:off x="838200" y="1825625"/>
+            <a:ext cx="4508597" cy="4351338"/>
+          </a:xfrm>
+        </p:spPr>
+        <p:txBody>
+          <a:bodyPr/>
+          <a:lstStyle/>
+          <a:p>
+            <a:r>
+              <a:rPr lang="en-US" b="1" dirty="0"/>
+              <a:t>Idea</a:t>
+            </a:r>
+            <a:r>
+              <a:rPr lang="en-US" dirty="0"/>
+              <a:t>: Combine reasoning with acting (tool calls) to perform multi-step tasks.</a:t>
+            </a:r>
+          </a:p>
+          <a:p>
+            <a:endParaRPr lang="en-US" dirty="0"/>
+          </a:p>
+          <a:p>
+            <a:r>
+              <a:rPr lang="en-US" b="1" dirty="0"/>
+              <a:t>Example</a:t>
+            </a:r>
+            <a:r>
+              <a:rPr lang="en-US" dirty="0"/>
+              <a:t>: A research agent</a:t>
+            </a:r>
+          </a:p>
+          <a:p>
+            <a:endParaRPr lang="en-US" dirty="0"/>
+          </a:p>
+          <a:p>
+            <a:r>
+              <a:rPr lang="en-US" b="1" dirty="0"/>
+              <a:t>Tools</a:t>
+            </a:r>
+            <a:r>
+              <a:rPr lang="en-US" dirty="0"/>
+              <a:t>: </a:t>
+            </a:r>
+            <a:r>
+              <a:rPr lang="en-US" dirty="0" err="1"/>
+              <a:t>OpenClaw</a:t>
+            </a:r>
+            <a:endParaRPr lang="en-US" dirty="0"/>
+          </a:p>
+        </p:txBody>
+      </p:sp>
+      <p:grpSp>
+        <p:nvGrpSpPr>
+          <p:cNvPr id="19" name="Group 18">
+            <a:extLst>
+              <a:ext uri="{FF2B5EF4-FFF2-40B4-BE49-F238E27FC236}">
+                <a16:creationId xmlns:a16="http://schemas.microsoft.com/office/drawing/2014/main" id="{07D5ECC2-775E-2B59-329D-236DFE41AD4C}"/>
+              </a:ext>
+            </a:extLst>
+          </p:cNvPr>
+          <p:cNvGrpSpPr/>
+          <p:nvPr/>
+        </p:nvGrpSpPr>
+        <p:grpSpPr>
+          <a:xfrm>
+            <a:off x="5221155" y="1825625"/>
+            <a:ext cx="6540403" cy="3517997"/>
+            <a:chOff x="5283976" y="2226668"/>
+            <a:chExt cx="6540403" cy="3517997"/>
+          </a:xfrm>
+        </p:grpSpPr>
+        <p:grpSp>
+          <p:nvGrpSpPr>
+            <p:cNvPr id="17" name="Group 16">
+              <a:extLst>
+                <a:ext uri="{FF2B5EF4-FFF2-40B4-BE49-F238E27FC236}">
+                  <a16:creationId xmlns:a16="http://schemas.microsoft.com/office/drawing/2014/main" id="{9E92A7DD-880F-746C-8F94-392728BEAD83}"/>
+                </a:ext>
+              </a:extLst>
+            </p:cNvPr>
+            <p:cNvGrpSpPr/>
+            <p:nvPr/>
+          </p:nvGrpSpPr>
+          <p:grpSpPr>
+            <a:xfrm>
+              <a:off x="5390637" y="2316786"/>
+              <a:ext cx="6412802" cy="3369015"/>
+              <a:chOff x="3096674" y="2224453"/>
+              <a:chExt cx="6412802" cy="3369015"/>
+            </a:xfrm>
+          </p:grpSpPr>
+          <p:pic>
+            <p:nvPicPr>
+              <p:cNvPr id="1026" name="Picture 2" descr="How to Build a ReAct AI Agent for Cybersecurity Scanning with Python and  LangGraph | Vitalii Honchar's Blog">
+                <a:extLst>
+                  <a:ext uri="{FF2B5EF4-FFF2-40B4-BE49-F238E27FC236}">
+                    <a16:creationId xmlns:a16="http://schemas.microsoft.com/office/drawing/2014/main" id="{8143CE0D-94BC-FA58-B91E-91618DD25E4D}"/>
+                  </a:ext>
+                </a:extLst>
+              </p:cNvPr>
+              <p:cNvPicPr>
+                <a:picLocks noChangeAspect="1" noChangeArrowheads="1"/>
+              </p:cNvPicPr>
+              <p:nvPr/>
+            </p:nvPicPr>
+            <p:blipFill>
+              <a:blip r:embed="rId2">
+                <a:extLst>
+                  <a:ext uri="{28A0092B-C50C-407E-A947-70E740481C1C}">
+                    <a14:useLocalDpi xmlns:a14="http://schemas.microsoft.com/office/drawing/2010/main" val="0"/>
+                  </a:ext>
+                </a:extLst>
+              </a:blip>
+              <a:srcRect/>
+              <a:stretch>
+                <a:fillRect/>
+              </a:stretch>
+            </p:blipFill>
+            <p:spPr bwMode="auto">
+              <a:xfrm>
+                <a:off x="3096674" y="2409119"/>
+                <a:ext cx="6412802" cy="3184349"/>
+              </a:xfrm>
+              <a:prstGeom prst="rect">
+                <a:avLst/>
+              </a:prstGeom>
+              <a:noFill/>
+              <a:extLst>
+                <a:ext uri="{909E8E84-426E-40DD-AFC4-6F175D3DCCD1}">
+                  <a14:hiddenFill xmlns:a14="http://schemas.microsoft.com/office/drawing/2010/main">
+                    <a:solidFill>
+                      <a:srgbClr val="FFFFFF"/>
+                    </a:solidFill>
+                  </a14:hiddenFill>
+                </a:ext>
+              </a:extLst>
+            </p:spPr>
+          </p:pic>
+          <p:sp>
+            <p:nvSpPr>
+              <p:cNvPr id="14" name="TextBox 13">
+                <a:extLst>
+                  <a:ext uri="{FF2B5EF4-FFF2-40B4-BE49-F238E27FC236}">
+                    <a16:creationId xmlns:a16="http://schemas.microsoft.com/office/drawing/2014/main" id="{363500CB-327E-7F1F-577F-B558CA764E6A}"/>
+                  </a:ext>
+                </a:extLst>
+              </p:cNvPr>
+              <p:cNvSpPr txBox="1"/>
+              <p:nvPr/>
+            </p:nvSpPr>
+            <p:spPr>
+              <a:xfrm>
+                <a:off x="4453337" y="2224453"/>
+                <a:ext cx="1256427" cy="369332"/>
+              </a:xfrm>
+              <a:prstGeom prst="rect">
+                <a:avLst/>
+              </a:prstGeom>
+              <a:noFill/>
+            </p:spPr>
+            <p:txBody>
+              <a:bodyPr wrap="square" rtlCol="0">
+                <a:spAutoFit/>
+              </a:bodyPr>
+              <a:lstStyle/>
+              <a:p>
+                <a:pPr algn="ctr"/>
+                <a:r>
+                  <a:rPr lang="en-US" i="1" dirty="0"/>
+                  <a:t>Task</a:t>
+                </a:r>
+              </a:p>
+            </p:txBody>
+          </p:sp>
+          <p:cxnSp>
+            <p:nvCxnSpPr>
+              <p:cNvPr id="16" name="Straight Arrow Connector 15">
+                <a:extLst>
+                  <a:ext uri="{FF2B5EF4-FFF2-40B4-BE49-F238E27FC236}">
+                    <a16:creationId xmlns:a16="http://schemas.microsoft.com/office/drawing/2014/main" id="{33DA6C84-D69C-A472-CF04-47B7E87D5140}"/>
+                  </a:ext>
+                </a:extLst>
+              </p:cNvPr>
+              <p:cNvCxnSpPr/>
+              <p:nvPr/>
+            </p:nvCxnSpPr>
+            <p:spPr>
+              <a:xfrm>
+                <a:off x="5081551" y="2575676"/>
+                <a:ext cx="0" cy="432770"/>
+              </a:xfrm>
+              <a:prstGeom prst="straightConnector1">
+                <a:avLst/>
+              </a:prstGeom>
+              <a:ln>
+                <a:headEnd type="none" w="med" len="med"/>
+                <a:tailEnd type="arrow" w="med" len="med"/>
+              </a:ln>
+            </p:spPr>
+            <p:style>
+              <a:lnRef idx="2">
+                <a:schemeClr val="dk1"/>
+              </a:lnRef>
+              <a:fillRef idx="0">
+                <a:schemeClr val="dk1"/>
+              </a:fillRef>
+              <a:effectRef idx="1">
+                <a:schemeClr val="dk1"/>
+              </a:effectRef>
+              <a:fontRef idx="minor">
+                <a:schemeClr val="tx1"/>
+              </a:fontRef>
+            </p:style>
+          </p:cxnSp>
+        </p:grpSp>
+        <p:sp>
+          <p:nvSpPr>
+            <p:cNvPr id="18" name="Rectangle 17">
+              <a:extLst>
+                <a:ext uri="{FF2B5EF4-FFF2-40B4-BE49-F238E27FC236}">
+                  <a16:creationId xmlns:a16="http://schemas.microsoft.com/office/drawing/2014/main" id="{A4BBD54F-F998-4617-EDD7-7E67E2048718}"/>
+                </a:ext>
+              </a:extLst>
+            </p:cNvPr>
+            <p:cNvSpPr/>
+            <p:nvPr/>
+          </p:nvSpPr>
+          <p:spPr>
+            <a:xfrm>
+              <a:off x="5283976" y="2226668"/>
+              <a:ext cx="6540403" cy="3517997"/>
+            </a:xfrm>
+            <a:prstGeom prst="rect">
+              <a:avLst/>
+            </a:prstGeom>
+            <a:noFill/>
+            <a:ln w="9525" cap="flat" cmpd="sng" algn="ctr">
+              <a:solidFill>
+                <a:schemeClr val="dk1"/>
+              </a:solidFill>
+              <a:prstDash val="solid"/>
+              <a:round/>
+              <a:headEnd type="none" w="med" len="med"/>
+              <a:tailEnd type="none" w="med" len="med"/>
+            </a:ln>
+          </p:spPr>
+          <p:style>
+            <a:lnRef idx="0">
+              <a:scrgbClr r="0" g="0" b="0"/>
+            </a:lnRef>
+            <a:fillRef idx="0">
+              <a:scrgbClr r="0" g="0" b="0"/>
+            </a:fillRef>
+            <a:effectRef idx="0">
+              <a:scrgbClr r="0" g="0" b="0"/>
+            </a:effectRef>
+            <a:fontRef idx="minor">
+              <a:schemeClr val="dk1"/>
+            </a:fontRef>
+          </p:style>
+          <p:txBody>
+            <a:bodyPr rtlCol="0" anchor="ctr"/>
+            <a:lstStyle/>
+            <a:p>
+              <a:pPr algn="ctr"/>
+              <a:endParaRPr lang="en-US"/>
+            </a:p>
+          </p:txBody>
+        </p:sp>
+      </p:grpSp>
+    </p:spTree>
+    <p:extLst>
+      <p:ext uri="{BB962C8B-B14F-4D97-AF65-F5344CB8AC3E}">
+        <p14:creationId xmlns:p14="http://schemas.microsoft.com/office/powerpoint/2010/main" val="2041006477"/>
+      </p:ext>
+    </p:extLst>
+  </p:cSld>
+  <p:clrMapOvr>
+    <a:masterClrMapping/>
+  </p:clrMapOvr>
+</p:sld>
+</file>
+
+<file path=ppt/slides/slide16.xml><?xml version="1.0" encoding="utf-8"?>
 <p:sld xmlns:a="http://schemas.openxmlformats.org/drawingml/2006/main" xmlns:r="http://schemas.openxmlformats.org/officeDocument/2006/relationships" xmlns:p="http://schemas.openxmlformats.org/presentationml/2006/main">
   <p:cSld>
     <p:bg>
@@ -10433,13 +10829,13 @@
         </p:nvSpPr>
         <p:spPr>
           <a:xfrm>
-            <a:off x="838200" y="1825625"/>
-            <a:ext cx="7046626" cy="4351338"/>
+            <a:off x="838200" y="1598455"/>
+            <a:ext cx="7046626" cy="4578508"/>
           </a:xfrm>
         </p:spPr>
         <p:txBody>
           <a:bodyPr>
-            <a:normAutofit fontScale="70000" lnSpcReduction="20000"/>
+            <a:normAutofit fontScale="62500" lnSpcReduction="20000"/>
           </a:bodyPr>
           <a:lstStyle/>
           <a:p>
@@ -10530,6 +10926,28 @@
             <a:r>
               <a:rPr lang="en-US" dirty="0"/>
               <a:t>New words are generated from resulting vectors by learning a function that maps vectors back to tokens.</a:t>
+            </a:r>
+          </a:p>
+          <a:p>
+            <a:r>
+              <a:rPr lang="en-US" dirty="0"/>
+              <a:t>The complete response is created </a:t>
+            </a:r>
+            <a:r>
+              <a:rPr lang="en-US" b="1" dirty="0"/>
+              <a:t>token-by-token</a:t>
+            </a:r>
+            <a:r>
+              <a:rPr lang="en-US" dirty="0"/>
+              <a:t> (</a:t>
+            </a:r>
+            <a:r>
+              <a:rPr lang="en-US" dirty="0" err="1"/>
+              <a:t>autoregessive</a:t>
+            </a:r>
+            <a:r>
+              <a:rPr lang="en-US" dirty="0"/>
+              <a:t> generation). LLMs may hallucinate by creating low-probability tokens, and autoregression will amplify this issue. </a:t>
             </a:r>
           </a:p>
         </p:txBody>
@@ -10744,7 +11162,7 @@
           <a:p>
             <a:r>
               <a:rPr lang="en-US" dirty="0"/>
-              <a:t>Prompts and Generation</a:t>
+              <a:t>Prompts and Context</a:t>
             </a:r>
           </a:p>
         </p:txBody>
@@ -10862,29 +11280,21 @@
           <a:p>
             <a:r>
               <a:rPr lang="en-US" dirty="0"/>
-              <a:t>The context window size is limited by the model, and the model “forgets” everything that drops out of the window.</a:t>
-            </a:r>
-          </a:p>
-          <a:p>
+              <a:t>The context information can be seen as the </a:t>
+            </a:r>
+            <a:r>
+              <a:rPr lang="en-US" b="1" dirty="0"/>
+              <a:t>LLM’s memory</a:t>
+            </a:r>
             <a:r>
               <a:rPr lang="en-US" dirty="0"/>
-              <a:t>The complete response is created </a:t>
-            </a:r>
-            <a:r>
-              <a:rPr lang="en-US" b="1" dirty="0"/>
-              <a:t>token-by-token</a:t>
-            </a:r>
+              <a:t>, so it remembers things that are not in its fixed knowledge base.</a:t>
+            </a:r>
+          </a:p>
+          <a:p>
             <a:r>
               <a:rPr lang="en-US" dirty="0"/>
-              <a:t> (</a:t>
-            </a:r>
-            <a:r>
-              <a:rPr lang="en-US" dirty="0" err="1"/>
-              <a:t>autoregessive</a:t>
-            </a:r>
-            <a:r>
-              <a:rPr lang="en-US" dirty="0"/>
-              <a:t> generation). LLMs may hallucinate by creating low-probability tokens, and autoregression will amplify this issue. </a:t>
+              <a:t>The context window size is limited, and the model “forgets” everything that drops out of the window.</a:t>
             </a:r>
           </a:p>
         </p:txBody>
@@ -16533,8 +16943,8 @@
           </p:nvSpPr>
           <p:spPr>
             <a:xfrm>
-              <a:off x="9514320" y="5691027"/>
-              <a:ext cx="746620" cy="307777"/>
+              <a:off x="9259641" y="5691074"/>
+              <a:ext cx="1505396" cy="307777"/>
             </a:xfrm>
             <a:prstGeom prst="rect">
               <a:avLst/>
@@ -16554,7 +16964,7 @@
                     <a:schemeClr val="accent1"/>
                   </a:solidFill>
                 </a:rPr>
-                <a:t>state</a:t>
+                <a:t>State = percept</a:t>
               </a:r>
             </a:p>
           </p:txBody>
@@ -16657,8 +17067,8 @@
           </p:nvSpPr>
           <p:spPr>
             <a:xfrm>
-              <a:off x="9497669" y="6113992"/>
-              <a:ext cx="1413656" cy="307777"/>
+              <a:off x="9126361" y="6135039"/>
+              <a:ext cx="2326710" cy="307777"/>
             </a:xfrm>
             <a:prstGeom prst="rect">
               <a:avLst/>
@@ -16678,7 +17088,7 @@
                     <a:schemeClr val="accent1"/>
                   </a:solidFill>
                 </a:rPr>
-                <a:t>next state</a:t>
+                <a:t>next state = next  percept</a:t>
               </a:r>
             </a:p>
           </p:txBody>
@@ -19773,21 +20183,6 @@
             <a:pPr lvl="1"/>
             <a:r>
               <a:rPr lang="en-US" b="1" dirty="0"/>
-              <a:t>Few-Shot Prompting: </a:t>
-            </a:r>
-            <a:r>
-              <a:rPr lang="en-US" dirty="0"/>
-              <a:t>Provide demonstrations in the prompt to steer the model to better performance. This is also called “in-context learning”</a:t>
-            </a:r>
-          </a:p>
-          <a:p>
-            <a:pPr lvl="1"/>
-            <a:endParaRPr lang="en-US" b="1" dirty="0"/>
-          </a:p>
-          <a:p>
-            <a:pPr lvl="1"/>
-            <a:r>
-              <a:rPr lang="en-US" b="1" dirty="0"/>
               <a:t>Chain-of-thought</a:t>
             </a:r>
             <a:r>
@@ -19813,6 +20208,25 @@
               <a:rPr lang="en-US" dirty="0"/>
               <a:t>! </a:t>
             </a:r>
+          </a:p>
+          <a:p>
+            <a:pPr lvl="1"/>
+            <a:endParaRPr lang="en-US" b="1" dirty="0"/>
+          </a:p>
+          <a:p>
+            <a:pPr lvl="1"/>
+            <a:r>
+              <a:rPr lang="en-US" b="1" dirty="0"/>
+              <a:t>Few-Shot Prompting: </a:t>
+            </a:r>
+            <a:r>
+              <a:rPr lang="en-US" dirty="0"/>
+              <a:t>Provide demonstrations in the prompt to steer the model to better performance or to create output in a desired format.</a:t>
+            </a:r>
+          </a:p>
+          <a:p>
+            <a:pPr lvl="1"/>
+            <a:endParaRPr lang="en-US" b="1" dirty="0"/>
           </a:p>
         </p:txBody>
       </p:sp>
@@ -19830,10 +20244,10 @@
         </p:nvGrpSpPr>
         <p:grpSpPr>
           <a:xfrm>
-            <a:off x="8025423" y="2555396"/>
-            <a:ext cx="3750089" cy="2959168"/>
-            <a:chOff x="8025423" y="2555396"/>
-            <a:chExt cx="3750089" cy="2959168"/>
+            <a:off x="8032401" y="2402772"/>
+            <a:ext cx="3750091" cy="3371547"/>
+            <a:chOff x="8025421" y="2555396"/>
+            <a:chExt cx="3750091" cy="3371547"/>
           </a:xfrm>
         </p:grpSpPr>
         <p:sp>
@@ -19850,7 +20264,7 @@
           </p:nvSpPr>
           <p:spPr>
             <a:xfrm>
-              <a:off x="8025424" y="3848090"/>
+              <a:off x="8025421" y="5188279"/>
               <a:ext cx="3750087" cy="738664"/>
             </a:xfrm>
             <a:prstGeom prst="rect">
@@ -19958,7 +20372,7 @@
           </p:nvSpPr>
           <p:spPr>
             <a:xfrm>
-              <a:off x="8025423" y="4991344"/>
+              <a:off x="8025422" y="3888400"/>
               <a:ext cx="3750087" cy="523220"/>
             </a:xfrm>
             <a:prstGeom prst="rect">
@@ -20378,23 +20792,6 @@
 </file>
 
 <file path=customXml/item1.xml><?xml version="1.0" encoding="utf-8"?>
-<p:properties xmlns:p="http://schemas.microsoft.com/office/2006/metadata/properties" xmlns:xsi="http://www.w3.org/2001/XMLSchema-instance" xmlns:pc="http://schemas.microsoft.com/office/infopath/2007/PartnerControls">
-  <documentManagement>
-    <_activity xmlns="49eab711-90d1-4c0f-9775-bfb7f5e5a799" xsi:nil="true"/>
-  </documentManagement>
-</p:properties>
-</file>
-
-<file path=customXml/item2.xml><?xml version="1.0" encoding="utf-8"?>
-<?mso-contentType ?>
-<FormTemplates xmlns="http://schemas.microsoft.com/sharepoint/v3/contenttype/forms">
-  <Display>DocumentLibraryForm</Display>
-  <Edit>DocumentLibraryForm</Edit>
-  <New>DocumentLibraryForm</New>
-</FormTemplates>
-</file>
-
-<file path=customXml/item3.xml><?xml version="1.0" encoding="utf-8"?>
 <ct:contentTypeSchema xmlns:ct="http://schemas.microsoft.com/office/2006/metadata/contentType" xmlns:ma="http://schemas.microsoft.com/office/2006/metadata/properties/metaAttributes" ct:_="" ma:_="" ma:contentTypeName="Document" ma:contentTypeID="0x010100E62C0C88D39C234FAEC96AAE0F671565" ma:contentTypeVersion="14" ma:contentTypeDescription="Create a new document." ma:contentTypeScope="" ma:versionID="aacf67911b4e5100e6e89812ee2bd0a3">
   <xsd:schema xmlns:xsd="http://www.w3.org/2001/XMLSchema" xmlns:xs="http://www.w3.org/2001/XMLSchema" xmlns:p="http://schemas.microsoft.com/office/2006/metadata/properties" xmlns:ns3="49eab711-90d1-4c0f-9775-bfb7f5e5a799" xmlns:ns4="609867d6-2629-4535-86dd-ac3b97a3ffd8" targetNamespace="http://schemas.microsoft.com/office/2006/metadata/properties" ma:root="true" ma:fieldsID="8f1a028f5fcafea802f1bbbd0ccd48f9" ns3:_="" ns4:_="">
     <xsd:import namespace="49eab711-90d1-4c0f-9775-bfb7f5e5a799"/>
@@ -20619,32 +21016,24 @@
 </ct:contentTypeSchema>
 </file>
 
-<file path=customXml/itemProps1.xml><?xml version="1.0" encoding="utf-8"?>
-<ds:datastoreItem xmlns:ds="http://schemas.openxmlformats.org/officeDocument/2006/customXml" ds:itemID="{11B526AB-E763-48A9-8676-6358C5544126}">
-  <ds:schemaRefs>
-    <ds:schemaRef ds:uri="http://purl.org/dc/dcmitype/"/>
-    <ds:schemaRef ds:uri="http://schemas.microsoft.com/office/infopath/2007/PartnerControls"/>
-    <ds:schemaRef ds:uri="http://www.w3.org/XML/1998/namespace"/>
-    <ds:schemaRef ds:uri="http://schemas.microsoft.com/office/2006/metadata/properties"/>
-    <ds:schemaRef ds:uri="http://schemas.microsoft.com/office/2006/documentManagement/types"/>
-    <ds:schemaRef ds:uri="http://purl.org/dc/elements/1.1/"/>
-    <ds:schemaRef ds:uri="http://schemas.openxmlformats.org/package/2006/metadata/core-properties"/>
-    <ds:schemaRef ds:uri="609867d6-2629-4535-86dd-ac3b97a3ffd8"/>
-    <ds:schemaRef ds:uri="49eab711-90d1-4c0f-9775-bfb7f5e5a799"/>
-    <ds:schemaRef ds:uri="http://purl.org/dc/terms/"/>
-  </ds:schemaRefs>
-</ds:datastoreItem>
+<file path=customXml/item2.xml><?xml version="1.0" encoding="utf-8"?>
+<?mso-contentType ?>
+<FormTemplates xmlns="http://schemas.microsoft.com/sharepoint/v3/contenttype/forms">
+  <Display>DocumentLibraryForm</Display>
+  <Edit>DocumentLibraryForm</Edit>
+  <New>DocumentLibraryForm</New>
+</FormTemplates>
 </file>
 
-<file path=customXml/itemProps2.xml><?xml version="1.0" encoding="utf-8"?>
-<ds:datastoreItem xmlns:ds="http://schemas.openxmlformats.org/officeDocument/2006/customXml" ds:itemID="{7EAB5880-6DEB-490E-8068-CD3C9FC7A3FA}">
-  <ds:schemaRefs>
-    <ds:schemaRef ds:uri="http://schemas.microsoft.com/sharepoint/v3/contenttype/forms"/>
-  </ds:schemaRefs>
-</ds:datastoreItem>
+<file path=customXml/item3.xml><?xml version="1.0" encoding="utf-8"?>
+<p:properties xmlns:p="http://schemas.microsoft.com/office/2006/metadata/properties" xmlns:xsi="http://www.w3.org/2001/XMLSchema-instance" xmlns:pc="http://schemas.microsoft.com/office/infopath/2007/PartnerControls">
+  <documentManagement>
+    <_activity xmlns="49eab711-90d1-4c0f-9775-bfb7f5e5a799" xsi:nil="true"/>
+  </documentManagement>
+</p:properties>
 </file>
 
-<file path=customXml/itemProps3.xml><?xml version="1.0" encoding="utf-8"?>
+<file path=customXml/itemProps1.xml><?xml version="1.0" encoding="utf-8"?>
 <ds:datastoreItem xmlns:ds="http://schemas.openxmlformats.org/officeDocument/2006/customXml" ds:itemID="{C9830ED9-A146-440C-B934-C557D3AC1812}">
   <ds:schemaRefs>
     <ds:schemaRef ds:uri="http://schemas.microsoft.com/office/2006/metadata/contentType"/>
@@ -20661,4 +21050,29 @@
     <ds:schemaRef ds:uri="http://schemas.microsoft.com/internal/obd"/>
   </ds:schemaRefs>
 </ds:datastoreItem>
+</file>
+
+<file path=customXml/itemProps2.xml><?xml version="1.0" encoding="utf-8"?>
+<ds:datastoreItem xmlns:ds="http://schemas.openxmlformats.org/officeDocument/2006/customXml" ds:itemID="{7EAB5880-6DEB-490E-8068-CD3C9FC7A3FA}">
+  <ds:schemaRefs>
+    <ds:schemaRef ds:uri="http://schemas.microsoft.com/sharepoint/v3/contenttype/forms"/>
+  </ds:schemaRefs>
+</ds:datastoreItem>
+</file>
+
+<file path=customXml/itemProps3.xml><?xml version="1.0" encoding="utf-8"?>
+<ds:datastoreItem xmlns:ds="http://schemas.openxmlformats.org/officeDocument/2006/customXml" ds:itemID="{11B526AB-E763-48A9-8676-6358C5544126}">
+  <ds:schemaRefs>
+    <ds:schemaRef ds:uri="http://purl.org/dc/dcmitype/"/>
+    <ds:schemaRef ds:uri="http://schemas.microsoft.com/office/infopath/2007/PartnerControls"/>
+    <ds:schemaRef ds:uri="http://www.w3.org/XML/1998/namespace"/>
+    <ds:schemaRef ds:uri="http://schemas.microsoft.com/office/2006/metadata/properties"/>
+    <ds:schemaRef ds:uri="http://schemas.microsoft.com/office/2006/documentManagement/types"/>
+    <ds:schemaRef ds:uri="http://purl.org/dc/elements/1.1/"/>
+    <ds:schemaRef ds:uri="http://schemas.openxmlformats.org/package/2006/metadata/core-properties"/>
+    <ds:schemaRef ds:uri="609867d6-2629-4535-86dd-ac3b97a3ffd8"/>
+    <ds:schemaRef ds:uri="49eab711-90d1-4c0f-9775-bfb7f5e5a799"/>
+    <ds:schemaRef ds:uri="http://purl.org/dc/terms/"/>
+  </ds:schemaRefs>
+</ds:datastoreItem>
 </file>
--- a/slides/discussion/07_LLM_discussion.pptx
+++ b/slides/discussion/07_LLM_discussion.pptx
@@ -306,7 +306,7 @@
           <a:p>
             <a:fld id="{A0CF861B-2947-4E74-AAE0-E351222E926D}" type="datetimeFigureOut">
               <a:rPr lang="en-US" smtClean="0"/>
-              <a:t>4/11/2026</a:t>
+              <a:t>4/16/2026</a:t>
             </a:fld>
             <a:endParaRPr lang="en-US"/>
           </a:p>
@@ -504,7 +504,7 @@
           <a:p>
             <a:fld id="{A0CF861B-2947-4E74-AAE0-E351222E926D}" type="datetimeFigureOut">
               <a:rPr lang="en-US" smtClean="0"/>
-              <a:t>4/11/2026</a:t>
+              <a:t>4/16/2026</a:t>
             </a:fld>
             <a:endParaRPr lang="en-US"/>
           </a:p>
@@ -712,7 +712,7 @@
           <a:p>
             <a:fld id="{A0CF861B-2947-4E74-AAE0-E351222E926D}" type="datetimeFigureOut">
               <a:rPr lang="en-US" smtClean="0"/>
-              <a:t>4/11/2026</a:t>
+              <a:t>4/16/2026</a:t>
             </a:fld>
             <a:endParaRPr lang="en-US"/>
           </a:p>
@@ -910,7 +910,7 @@
           <a:p>
             <a:fld id="{A0CF861B-2947-4E74-AAE0-E351222E926D}" type="datetimeFigureOut">
               <a:rPr lang="en-US" smtClean="0"/>
-              <a:t>4/11/2026</a:t>
+              <a:t>4/16/2026</a:t>
             </a:fld>
             <a:endParaRPr lang="en-US"/>
           </a:p>
@@ -1185,7 +1185,7 @@
           <a:p>
             <a:fld id="{A0CF861B-2947-4E74-AAE0-E351222E926D}" type="datetimeFigureOut">
               <a:rPr lang="en-US" smtClean="0"/>
-              <a:t>4/11/2026</a:t>
+              <a:t>4/16/2026</a:t>
             </a:fld>
             <a:endParaRPr lang="en-US"/>
           </a:p>
@@ -1450,7 +1450,7 @@
           <a:p>
             <a:fld id="{A0CF861B-2947-4E74-AAE0-E351222E926D}" type="datetimeFigureOut">
               <a:rPr lang="en-US" smtClean="0"/>
-              <a:t>4/11/2026</a:t>
+              <a:t>4/16/2026</a:t>
             </a:fld>
             <a:endParaRPr lang="en-US"/>
           </a:p>
@@ -1862,7 +1862,7 @@
           <a:p>
             <a:fld id="{A0CF861B-2947-4E74-AAE0-E351222E926D}" type="datetimeFigureOut">
               <a:rPr lang="en-US" smtClean="0"/>
-              <a:t>4/11/2026</a:t>
+              <a:t>4/16/2026</a:t>
             </a:fld>
             <a:endParaRPr lang="en-US"/>
           </a:p>
@@ -2003,7 +2003,7 @@
           <a:p>
             <a:fld id="{A0CF861B-2947-4E74-AAE0-E351222E926D}" type="datetimeFigureOut">
               <a:rPr lang="en-US" smtClean="0"/>
-              <a:t>4/11/2026</a:t>
+              <a:t>4/16/2026</a:t>
             </a:fld>
             <a:endParaRPr lang="en-US"/>
           </a:p>
@@ -2116,7 +2116,7 @@
           <a:p>
             <a:fld id="{A0CF861B-2947-4E74-AAE0-E351222E926D}" type="datetimeFigureOut">
               <a:rPr lang="en-US" smtClean="0"/>
-              <a:t>4/11/2026</a:t>
+              <a:t>4/16/2026</a:t>
             </a:fld>
             <a:endParaRPr lang="en-US"/>
           </a:p>
@@ -2427,7 +2427,7 @@
           <a:p>
             <a:fld id="{A0CF861B-2947-4E74-AAE0-E351222E926D}" type="datetimeFigureOut">
               <a:rPr lang="en-US" smtClean="0"/>
-              <a:t>4/11/2026</a:t>
+              <a:t>4/16/2026</a:t>
             </a:fld>
             <a:endParaRPr lang="en-US"/>
           </a:p>
@@ -2715,7 +2715,7 @@
           <a:p>
             <a:fld id="{A0CF861B-2947-4E74-AAE0-E351222E926D}" type="datetimeFigureOut">
               <a:rPr lang="en-US" smtClean="0"/>
-              <a:t>4/11/2026</a:t>
+              <a:t>4/16/2026</a:t>
             </a:fld>
             <a:endParaRPr lang="en-US"/>
           </a:p>
@@ -2956,7 +2956,7 @@
           <a:p>
             <a:fld id="{A0CF861B-2947-4E74-AAE0-E351222E926D}" type="datetimeFigureOut">
               <a:rPr lang="en-US" smtClean="0"/>
-              <a:t>4/11/2026</a:t>
+              <a:t>4/16/2026</a:t>
             </a:fld>
             <a:endParaRPr lang="en-US"/>
           </a:p>
@@ -5506,7 +5506,7 @@
         </p:spPr>
         <p:txBody>
           <a:bodyPr>
-            <a:normAutofit fontScale="55000" lnSpcReduction="20000"/>
+            <a:normAutofit fontScale="47500" lnSpcReduction="20000"/>
           </a:bodyPr>
           <a:lstStyle/>
           <a:p>
@@ -5577,6 +5577,16 @@
               <a:buAutoNum type="arabicPeriod"/>
             </a:pPr>
             <a:endParaRPr lang="en-US" dirty="0"/>
+          </a:p>
+          <a:p>
+            <a:r>
+              <a:rPr lang="en-US" b="1" dirty="0"/>
+              <a:t>Technology: </a:t>
+            </a:r>
+            <a:r>
+              <a:rPr lang="en-US" dirty="0"/>
+              <a:t>MCP (Model Context Protocol): Open standard to connect LLMs (MCP clients) with external data sources, tools, and software applications (MCP servers).</a:t>
+            </a:r>
           </a:p>
           <a:p>
             <a:r>
@@ -7551,6 +7561,53 @@
           <a:chExt cx="0" cy="0"/>
         </a:xfrm>
       </p:grpSpPr>
+      <p:pic>
+        <p:nvPicPr>
+          <p:cNvPr id="7" name="Picture 2">
+            <a:extLst>
+              <a:ext uri="{FF2B5EF4-FFF2-40B4-BE49-F238E27FC236}">
+                <a16:creationId xmlns:a16="http://schemas.microsoft.com/office/drawing/2014/main" id="{5AC40533-4226-83F6-A8D7-CA80DA72AD92}"/>
+              </a:ext>
+            </a:extLst>
+          </p:cNvPr>
+          <p:cNvPicPr>
+            <a:picLocks noChangeAspect="1" noChangeArrowheads="1"/>
+          </p:cNvPicPr>
+          <p:nvPr/>
+        </p:nvPicPr>
+        <p:blipFill>
+          <a:blip r:embed="rId2">
+            <a:extLst>
+              <a:ext uri="{28A0092B-C50C-407E-A947-70E740481C1C}">
+                <a14:useLocalDpi xmlns:a14="http://schemas.microsoft.com/office/drawing/2010/main" val="0"/>
+              </a:ext>
+            </a:extLst>
+          </a:blip>
+          <a:srcRect/>
+          <a:stretch>
+            <a:fillRect/>
+          </a:stretch>
+        </p:blipFill>
+        <p:spPr bwMode="auto">
+          <a:xfrm>
+            <a:off x="2361388" y="4461211"/>
+            <a:ext cx="1234591" cy="1234591"/>
+          </a:xfrm>
+          <a:prstGeom prst="rect">
+            <a:avLst/>
+          </a:prstGeom>
+          <a:noFill/>
+          <a:extLst>
+            <a:ext uri="{909E8E84-426E-40DD-AFC4-6F175D3DCCD1}">
+              <a14:hiddenFill xmlns:a14="http://schemas.microsoft.com/office/drawing/2010/main">
+                <a:solidFill>
+                  <a:srgbClr val="FFFFFF"/>
+                </a:solidFill>
+              </a14:hiddenFill>
+            </a:ext>
+          </a:extLst>
+        </p:spPr>
+      </p:pic>
       <p:sp>
         <p:nvSpPr>
           <p:cNvPr id="2" name="Title 1">
@@ -7610,7 +7667,9 @@
           </a:xfrm>
         </p:spPr>
         <p:txBody>
-          <a:bodyPr/>
+          <a:bodyPr>
+            <a:normAutofit lnSpcReduction="10000"/>
+          </a:bodyPr>
           <a:lstStyle/>
           <a:p>
             <a:r>
@@ -7632,7 +7691,7 @@
             </a:r>
             <a:r>
               <a:rPr lang="en-US" dirty="0"/>
-              <a:t>: A research agent</a:t>
+              <a:t>: A research agent.</a:t>
             </a:r>
           </a:p>
           <a:p>
@@ -7647,11 +7706,26 @@
               <a:rPr lang="en-US" dirty="0"/>
               <a:t>: </a:t>
             </a:r>
+          </a:p>
+          <a:p>
+            <a:endParaRPr lang="en-US" dirty="0"/>
+          </a:p>
+          <a:p>
+            <a:pPr marL="0" indent="0">
+              <a:buNone/>
+            </a:pPr>
+            <a:r>
+              <a:rPr lang="en-US" dirty="0"/>
+              <a:t>                 </a:t>
+            </a:r>
             <a:r>
               <a:rPr lang="en-US" dirty="0" err="1"/>
               <a:t>OpenClaw</a:t>
             </a:r>
-            <a:endParaRPr lang="en-US" dirty="0"/>
+            <a:r>
+              <a:rPr lang="en-US" dirty="0"/>
+              <a:t>, etc.</a:t>
+            </a:r>
           </a:p>
         </p:txBody>
       </p:sp>
@@ -7710,7 +7784,7 @@
               <p:nvPr/>
             </p:nvPicPr>
             <p:blipFill>
-              <a:blip r:embed="rId2">
+              <a:blip r:embed="rId3">
                 <a:extLst>
                   <a:ext uri="{28A0092B-C50C-407E-A947-70E740481C1C}">
                     <a14:useLocalDpi xmlns:a14="http://schemas.microsoft.com/office/drawing/2010/main" val="0"/>
@@ -7874,6 +7948,135 @@
           </p:txBody>
         </p:sp>
       </p:grpSp>
+      <p:sp>
+        <p:nvSpPr>
+          <p:cNvPr id="4" name="Speech Bubble: Rectangle with Corners Rounded 3">
+            <a:extLst>
+              <a:ext uri="{FF2B5EF4-FFF2-40B4-BE49-F238E27FC236}">
+                <a16:creationId xmlns:a16="http://schemas.microsoft.com/office/drawing/2014/main" id="{AD7CF855-78DB-C40A-2F06-6325C82BFDD9}"/>
+              </a:ext>
+            </a:extLst>
+          </p:cNvPr>
+          <p:cNvSpPr/>
+          <p:nvPr/>
+        </p:nvSpPr>
+        <p:spPr>
+          <a:xfrm>
+            <a:off x="8965359" y="5828427"/>
+            <a:ext cx="2586793" cy="432770"/>
+          </a:xfrm>
+          <a:prstGeom prst="wedgeRoundRectCallout">
+            <a:avLst>
+              <a:gd name="adj1" fmla="val -93130"/>
+              <a:gd name="adj2" fmla="val -221661"/>
+              <a:gd name="adj3" fmla="val 16667"/>
+            </a:avLst>
+          </a:prstGeom>
+        </p:spPr>
+        <p:style>
+          <a:lnRef idx="0">
+            <a:schemeClr val="accent2"/>
+          </a:lnRef>
+          <a:fillRef idx="3">
+            <a:schemeClr val="accent2"/>
+          </a:fillRef>
+          <a:effectRef idx="3">
+            <a:schemeClr val="accent2"/>
+          </a:effectRef>
+          <a:fontRef idx="minor">
+            <a:schemeClr val="lt1"/>
+          </a:fontRef>
+        </p:style>
+        <p:txBody>
+          <a:bodyPr rtlCol="0" anchor="ctr"/>
+          <a:lstStyle/>
+          <a:p>
+            <a:pPr algn="ctr"/>
+            <a:r>
+              <a:rPr lang="en-US" sz="1400" b="1" dirty="0"/>
+              <a:t>Environment</a:t>
+            </a:r>
+          </a:p>
+          <a:p>
+            <a:pPr algn="ctr"/>
+            <a:r>
+              <a:rPr lang="en-US" sz="1400" dirty="0"/>
+              <a:t>Interaction is a tool call.</a:t>
+            </a:r>
+          </a:p>
+        </p:txBody>
+      </p:sp>
+      <p:sp>
+        <p:nvSpPr>
+          <p:cNvPr id="5" name="Speech Bubble: Rectangle with Corners Rounded 4">
+            <a:extLst>
+              <a:ext uri="{FF2B5EF4-FFF2-40B4-BE49-F238E27FC236}">
+                <a16:creationId xmlns:a16="http://schemas.microsoft.com/office/drawing/2014/main" id="{D7D68BDC-81CF-A08E-FA45-BC75E5F3CD90}"/>
+              </a:ext>
+            </a:extLst>
+          </p:cNvPr>
+          <p:cNvSpPr/>
+          <p:nvPr/>
+        </p:nvSpPr>
+        <p:spPr>
+          <a:xfrm>
+            <a:off x="8760092" y="4537809"/>
+            <a:ext cx="3168989" cy="776381"/>
+          </a:xfrm>
+          <a:prstGeom prst="wedgeRoundRectCallout">
+            <a:avLst>
+              <a:gd name="adj1" fmla="val -82779"/>
+              <a:gd name="adj2" fmla="val -212840"/>
+              <a:gd name="adj3" fmla="val 16667"/>
+            </a:avLst>
+          </a:prstGeom>
+        </p:spPr>
+        <p:style>
+          <a:lnRef idx="0">
+            <a:schemeClr val="accent2"/>
+          </a:lnRef>
+          <a:fillRef idx="3">
+            <a:schemeClr val="accent2"/>
+          </a:fillRef>
+          <a:effectRef idx="3">
+            <a:schemeClr val="accent2"/>
+          </a:effectRef>
+          <a:fontRef idx="minor">
+            <a:schemeClr val="lt1"/>
+          </a:fontRef>
+        </p:style>
+        <p:txBody>
+          <a:bodyPr rtlCol="0" anchor="ctr"/>
+          <a:lstStyle/>
+          <a:p>
+            <a:pPr algn="ctr"/>
+            <a:r>
+              <a:rPr lang="en-US" sz="1400" b="1" dirty="0"/>
+              <a:t>Agent</a:t>
+            </a:r>
+          </a:p>
+          <a:p>
+            <a:pPr marL="285750" indent="-285750">
+              <a:buFont typeface="Arial" panose="020B0604020202020204" pitchFamily="34" charset="0"/>
+              <a:buChar char="•"/>
+            </a:pPr>
+            <a:r>
+              <a:rPr lang="en-US" sz="1400" dirty="0"/>
+              <a:t>Agent function is a LLM call</a:t>
+            </a:r>
+          </a:p>
+          <a:p>
+            <a:pPr marL="285750" indent="-285750">
+              <a:buFont typeface="Arial" panose="020B0604020202020204" pitchFamily="34" charset="0"/>
+              <a:buChar char="•"/>
+            </a:pPr>
+            <a:r>
+              <a:rPr lang="en-US" sz="1400" dirty="0"/>
+              <a:t>Persistent state stored in context</a:t>
+            </a:r>
+          </a:p>
+        </p:txBody>
+      </p:sp>
     </p:spTree>
     <p:extLst>
       <p:ext uri="{BB962C8B-B14F-4D97-AF65-F5344CB8AC3E}">
@@ -7884,6 +8087,130 @@
   <p:clrMapOvr>
     <a:masterClrMapping/>
   </p:clrMapOvr>
+  <p:timing>
+    <p:tnLst>
+      <p:par>
+        <p:cTn id="1" dur="indefinite" restart="never" nodeType="tmRoot">
+          <p:childTnLst>
+            <p:seq concurrent="1" nextAc="seek">
+              <p:cTn id="2" dur="indefinite" nodeType="mainSeq">
+                <p:childTnLst>
+                  <p:par>
+                    <p:cTn id="3" fill="hold">
+                      <p:stCondLst>
+                        <p:cond delay="indefinite"/>
+                      </p:stCondLst>
+                      <p:childTnLst>
+                        <p:par>
+                          <p:cTn id="4" fill="hold">
+                            <p:stCondLst>
+                              <p:cond delay="0"/>
+                            </p:stCondLst>
+                            <p:childTnLst>
+                              <p:par>
+                                <p:cTn id="5" presetID="1" presetClass="entr" presetSubtype="0" fill="hold" grpId="0" nodeType="clickEffect">
+                                  <p:stCondLst>
+                                    <p:cond delay="0"/>
+                                  </p:stCondLst>
+                                  <p:childTnLst>
+                                    <p:set>
+                                      <p:cBhvr>
+                                        <p:cTn id="6" dur="1" fill="hold">
+                                          <p:stCondLst>
+                                            <p:cond delay="0"/>
+                                          </p:stCondLst>
+                                        </p:cTn>
+                                        <p:tgtEl>
+                                          <p:spTgt spid="5"/>
+                                        </p:tgtEl>
+                                        <p:attrNameLst>
+                                          <p:attrName>style.visibility</p:attrName>
+                                        </p:attrNameLst>
+                                      </p:cBhvr>
+                                      <p:to>
+                                        <p:strVal val="visible"/>
+                                      </p:to>
+                                    </p:set>
+                                  </p:childTnLst>
+                                </p:cTn>
+                              </p:par>
+                            </p:childTnLst>
+                          </p:cTn>
+                        </p:par>
+                      </p:childTnLst>
+                    </p:cTn>
+                  </p:par>
+                  <p:par>
+                    <p:cTn id="7" fill="hold">
+                      <p:stCondLst>
+                        <p:cond delay="indefinite"/>
+                      </p:stCondLst>
+                      <p:childTnLst>
+                        <p:par>
+                          <p:cTn id="8" fill="hold">
+                            <p:stCondLst>
+                              <p:cond delay="0"/>
+                            </p:stCondLst>
+                            <p:childTnLst>
+                              <p:par>
+                                <p:cTn id="9" presetID="1" presetClass="entr" presetSubtype="0" fill="hold" grpId="0" nodeType="clickEffect">
+                                  <p:stCondLst>
+                                    <p:cond delay="0"/>
+                                  </p:stCondLst>
+                                  <p:childTnLst>
+                                    <p:set>
+                                      <p:cBhvr>
+                                        <p:cTn id="10" dur="1" fill="hold">
+                                          <p:stCondLst>
+                                            <p:cond delay="0"/>
+                                          </p:stCondLst>
+                                        </p:cTn>
+                                        <p:tgtEl>
+                                          <p:spTgt spid="4"/>
+                                        </p:tgtEl>
+                                        <p:attrNameLst>
+                                          <p:attrName>style.visibility</p:attrName>
+                                        </p:attrNameLst>
+                                      </p:cBhvr>
+                                      <p:to>
+                                        <p:strVal val="visible"/>
+                                      </p:to>
+                                    </p:set>
+                                  </p:childTnLst>
+                                </p:cTn>
+                              </p:par>
+                            </p:childTnLst>
+                          </p:cTn>
+                        </p:par>
+                      </p:childTnLst>
+                    </p:cTn>
+                  </p:par>
+                </p:childTnLst>
+              </p:cTn>
+              <p:prevCondLst>
+                <p:cond evt="onPrev" delay="0">
+                  <p:tgtEl>
+                    <p:sldTgt/>
+                  </p:tgtEl>
+                </p:cond>
+              </p:prevCondLst>
+              <p:nextCondLst>
+                <p:cond evt="onNext" delay="0">
+                  <p:tgtEl>
+                    <p:sldTgt/>
+                  </p:tgtEl>
+                </p:cond>
+              </p:nextCondLst>
+            </p:seq>
+          </p:childTnLst>
+        </p:cTn>
+      </p:par>
+    </p:tnLst>
+    <p:bldLst>
+      <p:bldP spid="4" grpId="0" animBg="1"/>
+      <p:bldP spid="5" grpId="0" animBg="1"/>
+    </p:bldLst>
+  </p:timing>
 </p:sld>
 </file>
 
@@ -20792,6 +21119,23 @@
 </file>
 
 <file path=customXml/item1.xml><?xml version="1.0" encoding="utf-8"?>
+<p:properties xmlns:p="http://schemas.microsoft.com/office/2006/metadata/properties" xmlns:xsi="http://www.w3.org/2001/XMLSchema-instance" xmlns:pc="http://schemas.microsoft.com/office/infopath/2007/PartnerControls">
+  <documentManagement>
+    <_activity xmlns="49eab711-90d1-4c0f-9775-bfb7f5e5a799" xsi:nil="true"/>
+  </documentManagement>
+</p:properties>
+</file>
+
+<file path=customXml/item2.xml><?xml version="1.0" encoding="utf-8"?>
+<?mso-contentType ?>
+<FormTemplates xmlns="http://schemas.microsoft.com/sharepoint/v3/contenttype/forms">
+  <Display>DocumentLibraryForm</Display>
+  <Edit>DocumentLibraryForm</Edit>
+  <New>DocumentLibraryForm</New>
+</FormTemplates>
+</file>
+
+<file path=customXml/item3.xml><?xml version="1.0" encoding="utf-8"?>
 <ct:contentTypeSchema xmlns:ct="http://schemas.microsoft.com/office/2006/metadata/contentType" xmlns:ma="http://schemas.microsoft.com/office/2006/metadata/properties/metaAttributes" ct:_="" ma:_="" ma:contentTypeName="Document" ma:contentTypeID="0x010100E62C0C88D39C234FAEC96AAE0F671565" ma:contentTypeVersion="14" ma:contentTypeDescription="Create a new document." ma:contentTypeScope="" ma:versionID="aacf67911b4e5100e6e89812ee2bd0a3">
   <xsd:schema xmlns:xsd="http://www.w3.org/2001/XMLSchema" xmlns:xs="http://www.w3.org/2001/XMLSchema" xmlns:p="http://schemas.microsoft.com/office/2006/metadata/properties" xmlns:ns3="49eab711-90d1-4c0f-9775-bfb7f5e5a799" xmlns:ns4="609867d6-2629-4535-86dd-ac3b97a3ffd8" targetNamespace="http://schemas.microsoft.com/office/2006/metadata/properties" ma:root="true" ma:fieldsID="8f1a028f5fcafea802f1bbbd0ccd48f9" ns3:_="" ns4:_="">
     <xsd:import namespace="49eab711-90d1-4c0f-9775-bfb7f5e5a799"/>
@@ -21016,24 +21360,32 @@
 </ct:contentTypeSchema>
 </file>
 
-<file path=customXml/item2.xml><?xml version="1.0" encoding="utf-8"?>
-<?mso-contentType ?>
-<FormTemplates xmlns="http://schemas.microsoft.com/sharepoint/v3/contenttype/forms">
-  <Display>DocumentLibraryForm</Display>
-  <Edit>DocumentLibraryForm</Edit>
-  <New>DocumentLibraryForm</New>
-</FormTemplates>
+<file path=customXml/itemProps1.xml><?xml version="1.0" encoding="utf-8"?>
+<ds:datastoreItem xmlns:ds="http://schemas.openxmlformats.org/officeDocument/2006/customXml" ds:itemID="{11B526AB-E763-48A9-8676-6358C5544126}">
+  <ds:schemaRefs>
+    <ds:schemaRef ds:uri="http://purl.org/dc/dcmitype/"/>
+    <ds:schemaRef ds:uri="http://schemas.microsoft.com/office/infopath/2007/PartnerControls"/>
+    <ds:schemaRef ds:uri="http://www.w3.org/XML/1998/namespace"/>
+    <ds:schemaRef ds:uri="http://schemas.microsoft.com/office/2006/metadata/properties"/>
+    <ds:schemaRef ds:uri="http://schemas.microsoft.com/office/2006/documentManagement/types"/>
+    <ds:schemaRef ds:uri="http://purl.org/dc/elements/1.1/"/>
+    <ds:schemaRef ds:uri="http://schemas.openxmlformats.org/package/2006/metadata/core-properties"/>
+    <ds:schemaRef ds:uri="609867d6-2629-4535-86dd-ac3b97a3ffd8"/>
+    <ds:schemaRef ds:uri="49eab711-90d1-4c0f-9775-bfb7f5e5a799"/>
+    <ds:schemaRef ds:uri="http://purl.org/dc/terms/"/>
+  </ds:schemaRefs>
+</ds:datastoreItem>
 </file>
 
-<file path=customXml/item3.xml><?xml version="1.0" encoding="utf-8"?>
-<p:properties xmlns:p="http://schemas.microsoft.com/office/2006/metadata/properties" xmlns:xsi="http://www.w3.org/2001/XMLSchema-instance" xmlns:pc="http://schemas.microsoft.com/office/infopath/2007/PartnerControls">
-  <documentManagement>
-    <_activity xmlns="49eab711-90d1-4c0f-9775-bfb7f5e5a799" xsi:nil="true"/>
-  </documentManagement>
-</p:properties>
+<file path=customXml/itemProps2.xml><?xml version="1.0" encoding="utf-8"?>
+<ds:datastoreItem xmlns:ds="http://schemas.openxmlformats.org/officeDocument/2006/customXml" ds:itemID="{7EAB5880-6DEB-490E-8068-CD3C9FC7A3FA}">
+  <ds:schemaRefs>
+    <ds:schemaRef ds:uri="http://schemas.microsoft.com/sharepoint/v3/contenttype/forms"/>
+  </ds:schemaRefs>
+</ds:datastoreItem>
 </file>
 
-<file path=customXml/itemProps1.xml><?xml version="1.0" encoding="utf-8"?>
+<file path=customXml/itemProps3.xml><?xml version="1.0" encoding="utf-8"?>
 <ds:datastoreItem xmlns:ds="http://schemas.openxmlformats.org/officeDocument/2006/customXml" ds:itemID="{C9830ED9-A146-440C-B934-C557D3AC1812}">
   <ds:schemaRefs>
     <ds:schemaRef ds:uri="http://schemas.microsoft.com/office/2006/metadata/contentType"/>
@@ -21050,29 +21402,4 @@
     <ds:schemaRef ds:uri="http://schemas.microsoft.com/internal/obd"/>
   </ds:schemaRefs>
 </ds:datastoreItem>
-</file>
-
-<file path=customXml/itemProps2.xml><?xml version="1.0" encoding="utf-8"?>
-<ds:datastoreItem xmlns:ds="http://schemas.openxmlformats.org/officeDocument/2006/customXml" ds:itemID="{7EAB5880-6DEB-490E-8068-CD3C9FC7A3FA}">
-  <ds:schemaRefs>
-    <ds:schemaRef ds:uri="http://schemas.microsoft.com/sharepoint/v3/contenttype/forms"/>
-  </ds:schemaRefs>
-</ds:datastoreItem>
-</file>
-
-<file path=customXml/itemProps3.xml><?xml version="1.0" encoding="utf-8"?>
-<ds:datastoreItem xmlns:ds="http://schemas.openxmlformats.org/officeDocument/2006/customXml" ds:itemID="{11B526AB-E763-48A9-8676-6358C5544126}">
-  <ds:schemaRefs>
-    <ds:schemaRef ds:uri="http://purl.org/dc/dcmitype/"/>
-    <ds:schemaRef ds:uri="http://schemas.microsoft.com/office/infopath/2007/PartnerControls"/>
-    <ds:schemaRef ds:uri="http://www.w3.org/XML/1998/namespace"/>
-    <ds:schemaRef ds:uri="http://schemas.microsoft.com/office/2006/metadata/properties"/>
-    <ds:schemaRef ds:uri="http://schemas.microsoft.com/office/2006/documentManagement/types"/>
-    <ds:schemaRef ds:uri="http://purl.org/dc/elements/1.1/"/>
-    <ds:schemaRef ds:uri="http://schemas.openxmlformats.org/package/2006/metadata/core-properties"/>
-    <ds:schemaRef ds:uri="609867d6-2629-4535-86dd-ac3b97a3ffd8"/>
-    <ds:schemaRef ds:uri="49eab711-90d1-4c0f-9775-bfb7f5e5a799"/>
-    <ds:schemaRef ds:uri="http://purl.org/dc/terms/"/>
-  </ds:schemaRefs>
-</ds:datastoreItem>
 </file>
--- a/slides/discussion/07_LLM_discussion.pptx
+++ b/slides/discussion/07_LLM_discussion.pptx
@@ -6,21 +6,26 @@
   </p:sldMasterIdLst>
   <p:sldIdLst>
     <p:sldId id="256" r:id="rId5"/>
-    <p:sldId id="817" r:id="rId6"/>
-    <p:sldId id="384" r:id="rId7"/>
-    <p:sldId id="265" r:id="rId8"/>
-    <p:sldId id="264" r:id="rId9"/>
-    <p:sldId id="257" r:id="rId10"/>
-    <p:sldId id="818" r:id="rId11"/>
-    <p:sldId id="819" r:id="rId12"/>
-    <p:sldId id="259" r:id="rId13"/>
-    <p:sldId id="260" r:id="rId14"/>
-    <p:sldId id="258" r:id="rId15"/>
-    <p:sldId id="263" r:id="rId16"/>
-    <p:sldId id="261" r:id="rId17"/>
-    <p:sldId id="262" r:id="rId18"/>
-    <p:sldId id="820" r:id="rId19"/>
-    <p:sldId id="266" r:id="rId20"/>
+    <p:sldId id="823" r:id="rId6"/>
+    <p:sldId id="817" r:id="rId7"/>
+    <p:sldId id="384" r:id="rId8"/>
+    <p:sldId id="265" r:id="rId9"/>
+    <p:sldId id="264" r:id="rId10"/>
+    <p:sldId id="257" r:id="rId11"/>
+    <p:sldId id="818" r:id="rId12"/>
+    <p:sldId id="819" r:id="rId13"/>
+    <p:sldId id="821" r:id="rId14"/>
+    <p:sldId id="822" r:id="rId15"/>
+    <p:sldId id="259" r:id="rId16"/>
+    <p:sldId id="260" r:id="rId17"/>
+    <p:sldId id="258" r:id="rId18"/>
+    <p:sldId id="263" r:id="rId19"/>
+    <p:sldId id="824" r:id="rId20"/>
+    <p:sldId id="261" r:id="rId21"/>
+    <p:sldId id="825" r:id="rId22"/>
+    <p:sldId id="820" r:id="rId23"/>
+    <p:sldId id="826" r:id="rId24"/>
+    <p:sldId id="266" r:id="rId25"/>
   </p:sldIdLst>
   <p:sldSz cx="12192000" cy="6858000"/>
   <p:notesSz cx="6858000" cy="9144000"/>
@@ -129,6 +134,7 @@
         </p14:section>
         <p14:section name="Introduction" id="{2536F703-5AE5-48D1-A7B5-35DFBA591515}">
           <p14:sldIdLst>
+            <p14:sldId id="823"/>
             <p14:sldId id="817"/>
             <p14:sldId id="384"/>
             <p14:sldId id="265"/>
@@ -140,13 +146,21 @@
         </p14:section>
         <p14:section name="Using LLMs" id="{EB2E06F3-49EE-4CF4-B34B-FD67CF177CB1}">
           <p14:sldIdLst>
+            <p14:sldId id="821"/>
+            <p14:sldId id="822"/>
             <p14:sldId id="259"/>
             <p14:sldId id="260"/>
             <p14:sldId id="258"/>
             <p14:sldId id="263"/>
+          </p14:sldIdLst>
+        </p14:section>
+        <p14:section name="Agentic AI" id="{9B70FC21-B15C-4CD9-85BD-8D1F14737BBB}">
+          <p14:sldIdLst>
+            <p14:sldId id="824"/>
             <p14:sldId id="261"/>
-            <p14:sldId id="262"/>
+            <p14:sldId id="825"/>
             <p14:sldId id="820"/>
+            <p14:sldId id="826"/>
             <p14:sldId id="266"/>
           </p14:sldIdLst>
         </p14:section>
@@ -306,7 +320,7 @@
           <a:p>
             <a:fld id="{A0CF861B-2947-4E74-AAE0-E351222E926D}" type="datetimeFigureOut">
               <a:rPr lang="en-US" smtClean="0"/>
-              <a:t>4/16/2026</a:t>
+              <a:t>8/19/2026</a:t>
             </a:fld>
             <a:endParaRPr lang="en-US"/>
           </a:p>
@@ -504,7 +518,7 @@
           <a:p>
             <a:fld id="{A0CF861B-2947-4E74-AAE0-E351222E926D}" type="datetimeFigureOut">
               <a:rPr lang="en-US" smtClean="0"/>
-              <a:t>4/16/2026</a:t>
+              <a:t>8/19/2026</a:t>
             </a:fld>
             <a:endParaRPr lang="en-US"/>
           </a:p>
@@ -712,7 +726,7 @@
           <a:p>
             <a:fld id="{A0CF861B-2947-4E74-AAE0-E351222E926D}" type="datetimeFigureOut">
               <a:rPr lang="en-US" smtClean="0"/>
-              <a:t>4/16/2026</a:t>
+              <a:t>8/19/2026</a:t>
             </a:fld>
             <a:endParaRPr lang="en-US"/>
           </a:p>
@@ -910,7 +924,7 @@
           <a:p>
             <a:fld id="{A0CF861B-2947-4E74-AAE0-E351222E926D}" type="datetimeFigureOut">
               <a:rPr lang="en-US" smtClean="0"/>
-              <a:t>4/16/2026</a:t>
+              <a:t>8/19/2026</a:t>
             </a:fld>
             <a:endParaRPr lang="en-US"/>
           </a:p>
@@ -1185,7 +1199,7 @@
           <a:p>
             <a:fld id="{A0CF861B-2947-4E74-AAE0-E351222E926D}" type="datetimeFigureOut">
               <a:rPr lang="en-US" smtClean="0"/>
-              <a:t>4/16/2026</a:t>
+              <a:t>8/19/2026</a:t>
             </a:fld>
             <a:endParaRPr lang="en-US"/>
           </a:p>
@@ -1450,7 +1464,7 @@
           <a:p>
             <a:fld id="{A0CF861B-2947-4E74-AAE0-E351222E926D}" type="datetimeFigureOut">
               <a:rPr lang="en-US" smtClean="0"/>
-              <a:t>4/16/2026</a:t>
+              <a:t>8/19/2026</a:t>
             </a:fld>
             <a:endParaRPr lang="en-US"/>
           </a:p>
@@ -1862,7 +1876,7 @@
           <a:p>
             <a:fld id="{A0CF861B-2947-4E74-AAE0-E351222E926D}" type="datetimeFigureOut">
               <a:rPr lang="en-US" smtClean="0"/>
-              <a:t>4/16/2026</a:t>
+              <a:t>8/19/2026</a:t>
             </a:fld>
             <a:endParaRPr lang="en-US"/>
           </a:p>
@@ -2003,7 +2017,7 @@
           <a:p>
             <a:fld id="{A0CF861B-2947-4E74-AAE0-E351222E926D}" type="datetimeFigureOut">
               <a:rPr lang="en-US" smtClean="0"/>
-              <a:t>4/16/2026</a:t>
+              <a:t>8/19/2026</a:t>
             </a:fld>
             <a:endParaRPr lang="en-US"/>
           </a:p>
@@ -2116,7 +2130,7 @@
           <a:p>
             <a:fld id="{A0CF861B-2947-4E74-AAE0-E351222E926D}" type="datetimeFigureOut">
               <a:rPr lang="en-US" smtClean="0"/>
-              <a:t>4/16/2026</a:t>
+              <a:t>8/19/2026</a:t>
             </a:fld>
             <a:endParaRPr lang="en-US"/>
           </a:p>
@@ -2427,7 +2441,7 @@
           <a:p>
             <a:fld id="{A0CF861B-2947-4E74-AAE0-E351222E926D}" type="datetimeFigureOut">
               <a:rPr lang="en-US" smtClean="0"/>
-              <a:t>4/16/2026</a:t>
+              <a:t>8/19/2026</a:t>
             </a:fld>
             <a:endParaRPr lang="en-US"/>
           </a:p>
@@ -2715,7 +2729,7 @@
           <a:p>
             <a:fld id="{A0CF861B-2947-4E74-AAE0-E351222E926D}" type="datetimeFigureOut">
               <a:rPr lang="en-US" smtClean="0"/>
-              <a:t>4/16/2026</a:t>
+              <a:t>8/19/2026</a:t>
             </a:fld>
             <a:endParaRPr lang="en-US"/>
           </a:p>
@@ -2956,7 +2970,7 @@
           <a:p>
             <a:fld id="{A0CF861B-2947-4E74-AAE0-E351222E926D}" type="datetimeFigureOut">
               <a:rPr lang="en-US" smtClean="0"/>
-              <a:t>4/16/2026</a:t>
+              <a:t>8/19/2026</a:t>
             </a:fld>
             <a:endParaRPr lang="en-US"/>
           </a:p>
@@ -4884,6 +4898,1005 @@
 <file path=ppt/slides/slide10.xml><?xml version="1.0" encoding="utf-8"?>
 <p:sld xmlns:a="http://schemas.openxmlformats.org/drawingml/2006/main" xmlns:r="http://schemas.openxmlformats.org/officeDocument/2006/relationships" xmlns:p="http://schemas.openxmlformats.org/presentationml/2006/main">
   <p:cSld>
+    <p:bg>
+      <p:bgPr>
+        <a:solidFill>
+          <a:schemeClr val="bg1"/>
+        </a:solidFill>
+        <a:effectLst/>
+      </p:bgPr>
+    </p:bg>
+    <p:spTree>
+      <p:nvGrpSpPr>
+        <p:cNvPr id="1" name=""/>
+        <p:cNvGrpSpPr/>
+        <p:nvPr/>
+      </p:nvGrpSpPr>
+      <p:grpSpPr>
+        <a:xfrm>
+          <a:off x="0" y="0"/>
+          <a:ext cx="0" cy="0"/>
+          <a:chOff x="0" y="0"/>
+          <a:chExt cx="0" cy="0"/>
+        </a:xfrm>
+      </p:grpSpPr>
+      <p:sp useBgFill="1">
+        <p:nvSpPr>
+          <p:cNvPr id="10" name="Rectangle 9">
+            <a:extLst>
+              <a:ext uri="{FF2B5EF4-FFF2-40B4-BE49-F238E27FC236}">
+                <a16:creationId xmlns:a16="http://schemas.microsoft.com/office/drawing/2014/main" id="{BAD76F3E-3A97-486B-B402-44400A8B9173}"/>
+              </a:ext>
+              <a:ext uri="{C183D7F6-B498-43B3-948B-1728B52AA6E4}">
+                <adec:decorative xmlns:adec="http://schemas.microsoft.com/office/drawing/2017/decorative" val="1"/>
+              </a:ext>
+            </a:extLst>
+          </p:cNvPr>
+          <p:cNvSpPr>
+            <a:spLocks noGrp="1" noRot="1" noChangeAspect="1" noMove="1" noResize="1" noEditPoints="1" noAdjustHandles="1" noChangeArrowheads="1" noChangeShapeType="1" noTextEdit="1"/>
+          </p:cNvSpPr>
+          <p:nvPr>
+            <p:extLst>
+              <p:ext uri="{386F3935-93C4-4BCD-93E2-E3B085C9AB24}">
+                <p16:designElem xmlns:p16="http://schemas.microsoft.com/office/powerpoint/2015/main" val="1"/>
+              </p:ext>
+            </p:extLst>
+          </p:nvPr>
+        </p:nvSpPr>
+        <p:spPr>
+          <a:xfrm>
+            <a:off x="0" y="0"/>
+            <a:ext cx="12192000" cy="6858000"/>
+          </a:xfrm>
+          <a:prstGeom prst="rect">
+            <a:avLst/>
+          </a:prstGeom>
+          <a:ln>
+            <a:noFill/>
+          </a:ln>
+        </p:spPr>
+        <p:style>
+          <a:lnRef idx="2">
+            <a:schemeClr val="accent1">
+              <a:shade val="50000"/>
+            </a:schemeClr>
+          </a:lnRef>
+          <a:fillRef idx="1">
+            <a:schemeClr val="accent1"/>
+          </a:fillRef>
+          <a:effectRef idx="0">
+            <a:schemeClr val="accent1"/>
+          </a:effectRef>
+          <a:fontRef idx="minor">
+            <a:schemeClr val="lt1"/>
+          </a:fontRef>
+        </p:style>
+        <p:txBody>
+          <a:bodyPr rtlCol="0" anchor="ctr"/>
+          <a:lstStyle/>
+          <a:p>
+            <a:pPr algn="ctr"/>
+            <a:endParaRPr lang="en-US"/>
+          </a:p>
+        </p:txBody>
+      </p:sp>
+      <p:sp>
+        <p:nvSpPr>
+          <p:cNvPr id="4" name="Title 3">
+            <a:extLst>
+              <a:ext uri="{FF2B5EF4-FFF2-40B4-BE49-F238E27FC236}">
+                <a16:creationId xmlns:a16="http://schemas.microsoft.com/office/drawing/2014/main" id="{7F86B421-1C2D-73E5-3CEA-E88E3B8B7433}"/>
+              </a:ext>
+            </a:extLst>
+          </p:cNvPr>
+          <p:cNvSpPr>
+            <a:spLocks noGrp="1"/>
+          </p:cNvSpPr>
+          <p:nvPr>
+            <p:ph type="title"/>
+          </p:nvPr>
+        </p:nvSpPr>
+        <p:spPr>
+          <a:xfrm>
+            <a:off x="838199" y="1093788"/>
+            <a:ext cx="10506455" cy="2967208"/>
+          </a:xfrm>
+        </p:spPr>
+        <p:txBody>
+          <a:bodyPr vert="horz" lIns="91440" tIns="45720" rIns="91440" bIns="45720" rtlCol="0" anchor="b">
+            <a:normAutofit/>
+          </a:bodyPr>
+          <a:lstStyle/>
+          <a:p>
+            <a:r>
+              <a:rPr lang="en-US" sz="8000" kern="1200">
+                <a:solidFill>
+                  <a:schemeClr val="tx1"/>
+                </a:solidFill>
+                <a:latin typeface="+mj-lt"/>
+                <a:ea typeface="+mj-ea"/>
+                <a:cs typeface="+mj-cs"/>
+              </a:rPr>
+              <a:t>Using LLMs in AI</a:t>
+            </a:r>
+          </a:p>
+        </p:txBody>
+      </p:sp>
+      <p:sp>
+        <p:nvSpPr>
+          <p:cNvPr id="5" name="Text Placeholder 4">
+            <a:extLst>
+              <a:ext uri="{FF2B5EF4-FFF2-40B4-BE49-F238E27FC236}">
+                <a16:creationId xmlns:a16="http://schemas.microsoft.com/office/drawing/2014/main" id="{C3A73C10-1DA9-61E1-22CD-C0768AEB70CA}"/>
+              </a:ext>
+            </a:extLst>
+          </p:cNvPr>
+          <p:cNvSpPr>
+            <a:spLocks noGrp="1"/>
+          </p:cNvSpPr>
+          <p:nvPr>
+            <p:ph type="body" idx="1"/>
+          </p:nvPr>
+        </p:nvSpPr>
+        <p:spPr>
+          <a:xfrm>
+            <a:off x="7400924" y="4619624"/>
+            <a:ext cx="3946779" cy="1038225"/>
+          </a:xfrm>
+        </p:spPr>
+        <p:txBody>
+          <a:bodyPr vert="horz" lIns="91440" tIns="45720" rIns="91440" bIns="45720" rtlCol="0">
+            <a:normAutofit/>
+          </a:bodyPr>
+          <a:lstStyle/>
+          <a:p>
+            <a:pPr algn="r"/>
+            <a:endParaRPr lang="en-US" sz="2400" kern="1200">
+              <a:solidFill>
+                <a:schemeClr val="tx1"/>
+              </a:solidFill>
+              <a:latin typeface="+mn-lt"/>
+              <a:ea typeface="+mn-ea"/>
+              <a:cs typeface="+mn-cs"/>
+            </a:endParaRPr>
+          </a:p>
+        </p:txBody>
+      </p:sp>
+      <p:sp>
+        <p:nvSpPr>
+          <p:cNvPr id="12" name="Rectangle 11">
+            <a:extLst>
+              <a:ext uri="{FF2B5EF4-FFF2-40B4-BE49-F238E27FC236}">
+                <a16:creationId xmlns:a16="http://schemas.microsoft.com/office/drawing/2014/main" id="{391F6B52-91F4-4AEB-B6DB-29FEBCF28C8B}"/>
+              </a:ext>
+              <a:ext uri="{C183D7F6-B498-43B3-948B-1728B52AA6E4}">
+                <adec:decorative xmlns:adec="http://schemas.microsoft.com/office/drawing/2017/decorative" val="1"/>
+              </a:ext>
+            </a:extLst>
+          </p:cNvPr>
+          <p:cNvSpPr>
+            <a:spLocks noGrp="1" noRot="1" noChangeAspect="1" noMove="1" noResize="1" noEditPoints="1" noAdjustHandles="1" noChangeArrowheads="1" noChangeShapeType="1" noTextEdit="1"/>
+          </p:cNvSpPr>
+          <p:nvPr>
+            <p:extLst>
+              <p:ext uri="{386F3935-93C4-4BCD-93E2-E3B085C9AB24}">
+                <p16:designElem xmlns:p16="http://schemas.microsoft.com/office/powerpoint/2015/main" val="1"/>
+              </p:ext>
+            </p:extLst>
+          </p:nvPr>
+        </p:nvSpPr>
+        <p:spPr>
+          <a:xfrm>
+            <a:off x="841248" y="4331166"/>
+            <a:ext cx="10506456" cy="18288"/>
+          </a:xfrm>
+          <a:prstGeom prst="rect">
+            <a:avLst/>
+          </a:prstGeom>
+          <a:solidFill>
+            <a:srgbClr val="D5D5D5"/>
+          </a:solidFill>
+          <a:ln w="3175">
+            <a:noFill/>
+          </a:ln>
+          <a:effectLst/>
+        </p:spPr>
+        <p:style>
+          <a:lnRef idx="2">
+            <a:schemeClr val="accent1">
+              <a:shade val="50000"/>
+            </a:schemeClr>
+          </a:lnRef>
+          <a:fillRef idx="1">
+            <a:schemeClr val="accent1"/>
+          </a:fillRef>
+          <a:effectRef idx="0">
+            <a:schemeClr val="accent1"/>
+          </a:effectRef>
+          <a:fontRef idx="minor">
+            <a:schemeClr val="lt1"/>
+          </a:fontRef>
+        </p:style>
+        <p:txBody>
+          <a:bodyPr rtlCol="0" anchor="ctr"/>
+          <a:lstStyle/>
+          <a:p>
+            <a:pPr algn="ctr"/>
+            <a:endParaRPr lang="en-US">
+              <a:solidFill>
+                <a:prstClr val="white"/>
+              </a:solidFill>
+              <a:latin typeface="Calibri" panose="020F0502020204030204"/>
+            </a:endParaRPr>
+          </a:p>
+        </p:txBody>
+      </p:sp>
+      <p:sp>
+        <p:nvSpPr>
+          <p:cNvPr id="14" name="Rectangle 13">
+            <a:extLst>
+              <a:ext uri="{FF2B5EF4-FFF2-40B4-BE49-F238E27FC236}">
+                <a16:creationId xmlns:a16="http://schemas.microsoft.com/office/drawing/2014/main" id="{2CD6F061-7C53-44F4-9794-953DB70A451B}"/>
+              </a:ext>
+              <a:ext uri="{C183D7F6-B498-43B3-948B-1728B52AA6E4}">
+                <adec:decorative xmlns:adec="http://schemas.microsoft.com/office/drawing/2017/decorative" val="1"/>
+              </a:ext>
+            </a:extLst>
+          </p:cNvPr>
+          <p:cNvSpPr>
+            <a:spLocks noGrp="1" noRot="1" noChangeAspect="1" noMove="1" noResize="1" noEditPoints="1" noAdjustHandles="1" noChangeArrowheads="1" noChangeShapeType="1" noTextEdit="1"/>
+          </p:cNvSpPr>
+          <p:nvPr>
+            <p:extLst>
+              <p:ext uri="{386F3935-93C4-4BCD-93E2-E3B085C9AB24}">
+                <p16:designElem xmlns:p16="http://schemas.microsoft.com/office/powerpoint/2015/main" val="1"/>
+              </p:ext>
+            </p:extLst>
+          </p:nvPr>
+        </p:nvSpPr>
+        <p:spPr>
+          <a:xfrm rot="5400000">
+            <a:off x="9346882" y="2348839"/>
+            <a:ext cx="54864" cy="3946779"/>
+          </a:xfrm>
+          <a:prstGeom prst="rect">
+            <a:avLst/>
+          </a:prstGeom>
+          <a:solidFill>
+            <a:schemeClr val="accent2"/>
+          </a:solidFill>
+          <a:ln>
+            <a:noFill/>
+          </a:ln>
+        </p:spPr>
+        <p:style>
+          <a:lnRef idx="2">
+            <a:schemeClr val="accent1">
+              <a:shade val="50000"/>
+            </a:schemeClr>
+          </a:lnRef>
+          <a:fillRef idx="1">
+            <a:schemeClr val="accent1"/>
+          </a:fillRef>
+          <a:effectRef idx="0">
+            <a:schemeClr val="accent1"/>
+          </a:effectRef>
+          <a:fontRef idx="minor">
+            <a:schemeClr val="lt1"/>
+          </a:fontRef>
+        </p:style>
+        <p:txBody>
+          <a:bodyPr rtlCol="0" anchor="ctr"/>
+          <a:lstStyle/>
+          <a:p>
+            <a:pPr marL="0" marR="0" lvl="0" indent="0" algn="ctr" defTabSz="914400" rtl="0" eaLnBrk="1" fontAlgn="auto" latinLnBrk="0" hangingPunct="1">
+              <a:lnSpc>
+                <a:spcPct val="100000"/>
+              </a:lnSpc>
+              <a:spcBef>
+                <a:spcPts val="0"/>
+              </a:spcBef>
+              <a:spcAft>
+                <a:spcPts val="0"/>
+              </a:spcAft>
+              <a:buClrTx/>
+              <a:buSzTx/>
+              <a:buFontTx/>
+              <a:buNone/>
+              <a:tabLst/>
+              <a:defRPr/>
+            </a:pPr>
+            <a:endParaRPr kumimoji="0" lang="en-US" sz="1800" b="0" i="0" u="none" strike="noStrike" kern="1200" cap="none" spc="0" normalizeH="0" baseline="0" noProof="0">
+              <a:ln>
+                <a:noFill/>
+              </a:ln>
+              <a:solidFill>
+                <a:prstClr val="white"/>
+              </a:solidFill>
+              <a:effectLst/>
+              <a:uLnTx/>
+              <a:uFillTx/>
+              <a:latin typeface="Calibri" panose="020F0502020204030204"/>
+              <a:ea typeface="+mn-ea"/>
+              <a:cs typeface="+mn-cs"/>
+            </a:endParaRPr>
+          </a:p>
+        </p:txBody>
+      </p:sp>
+    </p:spTree>
+    <p:extLst>
+      <p:ext uri="{BB962C8B-B14F-4D97-AF65-F5344CB8AC3E}">
+        <p14:creationId xmlns:p14="http://schemas.microsoft.com/office/powerpoint/2010/main" val="3070116704"/>
+      </p:ext>
+    </p:extLst>
+  </p:cSld>
+  <p:clrMapOvr>
+    <a:masterClrMapping/>
+  </p:clrMapOvr>
+</p:sld>
+</file>
+
+<file path=ppt/slides/slide11.xml><?xml version="1.0" encoding="utf-8"?>
+<p:sld xmlns:a="http://schemas.openxmlformats.org/drawingml/2006/main" xmlns:r="http://schemas.openxmlformats.org/officeDocument/2006/relationships" xmlns:p="http://schemas.openxmlformats.org/presentationml/2006/main">
+  <p:cSld>
+    <p:spTree>
+      <p:nvGrpSpPr>
+        <p:cNvPr id="1" name=""/>
+        <p:cNvGrpSpPr/>
+        <p:nvPr/>
+      </p:nvGrpSpPr>
+      <p:grpSpPr>
+        <a:xfrm>
+          <a:off x="0" y="0"/>
+          <a:ext cx="0" cy="0"/>
+          <a:chOff x="0" y="0"/>
+          <a:chExt cx="0" cy="0"/>
+        </a:xfrm>
+      </p:grpSpPr>
+      <p:sp>
+        <p:nvSpPr>
+          <p:cNvPr id="2" name="Title 1">
+            <a:extLst>
+              <a:ext uri="{FF2B5EF4-FFF2-40B4-BE49-F238E27FC236}">
+                <a16:creationId xmlns:a16="http://schemas.microsoft.com/office/drawing/2014/main" id="{86259EE7-0262-3950-5AC0-9432C21F44CE}"/>
+              </a:ext>
+            </a:extLst>
+          </p:cNvPr>
+          <p:cNvSpPr>
+            <a:spLocks noGrp="1"/>
+          </p:cNvSpPr>
+          <p:nvPr>
+            <p:ph type="title"/>
+          </p:nvPr>
+        </p:nvSpPr>
+        <p:spPr/>
+        <p:txBody>
+          <a:bodyPr/>
+          <a:lstStyle/>
+          <a:p>
+            <a:r>
+              <a:rPr lang="en-US" dirty="0"/>
+              <a:t>The Agent Harness</a:t>
+            </a:r>
+          </a:p>
+        </p:txBody>
+      </p:sp>
+      <p:sp>
+        <p:nvSpPr>
+          <p:cNvPr id="3" name="Content Placeholder 2">
+            <a:extLst>
+              <a:ext uri="{FF2B5EF4-FFF2-40B4-BE49-F238E27FC236}">
+                <a16:creationId xmlns:a16="http://schemas.microsoft.com/office/drawing/2014/main" id="{0267AE25-ED73-8E72-2D99-95C3B8D46F5C}"/>
+              </a:ext>
+            </a:extLst>
+          </p:cNvPr>
+          <p:cNvSpPr>
+            <a:spLocks noGrp="1"/>
+          </p:cNvSpPr>
+          <p:nvPr>
+            <p:ph idx="1"/>
+          </p:nvPr>
+        </p:nvSpPr>
+        <p:spPr>
+          <a:xfrm>
+            <a:off x="838200" y="1528877"/>
+            <a:ext cx="5576560" cy="4844978"/>
+          </a:xfrm>
+        </p:spPr>
+        <p:txBody>
+          <a:bodyPr>
+            <a:normAutofit fontScale="70000" lnSpcReduction="20000"/>
+          </a:bodyPr>
+          <a:lstStyle/>
+          <a:p>
+            <a:pPr marL="0" indent="0">
+              <a:buNone/>
+            </a:pPr>
+            <a:r>
+              <a:rPr lang="en-US" dirty="0"/>
+              <a:t>An </a:t>
+            </a:r>
+            <a:r>
+              <a:rPr lang="en-US" b="1" dirty="0"/>
+              <a:t>Agent Harness</a:t>
+            </a:r>
+            <a:r>
+              <a:rPr lang="en-US" dirty="0"/>
+              <a:t> transforms a raw model into an autonomous AI agent by providing:</a:t>
+            </a:r>
+          </a:p>
+          <a:p>
+            <a:endParaRPr lang="en-US" dirty="0"/>
+          </a:p>
+          <a:p>
+            <a:pPr lvl="1"/>
+            <a:r>
+              <a:rPr lang="en-US" b="1" dirty="0"/>
+              <a:t>Memory &amp; Context Management</a:t>
+            </a:r>
+            <a:r>
+              <a:rPr lang="en-US" dirty="0"/>
+              <a:t>: Manages the LLMs context windows. E.g., provides system prompts, short-term session tracking and long-term databases (like vector stores) so the AI remembers previous conversations. </a:t>
+            </a:r>
+          </a:p>
+          <a:p>
+            <a:pPr lvl="1"/>
+            <a:r>
+              <a:rPr lang="en-US" b="1" dirty="0"/>
+              <a:t>Tool Access</a:t>
+            </a:r>
+            <a:r>
+              <a:rPr lang="en-US" dirty="0"/>
+              <a:t>: Catch tool command, executes the tool in a safe environment, and return the results back to the model.</a:t>
+            </a:r>
+          </a:p>
+          <a:p>
+            <a:pPr lvl="1"/>
+            <a:r>
+              <a:rPr lang="en-US" b="1" dirty="0"/>
+              <a:t>Loop Control &amp; Error Recovery</a:t>
+            </a:r>
+            <a:r>
+              <a:rPr lang="en-US" dirty="0"/>
+              <a:t>: Looping autonomously until the problem is solved. E.g., LLM writes broken code, the harness tests the code and tells the LLM: </a:t>
+            </a:r>
+            <a:r>
+              <a:rPr lang="en-US" i="1" dirty="0"/>
+              <a:t>"This failed for X reason, try again."</a:t>
+            </a:r>
+            <a:endParaRPr lang="en-US" dirty="0"/>
+          </a:p>
+          <a:p>
+            <a:pPr lvl="1"/>
+            <a:r>
+              <a:rPr lang="en-US" b="1" dirty="0"/>
+              <a:t>Guardrails &amp; Security</a:t>
+            </a:r>
+            <a:r>
+              <a:rPr lang="en-US" dirty="0"/>
+              <a:t>: It acts as a filter to sanitize inputs before they hit the model and blocks restricted or unsafe outputs before they reach the user.</a:t>
+            </a:r>
+          </a:p>
+          <a:p>
+            <a:pPr lvl="1"/>
+            <a:endParaRPr lang="en-US" dirty="0"/>
+          </a:p>
+          <a:p>
+            <a:pPr marL="0" indent="0">
+              <a:buNone/>
+            </a:pPr>
+            <a:r>
+              <a:rPr lang="en-US" dirty="0"/>
+              <a:t>Tools: </a:t>
+            </a:r>
+            <a:r>
+              <a:rPr lang="en-US" dirty="0" err="1"/>
+              <a:t>LangGraph</a:t>
+            </a:r>
+            <a:r>
+              <a:rPr lang="en-US" dirty="0"/>
+              <a:t>, </a:t>
+            </a:r>
+            <a:r>
+              <a:rPr lang="en-US" dirty="0" err="1"/>
+              <a:t>CrewAI</a:t>
+            </a:r>
+            <a:r>
+              <a:rPr lang="en-US" dirty="0"/>
+              <a:t>, Microsoft </a:t>
+            </a:r>
+            <a:r>
+              <a:rPr lang="en-US" dirty="0" err="1"/>
+              <a:t>AutoGen</a:t>
+            </a:r>
+            <a:r>
+              <a:rPr lang="en-US" dirty="0"/>
+              <a:t>, … </a:t>
+            </a:r>
+          </a:p>
+        </p:txBody>
+      </p:sp>
+      <p:pic>
+        <p:nvPicPr>
+          <p:cNvPr id="4" name="Picture 3" descr="What is an agent harness — conceptual diagram">
+            <a:extLst>
+              <a:ext uri="{FF2B5EF4-FFF2-40B4-BE49-F238E27FC236}">
+                <a16:creationId xmlns:a16="http://schemas.microsoft.com/office/drawing/2014/main" id="{DB3A6780-CD4F-3F9A-B1E4-445733F7039A}"/>
+              </a:ext>
+            </a:extLst>
+          </p:cNvPr>
+          <p:cNvPicPr>
+            <a:picLocks noChangeAspect="1"/>
+          </p:cNvPicPr>
+          <p:nvPr/>
+        </p:nvPicPr>
+        <p:blipFill>
+          <a:blip r:embed="rId2"/>
+          <a:stretch>
+            <a:fillRect/>
+          </a:stretch>
+        </p:blipFill>
+        <p:spPr>
+          <a:xfrm>
+            <a:off x="6344822" y="1638605"/>
+            <a:ext cx="5363015" cy="4022261"/>
+          </a:xfrm>
+          <a:prstGeom prst="rect">
+            <a:avLst/>
+          </a:prstGeom>
+        </p:spPr>
+      </p:pic>
+      <p:sp>
+        <p:nvSpPr>
+          <p:cNvPr id="7" name="TextBox 6">
+            <a:extLst>
+              <a:ext uri="{FF2B5EF4-FFF2-40B4-BE49-F238E27FC236}">
+                <a16:creationId xmlns:a16="http://schemas.microsoft.com/office/drawing/2014/main" id="{C2E0ACEC-14BF-D1E9-EAB4-F02327F4B316}"/>
+              </a:ext>
+            </a:extLst>
+          </p:cNvPr>
+          <p:cNvSpPr txBox="1"/>
+          <p:nvPr/>
+        </p:nvSpPr>
+        <p:spPr>
+          <a:xfrm>
+            <a:off x="6823681" y="5912189"/>
+            <a:ext cx="4530119" cy="461665"/>
+          </a:xfrm>
+          <a:prstGeom prst="rect">
+            <a:avLst/>
+          </a:prstGeom>
+          <a:noFill/>
+        </p:spPr>
+        <p:txBody>
+          <a:bodyPr wrap="square" rtlCol="0">
+            <a:spAutoFit/>
+          </a:bodyPr>
+          <a:lstStyle/>
+          <a:p>
+            <a:r>
+              <a:rPr lang="en-US" sz="1200" dirty="0"/>
+              <a:t>Source: </a:t>
+            </a:r>
+            <a:r>
+              <a:rPr lang="en-US" sz="1200" dirty="0">
+                <a:hlinkClick r:id="rId3"/>
+              </a:rPr>
+              <a:t>https://xmpro.com/your-ai-agent-needs-a-harness-heres-what-that-means-for-industrial-operations/</a:t>
+            </a:r>
+            <a:r>
+              <a:rPr lang="en-US" sz="1200" dirty="0"/>
+              <a:t> </a:t>
+            </a:r>
+          </a:p>
+        </p:txBody>
+      </p:sp>
+    </p:spTree>
+    <p:extLst>
+      <p:ext uri="{BB962C8B-B14F-4D97-AF65-F5344CB8AC3E}">
+        <p14:creationId xmlns:p14="http://schemas.microsoft.com/office/powerpoint/2010/main" val="1746590836"/>
+      </p:ext>
+    </p:extLst>
+  </p:cSld>
+  <p:clrMapOvr>
+    <a:masterClrMapping/>
+  </p:clrMapOvr>
+</p:sld>
+</file>
+
+<file path=ppt/slides/slide12.xml><?xml version="1.0" encoding="utf-8"?>
+<p:sld xmlns:a="http://schemas.openxmlformats.org/drawingml/2006/main" xmlns:r="http://schemas.openxmlformats.org/officeDocument/2006/relationships" xmlns:p="http://schemas.openxmlformats.org/presentationml/2006/main">
+  <p:cSld>
+    <p:spTree>
+      <p:nvGrpSpPr>
+        <p:cNvPr id="1" name=""/>
+        <p:cNvGrpSpPr/>
+        <p:nvPr/>
+      </p:nvGrpSpPr>
+      <p:grpSpPr>
+        <a:xfrm>
+          <a:off x="0" y="0"/>
+          <a:ext cx="0" cy="0"/>
+          <a:chOff x="0" y="0"/>
+          <a:chExt cx="0" cy="0"/>
+        </a:xfrm>
+      </p:grpSpPr>
+      <p:sp>
+        <p:nvSpPr>
+          <p:cNvPr id="2" name="Title 1">
+            <a:extLst>
+              <a:ext uri="{FF2B5EF4-FFF2-40B4-BE49-F238E27FC236}">
+                <a16:creationId xmlns:a16="http://schemas.microsoft.com/office/drawing/2014/main" id="{114D385A-D658-061C-3FF8-9E8697E85247}"/>
+              </a:ext>
+            </a:extLst>
+          </p:cNvPr>
+          <p:cNvSpPr>
+            <a:spLocks noGrp="1"/>
+          </p:cNvSpPr>
+          <p:nvPr>
+            <p:ph type="title"/>
+          </p:nvPr>
+        </p:nvSpPr>
+        <p:spPr/>
+        <p:txBody>
+          <a:bodyPr/>
+          <a:lstStyle/>
+          <a:p>
+            <a:r>
+              <a:rPr lang="en-US" dirty="0"/>
+              <a:t>Prompt Engineering / Context Engineering</a:t>
+            </a:r>
+          </a:p>
+        </p:txBody>
+      </p:sp>
+      <p:sp>
+        <p:nvSpPr>
+          <p:cNvPr id="3" name="Content Placeholder 2">
+            <a:extLst>
+              <a:ext uri="{FF2B5EF4-FFF2-40B4-BE49-F238E27FC236}">
+                <a16:creationId xmlns:a16="http://schemas.microsoft.com/office/drawing/2014/main" id="{7B4CA82F-7E87-F33C-678A-4F3E6B9D2E04}"/>
+              </a:ext>
+            </a:extLst>
+          </p:cNvPr>
+          <p:cNvSpPr>
+            <a:spLocks noGrp="1"/>
+          </p:cNvSpPr>
+          <p:nvPr>
+            <p:ph idx="1"/>
+          </p:nvPr>
+        </p:nvSpPr>
+        <p:spPr>
+          <a:xfrm>
+            <a:off x="838200" y="1825625"/>
+            <a:ext cx="7070313" cy="4351338"/>
+          </a:xfrm>
+        </p:spPr>
+        <p:txBody>
+          <a:bodyPr>
+            <a:normAutofit fontScale="85000" lnSpcReduction="10000"/>
+          </a:bodyPr>
+          <a:lstStyle/>
+          <a:p>
+            <a:r>
+              <a:rPr lang="en-US" dirty="0"/>
+              <a:t>Design effective natural language instructions (prompts) to guide generative AI models toward desired outputs, such as text, images, or code.</a:t>
+            </a:r>
+          </a:p>
+          <a:p>
+            <a:pPr lvl="1"/>
+            <a:r>
+              <a:rPr lang="en-US" b="1" dirty="0"/>
+              <a:t>Zero-shot prompt: </a:t>
+            </a:r>
+            <a:r>
+              <a:rPr lang="en-US" dirty="0"/>
+              <a:t>directly instructs the model to perform a task without any additional examples.</a:t>
+            </a:r>
+          </a:p>
+          <a:p>
+            <a:pPr lvl="1"/>
+            <a:endParaRPr lang="en-US" dirty="0"/>
+          </a:p>
+          <a:p>
+            <a:pPr lvl="1"/>
+            <a:r>
+              <a:rPr lang="en-US" b="1" dirty="0"/>
+              <a:t>Chain-of-thought</a:t>
+            </a:r>
+            <a:r>
+              <a:rPr lang="en-US" dirty="0"/>
+              <a:t>: solve a problem as a series of intermediate steps before giving a final answer. </a:t>
+            </a:r>
+            <a:br>
+              <a:rPr lang="en-US" dirty="0"/>
+            </a:br>
+            <a:r>
+              <a:rPr lang="en-US" i="1" dirty="0"/>
+              <a:t>Note: </a:t>
+            </a:r>
+            <a:r>
+              <a:rPr lang="en-US" dirty="0"/>
+              <a:t>Many modern chatbots include chain-of-thought into the system prompt and call this </a:t>
+            </a:r>
+            <a:r>
+              <a:rPr lang="en-US" b="1" dirty="0"/>
+              <a:t>reasoning models</a:t>
+            </a:r>
+            <a:r>
+              <a:rPr lang="en-US" dirty="0"/>
+              <a:t>! </a:t>
+            </a:r>
+          </a:p>
+          <a:p>
+            <a:pPr lvl="1"/>
+            <a:endParaRPr lang="en-US" b="1" dirty="0"/>
+          </a:p>
+          <a:p>
+            <a:pPr lvl="1"/>
+            <a:r>
+              <a:rPr lang="en-US" b="1" dirty="0"/>
+              <a:t>Few-Shot Prompting: </a:t>
+            </a:r>
+            <a:r>
+              <a:rPr lang="en-US" dirty="0"/>
+              <a:t>Provide demonstrations in the prompt to steer the model to better performance or to create output in a desired format.</a:t>
+            </a:r>
+          </a:p>
+          <a:p>
+            <a:pPr lvl="1"/>
+            <a:endParaRPr lang="en-US" b="1" dirty="0"/>
+          </a:p>
+        </p:txBody>
+      </p:sp>
+      <p:grpSp>
+        <p:nvGrpSpPr>
+          <p:cNvPr id="10" name="Group 9">
+            <a:extLst>
+              <a:ext uri="{FF2B5EF4-FFF2-40B4-BE49-F238E27FC236}">
+                <a16:creationId xmlns:a16="http://schemas.microsoft.com/office/drawing/2014/main" id="{EF77830A-561A-B934-3E00-539C021C23B2}"/>
+              </a:ext>
+            </a:extLst>
+          </p:cNvPr>
+          <p:cNvGrpSpPr/>
+          <p:nvPr/>
+        </p:nvGrpSpPr>
+        <p:grpSpPr>
+          <a:xfrm>
+            <a:off x="8032401" y="2402772"/>
+            <a:ext cx="3750091" cy="3371547"/>
+            <a:chOff x="8025421" y="2555396"/>
+            <a:chExt cx="3750091" cy="3371547"/>
+          </a:xfrm>
+        </p:grpSpPr>
+        <p:sp>
+          <p:nvSpPr>
+            <p:cNvPr id="5" name="TextBox 4">
+              <a:extLst>
+                <a:ext uri="{FF2B5EF4-FFF2-40B4-BE49-F238E27FC236}">
+                  <a16:creationId xmlns:a16="http://schemas.microsoft.com/office/drawing/2014/main" id="{4506427E-FA4C-2E1F-5B08-A69F783CB207}"/>
+                </a:ext>
+              </a:extLst>
+            </p:cNvPr>
+            <p:cNvSpPr txBox="1"/>
+            <p:nvPr/>
+          </p:nvSpPr>
+          <p:spPr>
+            <a:xfrm>
+              <a:off x="8025421" y="5188279"/>
+              <a:ext cx="3750087" cy="738664"/>
+            </a:xfrm>
+            <a:prstGeom prst="rect">
+              <a:avLst/>
+            </a:prstGeom>
+          </p:spPr>
+          <p:style>
+            <a:lnRef idx="2">
+              <a:schemeClr val="dk1"/>
+            </a:lnRef>
+            <a:fillRef idx="1">
+              <a:schemeClr val="lt1"/>
+            </a:fillRef>
+            <a:effectRef idx="0">
+              <a:schemeClr val="dk1"/>
+            </a:effectRef>
+            <a:fontRef idx="minor">
+              <a:schemeClr val="dk1"/>
+            </a:fontRef>
+          </p:style>
+          <p:txBody>
+            <a:bodyPr wrap="square">
+              <a:spAutoFit/>
+            </a:bodyPr>
+            <a:lstStyle/>
+            <a:p>
+              <a:r>
+                <a:rPr lang="en-US" sz="1400" dirty="0"/>
+                <a:t>Review: Loved it! Output: Positive</a:t>
+              </a:r>
+            </a:p>
+            <a:p>
+              <a:r>
+                <a:rPr lang="en-US" sz="1400" dirty="0"/>
+                <a:t>Review: Hated it. Output: Negative</a:t>
+              </a:r>
+            </a:p>
+            <a:p>
+              <a:r>
+                <a:rPr lang="en-US" sz="1400" dirty="0"/>
+                <a:t>Review: It was good. Output: </a:t>
+              </a:r>
+            </a:p>
+          </p:txBody>
+        </p:sp>
+        <p:sp>
+          <p:nvSpPr>
+            <p:cNvPr id="6" name="TextBox 5">
+              <a:extLst>
+                <a:ext uri="{FF2B5EF4-FFF2-40B4-BE49-F238E27FC236}">
+                  <a16:creationId xmlns:a16="http://schemas.microsoft.com/office/drawing/2014/main" id="{D3A5546D-5CD6-4509-AB15-DD534CF900AC}"/>
+                </a:ext>
+              </a:extLst>
+            </p:cNvPr>
+            <p:cNvSpPr txBox="1"/>
+            <p:nvPr/>
+          </p:nvSpPr>
+          <p:spPr>
+            <a:xfrm>
+              <a:off x="8025424" y="3044937"/>
+              <a:ext cx="3750087" cy="307777"/>
+            </a:xfrm>
+            <a:prstGeom prst="rect">
+              <a:avLst/>
+            </a:prstGeom>
+          </p:spPr>
+          <p:style>
+            <a:lnRef idx="2">
+              <a:schemeClr val="dk1"/>
+            </a:lnRef>
+            <a:fillRef idx="1">
+              <a:schemeClr val="lt1"/>
+            </a:fillRef>
+            <a:effectRef idx="0">
+              <a:schemeClr val="dk1"/>
+            </a:effectRef>
+            <a:fontRef idx="minor">
+              <a:schemeClr val="dk1"/>
+            </a:fontRef>
+          </p:style>
+          <p:txBody>
+            <a:bodyPr wrap="square">
+              <a:spAutoFit/>
+            </a:bodyPr>
+            <a:lstStyle/>
+            <a:p>
+              <a:r>
+                <a:rPr lang="en-US" sz="1400" dirty="0"/>
+                <a:t>6 times 15 minus 3 is</a:t>
+              </a:r>
+            </a:p>
+          </p:txBody>
+        </p:sp>
+        <p:sp>
+          <p:nvSpPr>
+            <p:cNvPr id="7" name="TextBox 6">
+              <a:extLst>
+                <a:ext uri="{FF2B5EF4-FFF2-40B4-BE49-F238E27FC236}">
+                  <a16:creationId xmlns:a16="http://schemas.microsoft.com/office/drawing/2014/main" id="{0C4D6113-2342-DBC8-C22F-F88114463945}"/>
+                </a:ext>
+              </a:extLst>
+            </p:cNvPr>
+            <p:cNvSpPr txBox="1"/>
+            <p:nvPr/>
+          </p:nvSpPr>
+          <p:spPr>
+            <a:xfrm>
+              <a:off x="8025422" y="3888400"/>
+              <a:ext cx="3750087" cy="523220"/>
+            </a:xfrm>
+            <a:prstGeom prst="rect">
+              <a:avLst/>
+            </a:prstGeom>
+          </p:spPr>
+          <p:style>
+            <a:lnRef idx="2">
+              <a:schemeClr val="dk1"/>
+            </a:lnRef>
+            <a:fillRef idx="1">
+              <a:schemeClr val="lt1"/>
+            </a:fillRef>
+            <a:effectRef idx="0">
+              <a:schemeClr val="dk1"/>
+            </a:effectRef>
+            <a:fontRef idx="minor">
+              <a:schemeClr val="dk1"/>
+            </a:fontRef>
+          </p:style>
+          <p:txBody>
+            <a:bodyPr wrap="square">
+              <a:spAutoFit/>
+            </a:bodyPr>
+            <a:lstStyle/>
+            <a:p>
+              <a:r>
+                <a:rPr lang="en-US" sz="1400" dirty="0"/>
+                <a:t>How much is 6 times 15 minus 3? </a:t>
+              </a:r>
+              <a:r>
+                <a:rPr lang="en-US" sz="1400" i="1" dirty="0"/>
+                <a:t>Let's think step-by-step.</a:t>
+              </a:r>
+            </a:p>
+          </p:txBody>
+        </p:sp>
+        <p:sp>
+          <p:nvSpPr>
+            <p:cNvPr id="8" name="TextBox 7">
+              <a:extLst>
+                <a:ext uri="{FF2B5EF4-FFF2-40B4-BE49-F238E27FC236}">
+                  <a16:creationId xmlns:a16="http://schemas.microsoft.com/office/drawing/2014/main" id="{93CFADBC-5696-A6E2-9E51-ECFA641D0A16}"/>
+                </a:ext>
+              </a:extLst>
+            </p:cNvPr>
+            <p:cNvSpPr txBox="1"/>
+            <p:nvPr/>
+          </p:nvSpPr>
+          <p:spPr>
+            <a:xfrm>
+              <a:off x="8025425" y="2555396"/>
+              <a:ext cx="3750087" cy="307777"/>
+            </a:xfrm>
+            <a:prstGeom prst="rect">
+              <a:avLst/>
+            </a:prstGeom>
+            <a:noFill/>
+            <a:ln>
+              <a:noFill/>
+            </a:ln>
+          </p:spPr>
+          <p:style>
+            <a:lnRef idx="0">
+              <a:scrgbClr r="0" g="0" b="0"/>
+            </a:lnRef>
+            <a:fillRef idx="0">
+              <a:scrgbClr r="0" g="0" b="0"/>
+            </a:fillRef>
+            <a:effectRef idx="0">
+              <a:scrgbClr r="0" g="0" b="0"/>
+            </a:effectRef>
+            <a:fontRef idx="minor">
+              <a:schemeClr val="dk1"/>
+            </a:fontRef>
+          </p:style>
+          <p:txBody>
+            <a:bodyPr wrap="square">
+              <a:spAutoFit/>
+            </a:bodyPr>
+            <a:lstStyle/>
+            <a:p>
+              <a:r>
+                <a:rPr lang="en-US" sz="1400" dirty="0"/>
+                <a:t>Examples:</a:t>
+              </a:r>
+            </a:p>
+          </p:txBody>
+        </p:sp>
+      </p:grpSp>
+    </p:spTree>
+    <p:extLst>
+      <p:ext uri="{BB962C8B-B14F-4D97-AF65-F5344CB8AC3E}">
+        <p14:creationId xmlns:p14="http://schemas.microsoft.com/office/powerpoint/2010/main" val="883930596"/>
+      </p:ext>
+    </p:extLst>
+  </p:cSld>
+  <p:clrMapOvr>
+    <a:masterClrMapping/>
+  </p:clrMapOvr>
+</p:sld>
+</file>
+
+<file path=ppt/slides/slide13.xml><?xml version="1.0" encoding="utf-8"?>
+<p:sld xmlns:a="http://schemas.openxmlformats.org/drawingml/2006/main" xmlns:r="http://schemas.openxmlformats.org/officeDocument/2006/relationships" xmlns:p="http://schemas.openxmlformats.org/presentationml/2006/main">
+  <p:cSld>
     <p:spTree>
       <p:nvGrpSpPr>
         <p:cNvPr id="1" name=""/>
@@ -5248,7 +6261,7 @@
 </p:sld>
 </file>
 
-<file path=ppt/slides/slide11.xml><?xml version="1.0" encoding="utf-8"?>
+<file path=ppt/slides/slide14.xml><?xml version="1.0" encoding="utf-8"?>
 <p:sld xmlns:a="http://schemas.openxmlformats.org/drawingml/2006/main" xmlns:r="http://schemas.openxmlformats.org/officeDocument/2006/relationships" xmlns:p="http://schemas.openxmlformats.org/presentationml/2006/main">
   <p:cSld>
     <p:spTree>
@@ -5621,7 +6634,7 @@
 </p:sld>
 </file>
 
-<file path=ppt/slides/slide12.xml><?xml version="1.0" encoding="utf-8"?>
+<file path=ppt/slides/slide15.xml><?xml version="1.0" encoding="utf-8"?>
 <p:sld xmlns:a="http://schemas.openxmlformats.org/drawingml/2006/main" xmlns:r="http://schemas.openxmlformats.org/officeDocument/2006/relationships" xmlns:p="http://schemas.openxmlformats.org/presentationml/2006/main">
   <p:cSld>
     <p:spTree>
@@ -6779,7 +7792,354 @@
 </p:sld>
 </file>
 
-<file path=ppt/slides/slide13.xml><?xml version="1.0" encoding="utf-8"?>
+<file path=ppt/slides/slide16.xml><?xml version="1.0" encoding="utf-8"?>
+<p:sld xmlns:a="http://schemas.openxmlformats.org/drawingml/2006/main" xmlns:r="http://schemas.openxmlformats.org/officeDocument/2006/relationships" xmlns:p="http://schemas.openxmlformats.org/presentationml/2006/main">
+  <p:cSld>
+    <p:bg>
+      <p:bgPr>
+        <a:solidFill>
+          <a:schemeClr val="bg1"/>
+        </a:solidFill>
+        <a:effectLst/>
+      </p:bgPr>
+    </p:bg>
+    <p:spTree>
+      <p:nvGrpSpPr>
+        <p:cNvPr id="1" name="">
+          <a:extLst>
+            <a:ext uri="{FF2B5EF4-FFF2-40B4-BE49-F238E27FC236}">
+              <a16:creationId xmlns:a16="http://schemas.microsoft.com/office/drawing/2014/main" id="{F018C496-9C16-B8B4-A6A9-E19D54DB058F}"/>
+            </a:ext>
+          </a:extLst>
+        </p:cNvPr>
+        <p:cNvGrpSpPr/>
+        <p:nvPr/>
+      </p:nvGrpSpPr>
+      <p:grpSpPr>
+        <a:xfrm>
+          <a:off x="0" y="0"/>
+          <a:ext cx="0" cy="0"/>
+          <a:chOff x="0" y="0"/>
+          <a:chExt cx="0" cy="0"/>
+        </a:xfrm>
+      </p:grpSpPr>
+      <p:sp useBgFill="1">
+        <p:nvSpPr>
+          <p:cNvPr id="15" name="Rectangle 14">
+            <a:extLst>
+              <a:ext uri="{FF2B5EF4-FFF2-40B4-BE49-F238E27FC236}">
+                <a16:creationId xmlns:a16="http://schemas.microsoft.com/office/drawing/2014/main" id="{BAD76F3E-3A97-486B-B402-44400A8B9173}"/>
+              </a:ext>
+              <a:ext uri="{C183D7F6-B498-43B3-948B-1728B52AA6E4}">
+                <adec:decorative xmlns:adec="http://schemas.microsoft.com/office/drawing/2017/decorative" val="1"/>
+              </a:ext>
+            </a:extLst>
+          </p:cNvPr>
+          <p:cNvSpPr>
+            <a:spLocks noGrp="1" noRot="1" noChangeAspect="1" noMove="1" noResize="1" noEditPoints="1" noAdjustHandles="1" noChangeArrowheads="1" noChangeShapeType="1" noTextEdit="1"/>
+          </p:cNvSpPr>
+          <p:nvPr>
+            <p:extLst>
+              <p:ext uri="{386F3935-93C4-4BCD-93E2-E3B085C9AB24}">
+                <p16:designElem xmlns:p16="http://schemas.microsoft.com/office/powerpoint/2015/main" val="1"/>
+              </p:ext>
+            </p:extLst>
+          </p:nvPr>
+        </p:nvSpPr>
+        <p:spPr>
+          <a:xfrm>
+            <a:off x="0" y="0"/>
+            <a:ext cx="12192000" cy="6858000"/>
+          </a:xfrm>
+          <a:prstGeom prst="rect">
+            <a:avLst/>
+          </a:prstGeom>
+          <a:ln>
+            <a:noFill/>
+          </a:ln>
+        </p:spPr>
+        <p:style>
+          <a:lnRef idx="2">
+            <a:schemeClr val="accent1">
+              <a:shade val="50000"/>
+            </a:schemeClr>
+          </a:lnRef>
+          <a:fillRef idx="1">
+            <a:schemeClr val="accent1"/>
+          </a:fillRef>
+          <a:effectRef idx="0">
+            <a:schemeClr val="accent1"/>
+          </a:effectRef>
+          <a:fontRef idx="minor">
+            <a:schemeClr val="lt1"/>
+          </a:fontRef>
+        </p:style>
+        <p:txBody>
+          <a:bodyPr rtlCol="0" anchor="ctr"/>
+          <a:lstStyle/>
+          <a:p>
+            <a:pPr algn="ctr"/>
+            <a:endParaRPr lang="en-US"/>
+          </a:p>
+        </p:txBody>
+      </p:sp>
+      <p:sp>
+        <p:nvSpPr>
+          <p:cNvPr id="4" name="Title 3">
+            <a:extLst>
+              <a:ext uri="{FF2B5EF4-FFF2-40B4-BE49-F238E27FC236}">
+                <a16:creationId xmlns:a16="http://schemas.microsoft.com/office/drawing/2014/main" id="{62F52A63-1441-8902-2B43-8F5CB2AC2A7B}"/>
+              </a:ext>
+            </a:extLst>
+          </p:cNvPr>
+          <p:cNvSpPr>
+            <a:spLocks noGrp="1"/>
+          </p:cNvSpPr>
+          <p:nvPr>
+            <p:ph type="title"/>
+          </p:nvPr>
+        </p:nvSpPr>
+        <p:spPr>
+          <a:xfrm>
+            <a:off x="838199" y="1093788"/>
+            <a:ext cx="10506455" cy="2967208"/>
+          </a:xfrm>
+        </p:spPr>
+        <p:txBody>
+          <a:bodyPr vert="horz" lIns="91440" tIns="45720" rIns="91440" bIns="45720" rtlCol="0" anchor="b">
+            <a:normAutofit/>
+          </a:bodyPr>
+          <a:lstStyle/>
+          <a:p>
+            <a:r>
+              <a:rPr lang="en-US" sz="8000" kern="1200" dirty="0">
+                <a:solidFill>
+                  <a:schemeClr val="tx1"/>
+                </a:solidFill>
+                <a:latin typeface="+mj-lt"/>
+                <a:ea typeface="+mj-ea"/>
+                <a:cs typeface="+mj-cs"/>
+              </a:rPr>
+              <a:t>Agentic AI</a:t>
+            </a:r>
+          </a:p>
+        </p:txBody>
+      </p:sp>
+      <p:sp>
+        <p:nvSpPr>
+          <p:cNvPr id="5" name="Text Placeholder 4">
+            <a:extLst>
+              <a:ext uri="{FF2B5EF4-FFF2-40B4-BE49-F238E27FC236}">
+                <a16:creationId xmlns:a16="http://schemas.microsoft.com/office/drawing/2014/main" id="{B35E8801-232D-5BAA-ED1F-D954C42004C7}"/>
+              </a:ext>
+            </a:extLst>
+          </p:cNvPr>
+          <p:cNvSpPr>
+            <a:spLocks noGrp="1"/>
+          </p:cNvSpPr>
+          <p:nvPr>
+            <p:ph type="body" idx="1"/>
+          </p:nvPr>
+        </p:nvSpPr>
+        <p:spPr>
+          <a:xfrm>
+            <a:off x="7400924" y="4619624"/>
+            <a:ext cx="3946779" cy="1038225"/>
+          </a:xfrm>
+        </p:spPr>
+        <p:txBody>
+          <a:bodyPr vert="horz" lIns="91440" tIns="45720" rIns="91440" bIns="45720" rtlCol="0">
+            <a:normAutofit/>
+          </a:bodyPr>
+          <a:lstStyle/>
+          <a:p>
+            <a:pPr algn="r"/>
+            <a:endParaRPr lang="en-US" sz="2400" kern="1200">
+              <a:solidFill>
+                <a:schemeClr val="tx1"/>
+              </a:solidFill>
+              <a:latin typeface="+mn-lt"/>
+              <a:ea typeface="+mn-ea"/>
+              <a:cs typeface="+mn-cs"/>
+            </a:endParaRPr>
+          </a:p>
+        </p:txBody>
+      </p:sp>
+      <p:sp>
+        <p:nvSpPr>
+          <p:cNvPr id="16" name="Rectangle 15">
+            <a:extLst>
+              <a:ext uri="{FF2B5EF4-FFF2-40B4-BE49-F238E27FC236}">
+                <a16:creationId xmlns:a16="http://schemas.microsoft.com/office/drawing/2014/main" id="{391F6B52-91F4-4AEB-B6DB-29FEBCF28C8B}"/>
+              </a:ext>
+              <a:ext uri="{C183D7F6-B498-43B3-948B-1728B52AA6E4}">
+                <adec:decorative xmlns:adec="http://schemas.microsoft.com/office/drawing/2017/decorative" val="1"/>
+              </a:ext>
+            </a:extLst>
+          </p:cNvPr>
+          <p:cNvSpPr>
+            <a:spLocks noGrp="1" noRot="1" noChangeAspect="1" noMove="1" noResize="1" noEditPoints="1" noAdjustHandles="1" noChangeArrowheads="1" noChangeShapeType="1" noTextEdit="1"/>
+          </p:cNvSpPr>
+          <p:nvPr>
+            <p:extLst>
+              <p:ext uri="{386F3935-93C4-4BCD-93E2-E3B085C9AB24}">
+                <p16:designElem xmlns:p16="http://schemas.microsoft.com/office/powerpoint/2015/main" val="1"/>
+              </p:ext>
+            </p:extLst>
+          </p:nvPr>
+        </p:nvSpPr>
+        <p:spPr>
+          <a:xfrm>
+            <a:off x="841248" y="4331166"/>
+            <a:ext cx="10506456" cy="18288"/>
+          </a:xfrm>
+          <a:prstGeom prst="rect">
+            <a:avLst/>
+          </a:prstGeom>
+          <a:solidFill>
+            <a:srgbClr val="D5D5D5"/>
+          </a:solidFill>
+          <a:ln w="3175">
+            <a:noFill/>
+          </a:ln>
+          <a:effectLst/>
+        </p:spPr>
+        <p:style>
+          <a:lnRef idx="2">
+            <a:schemeClr val="accent1">
+              <a:shade val="50000"/>
+            </a:schemeClr>
+          </a:lnRef>
+          <a:fillRef idx="1">
+            <a:schemeClr val="accent1"/>
+          </a:fillRef>
+          <a:effectRef idx="0">
+            <a:schemeClr val="accent1"/>
+          </a:effectRef>
+          <a:fontRef idx="minor">
+            <a:schemeClr val="lt1"/>
+          </a:fontRef>
+        </p:style>
+        <p:txBody>
+          <a:bodyPr rtlCol="0" anchor="ctr"/>
+          <a:lstStyle/>
+          <a:p>
+            <a:pPr algn="ctr"/>
+            <a:endParaRPr lang="en-US">
+              <a:solidFill>
+                <a:prstClr val="white"/>
+              </a:solidFill>
+              <a:latin typeface="Calibri" panose="020F0502020204030204"/>
+            </a:endParaRPr>
+          </a:p>
+        </p:txBody>
+      </p:sp>
+      <p:sp>
+        <p:nvSpPr>
+          <p:cNvPr id="14" name="Rectangle 13">
+            <a:extLst>
+              <a:ext uri="{FF2B5EF4-FFF2-40B4-BE49-F238E27FC236}">
+                <a16:creationId xmlns:a16="http://schemas.microsoft.com/office/drawing/2014/main" id="{2CD6F061-7C53-44F4-9794-953DB70A451B}"/>
+              </a:ext>
+              <a:ext uri="{C183D7F6-B498-43B3-948B-1728B52AA6E4}">
+                <adec:decorative xmlns:adec="http://schemas.microsoft.com/office/drawing/2017/decorative" val="1"/>
+              </a:ext>
+            </a:extLst>
+          </p:cNvPr>
+          <p:cNvSpPr>
+            <a:spLocks noGrp="1" noRot="1" noChangeAspect="1" noMove="1" noResize="1" noEditPoints="1" noAdjustHandles="1" noChangeArrowheads="1" noChangeShapeType="1" noTextEdit="1"/>
+          </p:cNvSpPr>
+          <p:nvPr>
+            <p:extLst>
+              <p:ext uri="{386F3935-93C4-4BCD-93E2-E3B085C9AB24}">
+                <p16:designElem xmlns:p16="http://schemas.microsoft.com/office/powerpoint/2015/main" val="1"/>
+              </p:ext>
+            </p:extLst>
+          </p:nvPr>
+        </p:nvSpPr>
+        <p:spPr>
+          <a:xfrm rot="5400000">
+            <a:off x="9346882" y="2348839"/>
+            <a:ext cx="54864" cy="3946779"/>
+          </a:xfrm>
+          <a:prstGeom prst="rect">
+            <a:avLst/>
+          </a:prstGeom>
+          <a:solidFill>
+            <a:schemeClr val="accent2"/>
+          </a:solidFill>
+          <a:ln>
+            <a:noFill/>
+          </a:ln>
+        </p:spPr>
+        <p:style>
+          <a:lnRef idx="2">
+            <a:schemeClr val="accent1">
+              <a:shade val="50000"/>
+            </a:schemeClr>
+          </a:lnRef>
+          <a:fillRef idx="1">
+            <a:schemeClr val="accent1"/>
+          </a:fillRef>
+          <a:effectRef idx="0">
+            <a:schemeClr val="accent1"/>
+          </a:effectRef>
+          <a:fontRef idx="minor">
+            <a:schemeClr val="lt1"/>
+          </a:fontRef>
+        </p:style>
+        <p:txBody>
+          <a:bodyPr rtlCol="0" anchor="ctr"/>
+          <a:lstStyle/>
+          <a:p>
+            <a:pPr marL="0" marR="0" lvl="0" indent="0" algn="ctr" defTabSz="914400" rtl="0" eaLnBrk="1" fontAlgn="auto" latinLnBrk="0" hangingPunct="1">
+              <a:lnSpc>
+                <a:spcPct val="100000"/>
+              </a:lnSpc>
+              <a:spcBef>
+                <a:spcPts val="0"/>
+              </a:spcBef>
+              <a:spcAft>
+                <a:spcPts val="0"/>
+              </a:spcAft>
+              <a:buClrTx/>
+              <a:buSzTx/>
+              <a:buFontTx/>
+              <a:buNone/>
+              <a:tabLst/>
+              <a:defRPr/>
+            </a:pPr>
+            <a:endParaRPr kumimoji="0" lang="en-US" sz="1800" b="0" i="0" u="none" strike="noStrike" kern="1200" cap="none" spc="0" normalizeH="0" baseline="0" noProof="0">
+              <a:ln>
+                <a:noFill/>
+              </a:ln>
+              <a:solidFill>
+                <a:prstClr val="white"/>
+              </a:solidFill>
+              <a:effectLst/>
+              <a:uLnTx/>
+              <a:uFillTx/>
+              <a:latin typeface="Calibri" panose="020F0502020204030204"/>
+              <a:ea typeface="+mn-ea"/>
+              <a:cs typeface="+mn-cs"/>
+            </a:endParaRPr>
+          </a:p>
+        </p:txBody>
+      </p:sp>
+    </p:spTree>
+    <p:extLst>
+      <p:ext uri="{BB962C8B-B14F-4D97-AF65-F5344CB8AC3E}">
+        <p14:creationId xmlns:p14="http://schemas.microsoft.com/office/powerpoint/2010/main" val="359265016"/>
+      </p:ext>
+    </p:extLst>
+  </p:cSld>
+  <p:clrMapOvr>
+    <a:masterClrMapping/>
+  </p:clrMapOvr>
+</p:sld>
+</file>
+
+<file path=ppt/slides/slide17.xml><?xml version="1.0" encoding="utf-8"?>
 <p:sld xmlns:a="http://schemas.openxmlformats.org/drawingml/2006/main" xmlns:r="http://schemas.openxmlformats.org/officeDocument/2006/relationships" xmlns:p="http://schemas.openxmlformats.org/presentationml/2006/main">
   <p:cSld>
     <p:spTree>
@@ -6840,10 +8200,15 @@
             <p:ph idx="1"/>
           </p:nvPr>
         </p:nvSpPr>
-        <p:spPr/>
+        <p:spPr>
+          <a:xfrm>
+            <a:off x="838200" y="1825625"/>
+            <a:ext cx="10515600" cy="4219187"/>
+          </a:xfrm>
+        </p:spPr>
         <p:txBody>
           <a:bodyPr>
-            <a:normAutofit fontScale="92500" lnSpcReduction="20000"/>
+            <a:normAutofit fontScale="70000" lnSpcReduction="20000"/>
           </a:bodyPr>
           <a:lstStyle/>
           <a:p>
@@ -6852,12 +8217,29 @@
             </a:pPr>
             <a:r>
               <a:rPr lang="en-US" b="1" dirty="0"/>
-              <a:t>Observation</a:t>
+              <a:t>Definition*:  </a:t>
             </a:r>
             <a:r>
               <a:rPr lang="en-US" dirty="0"/>
-              <a:t>: LLMs are good to solve small problems, but struggle with larger, multi-step problems.</a:t>
-            </a:r>
+              <a:t>Autonomous AI systems that solve </a:t>
+            </a:r>
+            <a:r>
+              <a:rPr lang="en-US" b="1" dirty="0"/>
+              <a:t>complex tasks </a:t>
+            </a:r>
+            <a:r>
+              <a:rPr lang="en-US" dirty="0"/>
+              <a:t>that span over long periods of time </a:t>
+            </a:r>
+            <a:r>
+              <a:rPr lang="en-US" b="1" dirty="0"/>
+              <a:t>without human supervision</a:t>
+            </a:r>
+            <a:r>
+              <a:rPr lang="en-US" dirty="0"/>
+              <a:t>.</a:t>
+            </a:r>
+            <a:endParaRPr lang="en-US" b="1" dirty="0"/>
           </a:p>
           <a:p>
             <a:pPr marL="0" indent="0">
@@ -6865,20 +8247,39 @@
             </a:pPr>
             <a:r>
               <a:rPr lang="en-US" b="1" dirty="0"/>
-              <a:t>Argentic AI</a:t>
+              <a:t>Observation</a:t>
             </a:r>
             <a:r>
               <a:rPr lang="en-US" dirty="0"/>
-              <a:t>: An AI solution that breaks down a problem into a set of specially prompted LLM calls. </a:t>
+              <a:t>: LLMs are good at solving small problems, but struggle with larger, multi-step problems.</a:t>
             </a:r>
           </a:p>
           <a:p>
             <a:pPr marL="0" indent="0">
               <a:buNone/>
             </a:pPr>
+            <a:endParaRPr lang="en-US" b="1" dirty="0"/>
+          </a:p>
+          <a:p>
+            <a:pPr marL="0" indent="0">
+              <a:buNone/>
+            </a:pPr>
+            <a:r>
+              <a:rPr lang="en-US" b="1" dirty="0"/>
+              <a:t>Current Approach</a:t>
+            </a:r>
             <a:r>
               <a:rPr lang="en-US" dirty="0"/>
-              <a:t>The solution involves any or all of these:</a:t>
+              <a:t>: Break problems down into a set of specially prompted LLM calls. </a:t>
+            </a:r>
+          </a:p>
+          <a:p>
+            <a:pPr marL="0" indent="0">
+              <a:buNone/>
+            </a:pPr>
+            <a:r>
+              <a:rPr lang="en-US" dirty="0"/>
+              <a:t>The solution typically involves any or all of these:</a:t>
             </a:r>
           </a:p>
           <a:p>
@@ -6945,6 +8346,63 @@
             <a:r>
               <a:rPr lang="en-US" dirty="0"/>
               <a:t>, …</a:t>
+            </a:r>
+          </a:p>
+          <a:p>
+            <a:r>
+              <a:rPr lang="en-US" dirty="0"/>
+              <a:t>Next, we will look at several popular patterns.</a:t>
+            </a:r>
+          </a:p>
+        </p:txBody>
+      </p:sp>
+      <p:sp>
+        <p:nvSpPr>
+          <p:cNvPr id="4" name="TextBox 3">
+            <a:extLst>
+              <a:ext uri="{FF2B5EF4-FFF2-40B4-BE49-F238E27FC236}">
+                <a16:creationId xmlns:a16="http://schemas.microsoft.com/office/drawing/2014/main" id="{A76AD882-038C-720D-18F6-5461DDF06DBE}"/>
+              </a:ext>
+            </a:extLst>
+          </p:cNvPr>
+          <p:cNvSpPr txBox="1"/>
+          <p:nvPr/>
+        </p:nvSpPr>
+        <p:spPr>
+          <a:xfrm>
+            <a:off x="838200" y="6385736"/>
+            <a:ext cx="10281765" cy="276999"/>
+          </a:xfrm>
+          <a:prstGeom prst="rect">
+            <a:avLst/>
+          </a:prstGeom>
+          <a:noFill/>
+        </p:spPr>
+        <p:txBody>
+          <a:bodyPr wrap="square" rtlCol="0">
+            <a:spAutoFit/>
+          </a:bodyPr>
+          <a:lstStyle/>
+          <a:p>
+            <a:r>
+              <a:rPr lang="en-US" sz="1200" dirty="0"/>
+              <a:t>*D. B. Acharya, K. </a:t>
+            </a:r>
+            <a:r>
+              <a:rPr lang="en-US" sz="1200" dirty="0" err="1"/>
+              <a:t>Kuppan</a:t>
+            </a:r>
+            <a:r>
+              <a:rPr lang="en-US" sz="1200" dirty="0"/>
+              <a:t> and B. Divya, "Agentic AI: Autonomous Intelligence for Complex Goals—A Comprehensive Survey," in </a:t>
+            </a:r>
+            <a:r>
+              <a:rPr lang="en-US" sz="1200" i="1" dirty="0"/>
+              <a:t>IEEE Access</a:t>
+            </a:r>
+            <a:r>
+              <a:rPr lang="en-US" sz="1200" dirty="0"/>
+              <a:t>, vol. 13, 2025</a:t>
             </a:r>
           </a:p>
         </p:txBody>
@@ -7093,37 +8551,6 @@
                                         <p:tgtEl>
                                           <p:spTgt spid="3">
                                             <p:txEl>
-                                              <p:pRg st="2" end="2"/>
-                                            </p:txEl>
-                                          </p:spTgt>
-                                        </p:tgtEl>
-                                        <p:attrNameLst>
-                                          <p:attrName>style.visibility</p:attrName>
-                                        </p:attrNameLst>
-                                      </p:cBhvr>
-                                      <p:to>
-                                        <p:strVal val="visible"/>
-                                      </p:to>
-                                    </p:set>
-                                  </p:childTnLst>
-                                </p:cTn>
-                              </p:par>
-                              <p:par>
-                                <p:cTn id="15" presetID="1" presetClass="entr" presetSubtype="0" fill="hold" grpId="0" nodeType="withEffect">
-                                  <p:stCondLst>
-                                    <p:cond delay="0"/>
-                                  </p:stCondLst>
-                                  <p:childTnLst>
-                                    <p:set>
-                                      <p:cBhvr>
-                                        <p:cTn id="16" dur="1" fill="hold">
-                                          <p:stCondLst>
-                                            <p:cond delay="0"/>
-                                          </p:stCondLst>
-                                        </p:cTn>
-                                        <p:tgtEl>
-                                          <p:spTgt spid="3">
-                                            <p:txEl>
                                               <p:pRg st="3" end="3"/>
                                             </p:txEl>
                                           </p:spTgt>
@@ -7139,8 +8566,26 @@
                                   </p:childTnLst>
                                 </p:cTn>
                               </p:par>
+                            </p:childTnLst>
+                          </p:cTn>
+                        </p:par>
+                      </p:childTnLst>
+                    </p:cTn>
+                  </p:par>
+                  <p:par>
+                    <p:cTn id="15" fill="hold">
+                      <p:stCondLst>
+                        <p:cond delay="indefinite"/>
+                      </p:stCondLst>
+                      <p:childTnLst>
+                        <p:par>
+                          <p:cTn id="16" fill="hold">
+                            <p:stCondLst>
+                              <p:cond delay="0"/>
+                            </p:stCondLst>
+                            <p:childTnLst>
                               <p:par>
-                                <p:cTn id="17" presetID="1" presetClass="entr" presetSubtype="0" fill="hold" grpId="0" nodeType="withEffect">
+                                <p:cTn id="17" presetID="1" presetClass="entr" presetSubtype="0" fill="hold" grpId="0" nodeType="clickEffect">
                                   <p:stCondLst>
                                     <p:cond delay="0"/>
                                   </p:stCondLst>
@@ -7201,26 +8646,39 @@
                                   </p:childTnLst>
                                 </p:cTn>
                               </p:par>
-                            </p:childTnLst>
-                          </p:cTn>
-                        </p:par>
-                      </p:childTnLst>
-                    </p:cTn>
-                  </p:par>
-                  <p:par>
-                    <p:cTn id="21" fill="hold">
-                      <p:stCondLst>
-                        <p:cond delay="indefinite"/>
-                      </p:stCondLst>
-                      <p:childTnLst>
-                        <p:par>
-                          <p:cTn id="22" fill="hold">
-                            <p:stCondLst>
-                              <p:cond delay="0"/>
-                            </p:stCondLst>
-                            <p:childTnLst>
                               <p:par>
-                                <p:cTn id="23" presetID="1" presetClass="entr" presetSubtype="0" fill="hold" grpId="0" nodeType="clickEffect">
+                                <p:cTn id="21" presetID="1" presetClass="entr" presetSubtype="0" fill="hold" grpId="0" nodeType="withEffect">
+                                  <p:stCondLst>
+                                    <p:cond delay="0"/>
+                                  </p:stCondLst>
+                                  <p:childTnLst>
+                                    <p:set>
+                                      <p:cBhvr>
+                                        <p:cTn id="22" dur="1" fill="hold">
+                                          <p:stCondLst>
+                                            <p:cond delay="0"/>
+                                          </p:stCondLst>
+                                        </p:cTn>
+                                        <p:tgtEl>
+                                          <p:spTgt spid="3">
+                                            <p:txEl>
+                                              <p:pRg st="6" end="6"/>
+                                            </p:txEl>
+                                          </p:spTgt>
+                                        </p:tgtEl>
+                                        <p:attrNameLst>
+                                          <p:attrName>style.visibility</p:attrName>
+                                        </p:attrNameLst>
+                                      </p:cBhvr>
+                                      <p:to>
+                                        <p:strVal val="visible"/>
+                                      </p:to>
+                                    </p:set>
+                                  </p:childTnLst>
+                                </p:cTn>
+                              </p:par>
+                              <p:par>
+                                <p:cTn id="23" presetID="1" presetClass="entr" presetSubtype="0" fill="hold" grpId="0" nodeType="withEffect">
                                   <p:stCondLst>
                                     <p:cond delay="0"/>
                                   </p:stCondLst>
@@ -7236,6 +8694,104 @@
                                           <p:spTgt spid="3">
                                             <p:txEl>
                                               <p:pRg st="7" end="7"/>
+                                            </p:txEl>
+                                          </p:spTgt>
+                                        </p:tgtEl>
+                                        <p:attrNameLst>
+                                          <p:attrName>style.visibility</p:attrName>
+                                        </p:attrNameLst>
+                                      </p:cBhvr>
+                                      <p:to>
+                                        <p:strVal val="visible"/>
+                                      </p:to>
+                                    </p:set>
+                                  </p:childTnLst>
+                                </p:cTn>
+                              </p:par>
+                            </p:childTnLst>
+                          </p:cTn>
+                        </p:par>
+                      </p:childTnLst>
+                    </p:cTn>
+                  </p:par>
+                  <p:par>
+                    <p:cTn id="25" fill="hold">
+                      <p:stCondLst>
+                        <p:cond delay="indefinite"/>
+                      </p:stCondLst>
+                      <p:childTnLst>
+                        <p:par>
+                          <p:cTn id="26" fill="hold">
+                            <p:stCondLst>
+                              <p:cond delay="0"/>
+                            </p:stCondLst>
+                            <p:childTnLst>
+                              <p:par>
+                                <p:cTn id="27" presetID="1" presetClass="entr" presetSubtype="0" fill="hold" grpId="0" nodeType="clickEffect">
+                                  <p:stCondLst>
+                                    <p:cond delay="0"/>
+                                  </p:stCondLst>
+                                  <p:childTnLst>
+                                    <p:set>
+                                      <p:cBhvr>
+                                        <p:cTn id="28" dur="1" fill="hold">
+                                          <p:stCondLst>
+                                            <p:cond delay="0"/>
+                                          </p:stCondLst>
+                                        </p:cTn>
+                                        <p:tgtEl>
+                                          <p:spTgt spid="3">
+                                            <p:txEl>
+                                              <p:pRg st="9" end="9"/>
+                                            </p:txEl>
+                                          </p:spTgt>
+                                        </p:tgtEl>
+                                        <p:attrNameLst>
+                                          <p:attrName>style.visibility</p:attrName>
+                                        </p:attrNameLst>
+                                      </p:cBhvr>
+                                      <p:to>
+                                        <p:strVal val="visible"/>
+                                      </p:to>
+                                    </p:set>
+                                  </p:childTnLst>
+                                </p:cTn>
+                              </p:par>
+                            </p:childTnLst>
+                          </p:cTn>
+                        </p:par>
+                      </p:childTnLst>
+                    </p:cTn>
+                  </p:par>
+                  <p:par>
+                    <p:cTn id="29" fill="hold">
+                      <p:stCondLst>
+                        <p:cond delay="indefinite"/>
+                      </p:stCondLst>
+                      <p:childTnLst>
+                        <p:par>
+                          <p:cTn id="30" fill="hold">
+                            <p:stCondLst>
+                              <p:cond delay="0"/>
+                            </p:stCondLst>
+                            <p:childTnLst>
+                              <p:par>
+                                <p:cTn id="31" presetID="1" presetClass="entr" presetSubtype="0" fill="hold" grpId="0" nodeType="clickEffect">
+                                  <p:stCondLst>
+                                    <p:cond delay="0"/>
+                                  </p:stCondLst>
+                                  <p:childTnLst>
+                                    <p:set>
+                                      <p:cBhvr>
+                                        <p:cTn id="32" dur="1" fill="hold">
+                                          <p:stCondLst>
+                                            <p:cond delay="0"/>
+                                          </p:stCondLst>
+                                        </p:cTn>
+                                        <p:tgtEl>
+                                          <p:spTgt spid="3">
+                                            <p:txEl>
+                                              <p:pRg st="10" end="10"/>
                                             </p:txEl>
                                           </p:spTgt>
                                         </p:tgtEl>
@@ -7284,7 +8840,7 @@
 </p:sld>
 </file>
 
-<file path=ppt/slides/slide14.xml><?xml version="1.0" encoding="utf-8"?>
+<file path=ppt/slides/slide18.xml><?xml version="1.0" encoding="utf-8"?>
 <p:sld xmlns:a="http://schemas.openxmlformats.org/drawingml/2006/main" xmlns:r="http://schemas.openxmlformats.org/officeDocument/2006/relationships" xmlns:p="http://schemas.openxmlformats.org/presentationml/2006/main">
   <p:cSld>
     <p:spTree>
@@ -7303,10 +8859,10 @@
       </p:grpSpPr>
       <p:sp>
         <p:nvSpPr>
-          <p:cNvPr id="2" name="Title 1">
+          <p:cNvPr id="4" name="Title 3">
             <a:extLst>
               <a:ext uri="{FF2B5EF4-FFF2-40B4-BE49-F238E27FC236}">
-                <a16:creationId xmlns:a16="http://schemas.microsoft.com/office/drawing/2014/main" id="{BB76881E-5F00-BA85-6E67-444C24BEB476}"/>
+                <a16:creationId xmlns:a16="http://schemas.microsoft.com/office/drawing/2014/main" id="{0225E903-3AFB-D752-79D4-F363C239C03F}"/>
               </a:ext>
             </a:extLst>
           </p:cNvPr>
@@ -7317,24 +8873,29 @@
             <p:ph type="title"/>
           </p:nvPr>
         </p:nvSpPr>
-        <p:spPr/>
+        <p:spPr>
+          <a:xfrm>
+            <a:off x="838200" y="365125"/>
+            <a:ext cx="4800600" cy="1325563"/>
+          </a:xfrm>
+        </p:spPr>
         <p:txBody>
           <a:bodyPr/>
           <a:lstStyle/>
           <a:p>
             <a:r>
               <a:rPr lang="en-US" dirty="0"/>
-              <a:t>Argentic AI Strategies</a:t>
+              <a:t>Reflection Pattern</a:t>
             </a:r>
           </a:p>
         </p:txBody>
       </p:sp>
       <p:sp>
         <p:nvSpPr>
-          <p:cNvPr id="3" name="Content Placeholder 2">
+          <p:cNvPr id="5" name="Content Placeholder 4">
             <a:extLst>
               <a:ext uri="{FF2B5EF4-FFF2-40B4-BE49-F238E27FC236}">
-                <a16:creationId xmlns:a16="http://schemas.microsoft.com/office/drawing/2014/main" id="{C4AC6D2B-6F2F-0E0D-BEBD-E8FBCAAF357C}"/>
+                <a16:creationId xmlns:a16="http://schemas.microsoft.com/office/drawing/2014/main" id="{E14F8BC2-070D-BA28-F265-D1B78119A4F9}"/>
               </a:ext>
             </a:extLst>
           </p:cNvPr>
@@ -7348,203 +8909,367 @@
         <p:spPr>
           <a:xfrm>
             <a:off x="838200" y="1825625"/>
-            <a:ext cx="3259150" cy="4351338"/>
+            <a:ext cx="3048000" cy="4351338"/>
           </a:xfrm>
         </p:spPr>
         <p:txBody>
           <a:bodyPr>
-            <a:normAutofit fontScale="55000" lnSpcReduction="20000"/>
+            <a:normAutofit fontScale="85000" lnSpcReduction="10000"/>
           </a:bodyPr>
           <a:lstStyle/>
           <a:p>
-            <a:r>
-              <a:rPr lang="en-US" b="1" dirty="0"/>
-              <a:t>Prompt chaining</a:t>
-            </a:r>
+            <a:pPr marL="0" indent="0">
+              <a:buNone/>
+            </a:pPr>
             <a:r>
               <a:rPr lang="en-US" dirty="0"/>
-              <a:t>: each step has a focused job, making each LLM query simpler and more accurate.</a:t>
-            </a:r>
-          </a:p>
-          <a:p>
-            <a:r>
-              <a:rPr lang="en-US" b="1" dirty="0"/>
-              <a:t>Routing</a:t>
-            </a:r>
-            <a:r>
+              <a:t>A generator and an evaluator agent cooperate to improve the response.</a:t>
+            </a:r>
+            <a:br>
               <a:rPr lang="en-US" dirty="0"/>
-              <a:t> is about smartly directing inputs to the right handler (e.g., LLMs trained differently).</a:t>
-            </a:r>
-          </a:p>
-          <a:p>
-            <a:r>
-              <a:rPr lang="en-US" b="1" dirty="0"/>
-              <a:t>Parallelization</a:t>
-            </a:r>
-            <a:r>
+            </a:br>
+            <a:br>
               <a:rPr lang="en-US" dirty="0"/>
-              <a:t> lets the agent do multiple things at the same time.</a:t>
-            </a:r>
-          </a:p>
-          <a:p>
-            <a:r>
-              <a:rPr lang="en-US" b="1" dirty="0"/>
-              <a:t>Orchestration</a:t>
-            </a:r>
+            </a:br>
             <a:r>
               <a:rPr lang="en-US" dirty="0"/>
-              <a:t>: An agent takes the input, breaks it into sub-tasks on the fly, and then dispatches each subtask to separate “worker” agents.</a:t>
-            </a:r>
-          </a:p>
-          <a:p>
-            <a:r>
-              <a:rPr lang="en-US" b="1" dirty="0"/>
-              <a:t>Evaluator–optimizer </a:t>
-            </a:r>
+              <a:t>This is a simple implementation of “search.”</a:t>
+            </a:r>
+          </a:p>
+          <a:p>
+            <a:pPr marL="0" indent="0">
+              <a:buNone/>
+            </a:pPr>
+            <a:endParaRPr lang="en-US" dirty="0"/>
+          </a:p>
+          <a:p>
+            <a:pPr marL="0" indent="0">
+              <a:buNone/>
+            </a:pPr>
             <a:r>
               <a:rPr lang="en-US" dirty="0"/>
-              <a:t>is a feedback loop. One agent generates a solution, and another evaluates it and suggests improvements.</a:t>
-            </a:r>
+              <a:t>Example:</a:t>
+            </a:r>
+          </a:p>
+          <a:p>
+            <a:r>
+              <a:rPr lang="en-US" dirty="0"/>
+              <a:t>Writing a paper and check if it needs improvements.</a:t>
+            </a:r>
+          </a:p>
+          <a:p>
+            <a:endParaRPr lang="en-US" dirty="0"/>
+          </a:p>
+          <a:p>
+            <a:endParaRPr lang="en-US" dirty="0"/>
           </a:p>
         </p:txBody>
       </p:sp>
-      <p:grpSp>
-        <p:nvGrpSpPr>
-          <p:cNvPr id="5" name="Group 4">
+      <p:pic>
+        <p:nvPicPr>
+          <p:cNvPr id="7" name="Picture 6">
             <a:extLst>
               <a:ext uri="{FF2B5EF4-FFF2-40B4-BE49-F238E27FC236}">
-                <a16:creationId xmlns:a16="http://schemas.microsoft.com/office/drawing/2014/main" id="{B63A999C-CE15-E62E-07BA-C08D46D63F51}"/>
+                <a16:creationId xmlns:a16="http://schemas.microsoft.com/office/drawing/2014/main" id="{21BDE463-B643-3AED-92FD-D70E80CC1D1C}"/>
+              </a:ext>
+              <a:ext uri="{C183D7F6-B498-43B3-948B-1728B52AA6E4}">
+                <adec:decorative xmlns:adec="http://schemas.microsoft.com/office/drawing/2017/decorative" val="1"/>
               </a:ext>
             </a:extLst>
           </p:cNvPr>
-          <p:cNvGrpSpPr/>
+          <p:cNvPicPr>
+            <a:picLocks noChangeAspect="1"/>
+          </p:cNvPicPr>
           <p:nvPr/>
-        </p:nvGrpSpPr>
-        <p:grpSpPr>
-          <a:xfrm>
-            <a:off x="3975777" y="1453363"/>
-            <a:ext cx="8464599" cy="5260030"/>
-            <a:chOff x="5093185" y="1369322"/>
-            <a:chExt cx="7308220" cy="4609385"/>
-          </a:xfrm>
-        </p:grpSpPr>
-        <p:pic>
-          <p:nvPicPr>
-            <p:cNvPr id="4098" name="Picture 2">
-              <a:extLst>
-                <a:ext uri="{FF2B5EF4-FFF2-40B4-BE49-F238E27FC236}">
-                  <a16:creationId xmlns:a16="http://schemas.microsoft.com/office/drawing/2014/main" id="{BB5CA5D9-27D7-EC75-EED5-9679B80EE500}"/>
-                </a:ext>
-              </a:extLst>
-            </p:cNvPr>
-            <p:cNvPicPr>
-              <a:picLocks noChangeAspect="1" noChangeArrowheads="1"/>
-            </p:cNvPicPr>
-            <p:nvPr/>
-          </p:nvPicPr>
-          <p:blipFill>
-            <a:blip r:embed="rId2">
-              <a:extLst>
-                <a:ext uri="{BEBA8EAE-BF5A-486C-A8C5-ECC9F3942E4B}">
-                  <a14:imgProps xmlns:a14="http://schemas.microsoft.com/office/drawing/2010/main">
-                    <a14:imgLayer r:embed="rId3">
-                      <a14:imgEffect>
-                        <a14:colorTemperature colorTemp="4700"/>
-                      </a14:imgEffect>
-                    </a14:imgLayer>
-                  </a14:imgProps>
-                </a:ext>
-                <a:ext uri="{28A0092B-C50C-407E-A947-70E740481C1C}">
-                  <a14:useLocalDpi xmlns:a14="http://schemas.microsoft.com/office/drawing/2010/main" val="0"/>
-                </a:ext>
-              </a:extLst>
-            </a:blip>
-            <a:srcRect/>
-            <a:stretch>
-              <a:fillRect/>
-            </a:stretch>
-          </p:blipFill>
-          <p:spPr bwMode="auto">
-            <a:xfrm>
-              <a:off x="5235114" y="1369322"/>
-              <a:ext cx="6894573" cy="4340298"/>
-            </a:xfrm>
-            <a:prstGeom prst="rect">
-              <a:avLst/>
-            </a:prstGeom>
-            <a:noFill/>
+        </p:nvPicPr>
+        <p:blipFill>
+          <a:blip r:embed="rId2" cstate="screen">
             <a:extLst>
-              <a:ext uri="{909E8E84-426E-40DD-AFC4-6F175D3DCCD1}">
-                <a14:hiddenFill xmlns:a14="http://schemas.microsoft.com/office/drawing/2010/main">
-                  <a:solidFill>
-                    <a:srgbClr val="FFFFFF"/>
-                  </a:solidFill>
-                </a14:hiddenFill>
+              <a:ext uri="{28A0092B-C50C-407E-A947-70E740481C1C}">
+                <a14:useLocalDpi xmlns:a14="http://schemas.microsoft.com/office/drawing/2010/main"/>
               </a:ext>
             </a:extLst>
-          </p:spPr>
-        </p:pic>
-        <p:sp>
-          <p:nvSpPr>
-            <p:cNvPr id="4" name="TextBox 3">
-              <a:extLst>
-                <a:ext uri="{FF2B5EF4-FFF2-40B4-BE49-F238E27FC236}">
-                  <a16:creationId xmlns:a16="http://schemas.microsoft.com/office/drawing/2014/main" id="{D11E0D61-F0EE-6CA7-629D-3EB295A4A9CA}"/>
-                </a:ext>
-              </a:extLst>
-            </p:cNvPr>
-            <p:cNvSpPr txBox="1"/>
-            <p:nvPr/>
-          </p:nvSpPr>
-          <p:spPr>
-            <a:xfrm>
-              <a:off x="5093185" y="5732486"/>
-              <a:ext cx="7308220" cy="246221"/>
-            </a:xfrm>
-            <a:prstGeom prst="rect">
-              <a:avLst/>
-            </a:prstGeom>
-            <a:noFill/>
-          </p:spPr>
-          <p:txBody>
-            <a:bodyPr wrap="square" rtlCol="0">
-              <a:spAutoFit/>
-            </a:bodyPr>
-            <a:lstStyle/>
-            <a:p>
-              <a:pPr algn="ctr"/>
-              <a:r>
-                <a:rPr lang="en-US" sz="1000" dirty="0"/>
-                <a:t>Source: </a:t>
-              </a:r>
-              <a:r>
-                <a:rPr lang="en-US" sz="1000" dirty="0">
-                  <a:hlinkClick r:id="rId4"/>
-                </a:rPr>
-                <a:t>https://pub.towardsai.net/5-design-patterns-in-agentic-ai-workflow-c972c83f77e4</a:t>
-              </a:r>
-              <a:r>
-                <a:rPr lang="en-US" sz="1000" dirty="0"/>
-                <a:t> </a:t>
-              </a:r>
-            </a:p>
-          </p:txBody>
-        </p:sp>
-      </p:grpSp>
+          </a:blip>
+          <a:stretch>
+            <a:fillRect/>
+          </a:stretch>
+        </p:blipFill>
+        <p:spPr>
+          <a:xfrm>
+            <a:off x="4800600" y="1825625"/>
+            <a:ext cx="6345317" cy="4545443"/>
+          </a:xfrm>
+          <a:prstGeom prst="rect">
+            <a:avLst/>
+          </a:prstGeom>
+        </p:spPr>
+      </p:pic>
+      <p:sp>
+        <p:nvSpPr>
+          <p:cNvPr id="9" name="TextBox 8">
+            <a:extLst>
+              <a:ext uri="{FF2B5EF4-FFF2-40B4-BE49-F238E27FC236}">
+                <a16:creationId xmlns:a16="http://schemas.microsoft.com/office/drawing/2014/main" id="{B2F42169-260C-16A5-6334-FB155A6F3BB3}"/>
+              </a:ext>
+            </a:extLst>
+          </p:cNvPr>
+          <p:cNvSpPr txBox="1"/>
+          <p:nvPr/>
+        </p:nvSpPr>
+        <p:spPr>
+          <a:xfrm>
+            <a:off x="5334000" y="6336728"/>
+            <a:ext cx="5561908" cy="307777"/>
+          </a:xfrm>
+          <a:prstGeom prst="rect">
+            <a:avLst/>
+          </a:prstGeom>
+          <a:noFill/>
+        </p:spPr>
+        <p:txBody>
+          <a:bodyPr wrap="square">
+            <a:spAutoFit/>
+          </a:bodyPr>
+          <a:lstStyle/>
+          <a:p>
+            <a:r>
+              <a:rPr lang="en-US" sz="1400" dirty="0">
+                <a:hlinkClick r:id="rId3"/>
+              </a:rPr>
+              <a:t>https://blog.bytebytego.com/p/top-ai-agentic-workflow-patterns</a:t>
+            </a:r>
+            <a:r>
+              <a:rPr lang="en-US" sz="1400" dirty="0"/>
+              <a:t> </a:t>
+            </a:r>
+          </a:p>
+        </p:txBody>
+      </p:sp>
+      <p:sp>
+        <p:nvSpPr>
+          <p:cNvPr id="2" name="Speech Bubble: Rectangle with Corners Rounded 1">
+            <a:extLst>
+              <a:ext uri="{FF2B5EF4-FFF2-40B4-BE49-F238E27FC236}">
+                <a16:creationId xmlns:a16="http://schemas.microsoft.com/office/drawing/2014/main" id="{84FECD70-2D08-5404-E1F6-00A2FFDC027F}"/>
+              </a:ext>
+            </a:extLst>
+          </p:cNvPr>
+          <p:cNvSpPr/>
+          <p:nvPr/>
+        </p:nvSpPr>
+        <p:spPr>
+          <a:xfrm>
+            <a:off x="9220200" y="685800"/>
+            <a:ext cx="2286000" cy="1004888"/>
+          </a:xfrm>
+          <a:prstGeom prst="wedgeRoundRectCallout">
+            <a:avLst>
+              <a:gd name="adj1" fmla="val -22800"/>
+              <a:gd name="adj2" fmla="val 83384"/>
+              <a:gd name="adj3" fmla="val 16667"/>
+            </a:avLst>
+          </a:prstGeom>
+        </p:spPr>
+        <p:style>
+          <a:lnRef idx="2">
+            <a:schemeClr val="accent2">
+              <a:shade val="15000"/>
+            </a:schemeClr>
+          </a:lnRef>
+          <a:fillRef idx="1">
+            <a:schemeClr val="accent2"/>
+          </a:fillRef>
+          <a:effectRef idx="0">
+            <a:schemeClr val="accent2"/>
+          </a:effectRef>
+          <a:fontRef idx="minor">
+            <a:schemeClr val="lt1"/>
+          </a:fontRef>
+        </p:style>
+        <p:txBody>
+          <a:bodyPr rtlCol="0" anchor="ctr"/>
+          <a:lstStyle/>
+          <a:p>
+            <a:pPr algn="ctr"/>
+            <a:r>
+              <a:rPr lang="en-US" dirty="0"/>
+              <a:t>The code that runs the LLMs is called a harness.</a:t>
+            </a:r>
+          </a:p>
+        </p:txBody>
+      </p:sp>
     </p:spTree>
     <p:extLst>
       <p:ext uri="{BB962C8B-B14F-4D97-AF65-F5344CB8AC3E}">
-        <p14:creationId xmlns:p14="http://schemas.microsoft.com/office/powerpoint/2010/main" val="3717096269"/>
+        <p14:creationId xmlns:p14="http://schemas.microsoft.com/office/powerpoint/2010/main" val="3941774844"/>
       </p:ext>
     </p:extLst>
   </p:cSld>
   <p:clrMapOvr>
     <a:masterClrMapping/>
   </p:clrMapOvr>
+  <p:timing>
+    <p:tnLst>
+      <p:par>
+        <p:cTn id="1" dur="indefinite" restart="never" nodeType="tmRoot">
+          <p:childTnLst>
+            <p:seq concurrent="1" nextAc="seek">
+              <p:cTn id="2" dur="indefinite" nodeType="mainSeq">
+                <p:childTnLst>
+                  <p:par>
+                    <p:cTn id="3" fill="hold">
+                      <p:stCondLst>
+                        <p:cond delay="indefinite"/>
+                      </p:stCondLst>
+                      <p:childTnLst>
+                        <p:par>
+                          <p:cTn id="4" fill="hold">
+                            <p:stCondLst>
+                              <p:cond delay="0"/>
+                            </p:stCondLst>
+                            <p:childTnLst>
+                              <p:par>
+                                <p:cTn id="5" presetID="1" presetClass="entr" presetSubtype="0" fill="hold" grpId="0" nodeType="clickEffect">
+                                  <p:stCondLst>
+                                    <p:cond delay="0"/>
+                                  </p:stCondLst>
+                                  <p:childTnLst>
+                                    <p:set>
+                                      <p:cBhvr>
+                                        <p:cTn id="6" dur="1" fill="hold">
+                                          <p:stCondLst>
+                                            <p:cond delay="0"/>
+                                          </p:stCondLst>
+                                        </p:cTn>
+                                        <p:tgtEl>
+                                          <p:spTgt spid="2"/>
+                                        </p:tgtEl>
+                                        <p:attrNameLst>
+                                          <p:attrName>style.visibility</p:attrName>
+                                        </p:attrNameLst>
+                                      </p:cBhvr>
+                                      <p:to>
+                                        <p:strVal val="visible"/>
+                                      </p:to>
+                                    </p:set>
+                                  </p:childTnLst>
+                                </p:cTn>
+                              </p:par>
+                            </p:childTnLst>
+                          </p:cTn>
+                        </p:par>
+                      </p:childTnLst>
+                    </p:cTn>
+                  </p:par>
+                  <p:par>
+                    <p:cTn id="7" fill="hold">
+                      <p:stCondLst>
+                        <p:cond delay="indefinite"/>
+                      </p:stCondLst>
+                      <p:childTnLst>
+                        <p:par>
+                          <p:cTn id="8" fill="hold">
+                            <p:stCondLst>
+                              <p:cond delay="0"/>
+                            </p:stCondLst>
+                            <p:childTnLst>
+                              <p:par>
+                                <p:cTn id="9" presetID="1" presetClass="entr" presetSubtype="0" fill="hold" nodeType="clickEffect">
+                                  <p:stCondLst>
+                                    <p:cond delay="0"/>
+                                  </p:stCondLst>
+                                  <p:childTnLst>
+                                    <p:set>
+                                      <p:cBhvr>
+                                        <p:cTn id="10" dur="1" fill="hold">
+                                          <p:stCondLst>
+                                            <p:cond delay="0"/>
+                                          </p:stCondLst>
+                                        </p:cTn>
+                                        <p:tgtEl>
+                                          <p:spTgt spid="5">
+                                            <p:txEl>
+                                              <p:pRg st="2" end="2"/>
+                                            </p:txEl>
+                                          </p:spTgt>
+                                        </p:tgtEl>
+                                        <p:attrNameLst>
+                                          <p:attrName>style.visibility</p:attrName>
+                                        </p:attrNameLst>
+                                      </p:cBhvr>
+                                      <p:to>
+                                        <p:strVal val="visible"/>
+                                      </p:to>
+                                    </p:set>
+                                  </p:childTnLst>
+                                </p:cTn>
+                              </p:par>
+                              <p:par>
+                                <p:cTn id="11" presetID="1" presetClass="entr" presetSubtype="0" fill="hold" nodeType="withEffect">
+                                  <p:stCondLst>
+                                    <p:cond delay="0"/>
+                                  </p:stCondLst>
+                                  <p:childTnLst>
+                                    <p:set>
+                                      <p:cBhvr>
+                                        <p:cTn id="12" dur="1" fill="hold">
+                                          <p:stCondLst>
+                                            <p:cond delay="0"/>
+                                          </p:stCondLst>
+                                        </p:cTn>
+                                        <p:tgtEl>
+                                          <p:spTgt spid="5">
+                                            <p:txEl>
+                                              <p:pRg st="3" end="3"/>
+                                            </p:txEl>
+                                          </p:spTgt>
+                                        </p:tgtEl>
+                                        <p:attrNameLst>
+                                          <p:attrName>style.visibility</p:attrName>
+                                        </p:attrNameLst>
+                                      </p:cBhvr>
+                                      <p:to>
+                                        <p:strVal val="visible"/>
+                                      </p:to>
+                                    </p:set>
+                                  </p:childTnLst>
+                                </p:cTn>
+                              </p:par>
+                            </p:childTnLst>
+                          </p:cTn>
+                        </p:par>
+                      </p:childTnLst>
+                    </p:cTn>
+                  </p:par>
+                </p:childTnLst>
+              </p:cTn>
+              <p:prevCondLst>
+                <p:cond evt="onPrev" delay="0">
+                  <p:tgtEl>
+                    <p:sldTgt/>
+                  </p:tgtEl>
+                </p:cond>
+              </p:prevCondLst>
+              <p:nextCondLst>
+                <p:cond evt="onNext" delay="0">
+                  <p:tgtEl>
+                    <p:sldTgt/>
+                  </p:tgtEl>
+                </p:cond>
+              </p:nextCondLst>
+            </p:seq>
+          </p:childTnLst>
+        </p:cTn>
+      </p:par>
+    </p:tnLst>
+    <p:bldLst>
+      <p:bldP spid="2" grpId="0" animBg="1"/>
+    </p:bldLst>
+  </p:timing>
 </p:sld>
 </file>
 
-<file path=ppt/slides/slide15.xml><?xml version="1.0" encoding="utf-8"?>
+<file path=ppt/slides/slide19.xml><?xml version="1.0" encoding="utf-8"?>
 <p:sld xmlns:a="http://schemas.openxmlformats.org/drawingml/2006/main" xmlns:r="http://schemas.openxmlformats.org/officeDocument/2006/relationships" xmlns:p="http://schemas.openxmlformats.org/presentationml/2006/main">
   <p:cSld>
     <p:spTree>
@@ -7563,6 +9288,45 @@
       </p:grpSpPr>
       <p:pic>
         <p:nvPicPr>
+          <p:cNvPr id="8" name="Picture 7">
+            <a:extLst>
+              <a:ext uri="{FF2B5EF4-FFF2-40B4-BE49-F238E27FC236}">
+                <a16:creationId xmlns:a16="http://schemas.microsoft.com/office/drawing/2014/main" id="{EF8B6641-FCC6-3DDA-A454-54D9C61E25C9}"/>
+              </a:ext>
+              <a:ext uri="{C183D7F6-B498-43B3-948B-1728B52AA6E4}">
+                <adec:decorative xmlns:adec="http://schemas.microsoft.com/office/drawing/2017/decorative" val="1"/>
+              </a:ext>
+            </a:extLst>
+          </p:cNvPr>
+          <p:cNvPicPr>
+            <a:picLocks noChangeAspect="1"/>
+          </p:cNvPicPr>
+          <p:nvPr/>
+        </p:nvPicPr>
+        <p:blipFill>
+          <a:blip r:embed="rId2" cstate="screen">
+            <a:extLst>
+              <a:ext uri="{28A0092B-C50C-407E-A947-70E740481C1C}">
+                <a14:useLocalDpi xmlns:a14="http://schemas.microsoft.com/office/drawing/2010/main"/>
+              </a:ext>
+            </a:extLst>
+          </a:blip>
+          <a:stretch>
+            <a:fillRect/>
+          </a:stretch>
+        </p:blipFill>
+        <p:spPr>
+          <a:xfrm>
+            <a:off x="4645456" y="1734750"/>
+            <a:ext cx="7171943" cy="4310062"/>
+          </a:xfrm>
+          <a:prstGeom prst="rect">
+            <a:avLst/>
+          </a:prstGeom>
+        </p:spPr>
+      </p:pic>
+      <p:pic>
+        <p:nvPicPr>
           <p:cNvPr id="7" name="Picture 2">
             <a:extLst>
               <a:ext uri="{FF2B5EF4-FFF2-40B4-BE49-F238E27FC236}">
@@ -7576,7 +9340,7 @@
           <p:nvPr/>
         </p:nvPicPr>
         <p:blipFill>
-          <a:blip r:embed="rId2">
+          <a:blip r:embed="rId3">
             <a:extLst>
               <a:ext uri="{28A0092B-C50C-407E-A947-70E740481C1C}">
                 <a14:useLocalDpi xmlns:a14="http://schemas.microsoft.com/office/drawing/2010/main" val="0"/>
@@ -7590,8 +9354,8 @@
         </p:blipFill>
         <p:spPr bwMode="auto">
           <a:xfrm>
-            <a:off x="2361388" y="4461211"/>
-            <a:ext cx="1234591" cy="1234591"/>
+            <a:off x="2361280" y="4743537"/>
+            <a:ext cx="897265" cy="897265"/>
           </a:xfrm>
           <a:prstGeom prst="rect">
             <a:avLst/>
@@ -7630,10 +9394,6 @@
           <a:lstStyle/>
           <a:p>
             <a:r>
-              <a:rPr lang="en-US" dirty="0"/>
-              <a:t>Argentic AI: </a:t>
-            </a:r>
-            <a:r>
               <a:rPr lang="en-US" dirty="0" err="1"/>
               <a:t>ReAct</a:t>
             </a:r>
@@ -7663,12 +9423,12 @@
         <p:spPr>
           <a:xfrm>
             <a:off x="838200" y="1825625"/>
-            <a:ext cx="4508597" cy="4351338"/>
+            <a:ext cx="3608157" cy="4351338"/>
           </a:xfrm>
         </p:spPr>
         <p:txBody>
           <a:bodyPr>
-            <a:normAutofit lnSpcReduction="10000"/>
+            <a:normAutofit fontScale="92500" lnSpcReduction="20000"/>
           </a:bodyPr>
           <a:lstStyle/>
           <a:p>
@@ -7678,7 +9438,7 @@
             </a:r>
             <a:r>
               <a:rPr lang="en-US" dirty="0"/>
-              <a:t>: Combine reasoning with acting (tool calls) to perform multi-step tasks.</a:t>
+              <a:t>: Combine reasoning (LLM) with acting (tool calls) to perform multi-step tasks.</a:t>
             </a:r>
           </a:p>
           <a:p>
@@ -7729,225 +9489,6 @@
           </a:p>
         </p:txBody>
       </p:sp>
-      <p:grpSp>
-        <p:nvGrpSpPr>
-          <p:cNvPr id="19" name="Group 18">
-            <a:extLst>
-              <a:ext uri="{FF2B5EF4-FFF2-40B4-BE49-F238E27FC236}">
-                <a16:creationId xmlns:a16="http://schemas.microsoft.com/office/drawing/2014/main" id="{07D5ECC2-775E-2B59-329D-236DFE41AD4C}"/>
-              </a:ext>
-            </a:extLst>
-          </p:cNvPr>
-          <p:cNvGrpSpPr/>
-          <p:nvPr/>
-        </p:nvGrpSpPr>
-        <p:grpSpPr>
-          <a:xfrm>
-            <a:off x="5221155" y="1825625"/>
-            <a:ext cx="6540403" cy="3517997"/>
-            <a:chOff x="5283976" y="2226668"/>
-            <a:chExt cx="6540403" cy="3517997"/>
-          </a:xfrm>
-        </p:grpSpPr>
-        <p:grpSp>
-          <p:nvGrpSpPr>
-            <p:cNvPr id="17" name="Group 16">
-              <a:extLst>
-                <a:ext uri="{FF2B5EF4-FFF2-40B4-BE49-F238E27FC236}">
-                  <a16:creationId xmlns:a16="http://schemas.microsoft.com/office/drawing/2014/main" id="{9E92A7DD-880F-746C-8F94-392728BEAD83}"/>
-                </a:ext>
-              </a:extLst>
-            </p:cNvPr>
-            <p:cNvGrpSpPr/>
-            <p:nvPr/>
-          </p:nvGrpSpPr>
-          <p:grpSpPr>
-            <a:xfrm>
-              <a:off x="5390637" y="2316786"/>
-              <a:ext cx="6412802" cy="3369015"/>
-              <a:chOff x="3096674" y="2224453"/>
-              <a:chExt cx="6412802" cy="3369015"/>
-            </a:xfrm>
-          </p:grpSpPr>
-          <p:pic>
-            <p:nvPicPr>
-              <p:cNvPr id="1026" name="Picture 2" descr="How to Build a ReAct AI Agent for Cybersecurity Scanning with Python and  LangGraph | Vitalii Honchar's Blog">
-                <a:extLst>
-                  <a:ext uri="{FF2B5EF4-FFF2-40B4-BE49-F238E27FC236}">
-                    <a16:creationId xmlns:a16="http://schemas.microsoft.com/office/drawing/2014/main" id="{8143CE0D-94BC-FA58-B91E-91618DD25E4D}"/>
-                  </a:ext>
-                </a:extLst>
-              </p:cNvPr>
-              <p:cNvPicPr>
-                <a:picLocks noChangeAspect="1" noChangeArrowheads="1"/>
-              </p:cNvPicPr>
-              <p:nvPr/>
-            </p:nvPicPr>
-            <p:blipFill>
-              <a:blip r:embed="rId3">
-                <a:extLst>
-                  <a:ext uri="{28A0092B-C50C-407E-A947-70E740481C1C}">
-                    <a14:useLocalDpi xmlns:a14="http://schemas.microsoft.com/office/drawing/2010/main" val="0"/>
-                  </a:ext>
-                </a:extLst>
-              </a:blip>
-              <a:srcRect/>
-              <a:stretch>
-                <a:fillRect/>
-              </a:stretch>
-            </p:blipFill>
-            <p:spPr bwMode="auto">
-              <a:xfrm>
-                <a:off x="3096674" y="2409119"/>
-                <a:ext cx="6412802" cy="3184349"/>
-              </a:xfrm>
-              <a:prstGeom prst="rect">
-                <a:avLst/>
-              </a:prstGeom>
-              <a:noFill/>
-              <a:extLst>
-                <a:ext uri="{909E8E84-426E-40DD-AFC4-6F175D3DCCD1}">
-                  <a14:hiddenFill xmlns:a14="http://schemas.microsoft.com/office/drawing/2010/main">
-                    <a:solidFill>
-                      <a:srgbClr val="FFFFFF"/>
-                    </a:solidFill>
-                  </a14:hiddenFill>
-                </a:ext>
-              </a:extLst>
-            </p:spPr>
-          </p:pic>
-          <p:sp>
-            <p:nvSpPr>
-              <p:cNvPr id="14" name="TextBox 13">
-                <a:extLst>
-                  <a:ext uri="{FF2B5EF4-FFF2-40B4-BE49-F238E27FC236}">
-                    <a16:creationId xmlns:a16="http://schemas.microsoft.com/office/drawing/2014/main" id="{363500CB-327E-7F1F-577F-B558CA764E6A}"/>
-                  </a:ext>
-                </a:extLst>
-              </p:cNvPr>
-              <p:cNvSpPr txBox="1"/>
-              <p:nvPr/>
-            </p:nvSpPr>
-            <p:spPr>
-              <a:xfrm>
-                <a:off x="4453337" y="2224453"/>
-                <a:ext cx="1256427" cy="369332"/>
-              </a:xfrm>
-              <a:prstGeom prst="rect">
-                <a:avLst/>
-              </a:prstGeom>
-              <a:noFill/>
-            </p:spPr>
-            <p:txBody>
-              <a:bodyPr wrap="square" rtlCol="0">
-                <a:spAutoFit/>
-              </a:bodyPr>
-              <a:lstStyle/>
-              <a:p>
-                <a:pPr algn="ctr"/>
-                <a:r>
-                  <a:rPr lang="en-US" i="1" dirty="0"/>
-                  <a:t>Task</a:t>
-                </a:r>
-              </a:p>
-            </p:txBody>
-          </p:sp>
-          <p:cxnSp>
-            <p:nvCxnSpPr>
-              <p:cNvPr id="16" name="Straight Arrow Connector 15">
-                <a:extLst>
-                  <a:ext uri="{FF2B5EF4-FFF2-40B4-BE49-F238E27FC236}">
-                    <a16:creationId xmlns:a16="http://schemas.microsoft.com/office/drawing/2014/main" id="{33DA6C84-D69C-A472-CF04-47B7E87D5140}"/>
-                  </a:ext>
-                </a:extLst>
-              </p:cNvPr>
-              <p:cNvCxnSpPr/>
-              <p:nvPr/>
-            </p:nvCxnSpPr>
-            <p:spPr>
-              <a:xfrm>
-                <a:off x="5081551" y="2575676"/>
-                <a:ext cx="0" cy="432770"/>
-              </a:xfrm>
-              <a:prstGeom prst="straightConnector1">
-                <a:avLst/>
-              </a:prstGeom>
-              <a:ln>
-                <a:headEnd type="none" w="med" len="med"/>
-                <a:tailEnd type="arrow" w="med" len="med"/>
-              </a:ln>
-            </p:spPr>
-            <p:style>
-              <a:lnRef idx="2">
-                <a:schemeClr val="dk1"/>
-              </a:lnRef>
-              <a:fillRef idx="0">
-                <a:schemeClr val="dk1"/>
-              </a:fillRef>
-              <a:effectRef idx="1">
-                <a:schemeClr val="dk1"/>
-              </a:effectRef>
-              <a:fontRef idx="minor">
-                <a:schemeClr val="tx1"/>
-              </a:fontRef>
-            </p:style>
-          </p:cxnSp>
-        </p:grpSp>
-        <p:sp>
-          <p:nvSpPr>
-            <p:cNvPr id="18" name="Rectangle 17">
-              <a:extLst>
-                <a:ext uri="{FF2B5EF4-FFF2-40B4-BE49-F238E27FC236}">
-                  <a16:creationId xmlns:a16="http://schemas.microsoft.com/office/drawing/2014/main" id="{A4BBD54F-F998-4617-EDD7-7E67E2048718}"/>
-                </a:ext>
-              </a:extLst>
-            </p:cNvPr>
-            <p:cNvSpPr/>
-            <p:nvPr/>
-          </p:nvSpPr>
-          <p:spPr>
-            <a:xfrm>
-              <a:off x="5283976" y="2226668"/>
-              <a:ext cx="6540403" cy="3517997"/>
-            </a:xfrm>
-            <a:prstGeom prst="rect">
-              <a:avLst/>
-            </a:prstGeom>
-            <a:noFill/>
-            <a:ln w="9525" cap="flat" cmpd="sng" algn="ctr">
-              <a:solidFill>
-                <a:schemeClr val="dk1"/>
-              </a:solidFill>
-              <a:prstDash val="solid"/>
-              <a:round/>
-              <a:headEnd type="none" w="med" len="med"/>
-              <a:tailEnd type="none" w="med" len="med"/>
-            </a:ln>
-          </p:spPr>
-          <p:style>
-            <a:lnRef idx="0">
-              <a:scrgbClr r="0" g="0" b="0"/>
-            </a:lnRef>
-            <a:fillRef idx="0">
-              <a:scrgbClr r="0" g="0" b="0"/>
-            </a:fillRef>
-            <a:effectRef idx="0">
-              <a:scrgbClr r="0" g="0" b="0"/>
-            </a:effectRef>
-            <a:fontRef idx="minor">
-              <a:schemeClr val="dk1"/>
-            </a:fontRef>
-          </p:style>
-          <p:txBody>
-            <a:bodyPr rtlCol="0" anchor="ctr"/>
-            <a:lstStyle/>
-            <a:p>
-              <a:pPr algn="ctr"/>
-              <a:endParaRPr lang="en-US"/>
-            </a:p>
-          </p:txBody>
-        </p:sp>
-      </p:grpSp>
       <p:sp>
         <p:nvSpPr>
           <p:cNvPr id="4" name="Speech Bubble: Rectangle with Corners Rounded 3">
@@ -7962,25 +9503,27 @@
         </p:nvSpPr>
         <p:spPr>
           <a:xfrm>
-            <a:off x="8965359" y="5828427"/>
-            <a:ext cx="2586793" cy="432770"/>
+            <a:off x="9835429" y="4743537"/>
+            <a:ext cx="2133084" cy="432770"/>
           </a:xfrm>
           <a:prstGeom prst="wedgeRoundRectCallout">
             <a:avLst>
-              <a:gd name="adj1" fmla="val -93130"/>
-              <a:gd name="adj2" fmla="val -221661"/>
+              <a:gd name="adj1" fmla="val -43480"/>
+              <a:gd name="adj2" fmla="val -321661"/>
               <a:gd name="adj3" fmla="val 16667"/>
             </a:avLst>
           </a:prstGeom>
         </p:spPr>
         <p:style>
-          <a:lnRef idx="0">
-            <a:schemeClr val="accent2"/>
+          <a:lnRef idx="2">
+            <a:schemeClr val="accent2">
+              <a:shade val="15000"/>
+            </a:schemeClr>
           </a:lnRef>
-          <a:fillRef idx="3">
+          <a:fillRef idx="1">
             <a:schemeClr val="accent2"/>
           </a:fillRef>
-          <a:effectRef idx="3">
+          <a:effectRef idx="0">
             <a:schemeClr val="accent2"/>
           </a:effectRef>
           <a:fontRef idx="minor">
@@ -8020,25 +9563,27 @@
         </p:nvSpPr>
         <p:spPr>
           <a:xfrm>
-            <a:off x="8760092" y="4537809"/>
+            <a:off x="6213098" y="4001294"/>
             <a:ext cx="3168989" cy="776381"/>
           </a:xfrm>
           <a:prstGeom prst="wedgeRoundRectCallout">
             <a:avLst>
-              <a:gd name="adj1" fmla="val -82779"/>
-              <a:gd name="adj2" fmla="val -212840"/>
+              <a:gd name="adj1" fmla="val -11854"/>
+              <a:gd name="adj2" fmla="val -92366"/>
               <a:gd name="adj3" fmla="val 16667"/>
             </a:avLst>
           </a:prstGeom>
         </p:spPr>
         <p:style>
-          <a:lnRef idx="0">
-            <a:schemeClr val="accent2"/>
+          <a:lnRef idx="2">
+            <a:schemeClr val="accent2">
+              <a:shade val="15000"/>
+            </a:schemeClr>
           </a:lnRef>
-          <a:fillRef idx="3">
+          <a:fillRef idx="1">
             <a:schemeClr val="accent2"/>
           </a:fillRef>
-          <a:effectRef idx="3">
+          <a:effectRef idx="0">
             <a:schemeClr val="accent2"/>
           </a:effectRef>
           <a:fontRef idx="minor">
@@ -8073,6 +9618,48 @@
             <a:r>
               <a:rPr lang="en-US" sz="1400" dirty="0"/>
               <a:t>Persistent state stored in context</a:t>
+            </a:r>
+          </a:p>
+        </p:txBody>
+      </p:sp>
+      <p:sp>
+        <p:nvSpPr>
+          <p:cNvPr id="10" name="TextBox 9">
+            <a:extLst>
+              <a:ext uri="{FF2B5EF4-FFF2-40B4-BE49-F238E27FC236}">
+                <a16:creationId xmlns:a16="http://schemas.microsoft.com/office/drawing/2014/main" id="{4A34F548-BD77-6265-1CE4-74CD47E37BD6}"/>
+              </a:ext>
+            </a:extLst>
+          </p:cNvPr>
+          <p:cNvSpPr txBox="1"/>
+          <p:nvPr/>
+        </p:nvSpPr>
+        <p:spPr>
+          <a:xfrm>
+            <a:off x="5327816" y="6165707"/>
+            <a:ext cx="5561908" cy="307777"/>
+          </a:xfrm>
+          <a:prstGeom prst="rect">
+            <a:avLst/>
+          </a:prstGeom>
+          <a:noFill/>
+        </p:spPr>
+        <p:txBody>
+          <a:bodyPr wrap="square">
+            <a:spAutoFit/>
+          </a:bodyPr>
+          <a:lstStyle/>
+          <a:p>
+            <a:pPr algn="ctr"/>
+            <a:r>
+              <a:rPr lang="en-US" sz="1400" dirty="0">
+                <a:hlinkClick r:id="rId4"/>
+              </a:rPr>
+              <a:t>https://blog.bytebytego.com/p/top-ai-agentic-workflow-patterns</a:t>
+            </a:r>
+            <a:r>
+              <a:rPr lang="en-US" sz="1400" dirty="0"/>
+              <a:t> </a:t>
             </a:r>
           </a:p>
         </p:txBody>
@@ -8214,7 +9801,429 @@
 </p:sld>
 </file>
 
-<file path=ppt/slides/slide16.xml><?xml version="1.0" encoding="utf-8"?>
+<file path=ppt/slides/slide2.xml><?xml version="1.0" encoding="utf-8"?>
+<p:sld xmlns:a="http://schemas.openxmlformats.org/drawingml/2006/main" xmlns:r="http://schemas.openxmlformats.org/officeDocument/2006/relationships" xmlns:p="http://schemas.openxmlformats.org/presentationml/2006/main">
+  <p:cSld>
+    <p:spTree>
+      <p:nvGrpSpPr>
+        <p:cNvPr id="1" name="">
+          <a:extLst>
+            <a:ext uri="{FF2B5EF4-FFF2-40B4-BE49-F238E27FC236}">
+              <a16:creationId xmlns:a16="http://schemas.microsoft.com/office/drawing/2014/main" id="{2F0F1D38-7AD9-8637-3587-13101CFCB331}"/>
+            </a:ext>
+          </a:extLst>
+        </p:cNvPr>
+        <p:cNvGrpSpPr/>
+        <p:nvPr/>
+      </p:nvGrpSpPr>
+      <p:grpSpPr>
+        <a:xfrm>
+          <a:off x="0" y="0"/>
+          <a:ext cx="0" cy="0"/>
+          <a:chOff x="0" y="0"/>
+          <a:chExt cx="0" cy="0"/>
+        </a:xfrm>
+      </p:grpSpPr>
+      <p:sp>
+        <p:nvSpPr>
+          <p:cNvPr id="4" name="Title 3">
+            <a:extLst>
+              <a:ext uri="{FF2B5EF4-FFF2-40B4-BE49-F238E27FC236}">
+                <a16:creationId xmlns:a16="http://schemas.microsoft.com/office/drawing/2014/main" id="{CC191C7C-2DE7-E559-2B51-A6200A67635F}"/>
+              </a:ext>
+            </a:extLst>
+          </p:cNvPr>
+          <p:cNvSpPr>
+            <a:spLocks noGrp="1"/>
+          </p:cNvSpPr>
+          <p:nvPr>
+            <p:ph type="title"/>
+          </p:nvPr>
+        </p:nvSpPr>
+        <p:spPr>
+          <a:xfrm>
+            <a:off x="838199" y="1093788"/>
+            <a:ext cx="10506455" cy="2967208"/>
+          </a:xfrm>
+        </p:spPr>
+        <p:txBody>
+          <a:bodyPr vert="horz" lIns="91440" tIns="45720" rIns="91440" bIns="45720" rtlCol="0" anchor="b">
+            <a:normAutofit/>
+          </a:bodyPr>
+          <a:lstStyle/>
+          <a:p>
+            <a:r>
+              <a:rPr lang="en-US" sz="8000" kern="1200" dirty="0">
+                <a:solidFill>
+                  <a:schemeClr val="tx1"/>
+                </a:solidFill>
+                <a:latin typeface="+mj-lt"/>
+                <a:ea typeface="+mj-ea"/>
+                <a:cs typeface="+mj-cs"/>
+              </a:rPr>
+              <a:t>LLMs as Knowledge-Based Agents</a:t>
+            </a:r>
+          </a:p>
+        </p:txBody>
+      </p:sp>
+      <p:sp>
+        <p:nvSpPr>
+          <p:cNvPr id="5" name="Text Placeholder 4">
+            <a:extLst>
+              <a:ext uri="{FF2B5EF4-FFF2-40B4-BE49-F238E27FC236}">
+                <a16:creationId xmlns:a16="http://schemas.microsoft.com/office/drawing/2014/main" id="{EBF1418D-57B2-0CC0-F957-4A3AF6A81ECA}"/>
+              </a:ext>
+            </a:extLst>
+          </p:cNvPr>
+          <p:cNvSpPr>
+            <a:spLocks noGrp="1"/>
+          </p:cNvSpPr>
+          <p:nvPr>
+            <p:ph type="body" idx="1"/>
+          </p:nvPr>
+        </p:nvSpPr>
+        <p:spPr>
+          <a:xfrm>
+            <a:off x="7400924" y="4619624"/>
+            <a:ext cx="3946779" cy="1038225"/>
+          </a:xfrm>
+        </p:spPr>
+        <p:txBody>
+          <a:bodyPr vert="horz" lIns="91440" tIns="45720" rIns="91440" bIns="45720" rtlCol="0">
+            <a:normAutofit/>
+          </a:bodyPr>
+          <a:lstStyle/>
+          <a:p>
+            <a:pPr algn="r"/>
+            <a:endParaRPr lang="en-US" sz="2400" kern="1200">
+              <a:solidFill>
+                <a:schemeClr val="tx1"/>
+              </a:solidFill>
+              <a:latin typeface="+mn-lt"/>
+              <a:ea typeface="+mn-ea"/>
+              <a:cs typeface="+mn-cs"/>
+            </a:endParaRPr>
+          </a:p>
+        </p:txBody>
+      </p:sp>
+    </p:spTree>
+    <p:extLst>
+      <p:ext uri="{BB962C8B-B14F-4D97-AF65-F5344CB8AC3E}">
+        <p14:creationId xmlns:p14="http://schemas.microsoft.com/office/powerpoint/2010/main" val="2229115363"/>
+      </p:ext>
+    </p:extLst>
+  </p:cSld>
+  <p:clrMapOvr>
+    <a:masterClrMapping/>
+  </p:clrMapOvr>
+</p:sld>
+</file>
+
+<file path=ppt/slides/slide20.xml><?xml version="1.0" encoding="utf-8"?>
+<p:sld xmlns:a="http://schemas.openxmlformats.org/drawingml/2006/main" xmlns:r="http://schemas.openxmlformats.org/officeDocument/2006/relationships" xmlns:p="http://schemas.openxmlformats.org/presentationml/2006/main">
+  <p:cSld>
+    <p:spTree>
+      <p:nvGrpSpPr>
+        <p:cNvPr id="1" name="">
+          <a:extLst>
+            <a:ext uri="{FF2B5EF4-FFF2-40B4-BE49-F238E27FC236}">
+              <a16:creationId xmlns:a16="http://schemas.microsoft.com/office/drawing/2014/main" id="{ED8420FF-D7E5-A3D9-8B07-F1B5CD3736BF}"/>
+            </a:ext>
+          </a:extLst>
+        </p:cNvPr>
+        <p:cNvGrpSpPr/>
+        <p:nvPr/>
+      </p:nvGrpSpPr>
+      <p:grpSpPr>
+        <a:xfrm>
+          <a:off x="0" y="0"/>
+          <a:ext cx="0" cy="0"/>
+          <a:chOff x="0" y="0"/>
+          <a:chExt cx="0" cy="0"/>
+        </a:xfrm>
+      </p:grpSpPr>
+      <p:sp>
+        <p:nvSpPr>
+          <p:cNvPr id="4" name="Title 3">
+            <a:extLst>
+              <a:ext uri="{FF2B5EF4-FFF2-40B4-BE49-F238E27FC236}">
+                <a16:creationId xmlns:a16="http://schemas.microsoft.com/office/drawing/2014/main" id="{C7038DCD-9805-4915-E4BE-2FDE3E8A1767}"/>
+              </a:ext>
+            </a:extLst>
+          </p:cNvPr>
+          <p:cNvSpPr>
+            <a:spLocks noGrp="1"/>
+          </p:cNvSpPr>
+          <p:nvPr>
+            <p:ph type="title"/>
+          </p:nvPr>
+        </p:nvSpPr>
+        <p:spPr>
+          <a:xfrm>
+            <a:off x="838200" y="365125"/>
+            <a:ext cx="4800600" cy="1325563"/>
+          </a:xfrm>
+        </p:spPr>
+        <p:txBody>
+          <a:bodyPr/>
+          <a:lstStyle/>
+          <a:p>
+            <a:r>
+              <a:rPr lang="en-US" dirty="0"/>
+              <a:t>Planning Pattern</a:t>
+            </a:r>
+          </a:p>
+        </p:txBody>
+      </p:sp>
+      <p:sp>
+        <p:nvSpPr>
+          <p:cNvPr id="5" name="Content Placeholder 4">
+            <a:extLst>
+              <a:ext uri="{FF2B5EF4-FFF2-40B4-BE49-F238E27FC236}">
+                <a16:creationId xmlns:a16="http://schemas.microsoft.com/office/drawing/2014/main" id="{8769A84E-B8A9-C5E7-4463-043741304402}"/>
+              </a:ext>
+            </a:extLst>
+          </p:cNvPr>
+          <p:cNvSpPr>
+            <a:spLocks noGrp="1"/>
+          </p:cNvSpPr>
+          <p:nvPr>
+            <p:ph idx="1"/>
+          </p:nvPr>
+        </p:nvSpPr>
+        <p:spPr>
+          <a:xfrm>
+            <a:off x="838200" y="1825625"/>
+            <a:ext cx="3048000" cy="4351338"/>
+          </a:xfrm>
+        </p:spPr>
+        <p:txBody>
+          <a:bodyPr>
+            <a:normAutofit fontScale="77500" lnSpcReduction="20000"/>
+          </a:bodyPr>
+          <a:lstStyle/>
+          <a:p>
+            <a:pPr marL="0" indent="0">
+              <a:buNone/>
+            </a:pPr>
+            <a:r>
+              <a:rPr lang="en-US" dirty="0"/>
+              <a:t>This pattern combines:</a:t>
+            </a:r>
+          </a:p>
+          <a:p>
+            <a:r>
+              <a:rPr lang="en-US" dirty="0"/>
+              <a:t>Planning (e.g., tree search) to generate a list of tasks.</a:t>
+            </a:r>
+          </a:p>
+          <a:p>
+            <a:r>
+              <a:rPr lang="en-US" dirty="0"/>
+              <a:t>Task agents (e.g., using </a:t>
+            </a:r>
+            <a:r>
+              <a:rPr lang="en-US" dirty="0" err="1"/>
+              <a:t>ReAct</a:t>
+            </a:r>
+            <a:r>
+              <a:rPr lang="en-US" dirty="0"/>
+              <a:t>) to execute each task</a:t>
+            </a:r>
+          </a:p>
+          <a:p>
+            <a:r>
+              <a:rPr lang="en-US" dirty="0"/>
+              <a:t>Replanning is used if the plan does not work.</a:t>
+            </a:r>
+          </a:p>
+          <a:p>
+            <a:endParaRPr lang="en-US" dirty="0"/>
+          </a:p>
+          <a:p>
+            <a:pPr marL="0" indent="0">
+              <a:buNone/>
+            </a:pPr>
+            <a:r>
+              <a:rPr lang="en-US" dirty="0"/>
+              <a:t>Use case: For more complex tasks that need multiple steps.  </a:t>
+            </a:r>
+          </a:p>
+        </p:txBody>
+      </p:sp>
+      <p:pic>
+        <p:nvPicPr>
+          <p:cNvPr id="3" name="Picture 2">
+            <a:extLst>
+              <a:ext uri="{FF2B5EF4-FFF2-40B4-BE49-F238E27FC236}">
+                <a16:creationId xmlns:a16="http://schemas.microsoft.com/office/drawing/2014/main" id="{DEC9295E-0302-9366-6872-0151D424C2C1}"/>
+              </a:ext>
+              <a:ext uri="{C183D7F6-B498-43B3-948B-1728B52AA6E4}">
+                <adec:decorative xmlns:adec="http://schemas.microsoft.com/office/drawing/2017/decorative" val="1"/>
+              </a:ext>
+            </a:extLst>
+          </p:cNvPr>
+          <p:cNvPicPr>
+            <a:picLocks noChangeAspect="1"/>
+          </p:cNvPicPr>
+          <p:nvPr/>
+        </p:nvPicPr>
+        <p:blipFill>
+          <a:blip r:embed="rId2" cstate="screen">
+            <a:extLst>
+              <a:ext uri="{28A0092B-C50C-407E-A947-70E740481C1C}">
+                <a14:useLocalDpi xmlns:a14="http://schemas.microsoft.com/office/drawing/2010/main"/>
+              </a:ext>
+            </a:extLst>
+          </a:blip>
+          <a:stretch>
+            <a:fillRect/>
+          </a:stretch>
+        </p:blipFill>
+        <p:spPr>
+          <a:xfrm>
+            <a:off x="4691087" y="2026666"/>
+            <a:ext cx="6647723" cy="4310062"/>
+          </a:xfrm>
+          <a:prstGeom prst="rect">
+            <a:avLst/>
+          </a:prstGeom>
+        </p:spPr>
+      </p:pic>
+      <p:sp>
+        <p:nvSpPr>
+          <p:cNvPr id="7" name="TextBox 6">
+            <a:extLst>
+              <a:ext uri="{FF2B5EF4-FFF2-40B4-BE49-F238E27FC236}">
+                <a16:creationId xmlns:a16="http://schemas.microsoft.com/office/drawing/2014/main" id="{8FEC081D-49EC-A566-789F-2909AB6693D7}"/>
+              </a:ext>
+            </a:extLst>
+          </p:cNvPr>
+          <p:cNvSpPr txBox="1"/>
+          <p:nvPr/>
+        </p:nvSpPr>
+        <p:spPr>
+          <a:xfrm>
+            <a:off x="5334000" y="6336728"/>
+            <a:ext cx="5561908" cy="307777"/>
+          </a:xfrm>
+          <a:prstGeom prst="rect">
+            <a:avLst/>
+          </a:prstGeom>
+          <a:noFill/>
+        </p:spPr>
+        <p:txBody>
+          <a:bodyPr wrap="square">
+            <a:spAutoFit/>
+          </a:bodyPr>
+          <a:lstStyle/>
+          <a:p>
+            <a:r>
+              <a:rPr lang="en-US" sz="1400" dirty="0">
+                <a:hlinkClick r:id="rId3"/>
+              </a:rPr>
+              <a:t>https://blog.bytebytego.com/p/top-ai-agentic-workflow-patterns</a:t>
+            </a:r>
+            <a:r>
+              <a:rPr lang="en-US" sz="1400" dirty="0"/>
+              <a:t> </a:t>
+            </a:r>
+          </a:p>
+        </p:txBody>
+      </p:sp>
+    </p:spTree>
+    <p:extLst>
+      <p:ext uri="{BB962C8B-B14F-4D97-AF65-F5344CB8AC3E}">
+        <p14:creationId xmlns:p14="http://schemas.microsoft.com/office/powerpoint/2010/main" val="1756809269"/>
+      </p:ext>
+    </p:extLst>
+  </p:cSld>
+  <p:clrMapOvr>
+    <a:masterClrMapping/>
+  </p:clrMapOvr>
+  <p:timing>
+    <p:tnLst>
+      <p:par>
+        <p:cTn id="1" dur="indefinite" restart="never" nodeType="tmRoot">
+          <p:childTnLst>
+            <p:seq concurrent="1" nextAc="seek">
+              <p:cTn id="2" dur="indefinite" nodeType="mainSeq">
+                <p:childTnLst>
+                  <p:par>
+                    <p:cTn id="3" fill="hold">
+                      <p:stCondLst>
+                        <p:cond delay="indefinite"/>
+                      </p:stCondLst>
+                      <p:childTnLst>
+                        <p:par>
+                          <p:cTn id="4" fill="hold">
+                            <p:stCondLst>
+                              <p:cond delay="0"/>
+                            </p:stCondLst>
+                            <p:childTnLst>
+                              <p:par>
+                                <p:cTn id="5" presetID="1" presetClass="entr" presetSubtype="0" fill="hold" nodeType="clickEffect">
+                                  <p:stCondLst>
+                                    <p:cond delay="0"/>
+                                  </p:stCondLst>
+                                  <p:childTnLst>
+                                    <p:set>
+                                      <p:cBhvr>
+                                        <p:cTn id="6" dur="1" fill="hold">
+                                          <p:stCondLst>
+                                            <p:cond delay="0"/>
+                                          </p:stCondLst>
+                                        </p:cTn>
+                                        <p:tgtEl>
+                                          <p:spTgt spid="5">
+                                            <p:txEl>
+                                              <p:pRg st="5" end="5"/>
+                                            </p:txEl>
+                                          </p:spTgt>
+                                        </p:tgtEl>
+                                        <p:attrNameLst>
+                                          <p:attrName>style.visibility</p:attrName>
+                                        </p:attrNameLst>
+                                      </p:cBhvr>
+                                      <p:to>
+                                        <p:strVal val="visible"/>
+                                      </p:to>
+                                    </p:set>
+                                  </p:childTnLst>
+                                </p:cTn>
+                              </p:par>
+                            </p:childTnLst>
+                          </p:cTn>
+                        </p:par>
+                      </p:childTnLst>
+                    </p:cTn>
+                  </p:par>
+                </p:childTnLst>
+              </p:cTn>
+              <p:prevCondLst>
+                <p:cond evt="onPrev" delay="0">
+                  <p:tgtEl>
+                    <p:sldTgt/>
+                  </p:tgtEl>
+                </p:cond>
+              </p:prevCondLst>
+              <p:nextCondLst>
+                <p:cond evt="onNext" delay="0">
+                  <p:tgtEl>
+                    <p:sldTgt/>
+                  </p:tgtEl>
+                </p:cond>
+              </p:nextCondLst>
+            </p:seq>
+          </p:childTnLst>
+        </p:cTn>
+      </p:par>
+    </p:tnLst>
+  </p:timing>
+</p:sld>
+</file>
+
+<file path=ppt/slides/slide21.xml><?xml version="1.0" encoding="utf-8"?>
 <p:sld xmlns:a="http://schemas.openxmlformats.org/drawingml/2006/main" xmlns:r="http://schemas.openxmlformats.org/officeDocument/2006/relationships" xmlns:p="http://schemas.openxmlformats.org/presentationml/2006/main">
   <p:cSld>
     <p:bg>
@@ -9039,7 +11048,7 @@
 </p:sld>
 </file>
 
-<file path=ppt/slides/slide2.xml><?xml version="1.0" encoding="utf-8"?>
+<file path=ppt/slides/slide3.xml><?xml version="1.0" encoding="utf-8"?>
 <p:sld xmlns:a="http://schemas.openxmlformats.org/drawingml/2006/main" xmlns:r="http://schemas.openxmlformats.org/officeDocument/2006/relationships" xmlns:p="http://schemas.openxmlformats.org/presentationml/2006/main">
   <p:cSld>
     <p:spTree>
@@ -9093,7 +11102,7 @@
             </a:br>
             <a:r>
               <a:rPr lang="en-US" sz="3500" dirty="0"/>
-              <a:t>Large Language Model (LLM)</a:t>
+              <a:t>Large Language Model (LLM) Chat Bot</a:t>
             </a:r>
           </a:p>
         </p:txBody>
@@ -9332,7 +11341,7 @@
 </p:sld>
 </file>
 
-<file path=ppt/slides/slide3.xml><?xml version="1.0" encoding="utf-8"?>
+<file path=ppt/slides/slide4.xml><?xml version="1.0" encoding="utf-8"?>
 <p:sld xmlns:a="http://schemas.openxmlformats.org/drawingml/2006/main" xmlns:r="http://schemas.openxmlformats.org/officeDocument/2006/relationships" xmlns:p="http://schemas.openxmlformats.org/presentationml/2006/main">
   <p:cSld>
     <p:spTree>
@@ -10265,7 +12274,7 @@
 </p:sld>
 </file>
 
-<file path=ppt/slides/slide4.xml><?xml version="1.0" encoding="utf-8"?>
+<file path=ppt/slides/slide5.xml><?xml version="1.0" encoding="utf-8"?>
 <p:sld xmlns:a="http://schemas.openxmlformats.org/drawingml/2006/main" xmlns:r="http://schemas.openxmlformats.org/officeDocument/2006/relationships" xmlns:p="http://schemas.openxmlformats.org/presentationml/2006/main">
   <p:cSld>
     <p:spTree>
@@ -11093,7 +13102,7 @@
 </p:sld>
 </file>
 
-<file path=ppt/slides/slide5.xml><?xml version="1.0" encoding="utf-8"?>
+<file path=ppt/slides/slide6.xml><?xml version="1.0" encoding="utf-8"?>
 <p:sld xmlns:a="http://schemas.openxmlformats.org/drawingml/2006/main" xmlns:r="http://schemas.openxmlformats.org/officeDocument/2006/relationships" xmlns:p="http://schemas.openxmlformats.org/presentationml/2006/main">
   <p:cSld>
     <p:spTree>
@@ -11449,7 +13458,7 @@
 </p:sld>
 </file>
 
-<file path=ppt/slides/slide6.xml><?xml version="1.0" encoding="utf-8"?>
+<file path=ppt/slides/slide7.xml><?xml version="1.0" encoding="utf-8"?>
 <p:sld xmlns:a="http://schemas.openxmlformats.org/drawingml/2006/main" xmlns:r="http://schemas.openxmlformats.org/officeDocument/2006/relationships" xmlns:p="http://schemas.openxmlformats.org/presentationml/2006/main">
   <p:cSld>
     <p:spTree>
@@ -12149,7 +14158,7 @@
 </p:sld>
 </file>
 
-<file path=ppt/slides/slide7.xml><?xml version="1.0" encoding="utf-8"?>
+<file path=ppt/slides/slide8.xml><?xml version="1.0" encoding="utf-8"?>
 <p:sld xmlns:a="http://schemas.openxmlformats.org/drawingml/2006/main" xmlns:r="http://schemas.openxmlformats.org/officeDocument/2006/relationships" xmlns:p="http://schemas.openxmlformats.org/presentationml/2006/main">
   <p:cSld>
     <p:spTree>
@@ -12260,7 +14269,7 @@
                     <m:sSub>
                       <m:sSubPr>
                         <m:ctrlPr>
-                          <a:rPr lang="en-US" sz="1800" b="0" i="1" smtClean="0">
+                          <a:rPr lang="en-US" sz="1800" b="0" i="0" smtClean="0">
                             <a:latin typeface="Cambria Math" panose="02040503050406030204" pitchFamily="18" charset="0"/>
                           </a:rPr>
                         </m:ctrlPr>
@@ -12629,7 +14638,7 @@
                     <m:d>
                       <m:dPr>
                         <m:ctrlPr>
-                          <a:rPr lang="en-US" sz="1800" i="1">
+                          <a:rPr lang="en-US" sz="1800" i="1" smtClean="0">
                             <a:latin typeface="Cambria Math" panose="02040503050406030204" pitchFamily="18" charset="0"/>
                           </a:rPr>
                         </m:ctrlPr>
@@ -12638,7 +14647,7 @@
                         <m:sSub>
                           <m:sSubPr>
                             <m:ctrlPr>
-                              <a:rPr lang="en-US" sz="1800" i="1" smtClean="0">
+                              <a:rPr lang="en-US" sz="1800" i="1">
                                 <a:latin typeface="Cambria Math" panose="02040503050406030204" pitchFamily="18" charset="0"/>
                               </a:rPr>
                             </m:ctrlPr>
@@ -12712,7 +14721,7 @@
                         <m:sSub>
                           <m:sSubPr>
                             <m:ctrlPr>
-                              <a:rPr lang="en-US" sz="1800" i="1" smtClean="0">
+                              <a:rPr lang="en-US" sz="1800" b="0" i="1" smtClean="0">
                                 <a:latin typeface="Cambria Math" panose="02040503050406030204" pitchFamily="18" charset="0"/>
                               </a:rPr>
                             </m:ctrlPr>
@@ -12884,7 +14893,7 @@
                     <m:f>
                       <m:fPr>
                         <m:ctrlPr>
-                          <a:rPr lang="en-US" sz="1800" i="1">
+                          <a:rPr lang="en-US" sz="1800" b="0" i="1" smtClean="0">
                             <a:solidFill>
                               <a:srgbClr val="FF0000"/>
                             </a:solidFill>
@@ -12985,7 +14994,7 @@
                     <m:d>
                       <m:dPr>
                         <m:ctrlPr>
-                          <a:rPr lang="en-US" sz="1800" i="1">
+                          <a:rPr lang="en-US" sz="1800" i="1" smtClean="0">
                             <a:latin typeface="Cambria Math" panose="02040503050406030204" pitchFamily="18" charset="0"/>
                           </a:rPr>
                         </m:ctrlPr>
@@ -12994,7 +15003,7 @@
                         <m:sSub>
                           <m:sSubPr>
                             <m:ctrlPr>
-                              <a:rPr lang="en-US" sz="1800" i="1" smtClean="0">
+                              <a:rPr lang="en-US" sz="1800" i="1">
                                 <a:latin typeface="Cambria Math" panose="02040503050406030204" pitchFamily="18" charset="0"/>
                               </a:rPr>
                             </m:ctrlPr>
@@ -13068,7 +15077,7 @@
                         <m:sSub>
                           <m:sSubPr>
                             <m:ctrlPr>
-                              <a:rPr lang="en-US" sz="1800" i="1" smtClean="0">
+                              <a:rPr lang="en-US" sz="1800" b="0" i="1" smtClean="0">
                                 <a:latin typeface="Cambria Math" panose="02040503050406030204" pitchFamily="18" charset="0"/>
                               </a:rPr>
                             </m:ctrlPr>
@@ -13518,7 +15527,7 @@
                     <m:sSup>
                       <m:sSupPr>
                         <m:ctrlPr>
-                          <a:rPr lang="en-US" sz="1800" i="1" smtClean="0">
+                          <a:rPr lang="en-US" sz="1800" b="0" i="1" smtClean="0">
                             <a:latin typeface="Cambria Math" panose="02040503050406030204" pitchFamily="18" charset="0"/>
                           </a:rPr>
                         </m:ctrlPr>
@@ -13609,7 +15618,7 @@
                     <m:d>
                       <m:dPr>
                         <m:ctrlPr>
-                          <a:rPr lang="en-US" sz="1400" b="0" i="1" smtClean="0">
+                          <a:rPr lang="en-US" sz="1400" i="1" smtClean="0">
                             <a:latin typeface="Cambria Math" panose="02040503050406030204" pitchFamily="18" charset="0"/>
                           </a:rPr>
                         </m:ctrlPr>
@@ -13618,7 +15627,7 @@
                         <m:sSup>
                           <m:sSupPr>
                             <m:ctrlPr>
-                              <a:rPr lang="en-US" sz="1400" i="1" smtClean="0">
+                              <a:rPr lang="en-US" sz="1400" b="0" i="1" smtClean="0">
                                 <a:latin typeface="Cambria Math" panose="02040503050406030204" pitchFamily="18" charset="0"/>
                               </a:rPr>
                             </m:ctrlPr>
@@ -14033,10 +16042,7 @@
                   <a:pPr/>
                   <a14:m>
                     <m:oMathPara xmlns:m="http://schemas.openxmlformats.org/officeDocument/2006/math">
-                      <m:oMathParaPr>
-                        <m:jc m:val="centerGroup"/>
-                      </m:oMathParaPr>
-                      <m:oMath xmlns:m="http://schemas.openxmlformats.org/officeDocument/2006/math">
+                      <m:oMath>
                         <m:sSub>
                           <m:sSubPr>
                             <m:ctrlPr>
@@ -14161,10 +16167,7 @@
                   <a:pPr/>
                   <a14:m>
                     <m:oMathPara xmlns:m="http://schemas.openxmlformats.org/officeDocument/2006/math">
-                      <m:oMathParaPr>
-                        <m:jc m:val="centerGroup"/>
-                      </m:oMathParaPr>
-                      <m:oMath xmlns:m="http://schemas.openxmlformats.org/officeDocument/2006/math">
+                      <m:oMath>
                         <m:sSub>
                           <m:sSubPr>
                             <m:ctrlPr>
@@ -14298,10 +16301,7 @@
                   <a:pPr/>
                   <a14:m>
                     <m:oMathPara xmlns:m="http://schemas.openxmlformats.org/officeDocument/2006/math">
-                      <m:oMathParaPr>
-                        <m:jc m:val="centerGroup"/>
-                      </m:oMathParaPr>
-                      <m:oMath xmlns:m="http://schemas.openxmlformats.org/officeDocument/2006/math">
+                      <m:oMath>
                         <m:sSub>
                           <m:sSubPr>
                             <m:ctrlPr>
@@ -14435,10 +16435,7 @@
                   <a:pPr/>
                   <a14:m>
                     <m:oMathPara xmlns:m="http://schemas.openxmlformats.org/officeDocument/2006/math">
-                      <m:oMathParaPr>
-                        <m:jc m:val="centerGroup"/>
-                      </m:oMathParaPr>
-                      <m:oMath xmlns:m="http://schemas.openxmlformats.org/officeDocument/2006/math">
+                      <m:oMath>
                         <m:sSub>
                           <m:sSubPr>
                             <m:ctrlPr>
@@ -14616,10 +16613,7 @@
                   <a:pPr/>
                   <a14:m>
                     <m:oMathPara xmlns:m="http://schemas.openxmlformats.org/officeDocument/2006/math">
-                      <m:oMathParaPr>
-                        <m:jc m:val="centerGroup"/>
-                      </m:oMathParaPr>
-                      <m:oMath xmlns:m="http://schemas.openxmlformats.org/officeDocument/2006/math">
+                      <m:oMath>
                         <m:sSub>
                           <m:sSubPr>
                             <m:ctrlPr>
@@ -15061,10 +17055,7 @@
                           <a:pPr algn="ctr"/>
                           <a14:m>
                             <m:oMathPara xmlns:m="http://schemas.openxmlformats.org/officeDocument/2006/math">
-                              <m:oMathParaPr>
-                                <m:jc m:val="centerGroup"/>
-                              </m:oMathParaPr>
-                              <m:oMath xmlns:m="http://schemas.openxmlformats.org/officeDocument/2006/math">
+                              <m:oMath>
                                 <m:sSub>
                                   <m:sSubPr>
                                     <m:ctrlPr>
@@ -15164,10 +17155,7 @@
                           </a:pPr>
                           <a14:m>
                             <m:oMathPara xmlns:m="http://schemas.openxmlformats.org/officeDocument/2006/math">
-                              <m:oMathParaPr>
-                                <m:jc m:val="centerGroup"/>
-                              </m:oMathParaPr>
-                              <m:oMath xmlns:m="http://schemas.openxmlformats.org/officeDocument/2006/math">
+                              <m:oMath>
                                 <m:sSub>
                                   <m:sSubPr>
                                     <m:ctrlPr>
@@ -15237,10 +17225,7 @@
                           </a:pPr>
                           <a14:m>
                             <m:oMathPara xmlns:m="http://schemas.openxmlformats.org/officeDocument/2006/math">
-                              <m:oMathParaPr>
-                                <m:jc m:val="centerGroup"/>
-                              </m:oMathParaPr>
-                              <m:oMath xmlns:m="http://schemas.openxmlformats.org/officeDocument/2006/math">
+                              <m:oMath>
                                 <m:sSub>
                                   <m:sSubPr>
                                     <m:ctrlPr>
@@ -15310,10 +17295,7 @@
                           </a:pPr>
                           <a14:m>
                             <m:oMathPara xmlns:m="http://schemas.openxmlformats.org/officeDocument/2006/math">
-                              <m:oMathParaPr>
-                                <m:jc m:val="centerGroup"/>
-                              </m:oMathParaPr>
-                              <m:oMath xmlns:m="http://schemas.openxmlformats.org/officeDocument/2006/math">
+                              <m:oMath>
                                 <m:sSub>
                                   <m:sSubPr>
                                     <m:ctrlPr>
@@ -15383,10 +17365,7 @@
                           </a:pPr>
                           <a14:m>
                             <m:oMathPara xmlns:m="http://schemas.openxmlformats.org/officeDocument/2006/math">
-                              <m:oMathParaPr>
-                                <m:jc m:val="centerGroup"/>
-                              </m:oMathParaPr>
-                              <m:oMath xmlns:m="http://schemas.openxmlformats.org/officeDocument/2006/math">
+                              <m:oMath>
                                 <m:sSub>
                                   <m:sSubPr>
                                     <m:ctrlPr>
@@ -15444,10 +17423,7 @@
                           </a:pPr>
                           <a14:m>
                             <m:oMathPara xmlns:m="http://schemas.openxmlformats.org/officeDocument/2006/math">
-                              <m:oMathParaPr>
-                                <m:jc m:val="centerGroup"/>
-                              </m:oMathParaPr>
-                              <m:oMath xmlns:m="http://schemas.openxmlformats.org/officeDocument/2006/math">
+                              <m:oMath>
                                 <m:r>
                                   <a:rPr lang="en-US" sz="1100" b="0" i="1" dirty="0" smtClean="0">
                                     <a:latin typeface="Cambria Math" panose="02040503050406030204" pitchFamily="18" charset="0"/>
@@ -16681,7 +18657,7 @@
                     <m:sSup>
                       <m:sSupPr>
                         <m:ctrlPr>
-                          <a:rPr lang="en-US" sz="1600" i="1" smtClean="0">
+                          <a:rPr lang="en-US" sz="1600" b="0" i="1" smtClean="0">
                             <a:latin typeface="Cambria Math" panose="02040503050406030204" pitchFamily="18" charset="0"/>
                           </a:rPr>
                         </m:ctrlPr>
@@ -18073,7 +20049,7 @@
 </p:sld>
 </file>
 
-<file path=ppt/slides/slide8.xml><?xml version="1.0" encoding="utf-8"?>
+<file path=ppt/slides/slide9.xml><?xml version="1.0" encoding="utf-8"?>
 <p:sld xmlns:a="http://schemas.openxmlformats.org/drawingml/2006/main" xmlns:r="http://schemas.openxmlformats.org/officeDocument/2006/relationships" xmlns:p="http://schemas.openxmlformats.org/presentationml/2006/main">
   <p:cSld>
     <p:spTree>
@@ -19252,10 +21228,7 @@
                   <a:pPr/>
                   <a14:m>
                     <m:oMathPara xmlns:m="http://schemas.openxmlformats.org/officeDocument/2006/math">
-                      <m:oMathParaPr>
-                        <m:jc m:val="centerGroup"/>
-                      </m:oMathParaPr>
-                      <m:oMath xmlns:m="http://schemas.openxmlformats.org/officeDocument/2006/math">
+                      <m:oMath>
                         <m:d>
                           <m:dPr>
                             <m:ctrlPr>
@@ -19457,10 +21430,7 @@
                   <a:pPr/>
                   <a14:m>
                     <m:oMathPara xmlns:m="http://schemas.openxmlformats.org/officeDocument/2006/math">
-                      <m:oMathParaPr>
-                        <m:jc m:val="centerGroup"/>
-                      </m:oMathParaPr>
-                      <m:oMath xmlns:m="http://schemas.openxmlformats.org/officeDocument/2006/math">
+                      <m:oMath>
                         <m:r>
                           <a:rPr lang="en-US" b="0" i="1" dirty="0" smtClean="0">
                             <a:latin typeface="Cambria Math" panose="02040503050406030204" pitchFamily="18" charset="0"/>
@@ -19565,10 +21535,7 @@
                   <a:pPr/>
                   <a14:m>
                     <m:oMathPara xmlns:m="http://schemas.openxmlformats.org/officeDocument/2006/math">
-                      <m:oMathParaPr>
-                        <m:jc m:val="centerGroup"/>
-                      </m:oMathParaPr>
-                      <m:oMath xmlns:m="http://schemas.openxmlformats.org/officeDocument/2006/math">
+                      <m:oMath>
                         <m:r>
                           <a:rPr lang="en-US" b="0" i="1" dirty="0" smtClean="0">
                             <a:latin typeface="Cambria Math" panose="02040503050406030204" pitchFamily="18" charset="0"/>
@@ -20413,396 +22380,6 @@
 </p:sld>
 </file>
 
-<file path=ppt/slides/slide9.xml><?xml version="1.0" encoding="utf-8"?>
-<p:sld xmlns:a="http://schemas.openxmlformats.org/drawingml/2006/main" xmlns:r="http://schemas.openxmlformats.org/officeDocument/2006/relationships" xmlns:p="http://schemas.openxmlformats.org/presentationml/2006/main">
-  <p:cSld>
-    <p:spTree>
-      <p:nvGrpSpPr>
-        <p:cNvPr id="1" name=""/>
-        <p:cNvGrpSpPr/>
-        <p:nvPr/>
-      </p:nvGrpSpPr>
-      <p:grpSpPr>
-        <a:xfrm>
-          <a:off x="0" y="0"/>
-          <a:ext cx="0" cy="0"/>
-          <a:chOff x="0" y="0"/>
-          <a:chExt cx="0" cy="0"/>
-        </a:xfrm>
-      </p:grpSpPr>
-      <p:sp>
-        <p:nvSpPr>
-          <p:cNvPr id="2" name="Title 1">
-            <a:extLst>
-              <a:ext uri="{FF2B5EF4-FFF2-40B4-BE49-F238E27FC236}">
-                <a16:creationId xmlns:a16="http://schemas.microsoft.com/office/drawing/2014/main" id="{114D385A-D658-061C-3FF8-9E8697E85247}"/>
-              </a:ext>
-            </a:extLst>
-          </p:cNvPr>
-          <p:cNvSpPr>
-            <a:spLocks noGrp="1"/>
-          </p:cNvSpPr>
-          <p:nvPr>
-            <p:ph type="title"/>
-          </p:nvPr>
-        </p:nvSpPr>
-        <p:spPr/>
-        <p:txBody>
-          <a:bodyPr/>
-          <a:lstStyle/>
-          <a:p>
-            <a:r>
-              <a:rPr lang="en-US" dirty="0"/>
-              <a:t>Prompt Engineering / Context Engineering</a:t>
-            </a:r>
-          </a:p>
-        </p:txBody>
-      </p:sp>
-      <p:sp>
-        <p:nvSpPr>
-          <p:cNvPr id="3" name="Content Placeholder 2">
-            <a:extLst>
-              <a:ext uri="{FF2B5EF4-FFF2-40B4-BE49-F238E27FC236}">
-                <a16:creationId xmlns:a16="http://schemas.microsoft.com/office/drawing/2014/main" id="{7B4CA82F-7E87-F33C-678A-4F3E6B9D2E04}"/>
-              </a:ext>
-            </a:extLst>
-          </p:cNvPr>
-          <p:cNvSpPr>
-            <a:spLocks noGrp="1"/>
-          </p:cNvSpPr>
-          <p:nvPr>
-            <p:ph idx="1"/>
-          </p:nvPr>
-        </p:nvSpPr>
-        <p:spPr>
-          <a:xfrm>
-            <a:off x="838200" y="1825625"/>
-            <a:ext cx="7070313" cy="4351338"/>
-          </a:xfrm>
-        </p:spPr>
-        <p:txBody>
-          <a:bodyPr>
-            <a:normAutofit fontScale="85000" lnSpcReduction="10000"/>
-          </a:bodyPr>
-          <a:lstStyle/>
-          <a:p>
-            <a:r>
-              <a:rPr lang="en-US" dirty="0"/>
-              <a:t>Design effective natural language instructions (prompts) to guide generative AI models toward desired outputs, such as text, images, or code.</a:t>
-            </a:r>
-          </a:p>
-          <a:p>
-            <a:pPr lvl="1"/>
-            <a:r>
-              <a:rPr lang="en-US" b="1" dirty="0"/>
-              <a:t>Zero-shot prompt: </a:t>
-            </a:r>
-            <a:r>
-              <a:rPr lang="en-US" dirty="0"/>
-              <a:t>directly instructs the model to perform a task without any additional examples.</a:t>
-            </a:r>
-          </a:p>
-          <a:p>
-            <a:pPr lvl="1"/>
-            <a:endParaRPr lang="en-US" dirty="0"/>
-          </a:p>
-          <a:p>
-            <a:pPr lvl="1"/>
-            <a:r>
-              <a:rPr lang="en-US" b="1" dirty="0"/>
-              <a:t>Chain-of-thought</a:t>
-            </a:r>
-            <a:r>
-              <a:rPr lang="en-US" dirty="0"/>
-              <a:t>: solve a problem as a series of intermediate steps before giving a final answer. </a:t>
-            </a:r>
-            <a:br>
-              <a:rPr lang="en-US" dirty="0"/>
-            </a:br>
-            <a:r>
-              <a:rPr lang="en-US" i="1" dirty="0"/>
-              <a:t>Note: </a:t>
-            </a:r>
-            <a:r>
-              <a:rPr lang="en-US" dirty="0"/>
-              <a:t>Many modern chatbots include chain-of-thought into the system prompt and call this </a:t>
-            </a:r>
-            <a:r>
-              <a:rPr lang="en-US" b="1" dirty="0"/>
-              <a:t>reasoning models</a:t>
-            </a:r>
-            <a:r>
-              <a:rPr lang="en-US" dirty="0"/>
-              <a:t>! </a:t>
-            </a:r>
-          </a:p>
-          <a:p>
-            <a:pPr lvl="1"/>
-            <a:endParaRPr lang="en-US" b="1" dirty="0"/>
-          </a:p>
-          <a:p>
-            <a:pPr lvl="1"/>
-            <a:r>
-              <a:rPr lang="en-US" b="1" dirty="0"/>
-              <a:t>Few-Shot Prompting: </a:t>
-            </a:r>
-            <a:r>
-              <a:rPr lang="en-US" dirty="0"/>
-              <a:t>Provide demonstrations in the prompt to steer the model to better performance or to create output in a desired format.</a:t>
-            </a:r>
-          </a:p>
-          <a:p>
-            <a:pPr lvl="1"/>
-            <a:endParaRPr lang="en-US" b="1" dirty="0"/>
-          </a:p>
-        </p:txBody>
-      </p:sp>
-      <p:grpSp>
-        <p:nvGrpSpPr>
-          <p:cNvPr id="10" name="Group 9">
-            <a:extLst>
-              <a:ext uri="{FF2B5EF4-FFF2-40B4-BE49-F238E27FC236}">
-                <a16:creationId xmlns:a16="http://schemas.microsoft.com/office/drawing/2014/main" id="{EF77830A-561A-B934-3E00-539C021C23B2}"/>
-              </a:ext>
-            </a:extLst>
-          </p:cNvPr>
-          <p:cNvGrpSpPr/>
-          <p:nvPr/>
-        </p:nvGrpSpPr>
-        <p:grpSpPr>
-          <a:xfrm>
-            <a:off x="8032401" y="2402772"/>
-            <a:ext cx="3750091" cy="3371547"/>
-            <a:chOff x="8025421" y="2555396"/>
-            <a:chExt cx="3750091" cy="3371547"/>
-          </a:xfrm>
-        </p:grpSpPr>
-        <p:sp>
-          <p:nvSpPr>
-            <p:cNvPr id="5" name="TextBox 4">
-              <a:extLst>
-                <a:ext uri="{FF2B5EF4-FFF2-40B4-BE49-F238E27FC236}">
-                  <a16:creationId xmlns:a16="http://schemas.microsoft.com/office/drawing/2014/main" id="{4506427E-FA4C-2E1F-5B08-A69F783CB207}"/>
-                </a:ext>
-              </a:extLst>
-            </p:cNvPr>
-            <p:cNvSpPr txBox="1"/>
-            <p:nvPr/>
-          </p:nvSpPr>
-          <p:spPr>
-            <a:xfrm>
-              <a:off x="8025421" y="5188279"/>
-              <a:ext cx="3750087" cy="738664"/>
-            </a:xfrm>
-            <a:prstGeom prst="rect">
-              <a:avLst/>
-            </a:prstGeom>
-          </p:spPr>
-          <p:style>
-            <a:lnRef idx="2">
-              <a:schemeClr val="dk1"/>
-            </a:lnRef>
-            <a:fillRef idx="1">
-              <a:schemeClr val="lt1"/>
-            </a:fillRef>
-            <a:effectRef idx="0">
-              <a:schemeClr val="dk1"/>
-            </a:effectRef>
-            <a:fontRef idx="minor">
-              <a:schemeClr val="dk1"/>
-            </a:fontRef>
-          </p:style>
-          <p:txBody>
-            <a:bodyPr wrap="square">
-              <a:spAutoFit/>
-            </a:bodyPr>
-            <a:lstStyle/>
-            <a:p>
-              <a:r>
-                <a:rPr lang="en-US" sz="1400" dirty="0"/>
-                <a:t>Review: Loved it! Output: Positive</a:t>
-              </a:r>
-            </a:p>
-            <a:p>
-              <a:r>
-                <a:rPr lang="en-US" sz="1400" dirty="0"/>
-                <a:t>Review: Hated it. Output: Negative</a:t>
-              </a:r>
-            </a:p>
-            <a:p>
-              <a:r>
-                <a:rPr lang="en-US" sz="1400" dirty="0"/>
-                <a:t>Review: It was good. Output: </a:t>
-              </a:r>
-            </a:p>
-          </p:txBody>
-        </p:sp>
-        <p:sp>
-          <p:nvSpPr>
-            <p:cNvPr id="6" name="TextBox 5">
-              <a:extLst>
-                <a:ext uri="{FF2B5EF4-FFF2-40B4-BE49-F238E27FC236}">
-                  <a16:creationId xmlns:a16="http://schemas.microsoft.com/office/drawing/2014/main" id="{D3A5546D-5CD6-4509-AB15-DD534CF900AC}"/>
-                </a:ext>
-              </a:extLst>
-            </p:cNvPr>
-            <p:cNvSpPr txBox="1"/>
-            <p:nvPr/>
-          </p:nvSpPr>
-          <p:spPr>
-            <a:xfrm>
-              <a:off x="8025424" y="3044937"/>
-              <a:ext cx="3750087" cy="307777"/>
-            </a:xfrm>
-            <a:prstGeom prst="rect">
-              <a:avLst/>
-            </a:prstGeom>
-          </p:spPr>
-          <p:style>
-            <a:lnRef idx="2">
-              <a:schemeClr val="dk1"/>
-            </a:lnRef>
-            <a:fillRef idx="1">
-              <a:schemeClr val="lt1"/>
-            </a:fillRef>
-            <a:effectRef idx="0">
-              <a:schemeClr val="dk1"/>
-            </a:effectRef>
-            <a:fontRef idx="minor">
-              <a:schemeClr val="dk1"/>
-            </a:fontRef>
-          </p:style>
-          <p:txBody>
-            <a:bodyPr wrap="square">
-              <a:spAutoFit/>
-            </a:bodyPr>
-            <a:lstStyle/>
-            <a:p>
-              <a:r>
-                <a:rPr lang="en-US" sz="1400" dirty="0"/>
-                <a:t>6 times 15 minus 3 is</a:t>
-              </a:r>
-            </a:p>
-          </p:txBody>
-        </p:sp>
-        <p:sp>
-          <p:nvSpPr>
-            <p:cNvPr id="7" name="TextBox 6">
-              <a:extLst>
-                <a:ext uri="{FF2B5EF4-FFF2-40B4-BE49-F238E27FC236}">
-                  <a16:creationId xmlns:a16="http://schemas.microsoft.com/office/drawing/2014/main" id="{0C4D6113-2342-DBC8-C22F-F88114463945}"/>
-                </a:ext>
-              </a:extLst>
-            </p:cNvPr>
-            <p:cNvSpPr txBox="1"/>
-            <p:nvPr/>
-          </p:nvSpPr>
-          <p:spPr>
-            <a:xfrm>
-              <a:off x="8025422" y="3888400"/>
-              <a:ext cx="3750087" cy="523220"/>
-            </a:xfrm>
-            <a:prstGeom prst="rect">
-              <a:avLst/>
-            </a:prstGeom>
-          </p:spPr>
-          <p:style>
-            <a:lnRef idx="2">
-              <a:schemeClr val="dk1"/>
-            </a:lnRef>
-            <a:fillRef idx="1">
-              <a:schemeClr val="lt1"/>
-            </a:fillRef>
-            <a:effectRef idx="0">
-              <a:schemeClr val="dk1"/>
-            </a:effectRef>
-            <a:fontRef idx="minor">
-              <a:schemeClr val="dk1"/>
-            </a:fontRef>
-          </p:style>
-          <p:txBody>
-            <a:bodyPr wrap="square">
-              <a:spAutoFit/>
-            </a:bodyPr>
-            <a:lstStyle/>
-            <a:p>
-              <a:r>
-                <a:rPr lang="en-US" sz="1400" dirty="0"/>
-                <a:t>How much is 6 times 15 minus 3? </a:t>
-              </a:r>
-              <a:r>
-                <a:rPr lang="en-US" sz="1400" i="1" dirty="0"/>
-                <a:t>Let's think step-by-step.</a:t>
-              </a:r>
-            </a:p>
-          </p:txBody>
-        </p:sp>
-        <p:sp>
-          <p:nvSpPr>
-            <p:cNvPr id="8" name="TextBox 7">
-              <a:extLst>
-                <a:ext uri="{FF2B5EF4-FFF2-40B4-BE49-F238E27FC236}">
-                  <a16:creationId xmlns:a16="http://schemas.microsoft.com/office/drawing/2014/main" id="{93CFADBC-5696-A6E2-9E51-ECFA641D0A16}"/>
-                </a:ext>
-              </a:extLst>
-            </p:cNvPr>
-            <p:cNvSpPr txBox="1"/>
-            <p:nvPr/>
-          </p:nvSpPr>
-          <p:spPr>
-            <a:xfrm>
-              <a:off x="8025425" y="2555396"/>
-              <a:ext cx="3750087" cy="307777"/>
-            </a:xfrm>
-            <a:prstGeom prst="rect">
-              <a:avLst/>
-            </a:prstGeom>
-            <a:noFill/>
-            <a:ln>
-              <a:noFill/>
-            </a:ln>
-          </p:spPr>
-          <p:style>
-            <a:lnRef idx="0">
-              <a:scrgbClr r="0" g="0" b="0"/>
-            </a:lnRef>
-            <a:fillRef idx="0">
-              <a:scrgbClr r="0" g="0" b="0"/>
-            </a:fillRef>
-            <a:effectRef idx="0">
-              <a:scrgbClr r="0" g="0" b="0"/>
-            </a:effectRef>
-            <a:fontRef idx="minor">
-              <a:schemeClr val="dk1"/>
-            </a:fontRef>
-          </p:style>
-          <p:txBody>
-            <a:bodyPr wrap="square">
-              <a:spAutoFit/>
-            </a:bodyPr>
-            <a:lstStyle/>
-            <a:p>
-              <a:r>
-                <a:rPr lang="en-US" sz="1400" dirty="0"/>
-                <a:t>Examples:</a:t>
-              </a:r>
-            </a:p>
-          </p:txBody>
-        </p:sp>
-      </p:grpSp>
-    </p:spTree>
-    <p:extLst>
-      <p:ext uri="{BB962C8B-B14F-4D97-AF65-F5344CB8AC3E}">
-        <p14:creationId xmlns:p14="http://schemas.microsoft.com/office/powerpoint/2010/main" val="883930596"/>
-      </p:ext>
-    </p:extLst>
-  </p:cSld>
-  <p:clrMapOvr>
-    <a:masterClrMapping/>
-  </p:clrMapOvr>
-</p:sld>
-</file>
-
 <file path=ppt/theme/theme1.xml><?xml version="1.0" encoding="utf-8"?>
 <a:theme xmlns:a="http://schemas.openxmlformats.org/drawingml/2006/main" name="Office Theme">
   <a:themeElements>
@@ -21119,20 +22696,20 @@
 </file>
 
 <file path=customXml/item1.xml><?xml version="1.0" encoding="utf-8"?>
-<p:properties xmlns:p="http://schemas.microsoft.com/office/2006/metadata/properties" xmlns:xsi="http://www.w3.org/2001/XMLSchema-instance" xmlns:pc="http://schemas.microsoft.com/office/infopath/2007/PartnerControls">
-  <documentManagement>
-    <_activity xmlns="49eab711-90d1-4c0f-9775-bfb7f5e5a799" xsi:nil="true"/>
-  </documentManagement>
-</p:properties>
-</file>
-
-<file path=customXml/item2.xml><?xml version="1.0" encoding="utf-8"?>
 <?mso-contentType ?>
 <FormTemplates xmlns="http://schemas.microsoft.com/sharepoint/v3/contenttype/forms">
   <Display>DocumentLibraryForm</Display>
   <Edit>DocumentLibraryForm</Edit>
   <New>DocumentLibraryForm</New>
 </FormTemplates>
+</file>
+
+<file path=customXml/item2.xml><?xml version="1.0" encoding="utf-8"?>
+<p:properties xmlns:p="http://schemas.microsoft.com/office/2006/metadata/properties" xmlns:xsi="http://www.w3.org/2001/XMLSchema-instance" xmlns:pc="http://schemas.microsoft.com/office/infopath/2007/PartnerControls">
+  <documentManagement>
+    <_activity xmlns="49eab711-90d1-4c0f-9775-bfb7f5e5a799" xsi:nil="true"/>
+  </documentManagement>
+</p:properties>
 </file>
 
 <file path=customXml/item3.xml><?xml version="1.0" encoding="utf-8"?>
@@ -21361,6 +22938,14 @@
 </file>
 
 <file path=customXml/itemProps1.xml><?xml version="1.0" encoding="utf-8"?>
+<ds:datastoreItem xmlns:ds="http://schemas.openxmlformats.org/officeDocument/2006/customXml" ds:itemID="{7EAB5880-6DEB-490E-8068-CD3C9FC7A3FA}">
+  <ds:schemaRefs>
+    <ds:schemaRef ds:uri="http://schemas.microsoft.com/sharepoint/v3/contenttype/forms"/>
+  </ds:schemaRefs>
+</ds:datastoreItem>
+</file>
+
+<file path=customXml/itemProps2.xml><?xml version="1.0" encoding="utf-8"?>
 <ds:datastoreItem xmlns:ds="http://schemas.openxmlformats.org/officeDocument/2006/customXml" ds:itemID="{11B526AB-E763-48A9-8676-6358C5544126}">
   <ds:schemaRefs>
     <ds:schemaRef ds:uri="http://purl.org/dc/dcmitype/"/>
@@ -21373,14 +22958,6 @@
     <ds:schemaRef ds:uri="609867d6-2629-4535-86dd-ac3b97a3ffd8"/>
     <ds:schemaRef ds:uri="49eab711-90d1-4c0f-9775-bfb7f5e5a799"/>
     <ds:schemaRef ds:uri="http://purl.org/dc/terms/"/>
-  </ds:schemaRefs>
-</ds:datastoreItem>
-</file>
-
-<file path=customXml/itemProps2.xml><?xml version="1.0" encoding="utf-8"?>
-<ds:datastoreItem xmlns:ds="http://schemas.openxmlformats.org/officeDocument/2006/customXml" ds:itemID="{7EAB5880-6DEB-490E-8068-CD3C9FC7A3FA}">
-  <ds:schemaRefs>
-    <ds:schemaRef ds:uri="http://schemas.microsoft.com/sharepoint/v3/contenttype/forms"/>
   </ds:schemaRefs>
 </ds:datastoreItem>
 </file>
